--- a/docs/presentations/GitHub_AI_Appendix.pptx
+++ b/docs/presentations/GitHub_AI_Appendix.pptx
@@ -13,16 +13,12 @@
     <p:sldId id="258" r:id="rId4"/>
     <p:sldId id="259" r:id="rId5"/>
     <p:sldId id="260" r:id="rId6"/>
-    <p:sldId id="261" r:id="rId7"/>
-    <p:sldId id="262" r:id="rId8"/>
-    <p:sldId id="263" r:id="rId9"/>
-    <p:sldId id="264" r:id="rId10"/>
+    <p:sldId id="271" r:id="rId22"/>
     <p:sldId id="265" r:id="rId11"/>
     <p:sldId id="266" r:id="rId12"/>
     <p:sldId id="267" r:id="rId13"/>
     <p:sldId id="268" r:id="rId14"/>
     <p:sldId id="269" r:id="rId15"/>
-    <p:sldId id="270" r:id="rId16"/>
   </p:sldIdLst>
   <p:sldSz cx="9144000" cy="5143500" type="screen16x9"/>
   <p:notesSz cx="5143500" cy="9144000"/>
@@ -755,90 +751,6 @@
 </p:notes>
 </file>
 
-<file path=ppt/notesSlides/notesSlide15.xml><?xml version="1.0" encoding="utf-8"?>
-<p:notes xmlns:a="http://schemas.openxmlformats.org/drawingml/2006/main" xmlns:r="http://schemas.openxmlformats.org/officeDocument/2006/relationships" xmlns:p="http://schemas.openxmlformats.org/presentationml/2006/main">
-  <p:cSld>
-    <p:spTree>
-      <p:nvGrpSpPr>
-        <p:cNvPr id="1" name=""/>
-        <p:cNvGrpSpPr/>
-        <p:nvPr/>
-      </p:nvGrpSpPr>
-      <p:grpSpPr>
-        <a:xfrm>
-          <a:off x="0" y="0"/>
-          <a:ext cx="0" cy="0"/>
-          <a:chOff x="0" y="0"/>
-          <a:chExt cx="0" cy="0"/>
-        </a:xfrm>
-      </p:grpSpPr>
-      <p:sp>
-        <p:nvSpPr>
-          <p:cNvPr id="2" name="Slide Image Placeholder 1"/>
-          <p:cNvSpPr>
-            <a:spLocks noGrp="1" noRot="1" noChangeAspect="1"/>
-          </p:cNvSpPr>
-          <p:nvPr>
-            <p:ph type="sldImg"/>
-          </p:nvPr>
-        </p:nvSpPr>
-        <p:spPr/>
-      </p:sp>
-      <p:sp>
-        <p:nvSpPr>
-          <p:cNvPr id="3" name="Notes Placeholder 2"/>
-          <p:cNvSpPr>
-            <a:spLocks noGrp="1"/>
-          </p:cNvSpPr>
-          <p:nvPr>
-            <p:ph type="body" idx="1"/>
-          </p:nvPr>
-        </p:nvSpPr>
-        <p:spPr/>
-        <p:txBody>
-          <a:bodyPr/>
-          <a:lstStyle/>
-          <a:p>
-            <a:endParaRPr lang="en-US" dirty="0"/>
-          </a:p>
-        </p:txBody>
-      </p:sp>
-      <p:sp>
-        <p:nvSpPr>
-          <p:cNvPr id="4" name="Slide Number Placeholder 3"/>
-          <p:cNvSpPr>
-            <a:spLocks noGrp="1"/>
-          </p:cNvSpPr>
-          <p:nvPr>
-            <p:ph type="sldNum" sz="quarter" idx="10"/>
-          </p:nvPr>
-        </p:nvSpPr>
-        <p:spPr/>
-        <p:txBody>
-          <a:bodyPr/>
-          <a:lstStyle/>
-          <a:p>
-            <a:fld id="{F7021451-1387-4CA6-816F-3879F97B5CBC}" type="slidenum">
-              <a:rPr lang="en-US"/>
-              <a:t>15</a:t>
-            </a:fld>
-            <a:endParaRPr lang="en-US"/>
-          </a:p>
-        </p:txBody>
-      </p:sp>
-    </p:spTree>
-    <p:extLst>
-      <p:ext uri="{BB962C8B-B14F-4D97-AF65-F5344CB8AC3E}">
-        <p14:creationId xmlns:p14="http://schemas.microsoft.com/office/powerpoint/2010/main" val="1024086991"/>
-      </p:ext>
-    </p:extLst>
-  </p:cSld>
-  <p:clrMapOvr>
-    <a:masterClrMapping/>
-  </p:clrMapOvr>
-</p:notes>
-</file>
-
 <file path=ppt/notesSlides/notesSlide2.xml><?xml version="1.0" encoding="utf-8"?>
 <p:notes xmlns:a="http://schemas.openxmlformats.org/drawingml/2006/main" xmlns:r="http://schemas.openxmlformats.org/officeDocument/2006/relationships" xmlns:p="http://schemas.openxmlformats.org/presentationml/2006/main">
   <p:cSld>
@@ -1157,342 +1069,6 @@
             <a:fld id="{F7021451-1387-4CA6-816F-3879F97B5CBC}" type="slidenum">
               <a:rPr lang="en-US"/>
               <a:t>5</a:t>
-            </a:fld>
-            <a:endParaRPr lang="en-US"/>
-          </a:p>
-        </p:txBody>
-      </p:sp>
-    </p:spTree>
-    <p:extLst>
-      <p:ext uri="{BB962C8B-B14F-4D97-AF65-F5344CB8AC3E}">
-        <p14:creationId xmlns:p14="http://schemas.microsoft.com/office/powerpoint/2010/main" val="1024086991"/>
-      </p:ext>
-    </p:extLst>
-  </p:cSld>
-  <p:clrMapOvr>
-    <a:masterClrMapping/>
-  </p:clrMapOvr>
-</p:notes>
-</file>
-
-<file path=ppt/notesSlides/notesSlide6.xml><?xml version="1.0" encoding="utf-8"?>
-<p:notes xmlns:a="http://schemas.openxmlformats.org/drawingml/2006/main" xmlns:r="http://schemas.openxmlformats.org/officeDocument/2006/relationships" xmlns:p="http://schemas.openxmlformats.org/presentationml/2006/main">
-  <p:cSld>
-    <p:spTree>
-      <p:nvGrpSpPr>
-        <p:cNvPr id="1" name=""/>
-        <p:cNvGrpSpPr/>
-        <p:nvPr/>
-      </p:nvGrpSpPr>
-      <p:grpSpPr>
-        <a:xfrm>
-          <a:off x="0" y="0"/>
-          <a:ext cx="0" cy="0"/>
-          <a:chOff x="0" y="0"/>
-          <a:chExt cx="0" cy="0"/>
-        </a:xfrm>
-      </p:grpSpPr>
-      <p:sp>
-        <p:nvSpPr>
-          <p:cNvPr id="2" name="Slide Image Placeholder 1"/>
-          <p:cNvSpPr>
-            <a:spLocks noGrp="1" noRot="1" noChangeAspect="1"/>
-          </p:cNvSpPr>
-          <p:nvPr>
-            <p:ph type="sldImg"/>
-          </p:nvPr>
-        </p:nvSpPr>
-        <p:spPr/>
-      </p:sp>
-      <p:sp>
-        <p:nvSpPr>
-          <p:cNvPr id="3" name="Notes Placeholder 2"/>
-          <p:cNvSpPr>
-            <a:spLocks noGrp="1"/>
-          </p:cNvSpPr>
-          <p:nvPr>
-            <p:ph type="body" idx="1"/>
-          </p:nvPr>
-        </p:nvSpPr>
-        <p:spPr/>
-        <p:txBody>
-          <a:bodyPr/>
-          <a:lstStyle/>
-          <a:p>
-            <a:endParaRPr lang="en-US" dirty="0"/>
-          </a:p>
-        </p:txBody>
-      </p:sp>
-      <p:sp>
-        <p:nvSpPr>
-          <p:cNvPr id="4" name="Slide Number Placeholder 3"/>
-          <p:cNvSpPr>
-            <a:spLocks noGrp="1"/>
-          </p:cNvSpPr>
-          <p:nvPr>
-            <p:ph type="sldNum" sz="quarter" idx="10"/>
-          </p:nvPr>
-        </p:nvSpPr>
-        <p:spPr/>
-        <p:txBody>
-          <a:bodyPr/>
-          <a:lstStyle/>
-          <a:p>
-            <a:fld id="{F7021451-1387-4CA6-816F-3879F97B5CBC}" type="slidenum">
-              <a:rPr lang="en-US"/>
-              <a:t>6</a:t>
-            </a:fld>
-            <a:endParaRPr lang="en-US"/>
-          </a:p>
-        </p:txBody>
-      </p:sp>
-    </p:spTree>
-    <p:extLst>
-      <p:ext uri="{BB962C8B-B14F-4D97-AF65-F5344CB8AC3E}">
-        <p14:creationId xmlns:p14="http://schemas.microsoft.com/office/powerpoint/2010/main" val="1024086991"/>
-      </p:ext>
-    </p:extLst>
-  </p:cSld>
-  <p:clrMapOvr>
-    <a:masterClrMapping/>
-  </p:clrMapOvr>
-</p:notes>
-</file>
-
-<file path=ppt/notesSlides/notesSlide7.xml><?xml version="1.0" encoding="utf-8"?>
-<p:notes xmlns:a="http://schemas.openxmlformats.org/drawingml/2006/main" xmlns:r="http://schemas.openxmlformats.org/officeDocument/2006/relationships" xmlns:p="http://schemas.openxmlformats.org/presentationml/2006/main">
-  <p:cSld>
-    <p:spTree>
-      <p:nvGrpSpPr>
-        <p:cNvPr id="1" name=""/>
-        <p:cNvGrpSpPr/>
-        <p:nvPr/>
-      </p:nvGrpSpPr>
-      <p:grpSpPr>
-        <a:xfrm>
-          <a:off x="0" y="0"/>
-          <a:ext cx="0" cy="0"/>
-          <a:chOff x="0" y="0"/>
-          <a:chExt cx="0" cy="0"/>
-        </a:xfrm>
-      </p:grpSpPr>
-      <p:sp>
-        <p:nvSpPr>
-          <p:cNvPr id="2" name="Slide Image Placeholder 1"/>
-          <p:cNvSpPr>
-            <a:spLocks noGrp="1" noRot="1" noChangeAspect="1"/>
-          </p:cNvSpPr>
-          <p:nvPr>
-            <p:ph type="sldImg"/>
-          </p:nvPr>
-        </p:nvSpPr>
-        <p:spPr/>
-      </p:sp>
-      <p:sp>
-        <p:nvSpPr>
-          <p:cNvPr id="3" name="Notes Placeholder 2"/>
-          <p:cNvSpPr>
-            <a:spLocks noGrp="1"/>
-          </p:cNvSpPr>
-          <p:nvPr>
-            <p:ph type="body" idx="1"/>
-          </p:nvPr>
-        </p:nvSpPr>
-        <p:spPr/>
-        <p:txBody>
-          <a:bodyPr/>
-          <a:lstStyle/>
-          <a:p>
-            <a:endParaRPr lang="en-US" dirty="0"/>
-          </a:p>
-        </p:txBody>
-      </p:sp>
-      <p:sp>
-        <p:nvSpPr>
-          <p:cNvPr id="4" name="Slide Number Placeholder 3"/>
-          <p:cNvSpPr>
-            <a:spLocks noGrp="1"/>
-          </p:cNvSpPr>
-          <p:nvPr>
-            <p:ph type="sldNum" sz="quarter" idx="10"/>
-          </p:nvPr>
-        </p:nvSpPr>
-        <p:spPr/>
-        <p:txBody>
-          <a:bodyPr/>
-          <a:lstStyle/>
-          <a:p>
-            <a:fld id="{F7021451-1387-4CA6-816F-3879F97B5CBC}" type="slidenum">
-              <a:rPr lang="en-US"/>
-              <a:t>7</a:t>
-            </a:fld>
-            <a:endParaRPr lang="en-US"/>
-          </a:p>
-        </p:txBody>
-      </p:sp>
-    </p:spTree>
-    <p:extLst>
-      <p:ext uri="{BB962C8B-B14F-4D97-AF65-F5344CB8AC3E}">
-        <p14:creationId xmlns:p14="http://schemas.microsoft.com/office/powerpoint/2010/main" val="1024086991"/>
-      </p:ext>
-    </p:extLst>
-  </p:cSld>
-  <p:clrMapOvr>
-    <a:masterClrMapping/>
-  </p:clrMapOvr>
-</p:notes>
-</file>
-
-<file path=ppt/notesSlides/notesSlide8.xml><?xml version="1.0" encoding="utf-8"?>
-<p:notes xmlns:a="http://schemas.openxmlformats.org/drawingml/2006/main" xmlns:r="http://schemas.openxmlformats.org/officeDocument/2006/relationships" xmlns:p="http://schemas.openxmlformats.org/presentationml/2006/main">
-  <p:cSld>
-    <p:spTree>
-      <p:nvGrpSpPr>
-        <p:cNvPr id="1" name=""/>
-        <p:cNvGrpSpPr/>
-        <p:nvPr/>
-      </p:nvGrpSpPr>
-      <p:grpSpPr>
-        <a:xfrm>
-          <a:off x="0" y="0"/>
-          <a:ext cx="0" cy="0"/>
-          <a:chOff x="0" y="0"/>
-          <a:chExt cx="0" cy="0"/>
-        </a:xfrm>
-      </p:grpSpPr>
-      <p:sp>
-        <p:nvSpPr>
-          <p:cNvPr id="2" name="Slide Image Placeholder 1"/>
-          <p:cNvSpPr>
-            <a:spLocks noGrp="1" noRot="1" noChangeAspect="1"/>
-          </p:cNvSpPr>
-          <p:nvPr>
-            <p:ph type="sldImg"/>
-          </p:nvPr>
-        </p:nvSpPr>
-        <p:spPr/>
-      </p:sp>
-      <p:sp>
-        <p:nvSpPr>
-          <p:cNvPr id="3" name="Notes Placeholder 2"/>
-          <p:cNvSpPr>
-            <a:spLocks noGrp="1"/>
-          </p:cNvSpPr>
-          <p:nvPr>
-            <p:ph type="body" idx="1"/>
-          </p:nvPr>
-        </p:nvSpPr>
-        <p:spPr/>
-        <p:txBody>
-          <a:bodyPr/>
-          <a:lstStyle/>
-          <a:p>
-            <a:endParaRPr lang="en-US" dirty="0"/>
-          </a:p>
-        </p:txBody>
-      </p:sp>
-      <p:sp>
-        <p:nvSpPr>
-          <p:cNvPr id="4" name="Slide Number Placeholder 3"/>
-          <p:cNvSpPr>
-            <a:spLocks noGrp="1"/>
-          </p:cNvSpPr>
-          <p:nvPr>
-            <p:ph type="sldNum" sz="quarter" idx="10"/>
-          </p:nvPr>
-        </p:nvSpPr>
-        <p:spPr/>
-        <p:txBody>
-          <a:bodyPr/>
-          <a:lstStyle/>
-          <a:p>
-            <a:fld id="{F7021451-1387-4CA6-816F-3879F97B5CBC}" type="slidenum">
-              <a:rPr lang="en-US"/>
-              <a:t>8</a:t>
-            </a:fld>
-            <a:endParaRPr lang="en-US"/>
-          </a:p>
-        </p:txBody>
-      </p:sp>
-    </p:spTree>
-    <p:extLst>
-      <p:ext uri="{BB962C8B-B14F-4D97-AF65-F5344CB8AC3E}">
-        <p14:creationId xmlns:p14="http://schemas.microsoft.com/office/powerpoint/2010/main" val="1024086991"/>
-      </p:ext>
-    </p:extLst>
-  </p:cSld>
-  <p:clrMapOvr>
-    <a:masterClrMapping/>
-  </p:clrMapOvr>
-</p:notes>
-</file>
-
-<file path=ppt/notesSlides/notesSlide9.xml><?xml version="1.0" encoding="utf-8"?>
-<p:notes xmlns:a="http://schemas.openxmlformats.org/drawingml/2006/main" xmlns:r="http://schemas.openxmlformats.org/officeDocument/2006/relationships" xmlns:p="http://schemas.openxmlformats.org/presentationml/2006/main">
-  <p:cSld>
-    <p:spTree>
-      <p:nvGrpSpPr>
-        <p:cNvPr id="1" name=""/>
-        <p:cNvGrpSpPr/>
-        <p:nvPr/>
-      </p:nvGrpSpPr>
-      <p:grpSpPr>
-        <a:xfrm>
-          <a:off x="0" y="0"/>
-          <a:ext cx="0" cy="0"/>
-          <a:chOff x="0" y="0"/>
-          <a:chExt cx="0" cy="0"/>
-        </a:xfrm>
-      </p:grpSpPr>
-      <p:sp>
-        <p:nvSpPr>
-          <p:cNvPr id="2" name="Slide Image Placeholder 1"/>
-          <p:cNvSpPr>
-            <a:spLocks noGrp="1" noRot="1" noChangeAspect="1"/>
-          </p:cNvSpPr>
-          <p:nvPr>
-            <p:ph type="sldImg"/>
-          </p:nvPr>
-        </p:nvSpPr>
-        <p:spPr/>
-      </p:sp>
-      <p:sp>
-        <p:nvSpPr>
-          <p:cNvPr id="3" name="Notes Placeholder 2"/>
-          <p:cNvSpPr>
-            <a:spLocks noGrp="1"/>
-          </p:cNvSpPr>
-          <p:nvPr>
-            <p:ph type="body" idx="1"/>
-          </p:nvPr>
-        </p:nvSpPr>
-        <p:spPr/>
-        <p:txBody>
-          <a:bodyPr/>
-          <a:lstStyle/>
-          <a:p>
-            <a:endParaRPr lang="en-US" dirty="0"/>
-          </a:p>
-        </p:txBody>
-      </p:sp>
-      <p:sp>
-        <p:nvSpPr>
-          <p:cNvPr id="4" name="Slide Number Placeholder 3"/>
-          <p:cNvSpPr>
-            <a:spLocks noGrp="1"/>
-          </p:cNvSpPr>
-          <p:nvPr>
-            <p:ph type="sldNum" sz="quarter" idx="10"/>
-          </p:nvPr>
-        </p:nvSpPr>
-        <p:spPr/>
-        <p:txBody>
-          <a:bodyPr/>
-          <a:lstStyle/>
-          <a:p>
-            <a:fld id="{F7021451-1387-4CA6-816F-3879F97B5CBC}" type="slidenum">
-              <a:rPr lang="en-US"/>
-              <a:t>9</a:t>
             </a:fld>
             <a:endParaRPr lang="en-US"/>
           </a:p>
@@ -4430,7 +4006,7 @@
                   <a:srgbClr val="CC4444"/>
                 </a:solidFill>
               </a:rPr>
-              <a:t>Vague:  </a:t>
+              <a:t xml:space="preserve">Vague:  </a:t>
             </a:r>
             <a:r>
               <a:rPr lang="en-US" sz="1000" i="1" dirty="0">
@@ -4477,7 +4053,7 @@
                   <a:srgbClr val="1B5E40"/>
                 </a:solidFill>
               </a:rPr>
-              <a:t>Better:  </a:t>
+              <a:t xml:space="preserve">Better:  </a:t>
             </a:r>
             <a:r>
               <a:rPr lang="en-US" sz="1000" dirty="0">
@@ -4621,7 +4197,7 @@
                   <a:srgbClr val="CC4444"/>
                 </a:solidFill>
               </a:rPr>
-              <a:t>Vague:  </a:t>
+              <a:t xml:space="preserve">Vague:  </a:t>
             </a:r>
             <a:r>
               <a:rPr lang="en-US" sz="1000" i="1" dirty="0">
@@ -4668,7 +4244,7 @@
                   <a:srgbClr val="1B5E40"/>
                 </a:solidFill>
               </a:rPr>
-              <a:t>Better:  </a:t>
+              <a:t xml:space="preserve">Better:  </a:t>
             </a:r>
             <a:r>
               <a:rPr lang="en-US" sz="1000" dirty="0">
@@ -4812,7 +4388,7 @@
                   <a:srgbClr val="CC4444"/>
                 </a:solidFill>
               </a:rPr>
-              <a:t>Vague:  </a:t>
+              <a:t xml:space="preserve">Vague:  </a:t>
             </a:r>
             <a:r>
               <a:rPr lang="en-US" sz="1000" i="1" dirty="0">
@@ -4859,7 +4435,7 @@
                   <a:srgbClr val="1B5E40"/>
                 </a:solidFill>
               </a:rPr>
-              <a:t>Better:  </a:t>
+              <a:t xml:space="preserve">Better:  </a:t>
             </a:r>
             <a:r>
               <a:rPr lang="en-US" sz="1000" dirty="0">
@@ -5003,7 +4579,7 @@
                   <a:srgbClr val="CC4444"/>
                 </a:solidFill>
               </a:rPr>
-              <a:t>Vague:  </a:t>
+              <a:t xml:space="preserve">Vague:  </a:t>
             </a:r>
             <a:r>
               <a:rPr lang="en-US" sz="1000" i="1" dirty="0">
@@ -5050,7 +4626,7 @@
                   <a:srgbClr val="1B5E40"/>
                 </a:solidFill>
               </a:rPr>
-              <a:t>Better:  </a:t>
+              <a:t xml:space="preserve">Better:  </a:t>
             </a:r>
             <a:r>
               <a:rPr lang="en-US" sz="1000" dirty="0">
@@ -6337,7 +5913,7 @@
                   <a:srgbClr val="5A6B7A"/>
                 </a:solidFill>
               </a:rPr>
-              <a:t>Every meaningful AI interaction should be logged in </a:t>
+              <a:t xml:space="preserve">Every meaningful AI interaction should be logged in </a:t>
             </a:r>
             <a:r>
               <a:rPr lang="en-US" sz="1100" b="1" dirty="0">
@@ -6374,7 +5950,7 @@
                   <a:srgbClr val="5A6B7A"/>
                 </a:solidFill>
               </a:rPr>
-              <a:t>For each entry, record: </a:t>
+              <a:t xml:space="preserve">For each entry, record: </a:t>
             </a:r>
             <a:endParaRPr lang="en-US" sz="1100" dirty="0"/>
           </a:p>
@@ -6399,7 +5975,7 @@
                   <a:srgbClr val="5A6B7A"/>
                 </a:solidFill>
               </a:rPr>
-              <a:t>, </a:t>
+              <a:t xml:space="preserve">, </a:t>
             </a:r>
             <a:r>
               <a:rPr lang="en-US" sz="1100" b="1" dirty="0">
@@ -6415,7 +5991,7 @@
                   <a:srgbClr val="5A6B7A"/>
                 </a:solidFill>
               </a:rPr>
-              <a:t>, and </a:t>
+              <a:t xml:space="preserve">, and </a:t>
             </a:r>
             <a:r>
               <a:rPr lang="en-US" sz="1100" b="1" dirty="0">
@@ -6445,9 +6021,9 @@
 </p:sld>
 </file>
 
-<file path=ppt/slides/slide15.xml><?xml version="1.0" encoding="utf-8"?>
+<file path=ppt/slides/slide16.xml><?xml version="1.0" encoding="utf-8"?>
 <p:sld xmlns:a="http://schemas.openxmlformats.org/drawingml/2006/main" xmlns:r="http://schemas.openxmlformats.org/officeDocument/2006/relationships" xmlns:p="http://schemas.openxmlformats.org/presentationml/2006/main">
-  <p:cSld name="Slide 15">
+  <p:cSld name="Slide 1">
     <p:bg>
       <p:bgPr>
         <a:solidFill>
@@ -6505,8 +6081,8 @@
         </p:nvSpPr>
         <p:spPr>
           <a:xfrm>
-            <a:off x="731520" y="274320"/>
-            <a:ext cx="7680960" cy="457200"/>
+            <a:off x="731520" y="548640"/>
+            <a:ext cx="7680960" cy="365760"/>
           </a:xfrm>
           <a:prstGeom prst="rect">
             <a:avLst/>
@@ -6522,7 +6098,49 @@
               <a:buNone/>
             </a:pPr>
             <a:r>
-              <a:rPr lang="en-US" sz="2800" b="1" dirty="0">
+              <a:rPr lang="en-US" sz="1400" b="1" kern="0" spc="600" dirty="0">
+                <a:solidFill>
+                  <a:srgbClr val="B8975C"/>
+                </a:solidFill>
+                <a:latin typeface="Open Sans" pitchFamily="34" charset="0"/>
+                <a:ea typeface="Open Sans" pitchFamily="34" charset="-122"/>
+                <a:cs typeface="Open Sans" pitchFamily="34" charset="-120"/>
+              </a:rPr>
+              <a:t>NOW ONLINE</a:t>
+            </a:r>
+            <a:endParaRPr lang="en-US" sz="1400" dirty="0"/>
+          </a:p>
+        </p:txBody>
+      </p:sp>
+      <p:sp>
+        <p:nvSpPr>
+          <p:cNvPr id="4" name="Text 2"/>
+          <p:cNvSpPr/>
+          <p:nvPr/>
+        </p:nvSpPr>
+        <p:spPr>
+          <a:xfrm>
+            <a:off x="731520" y="1097280"/>
+            <a:ext cx="7680960" cy="1828800"/>
+          </a:xfrm>
+          <a:prstGeom prst="rect">
+            <a:avLst/>
+          </a:prstGeom>
+          <a:noFill/>
+          <a:ln/>
+        </p:spPr>
+        <p:txBody>
+          <a:bodyPr wrap="square" lIns="0" tIns="0" rIns="0" bIns="0" rtlCol="0" anchor="ctr"/>
+          <a:lstStyle/>
+          <a:p>
+            <a:pPr marL="0" indent="0">
+              <a:lnSpc>
+                <a:spcPct val="110000"/>
+              </a:lnSpc>
+              <a:buNone/>
+            </a:pPr>
+            <a:r>
+              <a:rPr lang="en-US" sz="4000" b="1" dirty="0">
                 <a:solidFill>
                   <a:srgbClr val="FFFFFF"/>
                 </a:solidFill>
@@ -6530,1219 +6148,42 @@
                 <a:ea typeface="Open Sans" pitchFamily="34" charset="-122"/>
                 <a:cs typeface="Open Sans" pitchFamily="34" charset="-120"/>
               </a:rPr>
-              <a:t>Quick Reference Cheat Sheet</a:t>
-            </a:r>
-            <a:endParaRPr lang="en-US" sz="2800" dirty="0"/>
-          </a:p>
-        </p:txBody>
-      </p:sp>
-      <p:sp>
-        <p:nvSpPr>
-          <p:cNvPr id="4" name="Text 2"/>
-          <p:cNvSpPr/>
-          <p:nvPr/>
-        </p:nvSpPr>
-        <p:spPr>
-          <a:xfrm>
-            <a:off x="731520" y="868680"/>
-            <a:ext cx="3657600" cy="320040"/>
-          </a:xfrm>
-          <a:prstGeom prst="rect">
-            <a:avLst/>
-          </a:prstGeom>
-          <a:noFill/>
-          <a:ln/>
-        </p:spPr>
-        <p:txBody>
-          <a:bodyPr wrap="square" lIns="0" tIns="0" rIns="0" bIns="0" rtlCol="0" anchor="ctr"/>
-          <a:lstStyle/>
+              <a:t>GitHub setup</a:t>
+            </a:r>
+            <a:endParaRPr lang="en-US" sz="4000" dirty="0"/>
+          </a:p>
           <a:p>
             <a:pPr marL="0" indent="0">
-              <a:buNone/>
-            </a:pPr>
-            <a:r>
-              <a:rPr lang="en-US" sz="1400" b="1" dirty="0">
-                <a:solidFill>
-                  <a:srgbClr val="B8975C"/>
-                </a:solidFill>
-                <a:latin typeface="Open Sans" pitchFamily="34" charset="0"/>
-                <a:ea typeface="Open Sans" pitchFamily="34" charset="-122"/>
-                <a:cs typeface="Open Sans" pitchFamily="34" charset="-120"/>
-              </a:rPr>
-              <a:t>Git Commands</a:t>
-            </a:r>
-            <a:endParaRPr lang="en-US" sz="1400" dirty="0"/>
-          </a:p>
-        </p:txBody>
-      </p:sp>
-      <p:sp>
-        <p:nvSpPr>
-          <p:cNvPr id="5" name="Text 3"/>
-          <p:cNvSpPr/>
-          <p:nvPr/>
-        </p:nvSpPr>
-        <p:spPr>
-          <a:xfrm>
-            <a:off x="731520" y="1280160"/>
-            <a:ext cx="3200400" cy="228600"/>
-          </a:xfrm>
-          <a:prstGeom prst="rect">
-            <a:avLst/>
-          </a:prstGeom>
-          <a:noFill/>
-          <a:ln/>
-        </p:spPr>
-        <p:txBody>
-          <a:bodyPr wrap="square" lIns="0" tIns="0" rIns="0" bIns="0" rtlCol="0" anchor="ctr"/>
-          <a:lstStyle/>
-          <a:p>
-            <a:pPr marL="0" indent="0">
-              <a:buNone/>
-            </a:pPr>
-            <a:r>
-              <a:rPr lang="en-US" sz="1100" dirty="0">
-                <a:solidFill>
-                  <a:srgbClr val="B8975C"/>
-                </a:solidFill>
-                <a:latin typeface="Consolas" pitchFamily="34" charset="0"/>
-                <a:ea typeface="Consolas" pitchFamily="34" charset="-122"/>
-                <a:cs typeface="Consolas" pitchFamily="34" charset="-120"/>
-              </a:rPr>
-              <a:t>git clone &lt;url&gt;</a:t>
-            </a:r>
-            <a:endParaRPr lang="en-US" sz="1100" dirty="0"/>
-          </a:p>
-        </p:txBody>
-      </p:sp>
-      <p:sp>
-        <p:nvSpPr>
-          <p:cNvPr id="6" name="Text 4"/>
-          <p:cNvSpPr/>
-          <p:nvPr/>
-        </p:nvSpPr>
-        <p:spPr>
-          <a:xfrm>
-            <a:off x="731520" y="1481328"/>
-            <a:ext cx="3200400" cy="201168"/>
-          </a:xfrm>
-          <a:prstGeom prst="rect">
-            <a:avLst/>
-          </a:prstGeom>
-          <a:noFill/>
-          <a:ln/>
-        </p:spPr>
-        <p:txBody>
-          <a:bodyPr wrap="square" lIns="0" tIns="0" rIns="0" bIns="0" rtlCol="0" anchor="ctr"/>
-          <a:lstStyle/>
-          <a:p>
-            <a:pPr marL="0" indent="0">
-              <a:buNone/>
-            </a:pPr>
-            <a:r>
-              <a:rPr lang="en-US" sz="900" dirty="0">
-                <a:solidFill>
-                  <a:srgbClr val="8A9BAD"/>
-                </a:solidFill>
-                <a:latin typeface="Open Sans" pitchFamily="34" charset="0"/>
-                <a:ea typeface="Open Sans" pitchFamily="34" charset="-122"/>
-                <a:cs typeface="Open Sans" pitchFamily="34" charset="-120"/>
-              </a:rPr>
-              <a:t>Download repository for the first time</a:t>
-            </a:r>
-            <a:endParaRPr lang="en-US" sz="900" dirty="0"/>
-          </a:p>
-        </p:txBody>
-      </p:sp>
-      <p:sp>
-        <p:nvSpPr>
-          <p:cNvPr id="7" name="Text 5"/>
-          <p:cNvSpPr/>
-          <p:nvPr/>
-        </p:nvSpPr>
-        <p:spPr>
-          <a:xfrm>
-            <a:off x="731520" y="1719072"/>
-            <a:ext cx="3200400" cy="228600"/>
-          </a:xfrm>
-          <a:prstGeom prst="rect">
-            <a:avLst/>
-          </a:prstGeom>
-          <a:noFill/>
-          <a:ln/>
-        </p:spPr>
-        <p:txBody>
-          <a:bodyPr wrap="square" lIns="0" tIns="0" rIns="0" bIns="0" rtlCol="0" anchor="ctr"/>
-          <a:lstStyle/>
-          <a:p>
-            <a:pPr marL="0" indent="0">
-              <a:buNone/>
-            </a:pPr>
-            <a:r>
-              <a:rPr lang="en-US" sz="1100" dirty="0">
-                <a:solidFill>
-                  <a:srgbClr val="B8975C"/>
-                </a:solidFill>
-                <a:latin typeface="Consolas" pitchFamily="34" charset="0"/>
-                <a:ea typeface="Consolas" pitchFamily="34" charset="-122"/>
-                <a:cs typeface="Consolas" pitchFamily="34" charset="-120"/>
-              </a:rPr>
-              <a:t>git status</a:t>
-            </a:r>
-            <a:endParaRPr lang="en-US" sz="1100" dirty="0"/>
-          </a:p>
-        </p:txBody>
-      </p:sp>
-      <p:sp>
-        <p:nvSpPr>
-          <p:cNvPr id="8" name="Text 6"/>
-          <p:cNvSpPr/>
-          <p:nvPr/>
-        </p:nvSpPr>
-        <p:spPr>
-          <a:xfrm>
-            <a:off x="731520" y="1920240"/>
-            <a:ext cx="3200400" cy="201168"/>
-          </a:xfrm>
-          <a:prstGeom prst="rect">
-            <a:avLst/>
-          </a:prstGeom>
-          <a:noFill/>
-          <a:ln/>
-        </p:spPr>
-        <p:txBody>
-          <a:bodyPr wrap="square" lIns="0" tIns="0" rIns="0" bIns="0" rtlCol="0" anchor="ctr"/>
-          <a:lstStyle/>
-          <a:p>
-            <a:pPr marL="0" indent="0">
-              <a:buNone/>
-            </a:pPr>
-            <a:r>
-              <a:rPr lang="en-US" sz="900" dirty="0">
-                <a:solidFill>
-                  <a:srgbClr val="8A9BAD"/>
-                </a:solidFill>
-                <a:latin typeface="Open Sans" pitchFamily="34" charset="0"/>
-                <a:ea typeface="Open Sans" pitchFamily="34" charset="-122"/>
-                <a:cs typeface="Open Sans" pitchFamily="34" charset="-120"/>
-              </a:rPr>
-              <a:t>See what files have changed</a:t>
-            </a:r>
-            <a:endParaRPr lang="en-US" sz="900" dirty="0"/>
-          </a:p>
-        </p:txBody>
-      </p:sp>
-      <p:sp>
-        <p:nvSpPr>
-          <p:cNvPr id="9" name="Text 7"/>
-          <p:cNvSpPr/>
-          <p:nvPr/>
-        </p:nvSpPr>
-        <p:spPr>
-          <a:xfrm>
-            <a:off x="731520" y="2157984"/>
-            <a:ext cx="3200400" cy="228600"/>
-          </a:xfrm>
-          <a:prstGeom prst="rect">
-            <a:avLst/>
-          </a:prstGeom>
-          <a:noFill/>
-          <a:ln/>
-        </p:spPr>
-        <p:txBody>
-          <a:bodyPr wrap="square" lIns="0" tIns="0" rIns="0" bIns="0" rtlCol="0" anchor="ctr"/>
-          <a:lstStyle/>
-          <a:p>
-            <a:pPr marL="0" indent="0">
-              <a:buNone/>
-            </a:pPr>
-            <a:r>
-              <a:rPr lang="en-US" sz="1100" dirty="0">
-                <a:solidFill>
-                  <a:srgbClr val="B8975C"/>
-                </a:solidFill>
-                <a:latin typeface="Consolas" pitchFamily="34" charset="0"/>
-                <a:ea typeface="Consolas" pitchFamily="34" charset="-122"/>
-                <a:cs typeface="Consolas" pitchFamily="34" charset="-120"/>
-              </a:rPr>
-              <a:t>git add .</a:t>
-            </a:r>
-            <a:endParaRPr lang="en-US" sz="1100" dirty="0"/>
-          </a:p>
-        </p:txBody>
-      </p:sp>
-      <p:sp>
-        <p:nvSpPr>
-          <p:cNvPr id="10" name="Text 8"/>
-          <p:cNvSpPr/>
-          <p:nvPr/>
-        </p:nvSpPr>
-        <p:spPr>
-          <a:xfrm>
-            <a:off x="731520" y="2359152"/>
-            <a:ext cx="3200400" cy="201168"/>
-          </a:xfrm>
-          <a:prstGeom prst="rect">
-            <a:avLst/>
-          </a:prstGeom>
-          <a:noFill/>
-          <a:ln/>
-        </p:spPr>
-        <p:txBody>
-          <a:bodyPr wrap="square" lIns="0" tIns="0" rIns="0" bIns="0" rtlCol="0" anchor="ctr"/>
-          <a:lstStyle/>
-          <a:p>
-            <a:pPr marL="0" indent="0">
-              <a:buNone/>
-            </a:pPr>
-            <a:r>
-              <a:rPr lang="en-US" sz="900" dirty="0">
-                <a:solidFill>
-                  <a:srgbClr val="8A9BAD"/>
-                </a:solidFill>
-                <a:latin typeface="Open Sans" pitchFamily="34" charset="0"/>
-                <a:ea typeface="Open Sans" pitchFamily="34" charset="-122"/>
-                <a:cs typeface="Open Sans" pitchFamily="34" charset="-120"/>
-              </a:rPr>
-              <a:t>Stage all changes for commit</a:t>
-            </a:r>
-            <a:endParaRPr lang="en-US" sz="900" dirty="0"/>
-          </a:p>
-        </p:txBody>
-      </p:sp>
-      <p:sp>
-        <p:nvSpPr>
-          <p:cNvPr id="11" name="Text 9"/>
-          <p:cNvSpPr/>
-          <p:nvPr/>
-        </p:nvSpPr>
-        <p:spPr>
-          <a:xfrm>
-            <a:off x="731520" y="2596896"/>
-            <a:ext cx="3200400" cy="228600"/>
-          </a:xfrm>
-          <a:prstGeom prst="rect">
-            <a:avLst/>
-          </a:prstGeom>
-          <a:noFill/>
-          <a:ln/>
-        </p:spPr>
-        <p:txBody>
-          <a:bodyPr wrap="square" lIns="0" tIns="0" rIns="0" bIns="0" rtlCol="0" anchor="ctr"/>
-          <a:lstStyle/>
-          <a:p>
-            <a:pPr marL="0" indent="0">
-              <a:buNone/>
-            </a:pPr>
-            <a:r>
-              <a:rPr lang="en-US" sz="1100" dirty="0">
-                <a:solidFill>
-                  <a:srgbClr val="B8975C"/>
-                </a:solidFill>
-                <a:latin typeface="Consolas" pitchFamily="34" charset="0"/>
-                <a:ea typeface="Consolas" pitchFamily="34" charset="-122"/>
-                <a:cs typeface="Consolas" pitchFamily="34" charset="-120"/>
-              </a:rPr>
-              <a:t>git commit -m "msg"</a:t>
-            </a:r>
-            <a:endParaRPr lang="en-US" sz="1100" dirty="0"/>
-          </a:p>
-        </p:txBody>
-      </p:sp>
-      <p:sp>
-        <p:nvSpPr>
-          <p:cNvPr id="12" name="Text 10"/>
-          <p:cNvSpPr/>
-          <p:nvPr/>
-        </p:nvSpPr>
-        <p:spPr>
-          <a:xfrm>
-            <a:off x="731520" y="2798064"/>
-            <a:ext cx="3200400" cy="201168"/>
-          </a:xfrm>
-          <a:prstGeom prst="rect">
-            <a:avLst/>
-          </a:prstGeom>
-          <a:noFill/>
-          <a:ln/>
-        </p:spPr>
-        <p:txBody>
-          <a:bodyPr wrap="square" lIns="0" tIns="0" rIns="0" bIns="0" rtlCol="0" anchor="ctr"/>
-          <a:lstStyle/>
-          <a:p>
-            <a:pPr marL="0" indent="0">
-              <a:buNone/>
-            </a:pPr>
-            <a:r>
-              <a:rPr lang="en-US" sz="900" dirty="0">
-                <a:solidFill>
-                  <a:srgbClr val="8A9BAD"/>
-                </a:solidFill>
-                <a:latin typeface="Open Sans" pitchFamily="34" charset="0"/>
-                <a:ea typeface="Open Sans" pitchFamily="34" charset="-122"/>
-                <a:cs typeface="Open Sans" pitchFamily="34" charset="-120"/>
-              </a:rPr>
-              <a:t>Save a snapshot with a message</a:t>
-            </a:r>
-            <a:endParaRPr lang="en-US" sz="900" dirty="0"/>
-          </a:p>
-        </p:txBody>
-      </p:sp>
-      <p:sp>
-        <p:nvSpPr>
-          <p:cNvPr id="13" name="Text 11"/>
-          <p:cNvSpPr/>
-          <p:nvPr/>
-        </p:nvSpPr>
-        <p:spPr>
-          <a:xfrm>
-            <a:off x="731520" y="3035808"/>
-            <a:ext cx="3200400" cy="228600"/>
-          </a:xfrm>
-          <a:prstGeom prst="rect">
-            <a:avLst/>
-          </a:prstGeom>
-          <a:noFill/>
-          <a:ln/>
-        </p:spPr>
-        <p:txBody>
-          <a:bodyPr wrap="square" lIns="0" tIns="0" rIns="0" bIns="0" rtlCol="0" anchor="ctr"/>
-          <a:lstStyle/>
-          <a:p>
-            <a:pPr marL="0" indent="0">
-              <a:buNone/>
-            </a:pPr>
-            <a:r>
-              <a:rPr lang="en-US" sz="1100" dirty="0">
-                <a:solidFill>
-                  <a:srgbClr val="B8975C"/>
-                </a:solidFill>
-                <a:latin typeface="Consolas" pitchFamily="34" charset="0"/>
-                <a:ea typeface="Consolas" pitchFamily="34" charset="-122"/>
-                <a:cs typeface="Consolas" pitchFamily="34" charset="-120"/>
-              </a:rPr>
-              <a:t>git push</a:t>
-            </a:r>
-            <a:endParaRPr lang="en-US" sz="1100" dirty="0"/>
-          </a:p>
-        </p:txBody>
-      </p:sp>
-      <p:sp>
-        <p:nvSpPr>
-          <p:cNvPr id="14" name="Text 12"/>
-          <p:cNvSpPr/>
-          <p:nvPr/>
-        </p:nvSpPr>
-        <p:spPr>
-          <a:xfrm>
-            <a:off x="731520" y="3236976"/>
-            <a:ext cx="3200400" cy="201168"/>
-          </a:xfrm>
-          <a:prstGeom prst="rect">
-            <a:avLst/>
-          </a:prstGeom>
-          <a:noFill/>
-          <a:ln/>
-        </p:spPr>
-        <p:txBody>
-          <a:bodyPr wrap="square" lIns="0" tIns="0" rIns="0" bIns="0" rtlCol="0" anchor="ctr"/>
-          <a:lstStyle/>
-          <a:p>
-            <a:pPr marL="0" indent="0">
-              <a:buNone/>
-            </a:pPr>
-            <a:r>
-              <a:rPr lang="en-US" sz="900" dirty="0">
-                <a:solidFill>
-                  <a:srgbClr val="8A9BAD"/>
-                </a:solidFill>
-                <a:latin typeface="Open Sans" pitchFamily="34" charset="0"/>
-                <a:ea typeface="Open Sans" pitchFamily="34" charset="-122"/>
-                <a:cs typeface="Open Sans" pitchFamily="34" charset="-120"/>
-              </a:rPr>
-              <a:t>Upload commits to GitHub</a:t>
-            </a:r>
-            <a:endParaRPr lang="en-US" sz="900" dirty="0"/>
-          </a:p>
-        </p:txBody>
-      </p:sp>
-      <p:sp>
-        <p:nvSpPr>
-          <p:cNvPr id="15" name="Text 13"/>
-          <p:cNvSpPr/>
-          <p:nvPr/>
-        </p:nvSpPr>
-        <p:spPr>
-          <a:xfrm>
-            <a:off x="731520" y="3474720"/>
-            <a:ext cx="3200400" cy="228600"/>
-          </a:xfrm>
-          <a:prstGeom prst="rect">
-            <a:avLst/>
-          </a:prstGeom>
-          <a:noFill/>
-          <a:ln/>
-        </p:spPr>
-        <p:txBody>
-          <a:bodyPr wrap="square" lIns="0" tIns="0" rIns="0" bIns="0" rtlCol="0" anchor="ctr"/>
-          <a:lstStyle/>
-          <a:p>
-            <a:pPr marL="0" indent="0">
-              <a:buNone/>
-            </a:pPr>
-            <a:r>
-              <a:rPr lang="en-US" sz="1100" dirty="0">
-                <a:solidFill>
-                  <a:srgbClr val="B8975C"/>
-                </a:solidFill>
-                <a:latin typeface="Consolas" pitchFamily="34" charset="0"/>
-                <a:ea typeface="Consolas" pitchFamily="34" charset="-122"/>
-                <a:cs typeface="Consolas" pitchFamily="34" charset="-120"/>
-              </a:rPr>
-              <a:t>git pull</a:t>
-            </a:r>
-            <a:endParaRPr lang="en-US" sz="1100" dirty="0"/>
-          </a:p>
-        </p:txBody>
-      </p:sp>
-      <p:sp>
-        <p:nvSpPr>
-          <p:cNvPr id="16" name="Text 14"/>
-          <p:cNvSpPr/>
-          <p:nvPr/>
-        </p:nvSpPr>
-        <p:spPr>
-          <a:xfrm>
-            <a:off x="731520" y="3675888"/>
-            <a:ext cx="3200400" cy="201168"/>
-          </a:xfrm>
-          <a:prstGeom prst="rect">
-            <a:avLst/>
-          </a:prstGeom>
-          <a:noFill/>
-          <a:ln/>
-        </p:spPr>
-        <p:txBody>
-          <a:bodyPr wrap="square" lIns="0" tIns="0" rIns="0" bIns="0" rtlCol="0" anchor="ctr"/>
-          <a:lstStyle/>
-          <a:p>
-            <a:pPr marL="0" indent="0">
-              <a:buNone/>
-            </a:pPr>
-            <a:r>
-              <a:rPr lang="en-US" sz="900" dirty="0">
-                <a:solidFill>
-                  <a:srgbClr val="8A9BAD"/>
-                </a:solidFill>
-                <a:latin typeface="Open Sans" pitchFamily="34" charset="0"/>
-                <a:ea typeface="Open Sans" pitchFamily="34" charset="-122"/>
-                <a:cs typeface="Open Sans" pitchFamily="34" charset="-120"/>
-              </a:rPr>
-              <a:t>Download latest changes from GitHub</a:t>
-            </a:r>
-            <a:endParaRPr lang="en-US" sz="900" dirty="0"/>
-          </a:p>
-        </p:txBody>
-      </p:sp>
-      <p:sp>
-        <p:nvSpPr>
-          <p:cNvPr id="17" name="Text 15"/>
-          <p:cNvSpPr/>
-          <p:nvPr/>
-        </p:nvSpPr>
-        <p:spPr>
-          <a:xfrm>
-            <a:off x="731520" y="3913632"/>
-            <a:ext cx="3200400" cy="228600"/>
-          </a:xfrm>
-          <a:prstGeom prst="rect">
-            <a:avLst/>
-          </a:prstGeom>
-          <a:noFill/>
-          <a:ln/>
-        </p:spPr>
-        <p:txBody>
-          <a:bodyPr wrap="square" lIns="0" tIns="0" rIns="0" bIns="0" rtlCol="0" anchor="ctr"/>
-          <a:lstStyle/>
-          <a:p>
-            <a:pPr marL="0" indent="0">
-              <a:buNone/>
-            </a:pPr>
-            <a:r>
-              <a:rPr lang="en-US" sz="1100" dirty="0">
-                <a:solidFill>
-                  <a:srgbClr val="B8975C"/>
-                </a:solidFill>
-                <a:latin typeface="Consolas" pitchFamily="34" charset="0"/>
-                <a:ea typeface="Consolas" pitchFamily="34" charset="-122"/>
-                <a:cs typeface="Consolas" pitchFamily="34" charset="-120"/>
-              </a:rPr>
-              <a:t>git log --oneline</a:t>
-            </a:r>
-            <a:endParaRPr lang="en-US" sz="1100" dirty="0"/>
-          </a:p>
-        </p:txBody>
-      </p:sp>
-      <p:sp>
-        <p:nvSpPr>
-          <p:cNvPr id="18" name="Text 16"/>
-          <p:cNvSpPr/>
-          <p:nvPr/>
-        </p:nvSpPr>
-        <p:spPr>
-          <a:xfrm>
-            <a:off x="731520" y="4114800"/>
-            <a:ext cx="3200400" cy="201168"/>
-          </a:xfrm>
-          <a:prstGeom prst="rect">
-            <a:avLst/>
-          </a:prstGeom>
-          <a:noFill/>
-          <a:ln/>
-        </p:spPr>
-        <p:txBody>
-          <a:bodyPr wrap="square" lIns="0" tIns="0" rIns="0" bIns="0" rtlCol="0" anchor="ctr"/>
-          <a:lstStyle/>
-          <a:p>
-            <a:pPr marL="0" indent="0">
-              <a:buNone/>
-            </a:pPr>
-            <a:r>
-              <a:rPr lang="en-US" sz="900" dirty="0">
-                <a:solidFill>
-                  <a:srgbClr val="8A9BAD"/>
-                </a:solidFill>
-                <a:latin typeface="Open Sans" pitchFamily="34" charset="0"/>
-                <a:ea typeface="Open Sans" pitchFamily="34" charset="-122"/>
-                <a:cs typeface="Open Sans" pitchFamily="34" charset="-120"/>
-              </a:rPr>
-              <a:t>View commit history</a:t>
-            </a:r>
-            <a:endParaRPr lang="en-US" sz="900" dirty="0"/>
-          </a:p>
-        </p:txBody>
-      </p:sp>
-      <p:sp>
-        <p:nvSpPr>
-          <p:cNvPr id="19" name="Shape 17"/>
-          <p:cNvSpPr/>
-          <p:nvPr/>
-        </p:nvSpPr>
-        <p:spPr>
-          <a:xfrm>
-            <a:off x="4389120" y="868680"/>
-            <a:ext cx="18288" cy="3474720"/>
-          </a:xfrm>
-          <a:prstGeom prst="rect">
-            <a:avLst/>
-          </a:prstGeom>
-          <a:solidFill>
-            <a:srgbClr val="5A6B7A"/>
-          </a:solidFill>
-          <a:ln/>
-        </p:spPr>
-        <p:txBody>
-          <a:bodyPr/>
-          <a:lstStyle/>
-          <a:p>
-            <a:endParaRPr lang="en-US"/>
-          </a:p>
-        </p:txBody>
-      </p:sp>
-      <p:sp>
-        <p:nvSpPr>
-          <p:cNvPr id="20" name="Text 18"/>
-          <p:cNvSpPr/>
-          <p:nvPr/>
-        </p:nvSpPr>
-        <p:spPr>
-          <a:xfrm>
-            <a:off x="4754880" y="868680"/>
-            <a:ext cx="3657600" cy="320040"/>
-          </a:xfrm>
-          <a:prstGeom prst="rect">
-            <a:avLst/>
-          </a:prstGeom>
-          <a:noFill/>
-          <a:ln/>
-        </p:spPr>
-        <p:txBody>
-          <a:bodyPr wrap="square" lIns="0" tIns="0" rIns="0" bIns="0" rtlCol="0" anchor="ctr"/>
-          <a:lstStyle/>
-          <a:p>
-            <a:pPr marL="0" indent="0">
-              <a:buNone/>
-            </a:pPr>
-            <a:r>
-              <a:rPr lang="en-US" sz="1400" b="1" dirty="0">
-                <a:solidFill>
-                  <a:srgbClr val="B8975C"/>
-                </a:solidFill>
-                <a:latin typeface="Open Sans" pitchFamily="34" charset="0"/>
-                <a:ea typeface="Open Sans" pitchFamily="34" charset="-122"/>
-                <a:cs typeface="Open Sans" pitchFamily="34" charset="-120"/>
-              </a:rPr>
-              <a:t>Useful Links</a:t>
-            </a:r>
-            <a:endParaRPr lang="en-US" sz="1400" dirty="0"/>
-          </a:p>
-        </p:txBody>
-      </p:sp>
-      <p:sp>
-        <p:nvSpPr>
-          <p:cNvPr id="21" name="Text 19"/>
-          <p:cNvSpPr/>
-          <p:nvPr/>
-        </p:nvSpPr>
-        <p:spPr>
-          <a:xfrm>
-            <a:off x="4754880" y="1280160"/>
-            <a:ext cx="3657600" cy="228600"/>
-          </a:xfrm>
-          <a:prstGeom prst="rect">
-            <a:avLst/>
-          </a:prstGeom>
-          <a:noFill/>
-          <a:ln/>
-        </p:spPr>
-        <p:txBody>
-          <a:bodyPr wrap="square" lIns="0" tIns="0" rIns="0" bIns="0" rtlCol="0" anchor="ctr"/>
-          <a:lstStyle/>
-          <a:p>
-            <a:pPr marL="0" indent="0">
-              <a:buNone/>
-            </a:pPr>
-            <a:r>
-              <a:rPr lang="en-US" sz="1100" b="1" dirty="0">
-                <a:solidFill>
-                  <a:srgbClr val="6B8FA3"/>
-                </a:solidFill>
-                <a:latin typeface="Open Sans" pitchFamily="34" charset="0"/>
-                <a:ea typeface="Open Sans" pitchFamily="34" charset="-122"/>
-                <a:cs typeface="Open Sans" pitchFamily="34" charset="-120"/>
-              </a:rPr>
-              <a:t>github.com</a:t>
-            </a:r>
-            <a:endParaRPr lang="en-US" sz="1100" dirty="0"/>
-          </a:p>
-        </p:txBody>
-      </p:sp>
-      <p:sp>
-        <p:nvSpPr>
-          <p:cNvPr id="22" name="Text 20"/>
-          <p:cNvSpPr/>
-          <p:nvPr/>
-        </p:nvSpPr>
-        <p:spPr>
-          <a:xfrm>
-            <a:off x="4754880" y="1481328"/>
-            <a:ext cx="3657600" cy="201168"/>
-          </a:xfrm>
-          <a:prstGeom prst="rect">
-            <a:avLst/>
-          </a:prstGeom>
-          <a:noFill/>
-          <a:ln/>
-        </p:spPr>
-        <p:txBody>
-          <a:bodyPr wrap="square" lIns="0" tIns="0" rIns="0" bIns="0" rtlCol="0" anchor="ctr"/>
-          <a:lstStyle/>
-          <a:p>
-            <a:pPr marL="0" indent="0">
-              <a:buNone/>
-            </a:pPr>
-            <a:r>
-              <a:rPr lang="en-US" sz="900" dirty="0">
-                <a:solidFill>
-                  <a:srgbClr val="8A9BAD"/>
-                </a:solidFill>
-                <a:latin typeface="Open Sans" pitchFamily="34" charset="0"/>
-                <a:ea typeface="Open Sans" pitchFamily="34" charset="-122"/>
-                <a:cs typeface="Open Sans" pitchFamily="34" charset="-120"/>
-              </a:rPr>
-              <a:t>Create account &amp; view repositories</a:t>
-            </a:r>
-            <a:endParaRPr lang="en-US" sz="900" dirty="0"/>
-          </a:p>
-        </p:txBody>
-      </p:sp>
-      <p:sp>
-        <p:nvSpPr>
-          <p:cNvPr id="23" name="Text 21"/>
-          <p:cNvSpPr/>
-          <p:nvPr/>
-        </p:nvSpPr>
-        <p:spPr>
-          <a:xfrm>
-            <a:off x="4754880" y="1719072"/>
-            <a:ext cx="3657600" cy="228600"/>
-          </a:xfrm>
-          <a:prstGeom prst="rect">
-            <a:avLst/>
-          </a:prstGeom>
-          <a:noFill/>
-          <a:ln/>
-        </p:spPr>
-        <p:txBody>
-          <a:bodyPr wrap="square" lIns="0" tIns="0" rIns="0" bIns="0" rtlCol="0" anchor="ctr"/>
-          <a:lstStyle/>
-          <a:p>
-            <a:pPr marL="0" indent="0">
-              <a:buNone/>
-            </a:pPr>
-            <a:r>
-              <a:rPr lang="en-US" sz="1100" b="1" dirty="0">
-                <a:solidFill>
-                  <a:srgbClr val="6B8FA3"/>
-                </a:solidFill>
-                <a:latin typeface="Open Sans" pitchFamily="34" charset="0"/>
-                <a:ea typeface="Open Sans" pitchFamily="34" charset="-122"/>
-                <a:cs typeface="Open Sans" pitchFamily="34" charset="-120"/>
-              </a:rPr>
-              <a:t>desktop.github.com</a:t>
-            </a:r>
-            <a:endParaRPr lang="en-US" sz="1100" dirty="0"/>
-          </a:p>
-        </p:txBody>
-      </p:sp>
-      <p:sp>
-        <p:nvSpPr>
-          <p:cNvPr id="24" name="Text 22"/>
-          <p:cNvSpPr/>
-          <p:nvPr/>
-        </p:nvSpPr>
-        <p:spPr>
-          <a:xfrm>
-            <a:off x="4754880" y="1920240"/>
-            <a:ext cx="3657600" cy="201168"/>
-          </a:xfrm>
-          <a:prstGeom prst="rect">
-            <a:avLst/>
-          </a:prstGeom>
-          <a:noFill/>
-          <a:ln/>
-        </p:spPr>
-        <p:txBody>
-          <a:bodyPr wrap="square" lIns="0" tIns="0" rIns="0" bIns="0" rtlCol="0" anchor="ctr"/>
-          <a:lstStyle/>
-          <a:p>
-            <a:pPr marL="0" indent="0">
-              <a:buNone/>
-            </a:pPr>
-            <a:r>
-              <a:rPr lang="en-US" sz="900" dirty="0">
-                <a:solidFill>
-                  <a:srgbClr val="8A9BAD"/>
-                </a:solidFill>
-                <a:latin typeface="Open Sans" pitchFamily="34" charset="0"/>
-                <a:ea typeface="Open Sans" pitchFamily="34" charset="-122"/>
-                <a:cs typeface="Open Sans" pitchFamily="34" charset="-120"/>
-              </a:rPr>
-              <a:t>GitHub Desktop (visual Git client)</a:t>
-            </a:r>
-            <a:endParaRPr lang="en-US" sz="900" dirty="0"/>
-          </a:p>
-        </p:txBody>
-      </p:sp>
-      <p:sp>
-        <p:nvSpPr>
-          <p:cNvPr id="25" name="Text 23"/>
-          <p:cNvSpPr/>
-          <p:nvPr/>
-        </p:nvSpPr>
-        <p:spPr>
-          <a:xfrm>
-            <a:off x="4754880" y="2157984"/>
-            <a:ext cx="3657600" cy="228600"/>
-          </a:xfrm>
-          <a:prstGeom prst="rect">
-            <a:avLst/>
-          </a:prstGeom>
-          <a:noFill/>
-          <a:ln/>
-        </p:spPr>
-        <p:txBody>
-          <a:bodyPr wrap="square" lIns="0" tIns="0" rIns="0" bIns="0" rtlCol="0" anchor="ctr"/>
-          <a:lstStyle/>
-          <a:p>
-            <a:pPr marL="0" indent="0">
-              <a:buNone/>
-            </a:pPr>
-            <a:r>
-              <a:rPr lang="en-US" sz="1100" b="1" dirty="0">
-                <a:solidFill>
-                  <a:srgbClr val="6B8FA3"/>
-                </a:solidFill>
-                <a:latin typeface="Open Sans" pitchFamily="34" charset="0"/>
-                <a:ea typeface="Open Sans" pitchFamily="34" charset="-122"/>
-                <a:cs typeface="Open Sans" pitchFamily="34" charset="-120"/>
-              </a:rPr>
-              <a:t>chatgpt.com</a:t>
-            </a:r>
-            <a:endParaRPr lang="en-US" sz="1100" dirty="0"/>
-          </a:p>
-        </p:txBody>
-      </p:sp>
-      <p:sp>
-        <p:nvSpPr>
-          <p:cNvPr id="26" name="Text 24"/>
-          <p:cNvSpPr/>
-          <p:nvPr/>
-        </p:nvSpPr>
-        <p:spPr>
-          <a:xfrm>
-            <a:off x="4754880" y="2359152"/>
-            <a:ext cx="3657600" cy="201168"/>
-          </a:xfrm>
-          <a:prstGeom prst="rect">
-            <a:avLst/>
-          </a:prstGeom>
-          <a:noFill/>
-          <a:ln/>
-        </p:spPr>
-        <p:txBody>
-          <a:bodyPr wrap="square" lIns="0" tIns="0" rIns="0" bIns="0" rtlCol="0" anchor="ctr"/>
-          <a:lstStyle/>
-          <a:p>
-            <a:pPr marL="0" indent="0">
-              <a:buNone/>
-            </a:pPr>
-            <a:r>
-              <a:rPr lang="en-US" sz="900" dirty="0">
-                <a:solidFill>
-                  <a:srgbClr val="8A9BAD"/>
-                </a:solidFill>
-                <a:latin typeface="Open Sans" pitchFamily="34" charset="0"/>
-                <a:ea typeface="Open Sans" pitchFamily="34" charset="-122"/>
-                <a:cs typeface="Open Sans" pitchFamily="34" charset="-120"/>
-              </a:rPr>
-              <a:t>ChatGPT (OpenAI)</a:t>
-            </a:r>
-            <a:endParaRPr lang="en-US" sz="900" dirty="0"/>
-          </a:p>
-        </p:txBody>
-      </p:sp>
-      <p:sp>
-        <p:nvSpPr>
-          <p:cNvPr id="27" name="Text 25"/>
-          <p:cNvSpPr/>
-          <p:nvPr/>
-        </p:nvSpPr>
-        <p:spPr>
-          <a:xfrm>
-            <a:off x="4754880" y="2596896"/>
-            <a:ext cx="3657600" cy="228600"/>
-          </a:xfrm>
-          <a:prstGeom prst="rect">
-            <a:avLst/>
-          </a:prstGeom>
-          <a:noFill/>
-          <a:ln/>
-        </p:spPr>
-        <p:txBody>
-          <a:bodyPr wrap="square" lIns="0" tIns="0" rIns="0" bIns="0" rtlCol="0" anchor="ctr"/>
-          <a:lstStyle/>
-          <a:p>
-            <a:pPr marL="0" indent="0">
-              <a:buNone/>
-            </a:pPr>
-            <a:r>
-              <a:rPr lang="en-US" sz="1100" b="1" dirty="0">
-                <a:solidFill>
-                  <a:srgbClr val="6B8FA3"/>
-                </a:solidFill>
-                <a:latin typeface="Open Sans" pitchFamily="34" charset="0"/>
-                <a:ea typeface="Open Sans" pitchFamily="34" charset="-122"/>
-                <a:cs typeface="Open Sans" pitchFamily="34" charset="-120"/>
-              </a:rPr>
-              <a:t>claude.ai</a:t>
-            </a:r>
-            <a:endParaRPr lang="en-US" sz="1100" dirty="0"/>
-          </a:p>
-        </p:txBody>
-      </p:sp>
-      <p:sp>
-        <p:nvSpPr>
-          <p:cNvPr id="28" name="Text 26"/>
-          <p:cNvSpPr/>
-          <p:nvPr/>
-        </p:nvSpPr>
-        <p:spPr>
-          <a:xfrm>
-            <a:off x="4754880" y="2798064"/>
-            <a:ext cx="3657600" cy="201168"/>
-          </a:xfrm>
-          <a:prstGeom prst="rect">
-            <a:avLst/>
-          </a:prstGeom>
-          <a:noFill/>
-          <a:ln/>
-        </p:spPr>
-        <p:txBody>
-          <a:bodyPr wrap="square" lIns="0" tIns="0" rIns="0" bIns="0" rtlCol="0" anchor="ctr"/>
-          <a:lstStyle/>
-          <a:p>
-            <a:pPr marL="0" indent="0">
-              <a:buNone/>
-            </a:pPr>
-            <a:r>
-              <a:rPr lang="en-US" sz="900" dirty="0">
-                <a:solidFill>
-                  <a:srgbClr val="8A9BAD"/>
-                </a:solidFill>
-                <a:latin typeface="Open Sans" pitchFamily="34" charset="0"/>
-                <a:ea typeface="Open Sans" pitchFamily="34" charset="-122"/>
-                <a:cs typeface="Open Sans" pitchFamily="34" charset="-120"/>
-              </a:rPr>
-              <a:t>Claude (Anthropic)</a:t>
-            </a:r>
-            <a:endParaRPr lang="en-US" sz="900" dirty="0"/>
-          </a:p>
-        </p:txBody>
-      </p:sp>
-      <p:sp>
-        <p:nvSpPr>
-          <p:cNvPr id="29" name="Text 27"/>
-          <p:cNvSpPr/>
-          <p:nvPr/>
-        </p:nvSpPr>
-        <p:spPr>
-          <a:xfrm>
-            <a:off x="4754880" y="3035808"/>
-            <a:ext cx="3657600" cy="228600"/>
-          </a:xfrm>
-          <a:prstGeom prst="rect">
-            <a:avLst/>
-          </a:prstGeom>
-          <a:noFill/>
-          <a:ln/>
-        </p:spPr>
-        <p:txBody>
-          <a:bodyPr wrap="square" lIns="0" tIns="0" rIns="0" bIns="0" rtlCol="0" anchor="ctr"/>
-          <a:lstStyle/>
-          <a:p>
-            <a:pPr marL="0" indent="0">
-              <a:buNone/>
-            </a:pPr>
-            <a:r>
-              <a:rPr lang="en-US" sz="1100" b="1" dirty="0">
-                <a:solidFill>
-                  <a:srgbClr val="6B8FA3"/>
-                </a:solidFill>
-                <a:latin typeface="Open Sans" pitchFamily="34" charset="0"/>
-                <a:ea typeface="Open Sans" pitchFamily="34" charset="-122"/>
-                <a:cs typeface="Open Sans" pitchFamily="34" charset="-120"/>
-              </a:rPr>
-              <a:t>education.github.com</a:t>
-            </a:r>
-            <a:endParaRPr lang="en-US" sz="1100" dirty="0"/>
-          </a:p>
-        </p:txBody>
-      </p:sp>
-      <p:sp>
-        <p:nvSpPr>
-          <p:cNvPr id="30" name="Text 28"/>
-          <p:cNvSpPr/>
-          <p:nvPr/>
-        </p:nvSpPr>
-        <p:spPr>
-          <a:xfrm>
-            <a:off x="4754880" y="3236976"/>
-            <a:ext cx="3657600" cy="201168"/>
-          </a:xfrm>
-          <a:prstGeom prst="rect">
-            <a:avLst/>
-          </a:prstGeom>
-          <a:noFill/>
-          <a:ln/>
-        </p:spPr>
-        <p:txBody>
-          <a:bodyPr wrap="square" lIns="0" tIns="0" rIns="0" bIns="0" rtlCol="0" anchor="ctr"/>
-          <a:lstStyle/>
-          <a:p>
-            <a:pPr marL="0" indent="0">
-              <a:buNone/>
-            </a:pPr>
-            <a:r>
-              <a:rPr lang="en-US" sz="900" dirty="0">
-                <a:solidFill>
-                  <a:srgbClr val="8A9BAD"/>
-                </a:solidFill>
-                <a:latin typeface="Open Sans" pitchFamily="34" charset="0"/>
-                <a:ea typeface="Open Sans" pitchFamily="34" charset="-122"/>
-                <a:cs typeface="Open Sans" pitchFamily="34" charset="-120"/>
-              </a:rPr>
-              <a:t>Student Developer Pack (free Pro)</a:t>
-            </a:r>
-            <a:endParaRPr lang="en-US" sz="900" dirty="0"/>
-          </a:p>
-        </p:txBody>
-      </p:sp>
-      <p:sp>
-        <p:nvSpPr>
-          <p:cNvPr id="31" name="Text 29"/>
-          <p:cNvSpPr/>
-          <p:nvPr/>
-        </p:nvSpPr>
-        <p:spPr>
-          <a:xfrm>
-            <a:off x="4754880" y="3474720"/>
-            <a:ext cx="3657600" cy="228600"/>
-          </a:xfrm>
-          <a:prstGeom prst="rect">
-            <a:avLst/>
-          </a:prstGeom>
-          <a:noFill/>
-          <a:ln/>
-        </p:spPr>
-        <p:txBody>
-          <a:bodyPr wrap="square" lIns="0" tIns="0" rIns="0" bIns="0" rtlCol="0" anchor="ctr"/>
-          <a:lstStyle/>
-          <a:p>
-            <a:pPr marL="0" indent="0">
-              <a:buNone/>
-            </a:pPr>
-            <a:r>
-              <a:rPr lang="en-US" sz="1100" b="1" dirty="0">
-                <a:solidFill>
-                  <a:srgbClr val="6B8FA3"/>
-                </a:solidFill>
-                <a:latin typeface="Open Sans" pitchFamily="34" charset="0"/>
-                <a:ea typeface="Open Sans" pitchFamily="34" charset="-122"/>
-                <a:cs typeface="Open Sans" pitchFamily="34" charset="-120"/>
-              </a:rPr>
-              <a:t>code.visualstudio.com</a:t>
-            </a:r>
-            <a:endParaRPr lang="en-US" sz="1100" dirty="0"/>
-          </a:p>
-        </p:txBody>
-      </p:sp>
-      <p:sp>
-        <p:nvSpPr>
-          <p:cNvPr id="32" name="Text 30"/>
-          <p:cNvSpPr/>
-          <p:nvPr/>
-        </p:nvSpPr>
-        <p:spPr>
-          <a:xfrm>
-            <a:off x="4754880" y="3675888"/>
-            <a:ext cx="3657600" cy="201168"/>
-          </a:xfrm>
-          <a:prstGeom prst="rect">
-            <a:avLst/>
-          </a:prstGeom>
-          <a:noFill/>
-          <a:ln/>
-        </p:spPr>
-        <p:txBody>
-          <a:bodyPr wrap="square" lIns="0" tIns="0" rIns="0" bIns="0" rtlCol="0" anchor="ctr"/>
-          <a:lstStyle/>
-          <a:p>
-            <a:pPr marL="0" indent="0">
-              <a:buNone/>
-            </a:pPr>
-            <a:r>
-              <a:rPr lang="en-US" sz="900" dirty="0">
-                <a:solidFill>
-                  <a:srgbClr val="8A9BAD"/>
-                </a:solidFill>
-                <a:latin typeface="Open Sans" pitchFamily="34" charset="0"/>
-                <a:ea typeface="Open Sans" pitchFamily="34" charset="-122"/>
-                <a:cs typeface="Open Sans" pitchFamily="34" charset="-120"/>
-              </a:rPr>
-              <a:t>VS Code (free text editor)</a:t>
-            </a:r>
-            <a:endParaRPr lang="en-US" sz="900" dirty="0"/>
-          </a:p>
-        </p:txBody>
-      </p:sp>
-      <p:sp>
-        <p:nvSpPr>
-          <p:cNvPr id="33" name="Text 31"/>
-          <p:cNvSpPr/>
-          <p:nvPr/>
-        </p:nvSpPr>
-        <p:spPr>
-          <a:xfrm>
-            <a:off x="4754880" y="3913632"/>
-            <a:ext cx="3657600" cy="228600"/>
-          </a:xfrm>
-          <a:prstGeom prst="rect">
-            <a:avLst/>
-          </a:prstGeom>
-          <a:noFill/>
-          <a:ln/>
-        </p:spPr>
-        <p:txBody>
-          <a:bodyPr wrap="square" lIns="0" tIns="0" rIns="0" bIns="0" rtlCol="0" anchor="ctr"/>
-          <a:lstStyle/>
-          <a:p>
-            <a:pPr marL="0" indent="0">
-              <a:buNone/>
-            </a:pPr>
-            <a:r>
-              <a:rPr lang="en-US" sz="1100" b="1" dirty="0">
-                <a:solidFill>
-                  <a:srgbClr val="6B8FA3"/>
-                </a:solidFill>
-                <a:latin typeface="Open Sans" pitchFamily="34" charset="0"/>
-                <a:ea typeface="Open Sans" pitchFamily="34" charset="-122"/>
-                <a:cs typeface="Open Sans" pitchFamily="34" charset="-120"/>
-              </a:rPr>
-              <a:t>git-scm.com</a:t>
-            </a:r>
-            <a:endParaRPr lang="en-US" sz="1100" dirty="0"/>
-          </a:p>
-        </p:txBody>
-      </p:sp>
-      <p:sp>
-        <p:nvSpPr>
-          <p:cNvPr id="34" name="Text 32"/>
-          <p:cNvSpPr/>
-          <p:nvPr/>
-        </p:nvSpPr>
-        <p:spPr>
-          <a:xfrm>
-            <a:off x="4754880" y="4114800"/>
-            <a:ext cx="3657600" cy="201168"/>
-          </a:xfrm>
-          <a:prstGeom prst="rect">
-            <a:avLst/>
-          </a:prstGeom>
-          <a:noFill/>
-          <a:ln/>
-        </p:spPr>
-        <p:txBody>
-          <a:bodyPr wrap="square" lIns="0" tIns="0" rIns="0" bIns="0" rtlCol="0" anchor="ctr"/>
-          <a:lstStyle/>
-          <a:p>
-            <a:pPr marL="0" indent="0">
-              <a:buNone/>
-            </a:pPr>
-            <a:r>
-              <a:rPr lang="en-US" sz="900" dirty="0">
-                <a:solidFill>
-                  <a:srgbClr val="8A9BAD"/>
-                </a:solidFill>
-                <a:latin typeface="Open Sans" pitchFamily="34" charset="0"/>
-                <a:ea typeface="Open Sans" pitchFamily="34" charset="-122"/>
-                <a:cs typeface="Open Sans" pitchFamily="34" charset="-120"/>
-              </a:rPr>
-              <a:t>Official Git download</a:t>
-            </a:r>
-            <a:endParaRPr lang="en-US" sz="900" dirty="0"/>
-          </a:p>
-        </p:txBody>
-      </p:sp>
-      <p:sp>
-        <p:nvSpPr>
-          <p:cNvPr id="35" name="Shape 33"/>
-          <p:cNvSpPr/>
-          <p:nvPr/>
-        </p:nvSpPr>
-        <p:spPr>
-          <a:xfrm>
-            <a:off x="0" y="4572000"/>
-            <a:ext cx="9144000" cy="36576"/>
+              <a:lnSpc>
+                <a:spcPct val="110000"/>
+              </a:lnSpc>
+              <a:buNone/>
+            </a:pPr>
+            <a:r>
+              <a:rPr lang="en-US" sz="4000" b="1" dirty="0">
+                <a:solidFill>
+                  <a:srgbClr val="FFFFFF"/>
+                </a:solidFill>
+                <a:latin typeface="Open Sans" pitchFamily="34" charset="0"/>
+                <a:ea typeface="Open Sans" pitchFamily="34" charset="-122"/>
+                <a:cs typeface="Open Sans" pitchFamily="34" charset="-120"/>
+              </a:rPr>
+              <a:t>moved online</a:t>
+            </a:r>
+            <a:endParaRPr lang="en-US" sz="4000" dirty="0"/>
+          </a:p>
+        </p:txBody>
+      </p:sp>
+      <p:sp>
+        <p:nvSpPr>
+          <p:cNvPr id="5" name="Shape 3"/>
+          <p:cNvSpPr/>
+          <p:nvPr/>
+        </p:nvSpPr>
+        <p:spPr>
+          <a:xfrm>
+            <a:off x="731520" y="3108960"/>
+            <a:ext cx="1828800" cy="36576"/>
           </a:xfrm>
           <a:prstGeom prst="rect">
             <a:avLst/>
@@ -7762,7 +6203,93 @@
       </p:sp>
       <p:sp>
         <p:nvSpPr>
-          <p:cNvPr id="36" name="Text 34"/>
+          <p:cNvPr id="6" name="Text 4"/>
+          <p:cNvSpPr/>
+          <p:nvPr/>
+        </p:nvSpPr>
+        <p:spPr>
+          <a:xfrm>
+            <a:off x="731520" y="3337560"/>
+            <a:ext cx="6400800" cy="731520"/>
+          </a:xfrm>
+          <a:prstGeom prst="rect">
+            <a:avLst/>
+          </a:prstGeom>
+          <a:noFill/>
+          <a:ln/>
+        </p:spPr>
+        <p:txBody>
+          <a:bodyPr wrap="square" lIns="0" tIns="0" rIns="0" bIns="0" rtlCol="0" anchor="ctr"/>
+          <a:lstStyle/>
+          <a:p>
+            <a:pPr marL="0" indent="0">
+              <a:lnSpc>
+                <a:spcPct val="140000"/>
+              </a:lnSpc>
+              <a:buNone/>
+            </a:pPr>
+            <a:r>
+              <a:rPr lang="en-US" sz="1400" dirty="0">
+                <a:solidFill>
+                  <a:srgbClr val="8A9BAD"/>
+                </a:solidFill>
+                <a:latin typeface="Open Sans" pitchFamily="34" charset="0"/>
+                <a:ea typeface="Open Sans" pitchFamily="34" charset="-122"/>
+                <a:cs typeface="Open Sans" pitchFamily="34" charset="-120"/>
+              </a:rPr>
+              <a:t>Full walkthrough, cheat sheet, and common fixes now live at</a:t>
+            </a:r>
+            <a:endParaRPr lang="en-US" sz="1400" dirty="0"/>
+          </a:p>
+          <a:p>
+            <a:pPr marL="0" indent="0">
+              <a:lnSpc>
+                <a:spcPct val="140000"/>
+              </a:lnSpc>
+              <a:buNone/>
+            </a:pPr>
+            <a:r>
+              <a:rPr lang="en-US" sz="1400" dirty="0">
+                <a:solidFill>
+                  <a:srgbClr val="8A9BAD"/>
+                </a:solidFill>
+                <a:latin typeface="Open Sans" pitchFamily="34" charset="0"/>
+                <a:ea typeface="Open Sans" pitchFamily="34" charset="-122"/>
+                <a:cs typeface="Open Sans" pitchFamily="34" charset="-120"/>
+              </a:rPr>
+              <a:t>adamwstauffer.github.io/ai-lms  →  Start Here</a:t>
+            </a:r>
+            <a:endParaRPr lang="en-US" sz="1400" dirty="0"/>
+          </a:p>
+        </p:txBody>
+      </p:sp>
+      <p:pic>
+        <p:nvPicPr>
+          <p:cNvPr id="7" name="Image 0" descr="preencoded.png"/>
+          <p:cNvPicPr>
+            <a:picLocks noChangeAspect="1"/>
+          </p:cNvPicPr>
+          <p:nvPr/>
+        </p:nvPicPr>
+        <p:blipFill>
+          <a:blip r:embed="rId3"/>
+          <a:stretch>
+            <a:fillRect/>
+          </a:stretch>
+        </p:blipFill>
+        <p:spPr>
+          <a:xfrm>
+            <a:off x="7132320" y="3200400"/>
+            <a:ext cx="1097280" cy="1097280"/>
+          </a:xfrm>
+          <a:prstGeom prst="rect">
+            <a:avLst/>
+          </a:prstGeom>
+        </p:spPr>
+      </p:pic>
+      <p:sp>
+        <p:nvSpPr>
+          <p:cNvPr id="8" name="Text 5"/>
           <p:cNvSpPr/>
           <p:nvPr/>
         </p:nvSpPr>
@@ -7793,7 +6320,7 @@
                 <a:ea typeface="Open Sans" pitchFamily="34" charset="-122"/>
                 <a:cs typeface="Open Sans" pitchFamily="34" charset="-120"/>
               </a:rPr>
-              <a:t>Stauffer  |  Shidler College of Business  |  University of Hawaiʻi at Mānoa  |  adamstau@hawaii.edu</a:t>
+              <a:t>Stauffer  |  Shidler College of Business  |  University of Hawaiʻi at Mānoa</a:t>
             </a:r>
             <a:endParaRPr lang="en-US" sz="1000" dirty="0"/>
           </a:p>
@@ -11205,5059 +9732,6 @@
                 <a:cs typeface="Open Sans" pitchFamily="34" charset="-120"/>
               </a:rPr>
               <a:t>After cloning, run  cd repo-name  to enter the project folder before doing anything else.</a:t>
-            </a:r>
-            <a:endParaRPr lang="en-US" sz="1100" dirty="0"/>
-          </a:p>
-        </p:txBody>
-      </p:sp>
-    </p:spTree>
-  </p:cSld>
-  <p:clrMapOvr>
-    <a:masterClrMapping/>
-  </p:clrMapOvr>
-</p:sld>
-</file>
-
-<file path=ppt/slides/slide6.xml><?xml version="1.0" encoding="utf-8"?>
-<p:sld xmlns:a="http://schemas.openxmlformats.org/drawingml/2006/main" xmlns:r="http://schemas.openxmlformats.org/officeDocument/2006/relationships" xmlns:p="http://schemas.openxmlformats.org/presentationml/2006/main">
-  <p:cSld name="Slide 6">
-    <p:bg>
-      <p:bgPr>
-        <a:solidFill>
-          <a:srgbClr val="FAF9F7"/>
-        </a:solidFill>
-        <a:effectLst/>
-      </p:bgPr>
-    </p:bg>
-    <p:spTree>
-      <p:nvGrpSpPr>
-        <p:cNvPr id="1" name=""/>
-        <p:cNvGrpSpPr/>
-        <p:nvPr/>
-      </p:nvGrpSpPr>
-      <p:grpSpPr>
-        <a:xfrm>
-          <a:off x="0" y="0"/>
-          <a:ext cx="0" cy="0"/>
-          <a:chOff x="0" y="0"/>
-          <a:chExt cx="0" cy="0"/>
-        </a:xfrm>
-      </p:grpSpPr>
-      <p:sp>
-        <p:nvSpPr>
-          <p:cNvPr id="2" name="Shape 0"/>
-          <p:cNvSpPr/>
-          <p:nvPr/>
-        </p:nvSpPr>
-        <p:spPr>
-          <a:xfrm>
-            <a:off x="0" y="0"/>
-            <a:ext cx="9144000" cy="36576"/>
-          </a:xfrm>
-          <a:prstGeom prst="rect">
-            <a:avLst/>
-          </a:prstGeom>
-          <a:solidFill>
-            <a:srgbClr val="B8975C"/>
-          </a:solidFill>
-          <a:ln/>
-        </p:spPr>
-        <p:txBody>
-          <a:bodyPr/>
-          <a:lstStyle/>
-          <a:p>
-            <a:endParaRPr lang="en-US"/>
-          </a:p>
-        </p:txBody>
-      </p:sp>
-      <p:sp>
-        <p:nvSpPr>
-          <p:cNvPr id="3" name="Shape 1"/>
-          <p:cNvSpPr/>
-          <p:nvPr/>
-        </p:nvSpPr>
-        <p:spPr>
-          <a:xfrm>
-            <a:off x="0" y="4709160"/>
-            <a:ext cx="9144000" cy="434340"/>
-          </a:xfrm>
-          <a:prstGeom prst="rect">
-            <a:avLst/>
-          </a:prstGeom>
-          <a:solidFill>
-            <a:srgbClr val="36454F"/>
-          </a:solidFill>
-          <a:ln/>
-        </p:spPr>
-        <p:txBody>
-          <a:bodyPr/>
-          <a:lstStyle/>
-          <a:p>
-            <a:endParaRPr lang="en-US"/>
-          </a:p>
-        </p:txBody>
-      </p:sp>
-      <p:sp>
-        <p:nvSpPr>
-          <p:cNvPr id="4" name="Text 2"/>
-          <p:cNvSpPr/>
-          <p:nvPr/>
-        </p:nvSpPr>
-        <p:spPr>
-          <a:xfrm>
-            <a:off x="457200" y="4754880"/>
-            <a:ext cx="8229600" cy="320040"/>
-          </a:xfrm>
-          <a:prstGeom prst="rect">
-            <a:avLst/>
-          </a:prstGeom>
-          <a:noFill/>
-          <a:ln/>
-        </p:spPr>
-        <p:txBody>
-          <a:bodyPr wrap="square" rtlCol="0" anchor="ctr"/>
-          <a:lstStyle/>
-          <a:p>
-            <a:pPr marL="0" indent="0" algn="ctr">
-              <a:buNone/>
-            </a:pPr>
-            <a:r>
-              <a:rPr lang="en-US" sz="900" dirty="0">
-                <a:solidFill>
-                  <a:srgbClr val="8A9BAD"/>
-                </a:solidFill>
-                <a:latin typeface="Open Sans" pitchFamily="34" charset="0"/>
-                <a:ea typeface="Open Sans" pitchFamily="34" charset="-122"/>
-                <a:cs typeface="Open Sans" pitchFamily="34" charset="-120"/>
-              </a:rPr>
-              <a:t>Stauffer  |  Appendix: GitHub &amp; AI Setup Guide  |  Shidler College of Business</a:t>
-            </a:r>
-            <a:endParaRPr lang="en-US" sz="900" dirty="0"/>
-          </a:p>
-        </p:txBody>
-      </p:sp>
-      <p:sp>
-        <p:nvSpPr>
-          <p:cNvPr id="5" name="Shape 3"/>
-          <p:cNvSpPr/>
-          <p:nvPr/>
-        </p:nvSpPr>
-        <p:spPr>
-          <a:xfrm>
-            <a:off x="731520" y="274320"/>
-            <a:ext cx="1179576" cy="274320"/>
-          </a:xfrm>
-          <a:prstGeom prst="rect">
-            <a:avLst/>
-          </a:prstGeom>
-          <a:solidFill>
-            <a:srgbClr val="36454F"/>
-          </a:solidFill>
-          <a:ln/>
-        </p:spPr>
-        <p:txBody>
-          <a:bodyPr/>
-          <a:lstStyle/>
-          <a:p>
-            <a:endParaRPr lang="en-US"/>
-          </a:p>
-        </p:txBody>
-      </p:sp>
-      <p:sp>
-        <p:nvSpPr>
-          <p:cNvPr id="6" name="Text 4"/>
-          <p:cNvSpPr/>
-          <p:nvPr/>
-        </p:nvSpPr>
-        <p:spPr>
-          <a:xfrm>
-            <a:off x="731520" y="274320"/>
-            <a:ext cx="1179576" cy="274320"/>
-          </a:xfrm>
-          <a:prstGeom prst="rect">
-            <a:avLst/>
-          </a:prstGeom>
-          <a:noFill/>
-          <a:ln/>
-        </p:spPr>
-        <p:txBody>
-          <a:bodyPr wrap="square" lIns="0" tIns="0" rIns="0" bIns="0" rtlCol="0" anchor="ctr"/>
-          <a:lstStyle/>
-          <a:p>
-            <a:pPr marL="0" indent="0" algn="ctr">
-              <a:buNone/>
-            </a:pPr>
-            <a:r>
-              <a:rPr lang="en-US" sz="900" b="1" kern="0" spc="300" dirty="0">
-                <a:solidFill>
-                  <a:srgbClr val="B8975C"/>
-                </a:solidFill>
-                <a:latin typeface="Open Sans" pitchFamily="34" charset="0"/>
-                <a:ea typeface="Open Sans" pitchFamily="34" charset="-122"/>
-                <a:cs typeface="Open Sans" pitchFamily="34" charset="-120"/>
-              </a:rPr>
-              <a:t>STEP 4 OF 4</a:t>
-            </a:r>
-            <a:endParaRPr lang="en-US" sz="900" dirty="0"/>
-          </a:p>
-        </p:txBody>
-      </p:sp>
-      <p:sp>
-        <p:nvSpPr>
-          <p:cNvPr id="7" name="Text 5"/>
-          <p:cNvSpPr/>
-          <p:nvPr/>
-        </p:nvSpPr>
-        <p:spPr>
-          <a:xfrm>
-            <a:off x="731520" y="640080"/>
-            <a:ext cx="7680960" cy="457200"/>
-          </a:xfrm>
-          <a:prstGeom prst="rect">
-            <a:avLst/>
-          </a:prstGeom>
-          <a:noFill/>
-          <a:ln/>
-        </p:spPr>
-        <p:txBody>
-          <a:bodyPr wrap="square" lIns="0" tIns="0" rIns="0" bIns="0" rtlCol="0" anchor="ctr"/>
-          <a:lstStyle/>
-          <a:p>
-            <a:pPr marL="0" indent="0">
-              <a:buNone/>
-            </a:pPr>
-            <a:r>
-              <a:rPr lang="en-US" sz="2800" b="1" dirty="0">
-                <a:solidFill>
-                  <a:srgbClr val="1E2530"/>
-                </a:solidFill>
-                <a:latin typeface="Open Sans" pitchFamily="34" charset="0"/>
-                <a:ea typeface="Open Sans" pitchFamily="34" charset="-122"/>
-                <a:cs typeface="Open Sans" pitchFamily="34" charset="-120"/>
-              </a:rPr>
-              <a:t>The Git Workflow: Add, Commit, Push</a:t>
-            </a:r>
-            <a:endParaRPr lang="en-US" sz="2800" dirty="0"/>
-          </a:p>
-        </p:txBody>
-      </p:sp>
-      <p:sp>
-        <p:nvSpPr>
-          <p:cNvPr id="8" name="Text 6"/>
-          <p:cNvSpPr/>
-          <p:nvPr/>
-        </p:nvSpPr>
-        <p:spPr>
-          <a:xfrm>
-            <a:off x="731520" y="1097280"/>
-            <a:ext cx="7680960" cy="320040"/>
-          </a:xfrm>
-          <a:prstGeom prst="rect">
-            <a:avLst/>
-          </a:prstGeom>
-          <a:noFill/>
-          <a:ln/>
-        </p:spPr>
-        <p:txBody>
-          <a:bodyPr wrap="square" lIns="0" tIns="0" rIns="0" bIns="0" rtlCol="0" anchor="ctr"/>
-          <a:lstStyle/>
-          <a:p>
-            <a:pPr marL="0" indent="0">
-              <a:buNone/>
-            </a:pPr>
-            <a:r>
-              <a:rPr lang="en-US" sz="1200" dirty="0">
-                <a:solidFill>
-                  <a:srgbClr val="5A6B7A"/>
-                </a:solidFill>
-                <a:latin typeface="Open Sans" pitchFamily="34" charset="0"/>
-                <a:ea typeface="Open Sans" pitchFamily="34" charset="-122"/>
-                <a:cs typeface="Open Sans" pitchFamily="34" charset="-120"/>
-              </a:rPr>
-              <a:t>These three commands are all you need. Run them every time you finish work on a deliverable.</a:t>
-            </a:r>
-            <a:endParaRPr lang="en-US" sz="1200" dirty="0"/>
-          </a:p>
-        </p:txBody>
-      </p:sp>
-      <p:sp>
-        <p:nvSpPr>
-          <p:cNvPr id="9" name="Shape 7"/>
-          <p:cNvSpPr/>
-          <p:nvPr/>
-        </p:nvSpPr>
-        <p:spPr>
-          <a:xfrm>
-            <a:off x="731520" y="1554480"/>
-            <a:ext cx="2468880" cy="2651760"/>
-          </a:xfrm>
-          <a:prstGeom prst="rect">
-            <a:avLst/>
-          </a:prstGeom>
-          <a:solidFill>
-            <a:srgbClr val="FFFFFF"/>
-          </a:solidFill>
-          <a:ln/>
-          <a:effectLst>
-            <a:outerShdw blurRad="50800" dist="25400" dir="8100000" algn="bl" rotWithShape="0">
-              <a:srgbClr val="000000">
-                <a:alpha val="6000"/>
-              </a:srgbClr>
-            </a:outerShdw>
-          </a:effectLst>
-        </p:spPr>
-        <p:txBody>
-          <a:bodyPr/>
-          <a:lstStyle/>
-          <a:p>
-            <a:endParaRPr lang="en-US"/>
-          </a:p>
-        </p:txBody>
-      </p:sp>
-      <p:sp>
-        <p:nvSpPr>
-          <p:cNvPr id="10" name="Shape 8"/>
-          <p:cNvSpPr/>
-          <p:nvPr/>
-        </p:nvSpPr>
-        <p:spPr>
-          <a:xfrm>
-            <a:off x="1691640" y="1691640"/>
-            <a:ext cx="365760" cy="365760"/>
-          </a:xfrm>
-          <a:prstGeom prst="line">
-            <a:avLst/>
-          </a:prstGeom>
-          <a:solidFill>
-            <a:srgbClr val="B8975C"/>
-          </a:solidFill>
-          <a:ln/>
-        </p:spPr>
-        <p:txBody>
-          <a:bodyPr/>
-          <a:lstStyle/>
-          <a:p>
-            <a:endParaRPr lang="en-US"/>
-          </a:p>
-        </p:txBody>
-      </p:sp>
-      <p:sp>
-        <p:nvSpPr>
-          <p:cNvPr id="11" name="Text 9"/>
-          <p:cNvSpPr/>
-          <p:nvPr/>
-        </p:nvSpPr>
-        <p:spPr>
-          <a:xfrm>
-            <a:off x="1691640" y="1691640"/>
-            <a:ext cx="365760" cy="365760"/>
-          </a:xfrm>
-          <a:prstGeom prst="rect">
-            <a:avLst/>
-          </a:prstGeom>
-          <a:noFill/>
-          <a:ln/>
-        </p:spPr>
-        <p:txBody>
-          <a:bodyPr wrap="square" lIns="0" tIns="0" rIns="0" bIns="0" rtlCol="0" anchor="ctr"/>
-          <a:lstStyle/>
-          <a:p>
-            <a:pPr marL="0" indent="0" algn="ctr">
-              <a:buNone/>
-            </a:pPr>
-            <a:r>
-              <a:rPr lang="en-US" sz="1400" b="1" dirty="0">
-                <a:solidFill>
-                  <a:srgbClr val="FFFFFF"/>
-                </a:solidFill>
-                <a:latin typeface="Open Sans" pitchFamily="34" charset="0"/>
-                <a:ea typeface="Open Sans" pitchFamily="34" charset="-122"/>
-                <a:cs typeface="Open Sans" pitchFamily="34" charset="-120"/>
-              </a:rPr>
-              <a:t>1</a:t>
-            </a:r>
-            <a:endParaRPr lang="en-US" sz="1400" dirty="0"/>
-          </a:p>
-        </p:txBody>
-      </p:sp>
-      <p:sp>
-        <p:nvSpPr>
-          <p:cNvPr id="12" name="Text 10"/>
-          <p:cNvSpPr/>
-          <p:nvPr/>
-        </p:nvSpPr>
-        <p:spPr>
-          <a:xfrm>
-            <a:off x="868680" y="2148840"/>
-            <a:ext cx="2194560" cy="274320"/>
-          </a:xfrm>
-          <a:prstGeom prst="rect">
-            <a:avLst/>
-          </a:prstGeom>
-          <a:noFill/>
-          <a:ln/>
-        </p:spPr>
-        <p:txBody>
-          <a:bodyPr wrap="square" lIns="0" tIns="0" rIns="0" bIns="0" rtlCol="0" anchor="ctr"/>
-          <a:lstStyle/>
-          <a:p>
-            <a:pPr marL="0" indent="0" algn="ctr">
-              <a:buNone/>
-            </a:pPr>
-            <a:r>
-              <a:rPr lang="en-US" sz="1500" b="1" dirty="0">
-                <a:solidFill>
-                  <a:srgbClr val="1E2530"/>
-                </a:solidFill>
-                <a:latin typeface="Open Sans" pitchFamily="34" charset="0"/>
-                <a:ea typeface="Open Sans" pitchFamily="34" charset="-122"/>
-                <a:cs typeface="Open Sans" pitchFamily="34" charset="-120"/>
-              </a:rPr>
-              <a:t>Stage</a:t>
-            </a:r>
-            <a:endParaRPr lang="en-US" sz="1500" dirty="0"/>
-          </a:p>
-        </p:txBody>
-      </p:sp>
-      <p:sp>
-        <p:nvSpPr>
-          <p:cNvPr id="13" name="Text 11"/>
-          <p:cNvSpPr/>
-          <p:nvPr/>
-        </p:nvSpPr>
-        <p:spPr>
-          <a:xfrm>
-            <a:off x="868680" y="2514600"/>
-            <a:ext cx="2194560" cy="365760"/>
-          </a:xfrm>
-          <a:prstGeom prst="rect">
-            <a:avLst/>
-          </a:prstGeom>
-          <a:solidFill>
-            <a:srgbClr val="36454F"/>
-          </a:solidFill>
-          <a:ln/>
-        </p:spPr>
-        <p:txBody>
-          <a:bodyPr wrap="square" lIns="0" tIns="0" rIns="0" bIns="0" rtlCol="0" anchor="ctr"/>
-          <a:lstStyle/>
-          <a:p>
-            <a:pPr marL="0" indent="0" algn="ctr">
-              <a:buNone/>
-            </a:pPr>
-            <a:r>
-              <a:rPr lang="en-US" sz="1000" dirty="0">
-                <a:solidFill>
-                  <a:srgbClr val="B8975C"/>
-                </a:solidFill>
-                <a:latin typeface="Consolas" pitchFamily="34" charset="0"/>
-                <a:ea typeface="Consolas" pitchFamily="34" charset="-122"/>
-                <a:cs typeface="Consolas" pitchFamily="34" charset="-120"/>
-              </a:rPr>
-              <a:t>git add .</a:t>
-            </a:r>
-            <a:endParaRPr lang="en-US" sz="1000" dirty="0"/>
-          </a:p>
-        </p:txBody>
-      </p:sp>
-      <p:sp>
-        <p:nvSpPr>
-          <p:cNvPr id="14" name="Text 12"/>
-          <p:cNvSpPr/>
-          <p:nvPr/>
-        </p:nvSpPr>
-        <p:spPr>
-          <a:xfrm>
-            <a:off x="868680" y="2971800"/>
-            <a:ext cx="2194560" cy="1005840"/>
-          </a:xfrm>
-          <a:prstGeom prst="rect">
-            <a:avLst/>
-          </a:prstGeom>
-          <a:noFill/>
-          <a:ln/>
-        </p:spPr>
-        <p:txBody>
-          <a:bodyPr wrap="square" lIns="0" tIns="0" rIns="0" bIns="0" rtlCol="0" anchor="t"/>
-          <a:lstStyle/>
-          <a:p>
-            <a:pPr marL="0" indent="0">
-              <a:lnSpc>
-                <a:spcPct val="140000"/>
-              </a:lnSpc>
-              <a:buNone/>
-            </a:pPr>
-            <a:r>
-              <a:rPr lang="en-US" sz="1100" dirty="0">
-                <a:solidFill>
-                  <a:srgbClr val="5A6B7A"/>
-                </a:solidFill>
-                <a:latin typeface="Open Sans" pitchFamily="34" charset="0"/>
-                <a:ea typeface="Open Sans" pitchFamily="34" charset="-122"/>
-                <a:cs typeface="Open Sans" pitchFamily="34" charset="-120"/>
-              </a:rPr>
-              <a:t>Tells Git which files to include in the next save. The dot means all changed files.</a:t>
-            </a:r>
-            <a:endParaRPr lang="en-US" sz="1100" dirty="0"/>
-          </a:p>
-        </p:txBody>
-      </p:sp>
-      <p:sp>
-        <p:nvSpPr>
-          <p:cNvPr id="15" name="Shape 13"/>
-          <p:cNvSpPr/>
-          <p:nvPr/>
-        </p:nvSpPr>
-        <p:spPr>
-          <a:xfrm>
-            <a:off x="3474720" y="1554480"/>
-            <a:ext cx="2468880" cy="2651760"/>
-          </a:xfrm>
-          <a:prstGeom prst="rect">
-            <a:avLst/>
-          </a:prstGeom>
-          <a:solidFill>
-            <a:srgbClr val="FFFFFF"/>
-          </a:solidFill>
-          <a:ln/>
-          <a:effectLst>
-            <a:outerShdw blurRad="50800" dist="25400" dir="8100000" algn="bl" rotWithShape="0">
-              <a:srgbClr val="000000">
-                <a:alpha val="6000"/>
-              </a:srgbClr>
-            </a:outerShdw>
-          </a:effectLst>
-        </p:spPr>
-        <p:txBody>
-          <a:bodyPr/>
-          <a:lstStyle/>
-          <a:p>
-            <a:endParaRPr lang="en-US"/>
-          </a:p>
-        </p:txBody>
-      </p:sp>
-      <p:sp>
-        <p:nvSpPr>
-          <p:cNvPr id="16" name="Shape 14"/>
-          <p:cNvSpPr/>
-          <p:nvPr/>
-        </p:nvSpPr>
-        <p:spPr>
-          <a:xfrm>
-            <a:off x="4434840" y="1691640"/>
-            <a:ext cx="365760" cy="365760"/>
-          </a:xfrm>
-          <a:prstGeom prst="line">
-            <a:avLst/>
-          </a:prstGeom>
-          <a:solidFill>
-            <a:srgbClr val="B8975C"/>
-          </a:solidFill>
-          <a:ln/>
-        </p:spPr>
-        <p:txBody>
-          <a:bodyPr/>
-          <a:lstStyle/>
-          <a:p>
-            <a:endParaRPr lang="en-US"/>
-          </a:p>
-        </p:txBody>
-      </p:sp>
-      <p:sp>
-        <p:nvSpPr>
-          <p:cNvPr id="17" name="Text 15"/>
-          <p:cNvSpPr/>
-          <p:nvPr/>
-        </p:nvSpPr>
-        <p:spPr>
-          <a:xfrm>
-            <a:off x="4434840" y="1691640"/>
-            <a:ext cx="365760" cy="365760"/>
-          </a:xfrm>
-          <a:prstGeom prst="rect">
-            <a:avLst/>
-          </a:prstGeom>
-          <a:noFill/>
-          <a:ln/>
-        </p:spPr>
-        <p:txBody>
-          <a:bodyPr wrap="square" lIns="0" tIns="0" rIns="0" bIns="0" rtlCol="0" anchor="ctr"/>
-          <a:lstStyle/>
-          <a:p>
-            <a:pPr marL="0" indent="0" algn="ctr">
-              <a:buNone/>
-            </a:pPr>
-            <a:r>
-              <a:rPr lang="en-US" sz="1400" b="1" dirty="0">
-                <a:solidFill>
-                  <a:srgbClr val="FFFFFF"/>
-                </a:solidFill>
-                <a:latin typeface="Open Sans" pitchFamily="34" charset="0"/>
-                <a:ea typeface="Open Sans" pitchFamily="34" charset="-122"/>
-                <a:cs typeface="Open Sans" pitchFamily="34" charset="-120"/>
-              </a:rPr>
-              <a:t>2</a:t>
-            </a:r>
-            <a:endParaRPr lang="en-US" sz="1400" dirty="0"/>
-          </a:p>
-        </p:txBody>
-      </p:sp>
-      <p:sp>
-        <p:nvSpPr>
-          <p:cNvPr id="18" name="Text 16"/>
-          <p:cNvSpPr/>
-          <p:nvPr/>
-        </p:nvSpPr>
-        <p:spPr>
-          <a:xfrm>
-            <a:off x="3611880" y="2148840"/>
-            <a:ext cx="2194560" cy="274320"/>
-          </a:xfrm>
-          <a:prstGeom prst="rect">
-            <a:avLst/>
-          </a:prstGeom>
-          <a:noFill/>
-          <a:ln/>
-        </p:spPr>
-        <p:txBody>
-          <a:bodyPr wrap="square" lIns="0" tIns="0" rIns="0" bIns="0" rtlCol="0" anchor="ctr"/>
-          <a:lstStyle/>
-          <a:p>
-            <a:pPr marL="0" indent="0" algn="ctr">
-              <a:buNone/>
-            </a:pPr>
-            <a:r>
-              <a:rPr lang="en-US" sz="1500" b="1" dirty="0">
-                <a:solidFill>
-                  <a:srgbClr val="1E2530"/>
-                </a:solidFill>
-                <a:latin typeface="Open Sans" pitchFamily="34" charset="0"/>
-                <a:ea typeface="Open Sans" pitchFamily="34" charset="-122"/>
-                <a:cs typeface="Open Sans" pitchFamily="34" charset="-120"/>
-              </a:rPr>
-              <a:t>Commit</a:t>
-            </a:r>
-            <a:endParaRPr lang="en-US" sz="1500" dirty="0"/>
-          </a:p>
-        </p:txBody>
-      </p:sp>
-      <p:sp>
-        <p:nvSpPr>
-          <p:cNvPr id="19" name="Text 17"/>
-          <p:cNvSpPr/>
-          <p:nvPr/>
-        </p:nvSpPr>
-        <p:spPr>
-          <a:xfrm>
-            <a:off x="3611880" y="2514600"/>
-            <a:ext cx="2194560" cy="365760"/>
-          </a:xfrm>
-          <a:prstGeom prst="rect">
-            <a:avLst/>
-          </a:prstGeom>
-          <a:solidFill>
-            <a:srgbClr val="36454F"/>
-          </a:solidFill>
-          <a:ln/>
-        </p:spPr>
-        <p:txBody>
-          <a:bodyPr wrap="square" lIns="0" tIns="0" rIns="0" bIns="0" rtlCol="0" anchor="ctr"/>
-          <a:lstStyle/>
-          <a:p>
-            <a:pPr marL="0" indent="0" algn="ctr">
-              <a:buNone/>
-            </a:pPr>
-            <a:r>
-              <a:rPr lang="en-US" sz="1000" dirty="0">
-                <a:solidFill>
-                  <a:srgbClr val="B8975C"/>
-                </a:solidFill>
-                <a:latin typeface="Consolas" pitchFamily="34" charset="0"/>
-                <a:ea typeface="Consolas" pitchFamily="34" charset="-122"/>
-                <a:cs typeface="Consolas" pitchFamily="34" charset="-120"/>
-              </a:rPr>
-              <a:t>git commit -m "Stage 1 memo"</a:t>
-            </a:r>
-            <a:endParaRPr lang="en-US" sz="1000" dirty="0"/>
-          </a:p>
-        </p:txBody>
-      </p:sp>
-      <p:sp>
-        <p:nvSpPr>
-          <p:cNvPr id="20" name="Text 18"/>
-          <p:cNvSpPr/>
-          <p:nvPr/>
-        </p:nvSpPr>
-        <p:spPr>
-          <a:xfrm>
-            <a:off x="3611880" y="2971800"/>
-            <a:ext cx="2194560" cy="1005840"/>
-          </a:xfrm>
-          <a:prstGeom prst="rect">
-            <a:avLst/>
-          </a:prstGeom>
-          <a:noFill/>
-          <a:ln/>
-        </p:spPr>
-        <p:txBody>
-          <a:bodyPr wrap="square" lIns="0" tIns="0" rIns="0" bIns="0" rtlCol="0" anchor="t"/>
-          <a:lstStyle/>
-          <a:p>
-            <a:pPr marL="0" indent="0">
-              <a:lnSpc>
-                <a:spcPct val="140000"/>
-              </a:lnSpc>
-              <a:buNone/>
-            </a:pPr>
-            <a:r>
-              <a:rPr lang="en-US" sz="1100" dirty="0">
-                <a:solidFill>
-                  <a:srgbClr val="5A6B7A"/>
-                </a:solidFill>
-                <a:latin typeface="Open Sans" pitchFamily="34" charset="0"/>
-                <a:ea typeface="Open Sans" pitchFamily="34" charset="-122"/>
-                <a:cs typeface="Open Sans" pitchFamily="34" charset="-120"/>
-              </a:rPr>
-              <a:t>Creates a permanent snapshot with a descriptive message. This is your save point.</a:t>
-            </a:r>
-            <a:endParaRPr lang="en-US" sz="1100" dirty="0"/>
-          </a:p>
-        </p:txBody>
-      </p:sp>
-      <p:sp>
-        <p:nvSpPr>
-          <p:cNvPr id="21" name="Shape 19"/>
-          <p:cNvSpPr/>
-          <p:nvPr/>
-        </p:nvSpPr>
-        <p:spPr>
-          <a:xfrm>
-            <a:off x="6217920" y="1554480"/>
-            <a:ext cx="2468880" cy="2651760"/>
-          </a:xfrm>
-          <a:prstGeom prst="rect">
-            <a:avLst/>
-          </a:prstGeom>
-          <a:solidFill>
-            <a:srgbClr val="FFFFFF"/>
-          </a:solidFill>
-          <a:ln/>
-          <a:effectLst>
-            <a:outerShdw blurRad="50800" dist="25400" dir="8100000" algn="bl" rotWithShape="0">
-              <a:srgbClr val="000000">
-                <a:alpha val="6000"/>
-              </a:srgbClr>
-            </a:outerShdw>
-          </a:effectLst>
-        </p:spPr>
-        <p:txBody>
-          <a:bodyPr/>
-          <a:lstStyle/>
-          <a:p>
-            <a:endParaRPr lang="en-US"/>
-          </a:p>
-        </p:txBody>
-      </p:sp>
-      <p:sp>
-        <p:nvSpPr>
-          <p:cNvPr id="22" name="Shape 20"/>
-          <p:cNvSpPr/>
-          <p:nvPr/>
-        </p:nvSpPr>
-        <p:spPr>
-          <a:xfrm>
-            <a:off x="7178040" y="1691640"/>
-            <a:ext cx="365760" cy="365760"/>
-          </a:xfrm>
-          <a:prstGeom prst="line">
-            <a:avLst/>
-          </a:prstGeom>
-          <a:solidFill>
-            <a:srgbClr val="B8975C"/>
-          </a:solidFill>
-          <a:ln/>
-        </p:spPr>
-        <p:txBody>
-          <a:bodyPr/>
-          <a:lstStyle/>
-          <a:p>
-            <a:endParaRPr lang="en-US"/>
-          </a:p>
-        </p:txBody>
-      </p:sp>
-      <p:sp>
-        <p:nvSpPr>
-          <p:cNvPr id="23" name="Text 21"/>
-          <p:cNvSpPr/>
-          <p:nvPr/>
-        </p:nvSpPr>
-        <p:spPr>
-          <a:xfrm>
-            <a:off x="7178040" y="1691640"/>
-            <a:ext cx="365760" cy="365760"/>
-          </a:xfrm>
-          <a:prstGeom prst="rect">
-            <a:avLst/>
-          </a:prstGeom>
-          <a:noFill/>
-          <a:ln/>
-        </p:spPr>
-        <p:txBody>
-          <a:bodyPr wrap="square" lIns="0" tIns="0" rIns="0" bIns="0" rtlCol="0" anchor="ctr"/>
-          <a:lstStyle/>
-          <a:p>
-            <a:pPr marL="0" indent="0" algn="ctr">
-              <a:buNone/>
-            </a:pPr>
-            <a:r>
-              <a:rPr lang="en-US" sz="1400" b="1" dirty="0">
-                <a:solidFill>
-                  <a:srgbClr val="FFFFFF"/>
-                </a:solidFill>
-                <a:latin typeface="Open Sans" pitchFamily="34" charset="0"/>
-                <a:ea typeface="Open Sans" pitchFamily="34" charset="-122"/>
-                <a:cs typeface="Open Sans" pitchFamily="34" charset="-120"/>
-              </a:rPr>
-              <a:t>3</a:t>
-            </a:r>
-            <a:endParaRPr lang="en-US" sz="1400" dirty="0"/>
-          </a:p>
-        </p:txBody>
-      </p:sp>
-      <p:sp>
-        <p:nvSpPr>
-          <p:cNvPr id="24" name="Text 22"/>
-          <p:cNvSpPr/>
-          <p:nvPr/>
-        </p:nvSpPr>
-        <p:spPr>
-          <a:xfrm>
-            <a:off x="6355080" y="2148840"/>
-            <a:ext cx="2194560" cy="274320"/>
-          </a:xfrm>
-          <a:prstGeom prst="rect">
-            <a:avLst/>
-          </a:prstGeom>
-          <a:noFill/>
-          <a:ln/>
-        </p:spPr>
-        <p:txBody>
-          <a:bodyPr wrap="square" lIns="0" tIns="0" rIns="0" bIns="0" rtlCol="0" anchor="ctr"/>
-          <a:lstStyle/>
-          <a:p>
-            <a:pPr marL="0" indent="0" algn="ctr">
-              <a:buNone/>
-            </a:pPr>
-            <a:r>
-              <a:rPr lang="en-US" sz="1500" b="1" dirty="0">
-                <a:solidFill>
-                  <a:srgbClr val="1E2530"/>
-                </a:solidFill>
-                <a:latin typeface="Open Sans" pitchFamily="34" charset="0"/>
-                <a:ea typeface="Open Sans" pitchFamily="34" charset="-122"/>
-                <a:cs typeface="Open Sans" pitchFamily="34" charset="-120"/>
-              </a:rPr>
-              <a:t>Push</a:t>
-            </a:r>
-            <a:endParaRPr lang="en-US" sz="1500" dirty="0"/>
-          </a:p>
-        </p:txBody>
-      </p:sp>
-      <p:sp>
-        <p:nvSpPr>
-          <p:cNvPr id="25" name="Text 23"/>
-          <p:cNvSpPr/>
-          <p:nvPr/>
-        </p:nvSpPr>
-        <p:spPr>
-          <a:xfrm>
-            <a:off x="6355080" y="2514600"/>
-            <a:ext cx="2194560" cy="365760"/>
-          </a:xfrm>
-          <a:prstGeom prst="rect">
-            <a:avLst/>
-          </a:prstGeom>
-          <a:solidFill>
-            <a:srgbClr val="36454F"/>
-          </a:solidFill>
-          <a:ln/>
-        </p:spPr>
-        <p:txBody>
-          <a:bodyPr wrap="square" lIns="0" tIns="0" rIns="0" bIns="0" rtlCol="0" anchor="ctr"/>
-          <a:lstStyle/>
-          <a:p>
-            <a:pPr marL="0" indent="0" algn="ctr">
-              <a:buNone/>
-            </a:pPr>
-            <a:r>
-              <a:rPr lang="en-US" sz="1000" dirty="0">
-                <a:solidFill>
-                  <a:srgbClr val="B8975C"/>
-                </a:solidFill>
-                <a:latin typeface="Consolas" pitchFamily="34" charset="0"/>
-                <a:ea typeface="Consolas" pitchFamily="34" charset="-122"/>
-                <a:cs typeface="Consolas" pitchFamily="34" charset="-120"/>
-              </a:rPr>
-              <a:t>git push</a:t>
-            </a:r>
-            <a:endParaRPr lang="en-US" sz="1000" dirty="0"/>
-          </a:p>
-        </p:txBody>
-      </p:sp>
-      <p:sp>
-        <p:nvSpPr>
-          <p:cNvPr id="26" name="Text 24"/>
-          <p:cNvSpPr/>
-          <p:nvPr/>
-        </p:nvSpPr>
-        <p:spPr>
-          <a:xfrm>
-            <a:off x="6355080" y="2971800"/>
-            <a:ext cx="2194560" cy="1005840"/>
-          </a:xfrm>
-          <a:prstGeom prst="rect">
-            <a:avLst/>
-          </a:prstGeom>
-          <a:noFill/>
-          <a:ln/>
-        </p:spPr>
-        <p:txBody>
-          <a:bodyPr wrap="square" lIns="0" tIns="0" rIns="0" bIns="0" rtlCol="0" anchor="t"/>
-          <a:lstStyle/>
-          <a:p>
-            <a:pPr marL="0" indent="0">
-              <a:lnSpc>
-                <a:spcPct val="140000"/>
-              </a:lnSpc>
-              <a:buNone/>
-            </a:pPr>
-            <a:r>
-              <a:rPr lang="en-US" sz="1100" dirty="0">
-                <a:solidFill>
-                  <a:srgbClr val="5A6B7A"/>
-                </a:solidFill>
-                <a:latin typeface="Open Sans" pitchFamily="34" charset="0"/>
-                <a:ea typeface="Open Sans" pitchFamily="34" charset="-122"/>
-                <a:cs typeface="Open Sans" pitchFamily="34" charset="-120"/>
-              </a:rPr>
-              <a:t>Uploads your commits to GitHub so they are visible online and to your instructor.</a:t>
-            </a:r>
-            <a:endParaRPr lang="en-US" sz="1100" dirty="0"/>
-          </a:p>
-        </p:txBody>
-      </p:sp>
-      <p:sp>
-        <p:nvSpPr>
-          <p:cNvPr id="27" name="Shape 25"/>
-          <p:cNvSpPr/>
-          <p:nvPr/>
-        </p:nvSpPr>
-        <p:spPr>
-          <a:xfrm>
-            <a:off x="731520" y="4315968"/>
-            <a:ext cx="7680960" cy="45720"/>
-          </a:xfrm>
-          <a:prstGeom prst="rect">
-            <a:avLst/>
-          </a:prstGeom>
-          <a:solidFill>
-            <a:srgbClr val="B8975C"/>
-          </a:solidFill>
-          <a:ln/>
-        </p:spPr>
-        <p:txBody>
-          <a:bodyPr/>
-          <a:lstStyle/>
-          <a:p>
-            <a:endParaRPr lang="en-US"/>
-          </a:p>
-        </p:txBody>
-      </p:sp>
-    </p:spTree>
-  </p:cSld>
-  <p:clrMapOvr>
-    <a:masterClrMapping/>
-  </p:clrMapOvr>
-</p:sld>
-</file>
-
-<file path=ppt/slides/slide7.xml><?xml version="1.0" encoding="utf-8"?>
-<p:sld xmlns:a="http://schemas.openxmlformats.org/drawingml/2006/main" xmlns:r="http://schemas.openxmlformats.org/officeDocument/2006/relationships" xmlns:p="http://schemas.openxmlformats.org/presentationml/2006/main">
-  <p:cSld name="Slide 7">
-    <p:bg>
-      <p:bgPr>
-        <a:solidFill>
-          <a:srgbClr val="FAF9F7"/>
-        </a:solidFill>
-        <a:effectLst/>
-      </p:bgPr>
-    </p:bg>
-    <p:spTree>
-      <p:nvGrpSpPr>
-        <p:cNvPr id="1" name=""/>
-        <p:cNvGrpSpPr/>
-        <p:nvPr/>
-      </p:nvGrpSpPr>
-      <p:grpSpPr>
-        <a:xfrm>
-          <a:off x="0" y="0"/>
-          <a:ext cx="0" cy="0"/>
-          <a:chOff x="0" y="0"/>
-          <a:chExt cx="0" cy="0"/>
-        </a:xfrm>
-      </p:grpSpPr>
-      <p:sp>
-        <p:nvSpPr>
-          <p:cNvPr id="2" name="Shape 0"/>
-          <p:cNvSpPr/>
-          <p:nvPr/>
-        </p:nvSpPr>
-        <p:spPr>
-          <a:xfrm>
-            <a:off x="0" y="0"/>
-            <a:ext cx="9144000" cy="36576"/>
-          </a:xfrm>
-          <a:prstGeom prst="rect">
-            <a:avLst/>
-          </a:prstGeom>
-          <a:solidFill>
-            <a:srgbClr val="B8975C"/>
-          </a:solidFill>
-          <a:ln/>
-        </p:spPr>
-        <p:txBody>
-          <a:bodyPr/>
-          <a:lstStyle/>
-          <a:p>
-            <a:endParaRPr lang="en-US"/>
-          </a:p>
-        </p:txBody>
-      </p:sp>
-      <p:sp>
-        <p:nvSpPr>
-          <p:cNvPr id="3" name="Shape 1"/>
-          <p:cNvSpPr/>
-          <p:nvPr/>
-        </p:nvSpPr>
-        <p:spPr>
-          <a:xfrm>
-            <a:off x="0" y="4709160"/>
-            <a:ext cx="9144000" cy="434340"/>
-          </a:xfrm>
-          <a:prstGeom prst="rect">
-            <a:avLst/>
-          </a:prstGeom>
-          <a:solidFill>
-            <a:srgbClr val="36454F"/>
-          </a:solidFill>
-          <a:ln/>
-        </p:spPr>
-        <p:txBody>
-          <a:bodyPr/>
-          <a:lstStyle/>
-          <a:p>
-            <a:endParaRPr lang="en-US"/>
-          </a:p>
-        </p:txBody>
-      </p:sp>
-      <p:sp>
-        <p:nvSpPr>
-          <p:cNvPr id="4" name="Text 2"/>
-          <p:cNvSpPr/>
-          <p:nvPr/>
-        </p:nvSpPr>
-        <p:spPr>
-          <a:xfrm>
-            <a:off x="457200" y="4754880"/>
-            <a:ext cx="8229600" cy="320040"/>
-          </a:xfrm>
-          <a:prstGeom prst="rect">
-            <a:avLst/>
-          </a:prstGeom>
-          <a:noFill/>
-          <a:ln/>
-        </p:spPr>
-        <p:txBody>
-          <a:bodyPr wrap="square" rtlCol="0" anchor="ctr"/>
-          <a:lstStyle/>
-          <a:p>
-            <a:pPr marL="0" indent="0" algn="ctr">
-              <a:buNone/>
-            </a:pPr>
-            <a:r>
-              <a:rPr lang="en-US" sz="900" dirty="0">
-                <a:solidFill>
-                  <a:srgbClr val="8A9BAD"/>
-                </a:solidFill>
-                <a:latin typeface="Open Sans" pitchFamily="34" charset="0"/>
-                <a:ea typeface="Open Sans" pitchFamily="34" charset="-122"/>
-                <a:cs typeface="Open Sans" pitchFamily="34" charset="-120"/>
-              </a:rPr>
-              <a:t>Stauffer  |  Appendix: GitHub &amp; AI Setup Guide  |  Shidler College of Business</a:t>
-            </a:r>
-            <a:endParaRPr lang="en-US" sz="900" dirty="0"/>
-          </a:p>
-        </p:txBody>
-      </p:sp>
-      <p:sp>
-        <p:nvSpPr>
-          <p:cNvPr id="5" name="Text 3"/>
-          <p:cNvSpPr/>
-          <p:nvPr/>
-        </p:nvSpPr>
-        <p:spPr>
-          <a:xfrm>
-            <a:off x="731520" y="320040"/>
-            <a:ext cx="7680960" cy="457200"/>
-          </a:xfrm>
-          <a:prstGeom prst="rect">
-            <a:avLst/>
-          </a:prstGeom>
-          <a:noFill/>
-          <a:ln/>
-        </p:spPr>
-        <p:txBody>
-          <a:bodyPr wrap="square" lIns="0" tIns="0" rIns="0" bIns="0" rtlCol="0" anchor="ctr"/>
-          <a:lstStyle/>
-          <a:p>
-            <a:pPr marL="0" indent="0">
-              <a:buNone/>
-            </a:pPr>
-            <a:r>
-              <a:rPr lang="en-US" sz="2800" b="1" dirty="0">
-                <a:solidFill>
-                  <a:srgbClr val="1E2530"/>
-                </a:solidFill>
-                <a:latin typeface="Open Sans" pitchFamily="34" charset="0"/>
-                <a:ea typeface="Open Sans" pitchFamily="34" charset="-122"/>
-                <a:cs typeface="Open Sans" pitchFamily="34" charset="-120"/>
-              </a:rPr>
-              <a:t>Prefer a Visual Interface? Use GitHub Desktop</a:t>
-            </a:r>
-            <a:endParaRPr lang="en-US" sz="2800" dirty="0"/>
-          </a:p>
-        </p:txBody>
-      </p:sp>
-      <p:sp>
-        <p:nvSpPr>
-          <p:cNvPr id="6" name="Text 4"/>
-          <p:cNvSpPr/>
-          <p:nvPr/>
-        </p:nvSpPr>
-        <p:spPr>
-          <a:xfrm>
-            <a:off x="731520" y="822960"/>
-            <a:ext cx="7680960" cy="457200"/>
-          </a:xfrm>
-          <a:prstGeom prst="rect">
-            <a:avLst/>
-          </a:prstGeom>
-          <a:noFill/>
-          <a:ln/>
-        </p:spPr>
-        <p:txBody>
-          <a:bodyPr wrap="square" lIns="0" tIns="0" rIns="0" bIns="0" rtlCol="0" anchor="ctr"/>
-          <a:lstStyle/>
-          <a:p>
-            <a:pPr marL="0" indent="0">
-              <a:lnSpc>
-                <a:spcPct val="130000"/>
-              </a:lnSpc>
-              <a:buNone/>
-            </a:pPr>
-            <a:r>
-              <a:rPr lang="en-US" sz="1200" dirty="0">
-                <a:solidFill>
-                  <a:srgbClr val="5A6B7A"/>
-                </a:solidFill>
-                <a:latin typeface="Open Sans" pitchFamily="34" charset="0"/>
-                <a:ea typeface="Open Sans" pitchFamily="34" charset="-122"/>
-                <a:cs typeface="Open Sans" pitchFamily="34" charset="-120"/>
-              </a:rPr>
-              <a:t>GitHub Desktop is a free app that does the same thing as the command line but with buttons instead of typing. Either approach is fine for this course.</a:t>
-            </a:r>
-            <a:endParaRPr lang="en-US" sz="1200" dirty="0"/>
-          </a:p>
-        </p:txBody>
-      </p:sp>
-      <p:sp>
-        <p:nvSpPr>
-          <p:cNvPr id="7" name="Shape 5"/>
-          <p:cNvSpPr/>
-          <p:nvPr/>
-        </p:nvSpPr>
-        <p:spPr>
-          <a:xfrm>
-            <a:off x="731520" y="1463040"/>
-            <a:ext cx="3840480" cy="3017520"/>
-          </a:xfrm>
-          <a:prstGeom prst="rect">
-            <a:avLst/>
-          </a:prstGeom>
-          <a:solidFill>
-            <a:srgbClr val="FFFFFF"/>
-          </a:solidFill>
-          <a:ln/>
-          <a:effectLst>
-            <a:outerShdw blurRad="50800" dist="25400" dir="8100000" algn="bl" rotWithShape="0">
-              <a:srgbClr val="000000">
-                <a:alpha val="6000"/>
-              </a:srgbClr>
-            </a:outerShdw>
-          </a:effectLst>
-        </p:spPr>
-        <p:txBody>
-          <a:bodyPr/>
-          <a:lstStyle/>
-          <a:p>
-            <a:endParaRPr lang="en-US"/>
-          </a:p>
-        </p:txBody>
-      </p:sp>
-      <p:sp>
-        <p:nvSpPr>
-          <p:cNvPr id="8" name="Text 6"/>
-          <p:cNvSpPr/>
-          <p:nvPr/>
-        </p:nvSpPr>
-        <p:spPr>
-          <a:xfrm>
-            <a:off x="914400" y="1600200"/>
-            <a:ext cx="3474720" cy="320040"/>
-          </a:xfrm>
-          <a:prstGeom prst="rect">
-            <a:avLst/>
-          </a:prstGeom>
-          <a:noFill/>
-          <a:ln/>
-        </p:spPr>
-        <p:txBody>
-          <a:bodyPr wrap="square" lIns="0" tIns="0" rIns="0" bIns="0" rtlCol="0" anchor="ctr"/>
-          <a:lstStyle/>
-          <a:p>
-            <a:pPr marL="0" indent="0">
-              <a:buNone/>
-            </a:pPr>
-            <a:r>
-              <a:rPr lang="en-US" sz="1500" b="1" dirty="0">
-                <a:solidFill>
-                  <a:srgbClr val="1E2530"/>
-                </a:solidFill>
-                <a:latin typeface="Open Sans" pitchFamily="34" charset="0"/>
-                <a:ea typeface="Open Sans" pitchFamily="34" charset="-122"/>
-                <a:cs typeface="Open Sans" pitchFamily="34" charset="-120"/>
-              </a:rPr>
-              <a:t>Install &amp; Connect</a:t>
-            </a:r>
-            <a:endParaRPr lang="en-US" sz="1500" dirty="0"/>
-          </a:p>
-        </p:txBody>
-      </p:sp>
-      <p:sp>
-        <p:nvSpPr>
-          <p:cNvPr id="9" name="Shape 7"/>
-          <p:cNvSpPr/>
-          <p:nvPr/>
-        </p:nvSpPr>
-        <p:spPr>
-          <a:xfrm>
-            <a:off x="914400" y="2057400"/>
-            <a:ext cx="274320" cy="274320"/>
-          </a:xfrm>
-          <a:prstGeom prst="line">
-            <a:avLst/>
-          </a:prstGeom>
-          <a:solidFill>
-            <a:srgbClr val="B8975C"/>
-          </a:solidFill>
-          <a:ln/>
-        </p:spPr>
-        <p:txBody>
-          <a:bodyPr/>
-          <a:lstStyle/>
-          <a:p>
-            <a:endParaRPr lang="en-US"/>
-          </a:p>
-        </p:txBody>
-      </p:sp>
-      <p:sp>
-        <p:nvSpPr>
-          <p:cNvPr id="10" name="Text 8"/>
-          <p:cNvSpPr/>
-          <p:nvPr/>
-        </p:nvSpPr>
-        <p:spPr>
-          <a:xfrm>
-            <a:off x="914400" y="2057400"/>
-            <a:ext cx="274320" cy="274320"/>
-          </a:xfrm>
-          <a:prstGeom prst="rect">
-            <a:avLst/>
-          </a:prstGeom>
-          <a:noFill/>
-          <a:ln/>
-        </p:spPr>
-        <p:txBody>
-          <a:bodyPr wrap="square" lIns="0" tIns="0" rIns="0" bIns="0" rtlCol="0" anchor="ctr"/>
-          <a:lstStyle/>
-          <a:p>
-            <a:pPr marL="0" indent="0" algn="ctr">
-              <a:buNone/>
-            </a:pPr>
-            <a:r>
-              <a:rPr lang="en-US" sz="1400" b="1" dirty="0">
-                <a:solidFill>
-                  <a:srgbClr val="FFFFFF"/>
-                </a:solidFill>
-                <a:latin typeface="Open Sans" pitchFamily="34" charset="0"/>
-                <a:ea typeface="Open Sans" pitchFamily="34" charset="-122"/>
-                <a:cs typeface="Open Sans" pitchFamily="34" charset="-120"/>
-              </a:rPr>
-              <a:t>1</a:t>
-            </a:r>
-            <a:endParaRPr lang="en-US" sz="1400" dirty="0"/>
-          </a:p>
-        </p:txBody>
-      </p:sp>
-      <p:sp>
-        <p:nvSpPr>
-          <p:cNvPr id="11" name="Text 9"/>
-          <p:cNvSpPr/>
-          <p:nvPr/>
-        </p:nvSpPr>
-        <p:spPr>
-          <a:xfrm>
-            <a:off x="1325880" y="2057400"/>
-            <a:ext cx="3017520" cy="274320"/>
-          </a:xfrm>
-          <a:prstGeom prst="rect">
-            <a:avLst/>
-          </a:prstGeom>
-          <a:noFill/>
-          <a:ln/>
-        </p:spPr>
-        <p:txBody>
-          <a:bodyPr wrap="square" lIns="0" tIns="0" rIns="0" bIns="0" rtlCol="0" anchor="ctr"/>
-          <a:lstStyle/>
-          <a:p>
-            <a:pPr marL="0" indent="0">
-              <a:buNone/>
-            </a:pPr>
-            <a:r>
-              <a:rPr lang="en-US" sz="1100" dirty="0">
-                <a:solidFill>
-                  <a:srgbClr val="5A6B7A"/>
-                </a:solidFill>
-                <a:latin typeface="Open Sans" pitchFamily="34" charset="0"/>
-                <a:ea typeface="Open Sans" pitchFamily="34" charset="-122"/>
-                <a:cs typeface="Open Sans" pitchFamily="34" charset="-120"/>
-              </a:rPr>
-              <a:t>Download from desktop.github.com</a:t>
-            </a:r>
-            <a:endParaRPr lang="en-US" sz="1100" dirty="0"/>
-          </a:p>
-        </p:txBody>
-      </p:sp>
-      <p:sp>
-        <p:nvSpPr>
-          <p:cNvPr id="12" name="Shape 10"/>
-          <p:cNvSpPr/>
-          <p:nvPr/>
-        </p:nvSpPr>
-        <p:spPr>
-          <a:xfrm>
-            <a:off x="914400" y="2560320"/>
-            <a:ext cx="274320" cy="274320"/>
-          </a:xfrm>
-          <a:prstGeom prst="line">
-            <a:avLst/>
-          </a:prstGeom>
-          <a:solidFill>
-            <a:srgbClr val="B8975C"/>
-          </a:solidFill>
-          <a:ln/>
-        </p:spPr>
-        <p:txBody>
-          <a:bodyPr/>
-          <a:lstStyle/>
-          <a:p>
-            <a:endParaRPr lang="en-US"/>
-          </a:p>
-        </p:txBody>
-      </p:sp>
-      <p:sp>
-        <p:nvSpPr>
-          <p:cNvPr id="13" name="Text 11"/>
-          <p:cNvSpPr/>
-          <p:nvPr/>
-        </p:nvSpPr>
-        <p:spPr>
-          <a:xfrm>
-            <a:off x="914400" y="2560320"/>
-            <a:ext cx="274320" cy="274320"/>
-          </a:xfrm>
-          <a:prstGeom prst="rect">
-            <a:avLst/>
-          </a:prstGeom>
-          <a:noFill/>
-          <a:ln/>
-        </p:spPr>
-        <p:txBody>
-          <a:bodyPr wrap="square" lIns="0" tIns="0" rIns="0" bIns="0" rtlCol="0" anchor="ctr"/>
-          <a:lstStyle/>
-          <a:p>
-            <a:pPr marL="0" indent="0" algn="ctr">
-              <a:buNone/>
-            </a:pPr>
-            <a:r>
-              <a:rPr lang="en-US" sz="1400" b="1" dirty="0">
-                <a:solidFill>
-                  <a:srgbClr val="FFFFFF"/>
-                </a:solidFill>
-                <a:latin typeface="Open Sans" pitchFamily="34" charset="0"/>
-                <a:ea typeface="Open Sans" pitchFamily="34" charset="-122"/>
-                <a:cs typeface="Open Sans" pitchFamily="34" charset="-120"/>
-              </a:rPr>
-              <a:t>2</a:t>
-            </a:r>
-            <a:endParaRPr lang="en-US" sz="1400" dirty="0"/>
-          </a:p>
-        </p:txBody>
-      </p:sp>
-      <p:sp>
-        <p:nvSpPr>
-          <p:cNvPr id="14" name="Text 12"/>
-          <p:cNvSpPr/>
-          <p:nvPr/>
-        </p:nvSpPr>
-        <p:spPr>
-          <a:xfrm>
-            <a:off x="1325880" y="2560320"/>
-            <a:ext cx="3017520" cy="274320"/>
-          </a:xfrm>
-          <a:prstGeom prst="rect">
-            <a:avLst/>
-          </a:prstGeom>
-          <a:noFill/>
-          <a:ln/>
-        </p:spPr>
-        <p:txBody>
-          <a:bodyPr wrap="square" lIns="0" tIns="0" rIns="0" bIns="0" rtlCol="0" anchor="ctr"/>
-          <a:lstStyle/>
-          <a:p>
-            <a:pPr marL="0" indent="0">
-              <a:buNone/>
-            </a:pPr>
-            <a:r>
-              <a:rPr lang="en-US" sz="1100" dirty="0">
-                <a:solidFill>
-                  <a:srgbClr val="5A6B7A"/>
-                </a:solidFill>
-                <a:latin typeface="Open Sans" pitchFamily="34" charset="0"/>
-                <a:ea typeface="Open Sans" pitchFamily="34" charset="-122"/>
-                <a:cs typeface="Open Sans" pitchFamily="34" charset="-120"/>
-              </a:rPr>
-              <a:t>Sign in with your GitHub account</a:t>
-            </a:r>
-            <a:endParaRPr lang="en-US" sz="1100" dirty="0"/>
-          </a:p>
-        </p:txBody>
-      </p:sp>
-      <p:sp>
-        <p:nvSpPr>
-          <p:cNvPr id="15" name="Shape 13"/>
-          <p:cNvSpPr/>
-          <p:nvPr/>
-        </p:nvSpPr>
-        <p:spPr>
-          <a:xfrm>
-            <a:off x="914400" y="3063240"/>
-            <a:ext cx="274320" cy="274320"/>
-          </a:xfrm>
-          <a:prstGeom prst="line">
-            <a:avLst/>
-          </a:prstGeom>
-          <a:solidFill>
-            <a:srgbClr val="B8975C"/>
-          </a:solidFill>
-          <a:ln/>
-        </p:spPr>
-        <p:txBody>
-          <a:bodyPr/>
-          <a:lstStyle/>
-          <a:p>
-            <a:endParaRPr lang="en-US"/>
-          </a:p>
-        </p:txBody>
-      </p:sp>
-      <p:sp>
-        <p:nvSpPr>
-          <p:cNvPr id="16" name="Text 14"/>
-          <p:cNvSpPr/>
-          <p:nvPr/>
-        </p:nvSpPr>
-        <p:spPr>
-          <a:xfrm>
-            <a:off x="914400" y="3063240"/>
-            <a:ext cx="274320" cy="274320"/>
-          </a:xfrm>
-          <a:prstGeom prst="rect">
-            <a:avLst/>
-          </a:prstGeom>
-          <a:noFill/>
-          <a:ln/>
-        </p:spPr>
-        <p:txBody>
-          <a:bodyPr wrap="square" lIns="0" tIns="0" rIns="0" bIns="0" rtlCol="0" anchor="ctr"/>
-          <a:lstStyle/>
-          <a:p>
-            <a:pPr marL="0" indent="0" algn="ctr">
-              <a:buNone/>
-            </a:pPr>
-            <a:r>
-              <a:rPr lang="en-US" sz="1400" b="1" dirty="0">
-                <a:solidFill>
-                  <a:srgbClr val="FFFFFF"/>
-                </a:solidFill>
-                <a:latin typeface="Open Sans" pitchFamily="34" charset="0"/>
-                <a:ea typeface="Open Sans" pitchFamily="34" charset="-122"/>
-                <a:cs typeface="Open Sans" pitchFamily="34" charset="-120"/>
-              </a:rPr>
-              <a:t>3</a:t>
-            </a:r>
-            <a:endParaRPr lang="en-US" sz="1400" dirty="0"/>
-          </a:p>
-        </p:txBody>
-      </p:sp>
-      <p:sp>
-        <p:nvSpPr>
-          <p:cNvPr id="17" name="Text 15"/>
-          <p:cNvSpPr/>
-          <p:nvPr/>
-        </p:nvSpPr>
-        <p:spPr>
-          <a:xfrm>
-            <a:off x="1325880" y="3063240"/>
-            <a:ext cx="3017520" cy="274320"/>
-          </a:xfrm>
-          <a:prstGeom prst="rect">
-            <a:avLst/>
-          </a:prstGeom>
-          <a:noFill/>
-          <a:ln/>
-        </p:spPr>
-        <p:txBody>
-          <a:bodyPr wrap="square" lIns="0" tIns="0" rIns="0" bIns="0" rtlCol="0" anchor="ctr"/>
-          <a:lstStyle/>
-          <a:p>
-            <a:pPr marL="0" indent="0">
-              <a:buNone/>
-            </a:pPr>
-            <a:r>
-              <a:rPr lang="en-US" sz="1100" dirty="0">
-                <a:solidFill>
-                  <a:srgbClr val="5A6B7A"/>
-                </a:solidFill>
-                <a:latin typeface="Open Sans" pitchFamily="34" charset="0"/>
-                <a:ea typeface="Open Sans" pitchFamily="34" charset="-122"/>
-                <a:cs typeface="Open Sans" pitchFamily="34" charset="-120"/>
-              </a:rPr>
-              <a:t>File → Clone Repository → paste URL</a:t>
-            </a:r>
-            <a:endParaRPr lang="en-US" sz="1100" dirty="0"/>
-          </a:p>
-        </p:txBody>
-      </p:sp>
-      <p:sp>
-        <p:nvSpPr>
-          <p:cNvPr id="18" name="Shape 16"/>
-          <p:cNvSpPr/>
-          <p:nvPr/>
-        </p:nvSpPr>
-        <p:spPr>
-          <a:xfrm>
-            <a:off x="914400" y="3566160"/>
-            <a:ext cx="274320" cy="274320"/>
-          </a:xfrm>
-          <a:prstGeom prst="line">
-            <a:avLst/>
-          </a:prstGeom>
-          <a:solidFill>
-            <a:srgbClr val="B8975C"/>
-          </a:solidFill>
-          <a:ln/>
-        </p:spPr>
-        <p:txBody>
-          <a:bodyPr/>
-          <a:lstStyle/>
-          <a:p>
-            <a:endParaRPr lang="en-US"/>
-          </a:p>
-        </p:txBody>
-      </p:sp>
-      <p:sp>
-        <p:nvSpPr>
-          <p:cNvPr id="19" name="Text 17"/>
-          <p:cNvSpPr/>
-          <p:nvPr/>
-        </p:nvSpPr>
-        <p:spPr>
-          <a:xfrm>
-            <a:off x="914400" y="3566160"/>
-            <a:ext cx="274320" cy="274320"/>
-          </a:xfrm>
-          <a:prstGeom prst="rect">
-            <a:avLst/>
-          </a:prstGeom>
-          <a:noFill/>
-          <a:ln/>
-        </p:spPr>
-        <p:txBody>
-          <a:bodyPr wrap="square" lIns="0" tIns="0" rIns="0" bIns="0" rtlCol="0" anchor="ctr"/>
-          <a:lstStyle/>
-          <a:p>
-            <a:pPr marL="0" indent="0" algn="ctr">
-              <a:buNone/>
-            </a:pPr>
-            <a:r>
-              <a:rPr lang="en-US" sz="1400" b="1" dirty="0">
-                <a:solidFill>
-                  <a:srgbClr val="FFFFFF"/>
-                </a:solidFill>
-                <a:latin typeface="Open Sans" pitchFamily="34" charset="0"/>
-                <a:ea typeface="Open Sans" pitchFamily="34" charset="-122"/>
-                <a:cs typeface="Open Sans" pitchFamily="34" charset="-120"/>
-              </a:rPr>
-              <a:t>4</a:t>
-            </a:r>
-            <a:endParaRPr lang="en-US" sz="1400" dirty="0"/>
-          </a:p>
-        </p:txBody>
-      </p:sp>
-      <p:sp>
-        <p:nvSpPr>
-          <p:cNvPr id="20" name="Text 18"/>
-          <p:cNvSpPr/>
-          <p:nvPr/>
-        </p:nvSpPr>
-        <p:spPr>
-          <a:xfrm>
-            <a:off x="1325880" y="3566160"/>
-            <a:ext cx="3017520" cy="274320"/>
-          </a:xfrm>
-          <a:prstGeom prst="rect">
-            <a:avLst/>
-          </a:prstGeom>
-          <a:noFill/>
-          <a:ln/>
-        </p:spPr>
-        <p:txBody>
-          <a:bodyPr wrap="square" lIns="0" tIns="0" rIns="0" bIns="0" rtlCol="0" anchor="ctr"/>
-          <a:lstStyle/>
-          <a:p>
-            <a:pPr marL="0" indent="0">
-              <a:buNone/>
-            </a:pPr>
-            <a:r>
-              <a:rPr lang="en-US" sz="1100" dirty="0">
-                <a:solidFill>
-                  <a:srgbClr val="5A6B7A"/>
-                </a:solidFill>
-                <a:latin typeface="Open Sans" pitchFamily="34" charset="0"/>
-                <a:ea typeface="Open Sans" pitchFamily="34" charset="-122"/>
-                <a:cs typeface="Open Sans" pitchFamily="34" charset="-120"/>
-              </a:rPr>
-              <a:t>Choose where to save on your computer</a:t>
-            </a:r>
-            <a:endParaRPr lang="en-US" sz="1100" dirty="0"/>
-          </a:p>
-        </p:txBody>
-      </p:sp>
-      <p:sp>
-        <p:nvSpPr>
-          <p:cNvPr id="21" name="Shape 19"/>
-          <p:cNvSpPr/>
-          <p:nvPr/>
-        </p:nvSpPr>
-        <p:spPr>
-          <a:xfrm>
-            <a:off x="4937760" y="1463040"/>
-            <a:ext cx="3474720" cy="3017520"/>
-          </a:xfrm>
-          <a:prstGeom prst="rect">
-            <a:avLst/>
-          </a:prstGeom>
-          <a:solidFill>
-            <a:srgbClr val="FFFFFF"/>
-          </a:solidFill>
-          <a:ln/>
-          <a:effectLst>
-            <a:outerShdw blurRad="50800" dist="25400" dir="8100000" algn="bl" rotWithShape="0">
-              <a:srgbClr val="000000">
-                <a:alpha val="6000"/>
-              </a:srgbClr>
-            </a:outerShdw>
-          </a:effectLst>
-        </p:spPr>
-        <p:txBody>
-          <a:bodyPr/>
-          <a:lstStyle/>
-          <a:p>
-            <a:endParaRPr lang="en-US"/>
-          </a:p>
-        </p:txBody>
-      </p:sp>
-      <p:sp>
-        <p:nvSpPr>
-          <p:cNvPr id="22" name="Text 20"/>
-          <p:cNvSpPr/>
-          <p:nvPr/>
-        </p:nvSpPr>
-        <p:spPr>
-          <a:xfrm>
-            <a:off x="5120640" y="1600200"/>
-            <a:ext cx="3108960" cy="320040"/>
-          </a:xfrm>
-          <a:prstGeom prst="rect">
-            <a:avLst/>
-          </a:prstGeom>
-          <a:noFill/>
-          <a:ln/>
-        </p:spPr>
-        <p:txBody>
-          <a:bodyPr wrap="square" lIns="0" tIns="0" rIns="0" bIns="0" rtlCol="0" anchor="ctr"/>
-          <a:lstStyle/>
-          <a:p>
-            <a:pPr marL="0" indent="0">
-              <a:buNone/>
-            </a:pPr>
-            <a:r>
-              <a:rPr lang="en-US" sz="1500" b="1" dirty="0">
-                <a:solidFill>
-                  <a:srgbClr val="1E2530"/>
-                </a:solidFill>
-                <a:latin typeface="Open Sans" pitchFamily="34" charset="0"/>
-                <a:ea typeface="Open Sans" pitchFamily="34" charset="-122"/>
-                <a:cs typeface="Open Sans" pitchFamily="34" charset="-120"/>
-              </a:rPr>
-              <a:t>Daily Workflow</a:t>
-            </a:r>
-            <a:endParaRPr lang="en-US" sz="1500" dirty="0"/>
-          </a:p>
-        </p:txBody>
-      </p:sp>
-      <p:sp>
-        <p:nvSpPr>
-          <p:cNvPr id="23" name="Shape 21"/>
-          <p:cNvSpPr/>
-          <p:nvPr/>
-        </p:nvSpPr>
-        <p:spPr>
-          <a:xfrm>
-            <a:off x="5120640" y="2057400"/>
-            <a:ext cx="274320" cy="274320"/>
-          </a:xfrm>
-          <a:prstGeom prst="line">
-            <a:avLst/>
-          </a:prstGeom>
-          <a:solidFill>
-            <a:srgbClr val="B8975C"/>
-          </a:solidFill>
-          <a:ln/>
-        </p:spPr>
-        <p:txBody>
-          <a:bodyPr/>
-          <a:lstStyle/>
-          <a:p>
-            <a:endParaRPr lang="en-US"/>
-          </a:p>
-        </p:txBody>
-      </p:sp>
-      <p:sp>
-        <p:nvSpPr>
-          <p:cNvPr id="24" name="Text 22"/>
-          <p:cNvSpPr/>
-          <p:nvPr/>
-        </p:nvSpPr>
-        <p:spPr>
-          <a:xfrm>
-            <a:off x="5120640" y="2057400"/>
-            <a:ext cx="274320" cy="274320"/>
-          </a:xfrm>
-          <a:prstGeom prst="rect">
-            <a:avLst/>
-          </a:prstGeom>
-          <a:noFill/>
-          <a:ln/>
-        </p:spPr>
-        <p:txBody>
-          <a:bodyPr wrap="square" lIns="0" tIns="0" rIns="0" bIns="0" rtlCol="0" anchor="ctr"/>
-          <a:lstStyle/>
-          <a:p>
-            <a:pPr marL="0" indent="0" algn="ctr">
-              <a:buNone/>
-            </a:pPr>
-            <a:r>
-              <a:rPr lang="en-US" sz="1400" b="1" dirty="0">
-                <a:solidFill>
-                  <a:srgbClr val="FFFFFF"/>
-                </a:solidFill>
-                <a:latin typeface="Open Sans" pitchFamily="34" charset="0"/>
-                <a:ea typeface="Open Sans" pitchFamily="34" charset="-122"/>
-                <a:cs typeface="Open Sans" pitchFamily="34" charset="-120"/>
-              </a:rPr>
-              <a:t>1</a:t>
-            </a:r>
-            <a:endParaRPr lang="en-US" sz="1400" dirty="0"/>
-          </a:p>
-        </p:txBody>
-      </p:sp>
-      <p:sp>
-        <p:nvSpPr>
-          <p:cNvPr id="25" name="Text 23"/>
-          <p:cNvSpPr/>
-          <p:nvPr/>
-        </p:nvSpPr>
-        <p:spPr>
-          <a:xfrm>
-            <a:off x="5532120" y="2057400"/>
-            <a:ext cx="2743200" cy="365760"/>
-          </a:xfrm>
-          <a:prstGeom prst="rect">
-            <a:avLst/>
-          </a:prstGeom>
-          <a:noFill/>
-          <a:ln/>
-        </p:spPr>
-        <p:txBody>
-          <a:bodyPr wrap="square" lIns="0" tIns="0" rIns="0" bIns="0" rtlCol="0" anchor="ctr"/>
-          <a:lstStyle/>
-          <a:p>
-            <a:pPr marL="0" indent="0">
-              <a:buNone/>
-            </a:pPr>
-            <a:r>
-              <a:rPr lang="en-US" sz="1100" b="1" dirty="0">
-                <a:solidFill>
-                  <a:srgbClr val="1E2530"/>
-                </a:solidFill>
-              </a:rPr>
-              <a:t>Changes tab  </a:t>
-            </a:r>
-            <a:r>
-              <a:rPr lang="en-US" sz="1100" dirty="0">
-                <a:solidFill>
-                  <a:srgbClr val="5A6B7A"/>
-                </a:solidFill>
-              </a:rPr>
-              <a:t>— shows modified files</a:t>
-            </a:r>
-            <a:endParaRPr lang="en-US" sz="1100" dirty="0"/>
-          </a:p>
-        </p:txBody>
-      </p:sp>
-      <p:sp>
-        <p:nvSpPr>
-          <p:cNvPr id="26" name="Shape 24"/>
-          <p:cNvSpPr/>
-          <p:nvPr/>
-        </p:nvSpPr>
-        <p:spPr>
-          <a:xfrm>
-            <a:off x="5120640" y="2560320"/>
-            <a:ext cx="274320" cy="274320"/>
-          </a:xfrm>
-          <a:prstGeom prst="line">
-            <a:avLst/>
-          </a:prstGeom>
-          <a:solidFill>
-            <a:srgbClr val="B8975C"/>
-          </a:solidFill>
-          <a:ln/>
-        </p:spPr>
-        <p:txBody>
-          <a:bodyPr/>
-          <a:lstStyle/>
-          <a:p>
-            <a:endParaRPr lang="en-US"/>
-          </a:p>
-        </p:txBody>
-      </p:sp>
-      <p:sp>
-        <p:nvSpPr>
-          <p:cNvPr id="27" name="Text 25"/>
-          <p:cNvSpPr/>
-          <p:nvPr/>
-        </p:nvSpPr>
-        <p:spPr>
-          <a:xfrm>
-            <a:off x="5120640" y="2560320"/>
-            <a:ext cx="274320" cy="274320"/>
-          </a:xfrm>
-          <a:prstGeom prst="rect">
-            <a:avLst/>
-          </a:prstGeom>
-          <a:noFill/>
-          <a:ln/>
-        </p:spPr>
-        <p:txBody>
-          <a:bodyPr wrap="square" lIns="0" tIns="0" rIns="0" bIns="0" rtlCol="0" anchor="ctr"/>
-          <a:lstStyle/>
-          <a:p>
-            <a:pPr marL="0" indent="0" algn="ctr">
-              <a:buNone/>
-            </a:pPr>
-            <a:r>
-              <a:rPr lang="en-US" sz="1400" b="1" dirty="0">
-                <a:solidFill>
-                  <a:srgbClr val="FFFFFF"/>
-                </a:solidFill>
-                <a:latin typeface="Open Sans" pitchFamily="34" charset="0"/>
-                <a:ea typeface="Open Sans" pitchFamily="34" charset="-122"/>
-                <a:cs typeface="Open Sans" pitchFamily="34" charset="-120"/>
-              </a:rPr>
-              <a:t>2</a:t>
-            </a:r>
-            <a:endParaRPr lang="en-US" sz="1400" dirty="0"/>
-          </a:p>
-        </p:txBody>
-      </p:sp>
-      <p:sp>
-        <p:nvSpPr>
-          <p:cNvPr id="28" name="Text 26"/>
-          <p:cNvSpPr/>
-          <p:nvPr/>
-        </p:nvSpPr>
-        <p:spPr>
-          <a:xfrm>
-            <a:off x="5532120" y="2560320"/>
-            <a:ext cx="2743200" cy="365760"/>
-          </a:xfrm>
-          <a:prstGeom prst="rect">
-            <a:avLst/>
-          </a:prstGeom>
-          <a:noFill/>
-          <a:ln/>
-        </p:spPr>
-        <p:txBody>
-          <a:bodyPr wrap="square" lIns="0" tIns="0" rIns="0" bIns="0" rtlCol="0" anchor="ctr"/>
-          <a:lstStyle/>
-          <a:p>
-            <a:pPr marL="0" indent="0">
-              <a:buNone/>
-            </a:pPr>
-            <a:r>
-              <a:rPr lang="en-US" sz="1100" b="1" dirty="0">
-                <a:solidFill>
-                  <a:srgbClr val="1E2530"/>
-                </a:solidFill>
-              </a:rPr>
-              <a:t>Summary box  </a:t>
-            </a:r>
-            <a:r>
-              <a:rPr lang="en-US" sz="1100" dirty="0">
-                <a:solidFill>
-                  <a:srgbClr val="5A6B7A"/>
-                </a:solidFill>
-              </a:rPr>
-              <a:t>— type your commit message (e.g., "Stage 2 Excel model")</a:t>
-            </a:r>
-            <a:endParaRPr lang="en-US" sz="1100" dirty="0"/>
-          </a:p>
-        </p:txBody>
-      </p:sp>
-      <p:sp>
-        <p:nvSpPr>
-          <p:cNvPr id="29" name="Shape 27"/>
-          <p:cNvSpPr/>
-          <p:nvPr/>
-        </p:nvSpPr>
-        <p:spPr>
-          <a:xfrm>
-            <a:off x="5120640" y="3063240"/>
-            <a:ext cx="274320" cy="274320"/>
-          </a:xfrm>
-          <a:prstGeom prst="line">
-            <a:avLst/>
-          </a:prstGeom>
-          <a:solidFill>
-            <a:srgbClr val="B8975C"/>
-          </a:solidFill>
-          <a:ln/>
-        </p:spPr>
-        <p:txBody>
-          <a:bodyPr/>
-          <a:lstStyle/>
-          <a:p>
-            <a:endParaRPr lang="en-US"/>
-          </a:p>
-        </p:txBody>
-      </p:sp>
-      <p:sp>
-        <p:nvSpPr>
-          <p:cNvPr id="30" name="Text 28"/>
-          <p:cNvSpPr/>
-          <p:nvPr/>
-        </p:nvSpPr>
-        <p:spPr>
-          <a:xfrm>
-            <a:off x="5120640" y="3063240"/>
-            <a:ext cx="274320" cy="274320"/>
-          </a:xfrm>
-          <a:prstGeom prst="rect">
-            <a:avLst/>
-          </a:prstGeom>
-          <a:noFill/>
-          <a:ln/>
-        </p:spPr>
-        <p:txBody>
-          <a:bodyPr wrap="square" lIns="0" tIns="0" rIns="0" bIns="0" rtlCol="0" anchor="ctr"/>
-          <a:lstStyle/>
-          <a:p>
-            <a:pPr marL="0" indent="0" algn="ctr">
-              <a:buNone/>
-            </a:pPr>
-            <a:r>
-              <a:rPr lang="en-US" sz="1400" b="1" dirty="0">
-                <a:solidFill>
-                  <a:srgbClr val="FFFFFF"/>
-                </a:solidFill>
-                <a:latin typeface="Open Sans" pitchFamily="34" charset="0"/>
-                <a:ea typeface="Open Sans" pitchFamily="34" charset="-122"/>
-                <a:cs typeface="Open Sans" pitchFamily="34" charset="-120"/>
-              </a:rPr>
-              <a:t>3</a:t>
-            </a:r>
-            <a:endParaRPr lang="en-US" sz="1400" dirty="0"/>
-          </a:p>
-        </p:txBody>
-      </p:sp>
-      <p:sp>
-        <p:nvSpPr>
-          <p:cNvPr id="31" name="Text 29"/>
-          <p:cNvSpPr/>
-          <p:nvPr/>
-        </p:nvSpPr>
-        <p:spPr>
-          <a:xfrm>
-            <a:off x="5532120" y="3063240"/>
-            <a:ext cx="2743200" cy="365760"/>
-          </a:xfrm>
-          <a:prstGeom prst="rect">
-            <a:avLst/>
-          </a:prstGeom>
-          <a:noFill/>
-          <a:ln/>
-        </p:spPr>
-        <p:txBody>
-          <a:bodyPr wrap="square" lIns="0" tIns="0" rIns="0" bIns="0" rtlCol="0" anchor="ctr"/>
-          <a:lstStyle/>
-          <a:p>
-            <a:pPr marL="0" indent="0">
-              <a:buNone/>
-            </a:pPr>
-            <a:r>
-              <a:rPr lang="en-US" sz="1100" b="1" dirty="0">
-                <a:solidFill>
-                  <a:srgbClr val="1E2530"/>
-                </a:solidFill>
-              </a:rPr>
-              <a:t>Commit button  </a:t>
-            </a:r>
-            <a:r>
-              <a:rPr lang="en-US" sz="1100" dirty="0">
-                <a:solidFill>
-                  <a:srgbClr val="5A6B7A"/>
-                </a:solidFill>
-              </a:rPr>
-              <a:t>— saves the snapshot locally</a:t>
-            </a:r>
-            <a:endParaRPr lang="en-US" sz="1100" dirty="0"/>
-          </a:p>
-        </p:txBody>
-      </p:sp>
-      <p:sp>
-        <p:nvSpPr>
-          <p:cNvPr id="32" name="Shape 30"/>
-          <p:cNvSpPr/>
-          <p:nvPr/>
-        </p:nvSpPr>
-        <p:spPr>
-          <a:xfrm>
-            <a:off x="5120640" y="3566160"/>
-            <a:ext cx="274320" cy="274320"/>
-          </a:xfrm>
-          <a:prstGeom prst="line">
-            <a:avLst/>
-          </a:prstGeom>
-          <a:solidFill>
-            <a:srgbClr val="B8975C"/>
-          </a:solidFill>
-          <a:ln/>
-        </p:spPr>
-        <p:txBody>
-          <a:bodyPr/>
-          <a:lstStyle/>
-          <a:p>
-            <a:endParaRPr lang="en-US"/>
-          </a:p>
-        </p:txBody>
-      </p:sp>
-      <p:sp>
-        <p:nvSpPr>
-          <p:cNvPr id="33" name="Text 31"/>
-          <p:cNvSpPr/>
-          <p:nvPr/>
-        </p:nvSpPr>
-        <p:spPr>
-          <a:xfrm>
-            <a:off x="5120640" y="3566160"/>
-            <a:ext cx="274320" cy="274320"/>
-          </a:xfrm>
-          <a:prstGeom prst="rect">
-            <a:avLst/>
-          </a:prstGeom>
-          <a:noFill/>
-          <a:ln/>
-        </p:spPr>
-        <p:txBody>
-          <a:bodyPr wrap="square" lIns="0" tIns="0" rIns="0" bIns="0" rtlCol="0" anchor="ctr"/>
-          <a:lstStyle/>
-          <a:p>
-            <a:pPr marL="0" indent="0" algn="ctr">
-              <a:buNone/>
-            </a:pPr>
-            <a:r>
-              <a:rPr lang="en-US" sz="1400" b="1" dirty="0">
-                <a:solidFill>
-                  <a:srgbClr val="FFFFFF"/>
-                </a:solidFill>
-                <a:latin typeface="Open Sans" pitchFamily="34" charset="0"/>
-                <a:ea typeface="Open Sans" pitchFamily="34" charset="-122"/>
-                <a:cs typeface="Open Sans" pitchFamily="34" charset="-120"/>
-              </a:rPr>
-              <a:t>4</a:t>
-            </a:r>
-            <a:endParaRPr lang="en-US" sz="1400" dirty="0"/>
-          </a:p>
-        </p:txBody>
-      </p:sp>
-      <p:sp>
-        <p:nvSpPr>
-          <p:cNvPr id="34" name="Text 32"/>
-          <p:cNvSpPr/>
-          <p:nvPr/>
-        </p:nvSpPr>
-        <p:spPr>
-          <a:xfrm>
-            <a:off x="5532120" y="3566160"/>
-            <a:ext cx="2743200" cy="365760"/>
-          </a:xfrm>
-          <a:prstGeom prst="rect">
-            <a:avLst/>
-          </a:prstGeom>
-          <a:noFill/>
-          <a:ln/>
-        </p:spPr>
-        <p:txBody>
-          <a:bodyPr wrap="square" lIns="0" tIns="0" rIns="0" bIns="0" rtlCol="0" anchor="ctr"/>
-          <a:lstStyle/>
-          <a:p>
-            <a:pPr marL="0" indent="0">
-              <a:buNone/>
-            </a:pPr>
-            <a:r>
-              <a:rPr lang="en-US" sz="1100" b="1" dirty="0">
-                <a:solidFill>
-                  <a:srgbClr val="1E2530"/>
-                </a:solidFill>
-              </a:rPr>
-              <a:t>Push Origin  </a:t>
-            </a:r>
-            <a:r>
-              <a:rPr lang="en-US" sz="1100" dirty="0">
-                <a:solidFill>
-                  <a:srgbClr val="5A6B7A"/>
-                </a:solidFill>
-              </a:rPr>
-              <a:t>— uploads to GitHub</a:t>
-            </a:r>
-            <a:endParaRPr lang="en-US" sz="1100" dirty="0"/>
-          </a:p>
-        </p:txBody>
-      </p:sp>
-    </p:spTree>
-  </p:cSld>
-  <p:clrMapOvr>
-    <a:masterClrMapping/>
-  </p:clrMapOvr>
-</p:sld>
-</file>
-
-<file path=ppt/slides/slide8.xml><?xml version="1.0" encoding="utf-8"?>
-<p:sld xmlns:a="http://schemas.openxmlformats.org/drawingml/2006/main" xmlns:r="http://schemas.openxmlformats.org/officeDocument/2006/relationships" xmlns:p="http://schemas.openxmlformats.org/presentationml/2006/main">
-  <p:cSld name="Slide 8">
-    <p:bg>
-      <p:bgPr>
-        <a:solidFill>
-          <a:srgbClr val="FAF9F7"/>
-        </a:solidFill>
-        <a:effectLst/>
-      </p:bgPr>
-    </p:bg>
-    <p:spTree>
-      <p:nvGrpSpPr>
-        <p:cNvPr id="1" name=""/>
-        <p:cNvGrpSpPr/>
-        <p:nvPr/>
-      </p:nvGrpSpPr>
-      <p:grpSpPr>
-        <a:xfrm>
-          <a:off x="0" y="0"/>
-          <a:ext cx="0" cy="0"/>
-          <a:chOff x="0" y="0"/>
-          <a:chExt cx="0" cy="0"/>
-        </a:xfrm>
-      </p:grpSpPr>
-      <p:sp>
-        <p:nvSpPr>
-          <p:cNvPr id="2" name="Shape 0"/>
-          <p:cNvSpPr/>
-          <p:nvPr/>
-        </p:nvSpPr>
-        <p:spPr>
-          <a:xfrm>
-            <a:off x="0" y="0"/>
-            <a:ext cx="9144000" cy="36576"/>
-          </a:xfrm>
-          <a:prstGeom prst="rect">
-            <a:avLst/>
-          </a:prstGeom>
-          <a:solidFill>
-            <a:srgbClr val="B8975C"/>
-          </a:solidFill>
-          <a:ln/>
-        </p:spPr>
-        <p:txBody>
-          <a:bodyPr/>
-          <a:lstStyle/>
-          <a:p>
-            <a:endParaRPr lang="en-US"/>
-          </a:p>
-        </p:txBody>
-      </p:sp>
-      <p:sp>
-        <p:nvSpPr>
-          <p:cNvPr id="3" name="Shape 1"/>
-          <p:cNvSpPr/>
-          <p:nvPr/>
-        </p:nvSpPr>
-        <p:spPr>
-          <a:xfrm>
-            <a:off x="0" y="4709160"/>
-            <a:ext cx="9144000" cy="434340"/>
-          </a:xfrm>
-          <a:prstGeom prst="rect">
-            <a:avLst/>
-          </a:prstGeom>
-          <a:solidFill>
-            <a:srgbClr val="36454F"/>
-          </a:solidFill>
-          <a:ln/>
-        </p:spPr>
-        <p:txBody>
-          <a:bodyPr/>
-          <a:lstStyle/>
-          <a:p>
-            <a:endParaRPr lang="en-US"/>
-          </a:p>
-        </p:txBody>
-      </p:sp>
-      <p:sp>
-        <p:nvSpPr>
-          <p:cNvPr id="4" name="Text 2"/>
-          <p:cNvSpPr/>
-          <p:nvPr/>
-        </p:nvSpPr>
-        <p:spPr>
-          <a:xfrm>
-            <a:off x="457200" y="4754880"/>
-            <a:ext cx="8229600" cy="320040"/>
-          </a:xfrm>
-          <a:prstGeom prst="rect">
-            <a:avLst/>
-          </a:prstGeom>
-          <a:noFill/>
-          <a:ln/>
-        </p:spPr>
-        <p:txBody>
-          <a:bodyPr wrap="square" rtlCol="0" anchor="ctr"/>
-          <a:lstStyle/>
-          <a:p>
-            <a:pPr marL="0" indent="0" algn="ctr">
-              <a:buNone/>
-            </a:pPr>
-            <a:r>
-              <a:rPr lang="en-US" sz="900" dirty="0">
-                <a:solidFill>
-                  <a:srgbClr val="8A9BAD"/>
-                </a:solidFill>
-                <a:latin typeface="Open Sans" pitchFamily="34" charset="0"/>
-                <a:ea typeface="Open Sans" pitchFamily="34" charset="-122"/>
-                <a:cs typeface="Open Sans" pitchFamily="34" charset="-120"/>
-              </a:rPr>
-              <a:t>Stauffer  |  Appendix: GitHub &amp; AI Setup Guide  |  Shidler College of Business</a:t>
-            </a:r>
-            <a:endParaRPr lang="en-US" sz="900" dirty="0"/>
-          </a:p>
-        </p:txBody>
-      </p:sp>
-      <p:sp>
-        <p:nvSpPr>
-          <p:cNvPr id="5" name="Text 3"/>
-          <p:cNvSpPr/>
-          <p:nvPr/>
-        </p:nvSpPr>
-        <p:spPr>
-          <a:xfrm>
-            <a:off x="731520" y="320040"/>
-            <a:ext cx="7680960" cy="457200"/>
-          </a:xfrm>
-          <a:prstGeom prst="rect">
-            <a:avLst/>
-          </a:prstGeom>
-          <a:noFill/>
-          <a:ln/>
-        </p:spPr>
-        <p:txBody>
-          <a:bodyPr wrap="square" lIns="0" tIns="0" rIns="0" bIns="0" rtlCol="0" anchor="ctr"/>
-          <a:lstStyle/>
-          <a:p>
-            <a:pPr marL="0" indent="0">
-              <a:buNone/>
-            </a:pPr>
-            <a:r>
-              <a:rPr lang="en-US" sz="2800" b="1" dirty="0">
-                <a:solidFill>
-                  <a:srgbClr val="1E2530"/>
-                </a:solidFill>
-                <a:latin typeface="Open Sans" pitchFamily="34" charset="0"/>
-                <a:ea typeface="Open Sans" pitchFamily="34" charset="-122"/>
-                <a:cs typeface="Open Sans" pitchFamily="34" charset="-120"/>
-              </a:rPr>
-              <a:t>Where to Save Each Deliverable</a:t>
-            </a:r>
-            <a:endParaRPr lang="en-US" sz="2800" dirty="0"/>
-          </a:p>
-        </p:txBody>
-      </p:sp>
-      <p:sp>
-        <p:nvSpPr>
-          <p:cNvPr id="6" name="Text 4"/>
-          <p:cNvSpPr/>
-          <p:nvPr/>
-        </p:nvSpPr>
-        <p:spPr>
-          <a:xfrm>
-            <a:off x="731520" y="822960"/>
-            <a:ext cx="7680960" cy="320040"/>
-          </a:xfrm>
-          <a:prstGeom prst="rect">
-            <a:avLst/>
-          </a:prstGeom>
-          <a:noFill/>
-          <a:ln/>
-        </p:spPr>
-        <p:txBody>
-          <a:bodyPr wrap="square" lIns="0" tIns="0" rIns="0" bIns="0" rtlCol="0" anchor="ctr"/>
-          <a:lstStyle/>
-          <a:p>
-            <a:pPr marL="0" indent="0">
-              <a:buNone/>
-            </a:pPr>
-            <a:r>
-              <a:rPr lang="en-US" sz="1200" dirty="0">
-                <a:solidFill>
-                  <a:srgbClr val="5A6B7A"/>
-                </a:solidFill>
-                <a:latin typeface="Open Sans" pitchFamily="34" charset="0"/>
-                <a:ea typeface="Open Sans" pitchFamily="34" charset="-122"/>
-                <a:cs typeface="Open Sans" pitchFamily="34" charset="-120"/>
-              </a:rPr>
-              <a:t>Save your files in the right directory, then commit and push. The file naming convention is shown below.</a:t>
-            </a:r>
-            <a:endParaRPr lang="en-US" sz="1200" dirty="0"/>
-          </a:p>
-        </p:txBody>
-      </p:sp>
-      <p:graphicFrame>
-        <p:nvGraphicFramePr>
-          <p:cNvPr id="9" name="Table 0"/>
-          <p:cNvGraphicFramePr>
-            <a:graphicFrameLocks noGrp="1"/>
-          </p:cNvGraphicFramePr>
-          <p:nvPr>
-            <p:extLst>
-              <p:ext uri="{D42A27DB-BD31-4B8C-83A1-F6EECF244321}">
-                <p14:modId xmlns:p14="http://schemas.microsoft.com/office/powerpoint/2010/main" val="1579011935"/>
-              </p:ext>
-            </p:extLst>
-          </p:nvPr>
-        </p:nvGraphicFramePr>
-        <p:xfrm>
-          <a:off x="731520" y="1325880"/>
-          <a:ext cx="7680960" cy="2194560"/>
-        </p:xfrm>
-        <a:graphic>
-          <a:graphicData uri="http://schemas.openxmlformats.org/drawingml/2006/table">
-            <a:tbl>
-              <a:tblPr/>
-              <a:tblGrid>
-                <a:gridCol w="731520">
-                  <a:extLst>
-                    <a:ext uri="{9D8B030D-6E8A-4147-A177-3AD203B41FA5}">
-                      <a16:colId xmlns:a16="http://schemas.microsoft.com/office/drawing/2014/main" val="20000"/>
-                    </a:ext>
-                  </a:extLst>
-                </a:gridCol>
-                <a:gridCol w="1645920">
-                  <a:extLst>
-                    <a:ext uri="{9D8B030D-6E8A-4147-A177-3AD203B41FA5}">
-                      <a16:colId xmlns:a16="http://schemas.microsoft.com/office/drawing/2014/main" val="20001"/>
-                    </a:ext>
-                  </a:extLst>
-                </a:gridCol>
-                <a:gridCol w="2743200">
-                  <a:extLst>
-                    <a:ext uri="{9D8B030D-6E8A-4147-A177-3AD203B41FA5}">
-                      <a16:colId xmlns:a16="http://schemas.microsoft.com/office/drawing/2014/main" val="20002"/>
-                    </a:ext>
-                  </a:extLst>
-                </a:gridCol>
-                <a:gridCol w="2560320">
-                  <a:extLst>
-                    <a:ext uri="{9D8B030D-6E8A-4147-A177-3AD203B41FA5}">
-                      <a16:colId xmlns:a16="http://schemas.microsoft.com/office/drawing/2014/main" val="20003"/>
-                    </a:ext>
-                  </a:extLst>
-                </a:gridCol>
-              </a:tblGrid>
-              <a:tr h="365760">
-                <a:tc>
-                  <a:txBody>
-                    <a:bodyPr/>
-                    <a:lstStyle/>
-                    <a:p>
-                      <a:pPr marL="0" indent="0" algn="ctr">
-                        <a:buNone/>
-                      </a:pPr>
-                      <a:r>
-                        <a:rPr lang="en-US" sz="1200" b="1" dirty="0">
-                          <a:solidFill>
-                            <a:srgbClr val="FFFFFF"/>
-                          </a:solidFill>
-                          <a:latin typeface="Open Sans" pitchFamily="34" charset="0"/>
-                          <a:ea typeface="Open Sans" pitchFamily="34" charset="-122"/>
-                          <a:cs typeface="Open Sans" pitchFamily="34" charset="-120"/>
-                        </a:rPr>
-                        <a:t>Stage</a:t>
-                      </a:r>
-                      <a:endParaRPr lang="en-US" sz="1200" dirty="0">
-                        <a:latin typeface="Open Sans" charset="0"/>
-                        <a:ea typeface="Open Sans" charset="0"/>
-                        <a:cs typeface="Open Sans" charset="0"/>
-                      </a:endParaRPr>
-                    </a:p>
-                  </a:txBody>
-                  <a:tcPr>
-                    <a:lnL w="6350" cap="flat" cmpd="sng" algn="ctr">
-                      <a:solidFill>
-                        <a:srgbClr val="C0C0C0"/>
-                      </a:solidFill>
-                      <a:prstDash val="solid"/>
-                      <a:round/>
-                      <a:headEnd type="none" w="med" len="med"/>
-                      <a:tailEnd type="none" w="med" len="med"/>
-                    </a:lnL>
-                    <a:lnR w="6350" cap="flat" cmpd="sng" algn="ctr">
-                      <a:solidFill>
-                        <a:srgbClr val="C0C0C0"/>
-                      </a:solidFill>
-                      <a:prstDash val="solid"/>
-                      <a:round/>
-                      <a:headEnd type="none" w="med" len="med"/>
-                      <a:tailEnd type="none" w="med" len="med"/>
-                    </a:lnR>
-                    <a:lnT w="6350" cap="flat" cmpd="sng" algn="ctr">
-                      <a:solidFill>
-                        <a:srgbClr val="C0C0C0"/>
-                      </a:solidFill>
-                      <a:prstDash val="solid"/>
-                      <a:round/>
-                      <a:headEnd type="none" w="med" len="med"/>
-                      <a:tailEnd type="none" w="med" len="med"/>
-                    </a:lnT>
-                    <a:lnB w="6350" cap="flat" cmpd="sng" algn="ctr">
-                      <a:solidFill>
-                        <a:srgbClr val="C0C0C0"/>
-                      </a:solidFill>
-                      <a:prstDash val="solid"/>
-                      <a:round/>
-                      <a:headEnd type="none" w="med" len="med"/>
-                      <a:tailEnd type="none" w="med" len="med"/>
-                    </a:lnB>
-                    <a:solidFill>
-                      <a:srgbClr val="36454F"/>
-                    </a:solidFill>
-                  </a:tcPr>
-                </a:tc>
-                <a:tc>
-                  <a:txBody>
-                    <a:bodyPr/>
-                    <a:lstStyle/>
-                    <a:p>
-                      <a:pPr marL="0" indent="0">
-                        <a:buNone/>
-                      </a:pPr>
-                      <a:r>
-                        <a:rPr lang="en-US" sz="1200" b="1" dirty="0">
-                          <a:solidFill>
-                            <a:srgbClr val="FFFFFF"/>
-                          </a:solidFill>
-                          <a:latin typeface="Open Sans" pitchFamily="34" charset="0"/>
-                          <a:ea typeface="Open Sans" pitchFamily="34" charset="-122"/>
-                          <a:cs typeface="Open Sans" pitchFamily="34" charset="-120"/>
-                        </a:rPr>
-                        <a:t>Deliverable</a:t>
-                      </a:r>
-                      <a:endParaRPr lang="en-US" sz="1200" dirty="0">
-                        <a:latin typeface="Open Sans" charset="0"/>
-                        <a:ea typeface="Open Sans" charset="0"/>
-                        <a:cs typeface="Open Sans" charset="0"/>
-                      </a:endParaRPr>
-                    </a:p>
-                  </a:txBody>
-                  <a:tcPr>
-                    <a:lnL w="6350" cap="flat" cmpd="sng" algn="ctr">
-                      <a:solidFill>
-                        <a:srgbClr val="C0C0C0"/>
-                      </a:solidFill>
-                      <a:prstDash val="solid"/>
-                      <a:round/>
-                      <a:headEnd type="none" w="med" len="med"/>
-                      <a:tailEnd type="none" w="med" len="med"/>
-                    </a:lnL>
-                    <a:lnR w="6350" cap="flat" cmpd="sng" algn="ctr">
-                      <a:solidFill>
-                        <a:srgbClr val="C0C0C0"/>
-                      </a:solidFill>
-                      <a:prstDash val="solid"/>
-                      <a:round/>
-                      <a:headEnd type="none" w="med" len="med"/>
-                      <a:tailEnd type="none" w="med" len="med"/>
-                    </a:lnR>
-                    <a:lnT w="6350" cap="flat" cmpd="sng" algn="ctr">
-                      <a:solidFill>
-                        <a:srgbClr val="C0C0C0"/>
-                      </a:solidFill>
-                      <a:prstDash val="solid"/>
-                      <a:round/>
-                      <a:headEnd type="none" w="med" len="med"/>
-                      <a:tailEnd type="none" w="med" len="med"/>
-                    </a:lnT>
-                    <a:lnB w="6350" cap="flat" cmpd="sng" algn="ctr">
-                      <a:solidFill>
-                        <a:srgbClr val="C0C0C0"/>
-                      </a:solidFill>
-                      <a:prstDash val="solid"/>
-                      <a:round/>
-                      <a:headEnd type="none" w="med" len="med"/>
-                      <a:tailEnd type="none" w="med" len="med"/>
-                    </a:lnB>
-                    <a:solidFill>
-                      <a:srgbClr val="36454F"/>
-                    </a:solidFill>
-                  </a:tcPr>
-                </a:tc>
-                <a:tc>
-                  <a:txBody>
-                    <a:bodyPr/>
-                    <a:lstStyle/>
-                    <a:p>
-                      <a:pPr marL="0" indent="0">
-                        <a:buNone/>
-                      </a:pPr>
-                      <a:r>
-                        <a:rPr lang="en-US" sz="1200" b="1" dirty="0">
-                          <a:solidFill>
-                            <a:srgbClr val="FFFFFF"/>
-                          </a:solidFill>
-                          <a:latin typeface="Open Sans" pitchFamily="34" charset="0"/>
-                          <a:ea typeface="Open Sans" pitchFamily="34" charset="-122"/>
-                          <a:cs typeface="Open Sans" pitchFamily="34" charset="-120"/>
-                        </a:rPr>
-                        <a:t>File Name</a:t>
-                      </a:r>
-                      <a:endParaRPr lang="en-US" sz="1200" dirty="0">
-                        <a:latin typeface="Open Sans" charset="0"/>
-                        <a:ea typeface="Open Sans" charset="0"/>
-                        <a:cs typeface="Open Sans" charset="0"/>
-                      </a:endParaRPr>
-                    </a:p>
-                  </a:txBody>
-                  <a:tcPr>
-                    <a:lnL w="6350" cap="flat" cmpd="sng" algn="ctr">
-                      <a:solidFill>
-                        <a:srgbClr val="C0C0C0"/>
-                      </a:solidFill>
-                      <a:prstDash val="solid"/>
-                      <a:round/>
-                      <a:headEnd type="none" w="med" len="med"/>
-                      <a:tailEnd type="none" w="med" len="med"/>
-                    </a:lnL>
-                    <a:lnR w="6350" cap="flat" cmpd="sng" algn="ctr">
-                      <a:solidFill>
-                        <a:srgbClr val="C0C0C0"/>
-                      </a:solidFill>
-                      <a:prstDash val="solid"/>
-                      <a:round/>
-                      <a:headEnd type="none" w="med" len="med"/>
-                      <a:tailEnd type="none" w="med" len="med"/>
-                    </a:lnR>
-                    <a:lnT w="6350" cap="flat" cmpd="sng" algn="ctr">
-                      <a:solidFill>
-                        <a:srgbClr val="C0C0C0"/>
-                      </a:solidFill>
-                      <a:prstDash val="solid"/>
-                      <a:round/>
-                      <a:headEnd type="none" w="med" len="med"/>
-                      <a:tailEnd type="none" w="med" len="med"/>
-                    </a:lnT>
-                    <a:lnB w="6350" cap="flat" cmpd="sng" algn="ctr">
-                      <a:solidFill>
-                        <a:srgbClr val="C0C0C0"/>
-                      </a:solidFill>
-                      <a:prstDash val="solid"/>
-                      <a:round/>
-                      <a:headEnd type="none" w="med" len="med"/>
-                      <a:tailEnd type="none" w="med" len="med"/>
-                    </a:lnB>
-                    <a:solidFill>
-                      <a:srgbClr val="36454F"/>
-                    </a:solidFill>
-                  </a:tcPr>
-                </a:tc>
-                <a:tc>
-                  <a:txBody>
-                    <a:bodyPr/>
-                    <a:lstStyle/>
-                    <a:p>
-                      <a:pPr marL="0" indent="0">
-                        <a:buNone/>
-                      </a:pPr>
-                      <a:r>
-                        <a:rPr lang="en-US" sz="1200" b="1" dirty="0">
-                          <a:solidFill>
-                            <a:srgbClr val="FFFFFF"/>
-                          </a:solidFill>
-                          <a:latin typeface="Open Sans" pitchFamily="34" charset="0"/>
-                          <a:ea typeface="Open Sans" pitchFamily="34" charset="-122"/>
-                          <a:cs typeface="Open Sans" pitchFamily="34" charset="-120"/>
-                        </a:rPr>
-                        <a:t>Directory</a:t>
-                      </a:r>
-                      <a:endParaRPr lang="en-US" sz="1200" dirty="0">
-                        <a:latin typeface="Open Sans" charset="0"/>
-                        <a:ea typeface="Open Sans" charset="0"/>
-                        <a:cs typeface="Open Sans" charset="0"/>
-                      </a:endParaRPr>
-                    </a:p>
-                  </a:txBody>
-                  <a:tcPr>
-                    <a:lnL w="6350" cap="flat" cmpd="sng" algn="ctr">
-                      <a:solidFill>
-                        <a:srgbClr val="C0C0C0"/>
-                      </a:solidFill>
-                      <a:prstDash val="solid"/>
-                      <a:round/>
-                      <a:headEnd type="none" w="med" len="med"/>
-                      <a:tailEnd type="none" w="med" len="med"/>
-                    </a:lnL>
-                    <a:lnR w="6350" cap="flat" cmpd="sng" algn="ctr">
-                      <a:solidFill>
-                        <a:srgbClr val="C0C0C0"/>
-                      </a:solidFill>
-                      <a:prstDash val="solid"/>
-                      <a:round/>
-                      <a:headEnd type="none" w="med" len="med"/>
-                      <a:tailEnd type="none" w="med" len="med"/>
-                    </a:lnR>
-                    <a:lnT w="6350" cap="flat" cmpd="sng" algn="ctr">
-                      <a:solidFill>
-                        <a:srgbClr val="C0C0C0"/>
-                      </a:solidFill>
-                      <a:prstDash val="solid"/>
-                      <a:round/>
-                      <a:headEnd type="none" w="med" len="med"/>
-                      <a:tailEnd type="none" w="med" len="med"/>
-                    </a:lnT>
-                    <a:lnB w="6350" cap="flat" cmpd="sng" algn="ctr">
-                      <a:solidFill>
-                        <a:srgbClr val="C0C0C0"/>
-                      </a:solidFill>
-                      <a:prstDash val="solid"/>
-                      <a:round/>
-                      <a:headEnd type="none" w="med" len="med"/>
-                      <a:tailEnd type="none" w="med" len="med"/>
-                    </a:lnB>
-                    <a:solidFill>
-                      <a:srgbClr val="36454F"/>
-                    </a:solidFill>
-                  </a:tcPr>
-                </a:tc>
-                <a:extLst>
-                  <a:ext uri="{0D108BD9-81ED-4DB2-BD59-A6C34878D82A}">
-                    <a16:rowId xmlns:a16="http://schemas.microsoft.com/office/drawing/2014/main" val="10000"/>
-                  </a:ext>
-                </a:extLst>
-              </a:tr>
-              <a:tr h="365760">
-                <a:tc>
-                  <a:txBody>
-                    <a:bodyPr/>
-                    <a:lstStyle/>
-                    <a:p>
-                      <a:pPr marL="0" indent="0" algn="ctr">
-                        <a:buNone/>
-                      </a:pPr>
-                      <a:r>
-                        <a:rPr lang="en-US" sz="1200" dirty="0">
-                          <a:solidFill>
-                            <a:srgbClr val="1E2530"/>
-                          </a:solidFill>
-                          <a:latin typeface="Open Sans" pitchFamily="34" charset="0"/>
-                          <a:ea typeface="Open Sans" pitchFamily="34" charset="-122"/>
-                          <a:cs typeface="Open Sans" pitchFamily="34" charset="-120"/>
-                        </a:rPr>
-                        <a:t>1</a:t>
-                      </a:r>
-                      <a:endParaRPr lang="en-US" sz="1200" dirty="0">
-                        <a:latin typeface="Open Sans" charset="0"/>
-                        <a:ea typeface="Open Sans" charset="0"/>
-                        <a:cs typeface="Open Sans" charset="0"/>
-                      </a:endParaRPr>
-                    </a:p>
-                  </a:txBody>
-                  <a:tcPr>
-                    <a:lnL w="6350" cap="flat" cmpd="sng" algn="ctr">
-                      <a:solidFill>
-                        <a:srgbClr val="C0C0C0"/>
-                      </a:solidFill>
-                      <a:prstDash val="solid"/>
-                      <a:round/>
-                      <a:headEnd type="none" w="med" len="med"/>
-                      <a:tailEnd type="none" w="med" len="med"/>
-                    </a:lnL>
-                    <a:lnR w="6350" cap="flat" cmpd="sng" algn="ctr">
-                      <a:solidFill>
-                        <a:srgbClr val="C0C0C0"/>
-                      </a:solidFill>
-                      <a:prstDash val="solid"/>
-                      <a:round/>
-                      <a:headEnd type="none" w="med" len="med"/>
-                      <a:tailEnd type="none" w="med" len="med"/>
-                    </a:lnR>
-                    <a:lnT w="6350" cap="flat" cmpd="sng" algn="ctr">
-                      <a:solidFill>
-                        <a:srgbClr val="C0C0C0"/>
-                      </a:solidFill>
-                      <a:prstDash val="solid"/>
-                      <a:round/>
-                      <a:headEnd type="none" w="med" len="med"/>
-                      <a:tailEnd type="none" w="med" len="med"/>
-                    </a:lnT>
-                    <a:lnB w="6350" cap="flat" cmpd="sng" algn="ctr">
-                      <a:solidFill>
-                        <a:srgbClr val="C0C0C0"/>
-                      </a:solidFill>
-                      <a:prstDash val="solid"/>
-                      <a:round/>
-                      <a:headEnd type="none" w="med" len="med"/>
-                      <a:tailEnd type="none" w="med" len="med"/>
-                    </a:lnB>
-                  </a:tcPr>
-                </a:tc>
-                <a:tc>
-                  <a:txBody>
-                    <a:bodyPr/>
-                    <a:lstStyle/>
-                    <a:p>
-                      <a:pPr marL="0" indent="0">
-                        <a:buNone/>
-                      </a:pPr>
-                      <a:r>
-                        <a:rPr lang="en-US" sz="1200" dirty="0">
-                          <a:solidFill>
-                            <a:srgbClr val="1E2530"/>
-                          </a:solidFill>
-                          <a:latin typeface="Open Sans" pitchFamily="34" charset="0"/>
-                          <a:ea typeface="Open Sans" pitchFamily="34" charset="-122"/>
-                          <a:cs typeface="Open Sans" pitchFamily="34" charset="-120"/>
-                        </a:rPr>
-                        <a:t>Executive Memo</a:t>
-                      </a:r>
-                      <a:endParaRPr lang="en-US" sz="1200" dirty="0">
-                        <a:latin typeface="Open Sans" charset="0"/>
-                        <a:ea typeface="Open Sans" charset="0"/>
-                        <a:cs typeface="Open Sans" charset="0"/>
-                      </a:endParaRPr>
-                    </a:p>
-                  </a:txBody>
-                  <a:tcPr>
-                    <a:lnL w="6350" cap="flat" cmpd="sng" algn="ctr">
-                      <a:solidFill>
-                        <a:srgbClr val="C0C0C0"/>
-                      </a:solidFill>
-                      <a:prstDash val="solid"/>
-                      <a:round/>
-                      <a:headEnd type="none" w="med" len="med"/>
-                      <a:tailEnd type="none" w="med" len="med"/>
-                    </a:lnL>
-                    <a:lnR w="6350" cap="flat" cmpd="sng" algn="ctr">
-                      <a:solidFill>
-                        <a:srgbClr val="C0C0C0"/>
-                      </a:solidFill>
-                      <a:prstDash val="solid"/>
-                      <a:round/>
-                      <a:headEnd type="none" w="med" len="med"/>
-                      <a:tailEnd type="none" w="med" len="med"/>
-                    </a:lnR>
-                    <a:lnT w="6350" cap="flat" cmpd="sng" algn="ctr">
-                      <a:solidFill>
-                        <a:srgbClr val="C0C0C0"/>
-                      </a:solidFill>
-                      <a:prstDash val="solid"/>
-                      <a:round/>
-                      <a:headEnd type="none" w="med" len="med"/>
-                      <a:tailEnd type="none" w="med" len="med"/>
-                    </a:lnT>
-                    <a:lnB w="6350" cap="flat" cmpd="sng" algn="ctr">
-                      <a:solidFill>
-                        <a:srgbClr val="C0C0C0"/>
-                      </a:solidFill>
-                      <a:prstDash val="solid"/>
-                      <a:round/>
-                      <a:headEnd type="none" w="med" len="med"/>
-                      <a:tailEnd type="none" w="med" len="med"/>
-                    </a:lnB>
-                  </a:tcPr>
-                </a:tc>
-                <a:tc>
-                  <a:txBody>
-                    <a:bodyPr/>
-                    <a:lstStyle/>
-                    <a:p>
-                      <a:pPr marL="0" indent="0">
-                        <a:buNone/>
-                      </a:pPr>
-                      <a:r>
-                        <a:rPr lang="en-US" sz="1100" dirty="0">
-                          <a:solidFill>
-                            <a:srgbClr val="B8975C"/>
-                          </a:solidFill>
-                          <a:latin typeface="Consolas" pitchFamily="34" charset="0"/>
-                          <a:ea typeface="Consolas" pitchFamily="34" charset="-122"/>
-                          <a:cs typeface="Consolas" pitchFamily="34" charset="-120"/>
-                        </a:rPr>
-                        <a:t>lastname-stage1-memo.md</a:t>
-                      </a:r>
-                      <a:endParaRPr lang="en-US" sz="1100" dirty="0">
-                        <a:latin typeface="Consolas" charset="0"/>
-                        <a:ea typeface="Consolas" charset="0"/>
-                        <a:cs typeface="Consolas" charset="0"/>
-                      </a:endParaRPr>
-                    </a:p>
-                  </a:txBody>
-                  <a:tcPr>
-                    <a:lnL w="6350" cap="flat" cmpd="sng" algn="ctr">
-                      <a:solidFill>
-                        <a:srgbClr val="C0C0C0"/>
-                      </a:solidFill>
-                      <a:prstDash val="solid"/>
-                      <a:round/>
-                      <a:headEnd type="none" w="med" len="med"/>
-                      <a:tailEnd type="none" w="med" len="med"/>
-                    </a:lnL>
-                    <a:lnR w="6350" cap="flat" cmpd="sng" algn="ctr">
-                      <a:solidFill>
-                        <a:srgbClr val="C0C0C0"/>
-                      </a:solidFill>
-                      <a:prstDash val="solid"/>
-                      <a:round/>
-                      <a:headEnd type="none" w="med" len="med"/>
-                      <a:tailEnd type="none" w="med" len="med"/>
-                    </a:lnR>
-                    <a:lnT w="6350" cap="flat" cmpd="sng" algn="ctr">
-                      <a:solidFill>
-                        <a:srgbClr val="C0C0C0"/>
-                      </a:solidFill>
-                      <a:prstDash val="solid"/>
-                      <a:round/>
-                      <a:headEnd type="none" w="med" len="med"/>
-                      <a:tailEnd type="none" w="med" len="med"/>
-                    </a:lnT>
-                    <a:lnB w="6350" cap="flat" cmpd="sng" algn="ctr">
-                      <a:solidFill>
-                        <a:srgbClr val="C0C0C0"/>
-                      </a:solidFill>
-                      <a:prstDash val="solid"/>
-                      <a:round/>
-                      <a:headEnd type="none" w="med" len="med"/>
-                      <a:tailEnd type="none" w="med" len="med"/>
-                    </a:lnB>
-                  </a:tcPr>
-                </a:tc>
-                <a:tc>
-                  <a:txBody>
-                    <a:bodyPr/>
-                    <a:lstStyle/>
-                    <a:p>
-                      <a:pPr marL="0" indent="0">
-                        <a:buNone/>
-                      </a:pPr>
-                      <a:r>
-                        <a:rPr lang="en-US" sz="1100" dirty="0">
-                          <a:solidFill>
-                            <a:srgbClr val="5A6B7A"/>
-                          </a:solidFill>
-                          <a:latin typeface="Consolas" pitchFamily="34" charset="0"/>
-                          <a:ea typeface="Consolas" pitchFamily="34" charset="-122"/>
-                          <a:cs typeface="Consolas" pitchFamily="34" charset="-120"/>
-                        </a:rPr>
-                        <a:t>docs/decisions/</a:t>
-                      </a:r>
-                      <a:endParaRPr lang="en-US" sz="1100" dirty="0">
-                        <a:latin typeface="Consolas" charset="0"/>
-                        <a:ea typeface="Consolas" charset="0"/>
-                        <a:cs typeface="Consolas" charset="0"/>
-                      </a:endParaRPr>
-                    </a:p>
-                  </a:txBody>
-                  <a:tcPr>
-                    <a:lnL w="6350" cap="flat" cmpd="sng" algn="ctr">
-                      <a:solidFill>
-                        <a:srgbClr val="C0C0C0"/>
-                      </a:solidFill>
-                      <a:prstDash val="solid"/>
-                      <a:round/>
-                      <a:headEnd type="none" w="med" len="med"/>
-                      <a:tailEnd type="none" w="med" len="med"/>
-                    </a:lnL>
-                    <a:lnR w="6350" cap="flat" cmpd="sng" algn="ctr">
-                      <a:solidFill>
-                        <a:srgbClr val="C0C0C0"/>
-                      </a:solidFill>
-                      <a:prstDash val="solid"/>
-                      <a:round/>
-                      <a:headEnd type="none" w="med" len="med"/>
-                      <a:tailEnd type="none" w="med" len="med"/>
-                    </a:lnR>
-                    <a:lnT w="6350" cap="flat" cmpd="sng" algn="ctr">
-                      <a:solidFill>
-                        <a:srgbClr val="C0C0C0"/>
-                      </a:solidFill>
-                      <a:prstDash val="solid"/>
-                      <a:round/>
-                      <a:headEnd type="none" w="med" len="med"/>
-                      <a:tailEnd type="none" w="med" len="med"/>
-                    </a:lnT>
-                    <a:lnB w="6350" cap="flat" cmpd="sng" algn="ctr">
-                      <a:solidFill>
-                        <a:srgbClr val="C0C0C0"/>
-                      </a:solidFill>
-                      <a:prstDash val="solid"/>
-                      <a:round/>
-                      <a:headEnd type="none" w="med" len="med"/>
-                      <a:tailEnd type="none" w="med" len="med"/>
-                    </a:lnB>
-                  </a:tcPr>
-                </a:tc>
-                <a:extLst>
-                  <a:ext uri="{0D108BD9-81ED-4DB2-BD59-A6C34878D82A}">
-                    <a16:rowId xmlns:a16="http://schemas.microsoft.com/office/drawing/2014/main" val="10001"/>
-                  </a:ext>
-                </a:extLst>
-              </a:tr>
-              <a:tr h="365760">
-                <a:tc>
-                  <a:txBody>
-                    <a:bodyPr/>
-                    <a:lstStyle/>
-                    <a:p>
-                      <a:pPr marL="0" indent="0" algn="ctr">
-                        <a:buNone/>
-                      </a:pPr>
-                      <a:r>
-                        <a:rPr lang="en-US" sz="1200" dirty="0">
-                          <a:solidFill>
-                            <a:srgbClr val="1E2530"/>
-                          </a:solidFill>
-                          <a:latin typeface="Open Sans" pitchFamily="34" charset="0"/>
-                          <a:ea typeface="Open Sans" pitchFamily="34" charset="-122"/>
-                          <a:cs typeface="Open Sans" pitchFamily="34" charset="-120"/>
-                        </a:rPr>
-                        <a:t>2</a:t>
-                      </a:r>
-                      <a:endParaRPr lang="en-US" sz="1200" dirty="0">
-                        <a:latin typeface="Open Sans" charset="0"/>
-                        <a:ea typeface="Open Sans" charset="0"/>
-                        <a:cs typeface="Open Sans" charset="0"/>
-                      </a:endParaRPr>
-                    </a:p>
-                  </a:txBody>
-                  <a:tcPr>
-                    <a:lnL w="6350" cap="flat" cmpd="sng" algn="ctr">
-                      <a:solidFill>
-                        <a:srgbClr val="C0C0C0"/>
-                      </a:solidFill>
-                      <a:prstDash val="solid"/>
-                      <a:round/>
-                      <a:headEnd type="none" w="med" len="med"/>
-                      <a:tailEnd type="none" w="med" len="med"/>
-                    </a:lnL>
-                    <a:lnR w="6350" cap="flat" cmpd="sng" algn="ctr">
-                      <a:solidFill>
-                        <a:srgbClr val="C0C0C0"/>
-                      </a:solidFill>
-                      <a:prstDash val="solid"/>
-                      <a:round/>
-                      <a:headEnd type="none" w="med" len="med"/>
-                      <a:tailEnd type="none" w="med" len="med"/>
-                    </a:lnR>
-                    <a:lnT w="6350" cap="flat" cmpd="sng" algn="ctr">
-                      <a:solidFill>
-                        <a:srgbClr val="C0C0C0"/>
-                      </a:solidFill>
-                      <a:prstDash val="solid"/>
-                      <a:round/>
-                      <a:headEnd type="none" w="med" len="med"/>
-                      <a:tailEnd type="none" w="med" len="med"/>
-                    </a:lnT>
-                    <a:lnB w="6350" cap="flat" cmpd="sng" algn="ctr">
-                      <a:solidFill>
-                        <a:srgbClr val="C0C0C0"/>
-                      </a:solidFill>
-                      <a:prstDash val="solid"/>
-                      <a:round/>
-                      <a:headEnd type="none" w="med" len="med"/>
-                      <a:tailEnd type="none" w="med" len="med"/>
-                    </a:lnB>
-                    <a:solidFill>
-                      <a:srgbClr val="F5F5F3"/>
-                    </a:solidFill>
-                  </a:tcPr>
-                </a:tc>
-                <a:tc>
-                  <a:txBody>
-                    <a:bodyPr/>
-                    <a:lstStyle/>
-                    <a:p>
-                      <a:pPr marL="0" indent="0">
-                        <a:buNone/>
-                      </a:pPr>
-                      <a:r>
-                        <a:rPr lang="en-US" sz="1200" dirty="0">
-                          <a:solidFill>
-                            <a:srgbClr val="1E2530"/>
-                          </a:solidFill>
-                          <a:latin typeface="Open Sans" pitchFamily="34" charset="0"/>
-                          <a:ea typeface="Open Sans" pitchFamily="34" charset="-122"/>
-                          <a:cs typeface="Open Sans" pitchFamily="34" charset="-120"/>
-                        </a:rPr>
-                        <a:t>Excel Model</a:t>
-                      </a:r>
-                      <a:endParaRPr lang="en-US" sz="1200" dirty="0">
-                        <a:latin typeface="Open Sans" charset="0"/>
-                        <a:ea typeface="Open Sans" charset="0"/>
-                        <a:cs typeface="Open Sans" charset="0"/>
-                      </a:endParaRPr>
-                    </a:p>
-                  </a:txBody>
-                  <a:tcPr>
-                    <a:lnL w="6350" cap="flat" cmpd="sng" algn="ctr">
-                      <a:solidFill>
-                        <a:srgbClr val="C0C0C0"/>
-                      </a:solidFill>
-                      <a:prstDash val="solid"/>
-                      <a:round/>
-                      <a:headEnd type="none" w="med" len="med"/>
-                      <a:tailEnd type="none" w="med" len="med"/>
-                    </a:lnL>
-                    <a:lnR w="6350" cap="flat" cmpd="sng" algn="ctr">
-                      <a:solidFill>
-                        <a:srgbClr val="C0C0C0"/>
-                      </a:solidFill>
-                      <a:prstDash val="solid"/>
-                      <a:round/>
-                      <a:headEnd type="none" w="med" len="med"/>
-                      <a:tailEnd type="none" w="med" len="med"/>
-                    </a:lnR>
-                    <a:lnT w="6350" cap="flat" cmpd="sng" algn="ctr">
-                      <a:solidFill>
-                        <a:srgbClr val="C0C0C0"/>
-                      </a:solidFill>
-                      <a:prstDash val="solid"/>
-                      <a:round/>
-                      <a:headEnd type="none" w="med" len="med"/>
-                      <a:tailEnd type="none" w="med" len="med"/>
-                    </a:lnT>
-                    <a:lnB w="6350" cap="flat" cmpd="sng" algn="ctr">
-                      <a:solidFill>
-                        <a:srgbClr val="C0C0C0"/>
-                      </a:solidFill>
-                      <a:prstDash val="solid"/>
-                      <a:round/>
-                      <a:headEnd type="none" w="med" len="med"/>
-                      <a:tailEnd type="none" w="med" len="med"/>
-                    </a:lnB>
-                    <a:solidFill>
-                      <a:srgbClr val="F5F5F3"/>
-                    </a:solidFill>
-                  </a:tcPr>
-                </a:tc>
-                <a:tc>
-                  <a:txBody>
-                    <a:bodyPr/>
-                    <a:lstStyle/>
-                    <a:p>
-                      <a:pPr marL="0" indent="0">
-                        <a:buNone/>
-                      </a:pPr>
-                      <a:r>
-                        <a:rPr lang="en-US" sz="1100" dirty="0">
-                          <a:solidFill>
-                            <a:srgbClr val="B8975C"/>
-                          </a:solidFill>
-                          <a:latin typeface="Consolas" pitchFamily="34" charset="0"/>
-                          <a:ea typeface="Consolas" pitchFamily="34" charset="-122"/>
-                          <a:cs typeface="Consolas" pitchFamily="34" charset="-120"/>
-                        </a:rPr>
-                        <a:t>lastname-stage2-model.xlsx</a:t>
-                      </a:r>
-                      <a:endParaRPr lang="en-US" sz="1100" dirty="0">
-                        <a:latin typeface="Consolas" charset="0"/>
-                        <a:ea typeface="Consolas" charset="0"/>
-                        <a:cs typeface="Consolas" charset="0"/>
-                      </a:endParaRPr>
-                    </a:p>
-                  </a:txBody>
-                  <a:tcPr>
-                    <a:lnL w="6350" cap="flat" cmpd="sng" algn="ctr">
-                      <a:solidFill>
-                        <a:srgbClr val="C0C0C0"/>
-                      </a:solidFill>
-                      <a:prstDash val="solid"/>
-                      <a:round/>
-                      <a:headEnd type="none" w="med" len="med"/>
-                      <a:tailEnd type="none" w="med" len="med"/>
-                    </a:lnL>
-                    <a:lnR w="6350" cap="flat" cmpd="sng" algn="ctr">
-                      <a:solidFill>
-                        <a:srgbClr val="C0C0C0"/>
-                      </a:solidFill>
-                      <a:prstDash val="solid"/>
-                      <a:round/>
-                      <a:headEnd type="none" w="med" len="med"/>
-                      <a:tailEnd type="none" w="med" len="med"/>
-                    </a:lnR>
-                    <a:lnT w="6350" cap="flat" cmpd="sng" algn="ctr">
-                      <a:solidFill>
-                        <a:srgbClr val="C0C0C0"/>
-                      </a:solidFill>
-                      <a:prstDash val="solid"/>
-                      <a:round/>
-                      <a:headEnd type="none" w="med" len="med"/>
-                      <a:tailEnd type="none" w="med" len="med"/>
-                    </a:lnT>
-                    <a:lnB w="6350" cap="flat" cmpd="sng" algn="ctr">
-                      <a:solidFill>
-                        <a:srgbClr val="C0C0C0"/>
-                      </a:solidFill>
-                      <a:prstDash val="solid"/>
-                      <a:round/>
-                      <a:headEnd type="none" w="med" len="med"/>
-                      <a:tailEnd type="none" w="med" len="med"/>
-                    </a:lnB>
-                    <a:solidFill>
-                      <a:srgbClr val="F5F5F3"/>
-                    </a:solidFill>
-                  </a:tcPr>
-                </a:tc>
-                <a:tc>
-                  <a:txBody>
-                    <a:bodyPr/>
-                    <a:lstStyle/>
-                    <a:p>
-                      <a:pPr marL="0" indent="0">
-                        <a:buNone/>
-                      </a:pPr>
-                      <a:r>
-                        <a:rPr lang="en-US" sz="1100" dirty="0">
-                          <a:solidFill>
-                            <a:srgbClr val="5A6B7A"/>
-                          </a:solidFill>
-                          <a:latin typeface="Consolas" pitchFamily="34" charset="0"/>
-                          <a:ea typeface="Consolas" pitchFamily="34" charset="-122"/>
-                          <a:cs typeface="Consolas" pitchFamily="34" charset="-120"/>
-                        </a:rPr>
-                        <a:t>docs/templates/excel/</a:t>
-                      </a:r>
-                      <a:endParaRPr lang="en-US" sz="1100" dirty="0">
-                        <a:latin typeface="Consolas" charset="0"/>
-                        <a:ea typeface="Consolas" charset="0"/>
-                        <a:cs typeface="Consolas" charset="0"/>
-                      </a:endParaRPr>
-                    </a:p>
-                  </a:txBody>
-                  <a:tcPr>
-                    <a:lnL w="6350" cap="flat" cmpd="sng" algn="ctr">
-                      <a:solidFill>
-                        <a:srgbClr val="C0C0C0"/>
-                      </a:solidFill>
-                      <a:prstDash val="solid"/>
-                      <a:round/>
-                      <a:headEnd type="none" w="med" len="med"/>
-                      <a:tailEnd type="none" w="med" len="med"/>
-                    </a:lnL>
-                    <a:lnR w="6350" cap="flat" cmpd="sng" algn="ctr">
-                      <a:solidFill>
-                        <a:srgbClr val="C0C0C0"/>
-                      </a:solidFill>
-                      <a:prstDash val="solid"/>
-                      <a:round/>
-                      <a:headEnd type="none" w="med" len="med"/>
-                      <a:tailEnd type="none" w="med" len="med"/>
-                    </a:lnR>
-                    <a:lnT w="6350" cap="flat" cmpd="sng" algn="ctr">
-                      <a:solidFill>
-                        <a:srgbClr val="C0C0C0"/>
-                      </a:solidFill>
-                      <a:prstDash val="solid"/>
-                      <a:round/>
-                      <a:headEnd type="none" w="med" len="med"/>
-                      <a:tailEnd type="none" w="med" len="med"/>
-                    </a:lnT>
-                    <a:lnB w="6350" cap="flat" cmpd="sng" algn="ctr">
-                      <a:solidFill>
-                        <a:srgbClr val="C0C0C0"/>
-                      </a:solidFill>
-                      <a:prstDash val="solid"/>
-                      <a:round/>
-                      <a:headEnd type="none" w="med" len="med"/>
-                      <a:tailEnd type="none" w="med" len="med"/>
-                    </a:lnB>
-                    <a:solidFill>
-                      <a:srgbClr val="F5F5F3"/>
-                    </a:solidFill>
-                  </a:tcPr>
-                </a:tc>
-                <a:extLst>
-                  <a:ext uri="{0D108BD9-81ED-4DB2-BD59-A6C34878D82A}">
-                    <a16:rowId xmlns:a16="http://schemas.microsoft.com/office/drawing/2014/main" val="10002"/>
-                  </a:ext>
-                </a:extLst>
-              </a:tr>
-              <a:tr h="365760">
-                <a:tc>
-                  <a:txBody>
-                    <a:bodyPr/>
-                    <a:lstStyle/>
-                    <a:p>
-                      <a:pPr marL="0" indent="0" algn="ctr">
-                        <a:buNone/>
-                      </a:pPr>
-                      <a:r>
-                        <a:rPr lang="en-US" sz="1200" dirty="0">
-                          <a:solidFill>
-                            <a:srgbClr val="1E2530"/>
-                          </a:solidFill>
-                          <a:latin typeface="Open Sans" pitchFamily="34" charset="0"/>
-                          <a:ea typeface="Open Sans" pitchFamily="34" charset="-122"/>
-                          <a:cs typeface="Open Sans" pitchFamily="34" charset="-120"/>
-                        </a:rPr>
-                        <a:t>3</a:t>
-                      </a:r>
-                      <a:endParaRPr lang="en-US" sz="1200" dirty="0">
-                        <a:latin typeface="Open Sans" charset="0"/>
-                        <a:ea typeface="Open Sans" charset="0"/>
-                        <a:cs typeface="Open Sans" charset="0"/>
-                      </a:endParaRPr>
-                    </a:p>
-                  </a:txBody>
-                  <a:tcPr>
-                    <a:lnL w="6350" cap="flat" cmpd="sng" algn="ctr">
-                      <a:solidFill>
-                        <a:srgbClr val="C0C0C0"/>
-                      </a:solidFill>
-                      <a:prstDash val="solid"/>
-                      <a:round/>
-                      <a:headEnd type="none" w="med" len="med"/>
-                      <a:tailEnd type="none" w="med" len="med"/>
-                    </a:lnL>
-                    <a:lnR w="6350" cap="flat" cmpd="sng" algn="ctr">
-                      <a:solidFill>
-                        <a:srgbClr val="C0C0C0"/>
-                      </a:solidFill>
-                      <a:prstDash val="solid"/>
-                      <a:round/>
-                      <a:headEnd type="none" w="med" len="med"/>
-                      <a:tailEnd type="none" w="med" len="med"/>
-                    </a:lnR>
-                    <a:lnT w="6350" cap="flat" cmpd="sng" algn="ctr">
-                      <a:solidFill>
-                        <a:srgbClr val="C0C0C0"/>
-                      </a:solidFill>
-                      <a:prstDash val="solid"/>
-                      <a:round/>
-                      <a:headEnd type="none" w="med" len="med"/>
-                      <a:tailEnd type="none" w="med" len="med"/>
-                    </a:lnT>
-                    <a:lnB w="6350" cap="flat" cmpd="sng" algn="ctr">
-                      <a:solidFill>
-                        <a:srgbClr val="C0C0C0"/>
-                      </a:solidFill>
-                      <a:prstDash val="solid"/>
-                      <a:round/>
-                      <a:headEnd type="none" w="med" len="med"/>
-                      <a:tailEnd type="none" w="med" len="med"/>
-                    </a:lnB>
-                  </a:tcPr>
-                </a:tc>
-                <a:tc>
-                  <a:txBody>
-                    <a:bodyPr/>
-                    <a:lstStyle/>
-                    <a:p>
-                      <a:pPr marL="0" indent="0">
-                        <a:buNone/>
-                      </a:pPr>
-                      <a:r>
-                        <a:rPr lang="en-US" sz="1200" dirty="0">
-                          <a:solidFill>
-                            <a:srgbClr val="1E2530"/>
-                          </a:solidFill>
-                          <a:latin typeface="Open Sans" pitchFamily="34" charset="0"/>
-                          <a:ea typeface="Open Sans" pitchFamily="34" charset="-122"/>
-                          <a:cs typeface="Open Sans" pitchFamily="34" charset="-120"/>
-                        </a:rPr>
-                        <a:t>Technical Spec</a:t>
-                      </a:r>
-                      <a:endParaRPr lang="en-US" sz="1200" dirty="0">
-                        <a:latin typeface="Open Sans" charset="0"/>
-                        <a:ea typeface="Open Sans" charset="0"/>
-                        <a:cs typeface="Open Sans" charset="0"/>
-                      </a:endParaRPr>
-                    </a:p>
-                  </a:txBody>
-                  <a:tcPr>
-                    <a:lnL w="6350" cap="flat" cmpd="sng" algn="ctr">
-                      <a:solidFill>
-                        <a:srgbClr val="C0C0C0"/>
-                      </a:solidFill>
-                      <a:prstDash val="solid"/>
-                      <a:round/>
-                      <a:headEnd type="none" w="med" len="med"/>
-                      <a:tailEnd type="none" w="med" len="med"/>
-                    </a:lnL>
-                    <a:lnR w="6350" cap="flat" cmpd="sng" algn="ctr">
-                      <a:solidFill>
-                        <a:srgbClr val="C0C0C0"/>
-                      </a:solidFill>
-                      <a:prstDash val="solid"/>
-                      <a:round/>
-                      <a:headEnd type="none" w="med" len="med"/>
-                      <a:tailEnd type="none" w="med" len="med"/>
-                    </a:lnR>
-                    <a:lnT w="6350" cap="flat" cmpd="sng" algn="ctr">
-                      <a:solidFill>
-                        <a:srgbClr val="C0C0C0"/>
-                      </a:solidFill>
-                      <a:prstDash val="solid"/>
-                      <a:round/>
-                      <a:headEnd type="none" w="med" len="med"/>
-                      <a:tailEnd type="none" w="med" len="med"/>
-                    </a:lnT>
-                    <a:lnB w="6350" cap="flat" cmpd="sng" algn="ctr">
-                      <a:solidFill>
-                        <a:srgbClr val="C0C0C0"/>
-                      </a:solidFill>
-                      <a:prstDash val="solid"/>
-                      <a:round/>
-                      <a:headEnd type="none" w="med" len="med"/>
-                      <a:tailEnd type="none" w="med" len="med"/>
-                    </a:lnB>
-                  </a:tcPr>
-                </a:tc>
-                <a:tc>
-                  <a:txBody>
-                    <a:bodyPr/>
-                    <a:lstStyle/>
-                    <a:p>
-                      <a:pPr marL="0" indent="0">
-                        <a:buNone/>
-                      </a:pPr>
-                      <a:r>
-                        <a:rPr lang="en-US" sz="1100" dirty="0">
-                          <a:solidFill>
-                            <a:srgbClr val="B8975C"/>
-                          </a:solidFill>
-                          <a:latin typeface="Consolas" pitchFamily="34" charset="0"/>
-                          <a:ea typeface="Consolas" pitchFamily="34" charset="-122"/>
-                          <a:cs typeface="Consolas" pitchFamily="34" charset="-120"/>
-                        </a:rPr>
-                        <a:t>lastname-stage3-spec.md</a:t>
-                      </a:r>
-                      <a:endParaRPr lang="en-US" sz="1100" dirty="0">
-                        <a:latin typeface="Consolas" charset="0"/>
-                        <a:ea typeface="Consolas" charset="0"/>
-                        <a:cs typeface="Consolas" charset="0"/>
-                      </a:endParaRPr>
-                    </a:p>
-                  </a:txBody>
-                  <a:tcPr>
-                    <a:lnL w="6350" cap="flat" cmpd="sng" algn="ctr">
-                      <a:solidFill>
-                        <a:srgbClr val="C0C0C0"/>
-                      </a:solidFill>
-                      <a:prstDash val="solid"/>
-                      <a:round/>
-                      <a:headEnd type="none" w="med" len="med"/>
-                      <a:tailEnd type="none" w="med" len="med"/>
-                    </a:lnL>
-                    <a:lnR w="6350" cap="flat" cmpd="sng" algn="ctr">
-                      <a:solidFill>
-                        <a:srgbClr val="C0C0C0"/>
-                      </a:solidFill>
-                      <a:prstDash val="solid"/>
-                      <a:round/>
-                      <a:headEnd type="none" w="med" len="med"/>
-                      <a:tailEnd type="none" w="med" len="med"/>
-                    </a:lnR>
-                    <a:lnT w="6350" cap="flat" cmpd="sng" algn="ctr">
-                      <a:solidFill>
-                        <a:srgbClr val="C0C0C0"/>
-                      </a:solidFill>
-                      <a:prstDash val="solid"/>
-                      <a:round/>
-                      <a:headEnd type="none" w="med" len="med"/>
-                      <a:tailEnd type="none" w="med" len="med"/>
-                    </a:lnT>
-                    <a:lnB w="6350" cap="flat" cmpd="sng" algn="ctr">
-                      <a:solidFill>
-                        <a:srgbClr val="C0C0C0"/>
-                      </a:solidFill>
-                      <a:prstDash val="solid"/>
-                      <a:round/>
-                      <a:headEnd type="none" w="med" len="med"/>
-                      <a:tailEnd type="none" w="med" len="med"/>
-                    </a:lnB>
-                  </a:tcPr>
-                </a:tc>
-                <a:tc>
-                  <a:txBody>
-                    <a:bodyPr/>
-                    <a:lstStyle/>
-                    <a:p>
-                      <a:pPr marL="0" indent="0">
-                        <a:buNone/>
-                      </a:pPr>
-                      <a:r>
-                        <a:rPr lang="en-US" sz="1100" dirty="0">
-                          <a:solidFill>
-                            <a:srgbClr val="5A6B7A"/>
-                          </a:solidFill>
-                          <a:latin typeface="Consolas" pitchFamily="34" charset="0"/>
-                          <a:ea typeface="Consolas" pitchFamily="34" charset="-122"/>
-                          <a:cs typeface="Consolas" pitchFamily="34" charset="-120"/>
-                        </a:rPr>
-                        <a:t>docs/</a:t>
-                      </a:r>
-                      <a:endParaRPr lang="en-US" sz="1100" dirty="0">
-                        <a:latin typeface="Consolas" charset="0"/>
-                        <a:ea typeface="Consolas" charset="0"/>
-                        <a:cs typeface="Consolas" charset="0"/>
-                      </a:endParaRPr>
-                    </a:p>
-                  </a:txBody>
-                  <a:tcPr>
-                    <a:lnL w="6350" cap="flat" cmpd="sng" algn="ctr">
-                      <a:solidFill>
-                        <a:srgbClr val="C0C0C0"/>
-                      </a:solidFill>
-                      <a:prstDash val="solid"/>
-                      <a:round/>
-                      <a:headEnd type="none" w="med" len="med"/>
-                      <a:tailEnd type="none" w="med" len="med"/>
-                    </a:lnL>
-                    <a:lnR w="6350" cap="flat" cmpd="sng" algn="ctr">
-                      <a:solidFill>
-                        <a:srgbClr val="C0C0C0"/>
-                      </a:solidFill>
-                      <a:prstDash val="solid"/>
-                      <a:round/>
-                      <a:headEnd type="none" w="med" len="med"/>
-                      <a:tailEnd type="none" w="med" len="med"/>
-                    </a:lnR>
-                    <a:lnT w="6350" cap="flat" cmpd="sng" algn="ctr">
-                      <a:solidFill>
-                        <a:srgbClr val="C0C0C0"/>
-                      </a:solidFill>
-                      <a:prstDash val="solid"/>
-                      <a:round/>
-                      <a:headEnd type="none" w="med" len="med"/>
-                      <a:tailEnd type="none" w="med" len="med"/>
-                    </a:lnT>
-                    <a:lnB w="6350" cap="flat" cmpd="sng" algn="ctr">
-                      <a:solidFill>
-                        <a:srgbClr val="C0C0C0"/>
-                      </a:solidFill>
-                      <a:prstDash val="solid"/>
-                      <a:round/>
-                      <a:headEnd type="none" w="med" len="med"/>
-                      <a:tailEnd type="none" w="med" len="med"/>
-                    </a:lnB>
-                  </a:tcPr>
-                </a:tc>
-                <a:extLst>
-                  <a:ext uri="{0D108BD9-81ED-4DB2-BD59-A6C34878D82A}">
-                    <a16:rowId xmlns:a16="http://schemas.microsoft.com/office/drawing/2014/main" val="10003"/>
-                  </a:ext>
-                </a:extLst>
-              </a:tr>
-              <a:tr h="365760">
-                <a:tc>
-                  <a:txBody>
-                    <a:bodyPr/>
-                    <a:lstStyle/>
-                    <a:p>
-                      <a:pPr marL="0" indent="0" algn="ctr">
-                        <a:buNone/>
-                      </a:pPr>
-                      <a:r>
-                        <a:rPr lang="en-US" sz="1200" dirty="0">
-                          <a:solidFill>
-                            <a:srgbClr val="1E2530"/>
-                          </a:solidFill>
-                          <a:latin typeface="Open Sans" pitchFamily="34" charset="0"/>
-                          <a:ea typeface="Open Sans" pitchFamily="34" charset="-122"/>
-                          <a:cs typeface="Open Sans" pitchFamily="34" charset="-120"/>
-                        </a:rPr>
-                        <a:t>4</a:t>
-                      </a:r>
-                      <a:endParaRPr lang="en-US" sz="1200" dirty="0">
-                        <a:latin typeface="Open Sans" charset="0"/>
-                        <a:ea typeface="Open Sans" charset="0"/>
-                        <a:cs typeface="Open Sans" charset="0"/>
-                      </a:endParaRPr>
-                    </a:p>
-                  </a:txBody>
-                  <a:tcPr>
-                    <a:lnL w="6350" cap="flat" cmpd="sng" algn="ctr">
-                      <a:solidFill>
-                        <a:srgbClr val="C0C0C0"/>
-                      </a:solidFill>
-                      <a:prstDash val="solid"/>
-                      <a:round/>
-                      <a:headEnd type="none" w="med" len="med"/>
-                      <a:tailEnd type="none" w="med" len="med"/>
-                    </a:lnL>
-                    <a:lnR w="6350" cap="flat" cmpd="sng" algn="ctr">
-                      <a:solidFill>
-                        <a:srgbClr val="C0C0C0"/>
-                      </a:solidFill>
-                      <a:prstDash val="solid"/>
-                      <a:round/>
-                      <a:headEnd type="none" w="med" len="med"/>
-                      <a:tailEnd type="none" w="med" len="med"/>
-                    </a:lnR>
-                    <a:lnT w="6350" cap="flat" cmpd="sng" algn="ctr">
-                      <a:solidFill>
-                        <a:srgbClr val="C0C0C0"/>
-                      </a:solidFill>
-                      <a:prstDash val="solid"/>
-                      <a:round/>
-                      <a:headEnd type="none" w="med" len="med"/>
-                      <a:tailEnd type="none" w="med" len="med"/>
-                    </a:lnT>
-                    <a:lnB w="6350" cap="flat" cmpd="sng" algn="ctr">
-                      <a:solidFill>
-                        <a:srgbClr val="C0C0C0"/>
-                      </a:solidFill>
-                      <a:prstDash val="solid"/>
-                      <a:round/>
-                      <a:headEnd type="none" w="med" len="med"/>
-                      <a:tailEnd type="none" w="med" len="med"/>
-                    </a:lnB>
-                    <a:solidFill>
-                      <a:srgbClr val="F5F5F3"/>
-                    </a:solidFill>
-                  </a:tcPr>
-                </a:tc>
-                <a:tc>
-                  <a:txBody>
-                    <a:bodyPr/>
-                    <a:lstStyle/>
-                    <a:p>
-                      <a:pPr marL="0" indent="0">
-                        <a:buNone/>
-                      </a:pPr>
-                      <a:r>
-                        <a:rPr lang="en-US" sz="1200" dirty="0">
-                          <a:solidFill>
-                            <a:srgbClr val="1E2530"/>
-                          </a:solidFill>
-                          <a:latin typeface="Open Sans" pitchFamily="34" charset="0"/>
-                          <a:ea typeface="Open Sans" pitchFamily="34" charset="-122"/>
-                          <a:cs typeface="Open Sans" pitchFamily="34" charset="-120"/>
-                        </a:rPr>
-                        <a:t>Final Analysis</a:t>
-                      </a:r>
-                      <a:endParaRPr lang="en-US" sz="1200" dirty="0">
-                        <a:latin typeface="Open Sans" charset="0"/>
-                        <a:ea typeface="Open Sans" charset="0"/>
-                        <a:cs typeface="Open Sans" charset="0"/>
-                      </a:endParaRPr>
-                    </a:p>
-                  </a:txBody>
-                  <a:tcPr>
-                    <a:lnL w="6350" cap="flat" cmpd="sng" algn="ctr">
-                      <a:solidFill>
-                        <a:srgbClr val="C0C0C0"/>
-                      </a:solidFill>
-                      <a:prstDash val="solid"/>
-                      <a:round/>
-                      <a:headEnd type="none" w="med" len="med"/>
-                      <a:tailEnd type="none" w="med" len="med"/>
-                    </a:lnL>
-                    <a:lnR w="6350" cap="flat" cmpd="sng" algn="ctr">
-                      <a:solidFill>
-                        <a:srgbClr val="C0C0C0"/>
-                      </a:solidFill>
-                      <a:prstDash val="solid"/>
-                      <a:round/>
-                      <a:headEnd type="none" w="med" len="med"/>
-                      <a:tailEnd type="none" w="med" len="med"/>
-                    </a:lnR>
-                    <a:lnT w="6350" cap="flat" cmpd="sng" algn="ctr">
-                      <a:solidFill>
-                        <a:srgbClr val="C0C0C0"/>
-                      </a:solidFill>
-                      <a:prstDash val="solid"/>
-                      <a:round/>
-                      <a:headEnd type="none" w="med" len="med"/>
-                      <a:tailEnd type="none" w="med" len="med"/>
-                    </a:lnT>
-                    <a:lnB w="6350" cap="flat" cmpd="sng" algn="ctr">
-                      <a:solidFill>
-                        <a:srgbClr val="C0C0C0"/>
-                      </a:solidFill>
-                      <a:prstDash val="solid"/>
-                      <a:round/>
-                      <a:headEnd type="none" w="med" len="med"/>
-                      <a:tailEnd type="none" w="med" len="med"/>
-                    </a:lnB>
-                    <a:solidFill>
-                      <a:srgbClr val="F5F5F3"/>
-                    </a:solidFill>
-                  </a:tcPr>
-                </a:tc>
-                <a:tc>
-                  <a:txBody>
-                    <a:bodyPr/>
-                    <a:lstStyle/>
-                    <a:p>
-                      <a:pPr marL="0" indent="0">
-                        <a:buNone/>
-                      </a:pPr>
-                      <a:r>
-                        <a:rPr lang="en-US" sz="1100" dirty="0">
-                          <a:solidFill>
-                            <a:srgbClr val="B8975C"/>
-                          </a:solidFill>
-                          <a:latin typeface="Consolas" pitchFamily="34" charset="0"/>
-                          <a:ea typeface="Consolas" pitchFamily="34" charset="-122"/>
-                          <a:cs typeface="Consolas" pitchFamily="34" charset="-120"/>
-                        </a:rPr>
-                        <a:t>lastname-stage4-final.md</a:t>
-                      </a:r>
-                      <a:endParaRPr lang="en-US" sz="1100" dirty="0">
-                        <a:latin typeface="Consolas" charset="0"/>
-                        <a:ea typeface="Consolas" charset="0"/>
-                        <a:cs typeface="Consolas" charset="0"/>
-                      </a:endParaRPr>
-                    </a:p>
-                  </a:txBody>
-                  <a:tcPr>
-                    <a:lnL w="6350" cap="flat" cmpd="sng" algn="ctr">
-                      <a:solidFill>
-                        <a:srgbClr val="C0C0C0"/>
-                      </a:solidFill>
-                      <a:prstDash val="solid"/>
-                      <a:round/>
-                      <a:headEnd type="none" w="med" len="med"/>
-                      <a:tailEnd type="none" w="med" len="med"/>
-                    </a:lnL>
-                    <a:lnR w="6350" cap="flat" cmpd="sng" algn="ctr">
-                      <a:solidFill>
-                        <a:srgbClr val="C0C0C0"/>
-                      </a:solidFill>
-                      <a:prstDash val="solid"/>
-                      <a:round/>
-                      <a:headEnd type="none" w="med" len="med"/>
-                      <a:tailEnd type="none" w="med" len="med"/>
-                    </a:lnR>
-                    <a:lnT w="6350" cap="flat" cmpd="sng" algn="ctr">
-                      <a:solidFill>
-                        <a:srgbClr val="C0C0C0"/>
-                      </a:solidFill>
-                      <a:prstDash val="solid"/>
-                      <a:round/>
-                      <a:headEnd type="none" w="med" len="med"/>
-                      <a:tailEnd type="none" w="med" len="med"/>
-                    </a:lnT>
-                    <a:lnB w="6350" cap="flat" cmpd="sng" algn="ctr">
-                      <a:solidFill>
-                        <a:srgbClr val="C0C0C0"/>
-                      </a:solidFill>
-                      <a:prstDash val="solid"/>
-                      <a:round/>
-                      <a:headEnd type="none" w="med" len="med"/>
-                      <a:tailEnd type="none" w="med" len="med"/>
-                    </a:lnB>
-                    <a:solidFill>
-                      <a:srgbClr val="F5F5F3"/>
-                    </a:solidFill>
-                  </a:tcPr>
-                </a:tc>
-                <a:tc>
-                  <a:txBody>
-                    <a:bodyPr/>
-                    <a:lstStyle/>
-                    <a:p>
-                      <a:pPr marL="0" indent="0">
-                        <a:buNone/>
-                      </a:pPr>
-                      <a:r>
-                        <a:rPr lang="en-US" sz="1100" dirty="0">
-                          <a:solidFill>
-                            <a:srgbClr val="5A6B7A"/>
-                          </a:solidFill>
-                          <a:latin typeface="Consolas" pitchFamily="34" charset="0"/>
-                          <a:ea typeface="Consolas" pitchFamily="34" charset="-122"/>
-                          <a:cs typeface="Consolas" pitchFamily="34" charset="-120"/>
-                        </a:rPr>
-                        <a:t>docs/</a:t>
-                      </a:r>
-                      <a:endParaRPr lang="en-US" sz="1100" dirty="0">
-                        <a:latin typeface="Consolas" charset="0"/>
-                        <a:ea typeface="Consolas" charset="0"/>
-                        <a:cs typeface="Consolas" charset="0"/>
-                      </a:endParaRPr>
-                    </a:p>
-                  </a:txBody>
-                  <a:tcPr>
-                    <a:lnL w="6350" cap="flat" cmpd="sng" algn="ctr">
-                      <a:solidFill>
-                        <a:srgbClr val="C0C0C0"/>
-                      </a:solidFill>
-                      <a:prstDash val="solid"/>
-                      <a:round/>
-                      <a:headEnd type="none" w="med" len="med"/>
-                      <a:tailEnd type="none" w="med" len="med"/>
-                    </a:lnL>
-                    <a:lnR w="6350" cap="flat" cmpd="sng" algn="ctr">
-                      <a:solidFill>
-                        <a:srgbClr val="C0C0C0"/>
-                      </a:solidFill>
-                      <a:prstDash val="solid"/>
-                      <a:round/>
-                      <a:headEnd type="none" w="med" len="med"/>
-                      <a:tailEnd type="none" w="med" len="med"/>
-                    </a:lnR>
-                    <a:lnT w="6350" cap="flat" cmpd="sng" algn="ctr">
-                      <a:solidFill>
-                        <a:srgbClr val="C0C0C0"/>
-                      </a:solidFill>
-                      <a:prstDash val="solid"/>
-                      <a:round/>
-                      <a:headEnd type="none" w="med" len="med"/>
-                      <a:tailEnd type="none" w="med" len="med"/>
-                    </a:lnT>
-                    <a:lnB w="6350" cap="flat" cmpd="sng" algn="ctr">
-                      <a:solidFill>
-                        <a:srgbClr val="C0C0C0"/>
-                      </a:solidFill>
-                      <a:prstDash val="solid"/>
-                      <a:round/>
-                      <a:headEnd type="none" w="med" len="med"/>
-                      <a:tailEnd type="none" w="med" len="med"/>
-                    </a:lnB>
-                    <a:solidFill>
-                      <a:srgbClr val="F5F5F3"/>
-                    </a:solidFill>
-                  </a:tcPr>
-                </a:tc>
-                <a:extLst>
-                  <a:ext uri="{0D108BD9-81ED-4DB2-BD59-A6C34878D82A}">
-                    <a16:rowId xmlns:a16="http://schemas.microsoft.com/office/drawing/2014/main" val="10004"/>
-                  </a:ext>
-                </a:extLst>
-              </a:tr>
-              <a:tr h="365760">
-                <a:tc>
-                  <a:txBody>
-                    <a:bodyPr/>
-                    <a:lstStyle/>
-                    <a:p>
-                      <a:pPr marL="0" indent="0" algn="ctr">
-                        <a:buNone/>
-                      </a:pPr>
-                      <a:r>
-                        <a:rPr lang="en-US" sz="1200" dirty="0">
-                          <a:solidFill>
-                            <a:srgbClr val="8A9BAD"/>
-                          </a:solidFill>
-                          <a:latin typeface="Open Sans" pitchFamily="34" charset="0"/>
-                          <a:ea typeface="Open Sans" pitchFamily="34" charset="-122"/>
-                          <a:cs typeface="Open Sans" pitchFamily="34" charset="-120"/>
-                        </a:rPr>
-                        <a:t>—</a:t>
-                      </a:r>
-                      <a:endParaRPr lang="en-US" sz="1200" dirty="0">
-                        <a:latin typeface="Open Sans" charset="0"/>
-                        <a:ea typeface="Open Sans" charset="0"/>
-                        <a:cs typeface="Open Sans" charset="0"/>
-                      </a:endParaRPr>
-                    </a:p>
-                  </a:txBody>
-                  <a:tcPr>
-                    <a:lnL w="6350" cap="flat" cmpd="sng" algn="ctr">
-                      <a:solidFill>
-                        <a:srgbClr val="C0C0C0"/>
-                      </a:solidFill>
-                      <a:prstDash val="solid"/>
-                      <a:round/>
-                      <a:headEnd type="none" w="med" len="med"/>
-                      <a:tailEnd type="none" w="med" len="med"/>
-                    </a:lnL>
-                    <a:lnR w="6350" cap="flat" cmpd="sng" algn="ctr">
-                      <a:solidFill>
-                        <a:srgbClr val="C0C0C0"/>
-                      </a:solidFill>
-                      <a:prstDash val="solid"/>
-                      <a:round/>
-                      <a:headEnd type="none" w="med" len="med"/>
-                      <a:tailEnd type="none" w="med" len="med"/>
-                    </a:lnR>
-                    <a:lnT w="6350" cap="flat" cmpd="sng" algn="ctr">
-                      <a:solidFill>
-                        <a:srgbClr val="C0C0C0"/>
-                      </a:solidFill>
-                      <a:prstDash val="solid"/>
-                      <a:round/>
-                      <a:headEnd type="none" w="med" len="med"/>
-                      <a:tailEnd type="none" w="med" len="med"/>
-                    </a:lnT>
-                    <a:lnB w="6350" cap="flat" cmpd="sng" algn="ctr">
-                      <a:solidFill>
-                        <a:srgbClr val="C0C0C0"/>
-                      </a:solidFill>
-                      <a:prstDash val="solid"/>
-                      <a:round/>
-                      <a:headEnd type="none" w="med" len="med"/>
-                      <a:tailEnd type="none" w="med" len="med"/>
-                    </a:lnB>
-                  </a:tcPr>
-                </a:tc>
-                <a:tc>
-                  <a:txBody>
-                    <a:bodyPr/>
-                    <a:lstStyle/>
-                    <a:p>
-                      <a:pPr marL="0" indent="0">
-                        <a:buNone/>
-                      </a:pPr>
-                      <a:r>
-                        <a:rPr lang="en-US" sz="1200" dirty="0">
-                          <a:solidFill>
-                            <a:srgbClr val="1E2530"/>
-                          </a:solidFill>
-                          <a:latin typeface="Open Sans" pitchFamily="34" charset="0"/>
-                          <a:ea typeface="Open Sans" pitchFamily="34" charset="-122"/>
-                          <a:cs typeface="Open Sans" pitchFamily="34" charset="-120"/>
-                        </a:rPr>
-                        <a:t>Prompt Log</a:t>
-                      </a:r>
-                      <a:endParaRPr lang="en-US" sz="1200" dirty="0">
-                        <a:latin typeface="Open Sans" charset="0"/>
-                        <a:ea typeface="Open Sans" charset="0"/>
-                        <a:cs typeface="Open Sans" charset="0"/>
-                      </a:endParaRPr>
-                    </a:p>
-                  </a:txBody>
-                  <a:tcPr>
-                    <a:lnL w="6350" cap="flat" cmpd="sng" algn="ctr">
-                      <a:solidFill>
-                        <a:srgbClr val="C0C0C0"/>
-                      </a:solidFill>
-                      <a:prstDash val="solid"/>
-                      <a:round/>
-                      <a:headEnd type="none" w="med" len="med"/>
-                      <a:tailEnd type="none" w="med" len="med"/>
-                    </a:lnL>
-                    <a:lnR w="6350" cap="flat" cmpd="sng" algn="ctr">
-                      <a:solidFill>
-                        <a:srgbClr val="C0C0C0"/>
-                      </a:solidFill>
-                      <a:prstDash val="solid"/>
-                      <a:round/>
-                      <a:headEnd type="none" w="med" len="med"/>
-                      <a:tailEnd type="none" w="med" len="med"/>
-                    </a:lnR>
-                    <a:lnT w="6350" cap="flat" cmpd="sng" algn="ctr">
-                      <a:solidFill>
-                        <a:srgbClr val="C0C0C0"/>
-                      </a:solidFill>
-                      <a:prstDash val="solid"/>
-                      <a:round/>
-                      <a:headEnd type="none" w="med" len="med"/>
-                      <a:tailEnd type="none" w="med" len="med"/>
-                    </a:lnT>
-                    <a:lnB w="6350" cap="flat" cmpd="sng" algn="ctr">
-                      <a:solidFill>
-                        <a:srgbClr val="C0C0C0"/>
-                      </a:solidFill>
-                      <a:prstDash val="solid"/>
-                      <a:round/>
-                      <a:headEnd type="none" w="med" len="med"/>
-                      <a:tailEnd type="none" w="med" len="med"/>
-                    </a:lnB>
-                  </a:tcPr>
-                </a:tc>
-                <a:tc>
-                  <a:txBody>
-                    <a:bodyPr/>
-                    <a:lstStyle/>
-                    <a:p>
-                      <a:pPr marL="0" indent="0">
-                        <a:buNone/>
-                      </a:pPr>
-                      <a:r>
-                        <a:rPr lang="en-US" sz="1100" dirty="0">
-                          <a:solidFill>
-                            <a:srgbClr val="B8975C"/>
-                          </a:solidFill>
-                          <a:latin typeface="Consolas" pitchFamily="34" charset="0"/>
-                          <a:ea typeface="Consolas" pitchFamily="34" charset="-122"/>
-                          <a:cs typeface="Consolas" pitchFamily="34" charset="-120"/>
-                        </a:rPr>
-                        <a:t>prompt-log.md</a:t>
-                      </a:r>
-                      <a:endParaRPr lang="en-US" sz="1100" dirty="0">
-                        <a:latin typeface="Consolas" charset="0"/>
-                        <a:ea typeface="Consolas" charset="0"/>
-                        <a:cs typeface="Consolas" charset="0"/>
-                      </a:endParaRPr>
-                    </a:p>
-                  </a:txBody>
-                  <a:tcPr>
-                    <a:lnL w="6350" cap="flat" cmpd="sng" algn="ctr">
-                      <a:solidFill>
-                        <a:srgbClr val="C0C0C0"/>
-                      </a:solidFill>
-                      <a:prstDash val="solid"/>
-                      <a:round/>
-                      <a:headEnd type="none" w="med" len="med"/>
-                      <a:tailEnd type="none" w="med" len="med"/>
-                    </a:lnL>
-                    <a:lnR w="6350" cap="flat" cmpd="sng" algn="ctr">
-                      <a:solidFill>
-                        <a:srgbClr val="C0C0C0"/>
-                      </a:solidFill>
-                      <a:prstDash val="solid"/>
-                      <a:round/>
-                      <a:headEnd type="none" w="med" len="med"/>
-                      <a:tailEnd type="none" w="med" len="med"/>
-                    </a:lnR>
-                    <a:lnT w="6350" cap="flat" cmpd="sng" algn="ctr">
-                      <a:solidFill>
-                        <a:srgbClr val="C0C0C0"/>
-                      </a:solidFill>
-                      <a:prstDash val="solid"/>
-                      <a:round/>
-                      <a:headEnd type="none" w="med" len="med"/>
-                      <a:tailEnd type="none" w="med" len="med"/>
-                    </a:lnT>
-                    <a:lnB w="6350" cap="flat" cmpd="sng" algn="ctr">
-                      <a:solidFill>
-                        <a:srgbClr val="C0C0C0"/>
-                      </a:solidFill>
-                      <a:prstDash val="solid"/>
-                      <a:round/>
-                      <a:headEnd type="none" w="med" len="med"/>
-                      <a:tailEnd type="none" w="med" len="med"/>
-                    </a:lnB>
-                  </a:tcPr>
-                </a:tc>
-                <a:tc>
-                  <a:txBody>
-                    <a:bodyPr/>
-                    <a:lstStyle/>
-                    <a:p>
-                      <a:pPr marL="0" indent="0">
-                        <a:buNone/>
-                      </a:pPr>
-                      <a:r>
-                        <a:rPr lang="en-US" sz="1100" dirty="0">
-                          <a:solidFill>
-                            <a:srgbClr val="5A6B7A"/>
-                          </a:solidFill>
-                          <a:latin typeface="Consolas" pitchFamily="34" charset="0"/>
-                          <a:ea typeface="Consolas" pitchFamily="34" charset="-122"/>
-                          <a:cs typeface="Consolas" pitchFamily="34" charset="-120"/>
-                        </a:rPr>
-                        <a:t>deliverables/</a:t>
-                      </a:r>
-                      <a:endParaRPr lang="en-US" sz="1100" dirty="0">
-                        <a:latin typeface="Consolas" charset="0"/>
-                        <a:ea typeface="Consolas" charset="0"/>
-                        <a:cs typeface="Consolas" charset="0"/>
-                      </a:endParaRPr>
-                    </a:p>
-                  </a:txBody>
-                  <a:tcPr>
-                    <a:lnL w="6350" cap="flat" cmpd="sng" algn="ctr">
-                      <a:solidFill>
-                        <a:srgbClr val="C0C0C0"/>
-                      </a:solidFill>
-                      <a:prstDash val="solid"/>
-                      <a:round/>
-                      <a:headEnd type="none" w="med" len="med"/>
-                      <a:tailEnd type="none" w="med" len="med"/>
-                    </a:lnL>
-                    <a:lnR w="6350" cap="flat" cmpd="sng" algn="ctr">
-                      <a:solidFill>
-                        <a:srgbClr val="C0C0C0"/>
-                      </a:solidFill>
-                      <a:prstDash val="solid"/>
-                      <a:round/>
-                      <a:headEnd type="none" w="med" len="med"/>
-                      <a:tailEnd type="none" w="med" len="med"/>
-                    </a:lnR>
-                    <a:lnT w="6350" cap="flat" cmpd="sng" algn="ctr">
-                      <a:solidFill>
-                        <a:srgbClr val="C0C0C0"/>
-                      </a:solidFill>
-                      <a:prstDash val="solid"/>
-                      <a:round/>
-                      <a:headEnd type="none" w="med" len="med"/>
-                      <a:tailEnd type="none" w="med" len="med"/>
-                    </a:lnT>
-                    <a:lnB w="6350" cap="flat" cmpd="sng" algn="ctr">
-                      <a:solidFill>
-                        <a:srgbClr val="C0C0C0"/>
-                      </a:solidFill>
-                      <a:prstDash val="solid"/>
-                      <a:round/>
-                      <a:headEnd type="none" w="med" len="med"/>
-                      <a:tailEnd type="none" w="med" len="med"/>
-                    </a:lnB>
-                  </a:tcPr>
-                </a:tc>
-                <a:extLst>
-                  <a:ext uri="{0D108BD9-81ED-4DB2-BD59-A6C34878D82A}">
-                    <a16:rowId xmlns:a16="http://schemas.microsoft.com/office/drawing/2014/main" val="10005"/>
-                  </a:ext>
-                </a:extLst>
-              </a:tr>
-            </a:tbl>
-          </a:graphicData>
-        </a:graphic>
-      </p:graphicFrame>
-      <p:sp>
-        <p:nvSpPr>
-          <p:cNvPr id="8" name="Shape 5"/>
-          <p:cNvSpPr/>
-          <p:nvPr/>
-        </p:nvSpPr>
-        <p:spPr>
-          <a:xfrm>
-            <a:off x="731520" y="3794760"/>
-            <a:ext cx="7680960" cy="731520"/>
-          </a:xfrm>
-          <a:prstGeom prst="rect">
-            <a:avLst/>
-          </a:prstGeom>
-          <a:solidFill>
-            <a:srgbClr val="36454F"/>
-          </a:solidFill>
-          <a:ln/>
-        </p:spPr>
-        <p:txBody>
-          <a:bodyPr/>
-          <a:lstStyle/>
-          <a:p>
-            <a:endParaRPr lang="en-US"/>
-          </a:p>
-        </p:txBody>
-      </p:sp>
-      <p:sp>
-        <p:nvSpPr>
-          <p:cNvPr id="7" name="Text 6"/>
-          <p:cNvSpPr/>
-          <p:nvPr/>
-        </p:nvSpPr>
-        <p:spPr>
-          <a:xfrm>
-            <a:off x="960120" y="3840480"/>
-            <a:ext cx="3657600" cy="228600"/>
-          </a:xfrm>
-          <a:prstGeom prst="rect">
-            <a:avLst/>
-          </a:prstGeom>
-          <a:noFill/>
-          <a:ln/>
-        </p:spPr>
-        <p:txBody>
-          <a:bodyPr wrap="square" lIns="0" tIns="0" rIns="0" bIns="0" rtlCol="0" anchor="ctr"/>
-          <a:lstStyle/>
-          <a:p>
-            <a:pPr marL="0" indent="0">
-              <a:buNone/>
-            </a:pPr>
-            <a:r>
-              <a:rPr lang="en-US" sz="1000" b="1" dirty="0">
-                <a:solidFill>
-                  <a:srgbClr val="B8975C"/>
-                </a:solidFill>
-                <a:latin typeface="Open Sans" pitchFamily="34" charset="0"/>
-                <a:ea typeface="Open Sans" pitchFamily="34" charset="-122"/>
-                <a:cs typeface="Open Sans" pitchFamily="34" charset="-120"/>
-              </a:rPr>
-              <a:t>Example: submitting Stage 1</a:t>
-            </a:r>
-            <a:endParaRPr lang="en-US" sz="1000" dirty="0"/>
-          </a:p>
-        </p:txBody>
-      </p:sp>
-      <p:sp>
-        <p:nvSpPr>
-          <p:cNvPr id="10" name="Text 7"/>
-          <p:cNvSpPr/>
-          <p:nvPr/>
-        </p:nvSpPr>
-        <p:spPr>
-          <a:xfrm>
-            <a:off x="960120" y="4096512"/>
-            <a:ext cx="7132320" cy="411480"/>
-          </a:xfrm>
-          <a:prstGeom prst="rect">
-            <a:avLst/>
-          </a:prstGeom>
-          <a:noFill/>
-          <a:ln/>
-        </p:spPr>
-        <p:txBody>
-          <a:bodyPr wrap="square" lIns="0" tIns="0" rIns="0" bIns="0" rtlCol="0" anchor="ctr"/>
-          <a:lstStyle/>
-          <a:p>
-            <a:pPr marL="0" indent="0">
-              <a:lnSpc>
-                <a:spcPct val="130000"/>
-              </a:lnSpc>
-              <a:buNone/>
-            </a:pPr>
-            <a:r>
-              <a:rPr lang="en-US" sz="1000" dirty="0">
-                <a:solidFill>
-                  <a:srgbClr val="FFFFFF"/>
-                </a:solidFill>
-                <a:latin typeface="Consolas" pitchFamily="34" charset="0"/>
-                <a:ea typeface="Consolas" pitchFamily="34" charset="-122"/>
-                <a:cs typeface="Consolas" pitchFamily="34" charset="-120"/>
-              </a:rPr>
-              <a:t>git add docs/decisions/stauffer-stage1-memo.md</a:t>
-            </a:r>
-            <a:endParaRPr lang="en-US" sz="1000" dirty="0"/>
-          </a:p>
-          <a:p>
-            <a:pPr marL="0" indent="0">
-              <a:lnSpc>
-                <a:spcPct val="130000"/>
-              </a:lnSpc>
-              <a:buNone/>
-            </a:pPr>
-            <a:r>
-              <a:rPr lang="en-US" sz="1000" dirty="0">
-                <a:solidFill>
-                  <a:srgbClr val="FFFFFF"/>
-                </a:solidFill>
-                <a:latin typeface="Consolas" pitchFamily="34" charset="0"/>
-                <a:ea typeface="Consolas" pitchFamily="34" charset="-122"/>
-                <a:cs typeface="Consolas" pitchFamily="34" charset="-120"/>
-              </a:rPr>
-              <a:t>git commit -m "Stage 1: executive memo for AAPL ratio analysis"</a:t>
-            </a:r>
-            <a:endParaRPr lang="en-US" sz="1000" dirty="0"/>
-          </a:p>
-          <a:p>
-            <a:pPr marL="0" indent="0">
-              <a:lnSpc>
-                <a:spcPct val="130000"/>
-              </a:lnSpc>
-              <a:buNone/>
-            </a:pPr>
-            <a:r>
-              <a:rPr lang="en-US" sz="1000" dirty="0">
-                <a:solidFill>
-                  <a:srgbClr val="FFFFFF"/>
-                </a:solidFill>
-                <a:latin typeface="Consolas" pitchFamily="34" charset="0"/>
-                <a:ea typeface="Consolas" pitchFamily="34" charset="-122"/>
-                <a:cs typeface="Consolas" pitchFamily="34" charset="-120"/>
-              </a:rPr>
-              <a:t>git push</a:t>
-            </a:r>
-            <a:endParaRPr lang="en-US" sz="1000" dirty="0"/>
-          </a:p>
-        </p:txBody>
-      </p:sp>
-    </p:spTree>
-  </p:cSld>
-  <p:clrMapOvr>
-    <a:masterClrMapping/>
-  </p:clrMapOvr>
-</p:sld>
-</file>
-
-<file path=ppt/slides/slide9.xml><?xml version="1.0" encoding="utf-8"?>
-<p:sld xmlns:a="http://schemas.openxmlformats.org/drawingml/2006/main" xmlns:r="http://schemas.openxmlformats.org/officeDocument/2006/relationships" xmlns:p="http://schemas.openxmlformats.org/presentationml/2006/main">
-  <p:cSld name="Slide 9">
-    <p:bg>
-      <p:bgPr>
-        <a:solidFill>
-          <a:srgbClr val="FAF9F7"/>
-        </a:solidFill>
-        <a:effectLst/>
-      </p:bgPr>
-    </p:bg>
-    <p:spTree>
-      <p:nvGrpSpPr>
-        <p:cNvPr id="1" name=""/>
-        <p:cNvGrpSpPr/>
-        <p:nvPr/>
-      </p:nvGrpSpPr>
-      <p:grpSpPr>
-        <a:xfrm>
-          <a:off x="0" y="0"/>
-          <a:ext cx="0" cy="0"/>
-          <a:chOff x="0" y="0"/>
-          <a:chExt cx="0" cy="0"/>
-        </a:xfrm>
-      </p:grpSpPr>
-      <p:sp>
-        <p:nvSpPr>
-          <p:cNvPr id="2" name="Shape 0"/>
-          <p:cNvSpPr/>
-          <p:nvPr/>
-        </p:nvSpPr>
-        <p:spPr>
-          <a:xfrm>
-            <a:off x="0" y="0"/>
-            <a:ext cx="9144000" cy="36576"/>
-          </a:xfrm>
-          <a:prstGeom prst="rect">
-            <a:avLst/>
-          </a:prstGeom>
-          <a:solidFill>
-            <a:srgbClr val="B8975C"/>
-          </a:solidFill>
-          <a:ln/>
-        </p:spPr>
-        <p:txBody>
-          <a:bodyPr/>
-          <a:lstStyle/>
-          <a:p>
-            <a:endParaRPr lang="en-US"/>
-          </a:p>
-        </p:txBody>
-      </p:sp>
-      <p:sp>
-        <p:nvSpPr>
-          <p:cNvPr id="3" name="Shape 1"/>
-          <p:cNvSpPr/>
-          <p:nvPr/>
-        </p:nvSpPr>
-        <p:spPr>
-          <a:xfrm>
-            <a:off x="0" y="4709160"/>
-            <a:ext cx="9144000" cy="434340"/>
-          </a:xfrm>
-          <a:prstGeom prst="rect">
-            <a:avLst/>
-          </a:prstGeom>
-          <a:solidFill>
-            <a:srgbClr val="36454F"/>
-          </a:solidFill>
-          <a:ln/>
-        </p:spPr>
-        <p:txBody>
-          <a:bodyPr/>
-          <a:lstStyle/>
-          <a:p>
-            <a:endParaRPr lang="en-US"/>
-          </a:p>
-        </p:txBody>
-      </p:sp>
-      <p:sp>
-        <p:nvSpPr>
-          <p:cNvPr id="4" name="Text 2"/>
-          <p:cNvSpPr/>
-          <p:nvPr/>
-        </p:nvSpPr>
-        <p:spPr>
-          <a:xfrm>
-            <a:off x="457200" y="4754880"/>
-            <a:ext cx="8229600" cy="320040"/>
-          </a:xfrm>
-          <a:prstGeom prst="rect">
-            <a:avLst/>
-          </a:prstGeom>
-          <a:noFill/>
-          <a:ln/>
-        </p:spPr>
-        <p:txBody>
-          <a:bodyPr wrap="square" rtlCol="0" anchor="ctr"/>
-          <a:lstStyle/>
-          <a:p>
-            <a:pPr marL="0" indent="0" algn="ctr">
-              <a:buNone/>
-            </a:pPr>
-            <a:r>
-              <a:rPr lang="en-US" sz="900" dirty="0">
-                <a:solidFill>
-                  <a:srgbClr val="8A9BAD"/>
-                </a:solidFill>
-                <a:latin typeface="Open Sans" pitchFamily="34" charset="0"/>
-                <a:ea typeface="Open Sans" pitchFamily="34" charset="-122"/>
-                <a:cs typeface="Open Sans" pitchFamily="34" charset="-120"/>
-              </a:rPr>
-              <a:t>Stauffer  |  Appendix: GitHub &amp; AI Setup Guide  |  Shidler College of Business</a:t>
-            </a:r>
-            <a:endParaRPr lang="en-US" sz="900" dirty="0"/>
-          </a:p>
-        </p:txBody>
-      </p:sp>
-      <p:sp>
-        <p:nvSpPr>
-          <p:cNvPr id="5" name="Text 3"/>
-          <p:cNvSpPr/>
-          <p:nvPr/>
-        </p:nvSpPr>
-        <p:spPr>
-          <a:xfrm>
-            <a:off x="731520" y="320040"/>
-            <a:ext cx="7680960" cy="457200"/>
-          </a:xfrm>
-          <a:prstGeom prst="rect">
-            <a:avLst/>
-          </a:prstGeom>
-          <a:noFill/>
-          <a:ln/>
-        </p:spPr>
-        <p:txBody>
-          <a:bodyPr wrap="square" lIns="0" tIns="0" rIns="0" bIns="0" rtlCol="0" anchor="ctr"/>
-          <a:lstStyle/>
-          <a:p>
-            <a:pPr marL="0" indent="0">
-              <a:buNone/>
-            </a:pPr>
-            <a:r>
-              <a:rPr lang="en-US" sz="2800" b="1" dirty="0">
-                <a:solidFill>
-                  <a:srgbClr val="1E2530"/>
-                </a:solidFill>
-                <a:latin typeface="Open Sans" pitchFamily="34" charset="0"/>
-                <a:ea typeface="Open Sans" pitchFamily="34" charset="-122"/>
-                <a:cs typeface="Open Sans" pitchFamily="34" charset="-120"/>
-              </a:rPr>
-              <a:t>Common Git Mistakes &amp; How to Fix Them</a:t>
-            </a:r>
-            <a:endParaRPr lang="en-US" sz="2800" dirty="0"/>
-          </a:p>
-        </p:txBody>
-      </p:sp>
-      <p:sp>
-        <p:nvSpPr>
-          <p:cNvPr id="6" name="Shape 4"/>
-          <p:cNvSpPr/>
-          <p:nvPr/>
-        </p:nvSpPr>
-        <p:spPr>
-          <a:xfrm>
-            <a:off x="731520" y="960120"/>
-            <a:ext cx="7680960" cy="658368"/>
-          </a:xfrm>
-          <a:prstGeom prst="rect">
-            <a:avLst/>
-          </a:prstGeom>
-          <a:solidFill>
-            <a:srgbClr val="FFFFFF"/>
-          </a:solidFill>
-          <a:ln/>
-        </p:spPr>
-        <p:txBody>
-          <a:bodyPr/>
-          <a:lstStyle/>
-          <a:p>
-            <a:endParaRPr lang="en-US"/>
-          </a:p>
-        </p:txBody>
-      </p:sp>
-      <p:sp>
-        <p:nvSpPr>
-          <p:cNvPr id="7" name="Text 5"/>
-          <p:cNvSpPr/>
-          <p:nvPr/>
-        </p:nvSpPr>
-        <p:spPr>
-          <a:xfrm>
-            <a:off x="868680" y="978408"/>
-            <a:ext cx="3200400" cy="274320"/>
-          </a:xfrm>
-          <a:prstGeom prst="rect">
-            <a:avLst/>
-          </a:prstGeom>
-          <a:noFill/>
-          <a:ln/>
-        </p:spPr>
-        <p:txBody>
-          <a:bodyPr wrap="square" lIns="0" tIns="0" rIns="0" bIns="0" rtlCol="0" anchor="ctr"/>
-          <a:lstStyle/>
-          <a:p>
-            <a:pPr marL="0" indent="0">
-              <a:buNone/>
-            </a:pPr>
-            <a:r>
-              <a:rPr lang="en-US" sz="1200" b="1" dirty="0">
-                <a:solidFill>
-                  <a:srgbClr val="1E2530"/>
-                </a:solidFill>
-                <a:latin typeface="Open Sans" pitchFamily="34" charset="0"/>
-                <a:ea typeface="Open Sans" pitchFamily="34" charset="-122"/>
-                <a:cs typeface="Open Sans" pitchFamily="34" charset="-120"/>
-              </a:rPr>
-              <a:t>"Everything up-to-date" but nothing pushed</a:t>
-            </a:r>
-            <a:endParaRPr lang="en-US" sz="1200" dirty="0"/>
-          </a:p>
-        </p:txBody>
-      </p:sp>
-      <p:sp>
-        <p:nvSpPr>
-          <p:cNvPr id="8" name="Text 6"/>
-          <p:cNvSpPr/>
-          <p:nvPr/>
-        </p:nvSpPr>
-        <p:spPr>
-          <a:xfrm>
-            <a:off x="868680" y="1252728"/>
-            <a:ext cx="3200400" cy="274320"/>
-          </a:xfrm>
-          <a:prstGeom prst="rect">
-            <a:avLst/>
-          </a:prstGeom>
-          <a:noFill/>
-          <a:ln/>
-        </p:spPr>
-        <p:txBody>
-          <a:bodyPr wrap="square" lIns="0" tIns="0" rIns="0" bIns="0" rtlCol="0" anchor="ctr"/>
-          <a:lstStyle/>
-          <a:p>
-            <a:pPr marL="0" indent="0">
-              <a:buNone/>
-            </a:pPr>
-            <a:r>
-              <a:rPr lang="en-US" sz="1000" dirty="0">
-                <a:solidFill>
-                  <a:srgbClr val="5A6B7A"/>
-                </a:solidFill>
-                <a:latin typeface="Open Sans" pitchFamily="34" charset="0"/>
-                <a:ea typeface="Open Sans" pitchFamily="34" charset="-122"/>
-                <a:cs typeface="Open Sans" pitchFamily="34" charset="-120"/>
-              </a:rPr>
-              <a:t>You forgot  git add  before committing.</a:t>
-            </a:r>
-            <a:endParaRPr lang="en-US" sz="1000" dirty="0"/>
-          </a:p>
-        </p:txBody>
-      </p:sp>
-      <p:sp>
-        <p:nvSpPr>
-          <p:cNvPr id="9" name="Text 7"/>
-          <p:cNvSpPr/>
-          <p:nvPr/>
-        </p:nvSpPr>
-        <p:spPr>
-          <a:xfrm>
-            <a:off x="4389120" y="1005840"/>
-            <a:ext cx="3840480" cy="502920"/>
-          </a:xfrm>
-          <a:prstGeom prst="rect">
-            <a:avLst/>
-          </a:prstGeom>
-          <a:noFill/>
-          <a:ln/>
-        </p:spPr>
-        <p:txBody>
-          <a:bodyPr wrap="square" lIns="0" tIns="0" rIns="0" bIns="0" rtlCol="0" anchor="ctr"/>
-          <a:lstStyle/>
-          <a:p>
-            <a:pPr marL="0" indent="0">
-              <a:buNone/>
-            </a:pPr>
-            <a:r>
-              <a:rPr lang="en-US" sz="1100" dirty="0">
-                <a:solidFill>
-                  <a:srgbClr val="1B5E40"/>
-                </a:solidFill>
-                <a:latin typeface="Consolas" pitchFamily="34" charset="0"/>
-                <a:ea typeface="Consolas" pitchFamily="34" charset="-122"/>
-                <a:cs typeface="Consolas" pitchFamily="34" charset="-120"/>
-              </a:rPr>
-              <a:t>Fix:  git add .  then  git commit  then  git push</a:t>
-            </a:r>
-            <a:endParaRPr lang="en-US" sz="1100" dirty="0"/>
-          </a:p>
-        </p:txBody>
-      </p:sp>
-      <p:sp>
-        <p:nvSpPr>
-          <p:cNvPr id="10" name="Text 8"/>
-          <p:cNvSpPr/>
-          <p:nvPr/>
-        </p:nvSpPr>
-        <p:spPr>
-          <a:xfrm>
-            <a:off x="868680" y="1691640"/>
-            <a:ext cx="3200400" cy="274320"/>
-          </a:xfrm>
-          <a:prstGeom prst="rect">
-            <a:avLst/>
-          </a:prstGeom>
-          <a:noFill/>
-          <a:ln/>
-        </p:spPr>
-        <p:txBody>
-          <a:bodyPr wrap="square" lIns="0" tIns="0" rIns="0" bIns="0" rtlCol="0" anchor="ctr"/>
-          <a:lstStyle/>
-          <a:p>
-            <a:pPr marL="0" indent="0">
-              <a:buNone/>
-            </a:pPr>
-            <a:r>
-              <a:rPr lang="en-US" sz="1200" b="1" dirty="0">
-                <a:solidFill>
-                  <a:srgbClr val="1E2530"/>
-                </a:solidFill>
-                <a:latin typeface="Open Sans" pitchFamily="34" charset="0"/>
-                <a:ea typeface="Open Sans" pitchFamily="34" charset="-122"/>
-                <a:cs typeface="Open Sans" pitchFamily="34" charset="-120"/>
-              </a:rPr>
-              <a:t>"fatal: not a git repository"</a:t>
-            </a:r>
-            <a:endParaRPr lang="en-US" sz="1200" dirty="0"/>
-          </a:p>
-        </p:txBody>
-      </p:sp>
-      <p:sp>
-        <p:nvSpPr>
-          <p:cNvPr id="11" name="Text 9"/>
-          <p:cNvSpPr/>
-          <p:nvPr/>
-        </p:nvSpPr>
-        <p:spPr>
-          <a:xfrm>
-            <a:off x="868680" y="1965960"/>
-            <a:ext cx="3200400" cy="274320"/>
-          </a:xfrm>
-          <a:prstGeom prst="rect">
-            <a:avLst/>
-          </a:prstGeom>
-          <a:noFill/>
-          <a:ln/>
-        </p:spPr>
-        <p:txBody>
-          <a:bodyPr wrap="square" lIns="0" tIns="0" rIns="0" bIns="0" rtlCol="0" anchor="ctr"/>
-          <a:lstStyle/>
-          <a:p>
-            <a:pPr marL="0" indent="0">
-              <a:buNone/>
-            </a:pPr>
-            <a:r>
-              <a:rPr lang="en-US" sz="1000" dirty="0">
-                <a:solidFill>
-                  <a:srgbClr val="5A6B7A"/>
-                </a:solidFill>
-                <a:latin typeface="Open Sans" pitchFamily="34" charset="0"/>
-                <a:ea typeface="Open Sans" pitchFamily="34" charset="-122"/>
-                <a:cs typeface="Open Sans" pitchFamily="34" charset="-120"/>
-              </a:rPr>
-              <a:t>Your terminal is not inside the project folder.</a:t>
-            </a:r>
-            <a:endParaRPr lang="en-US" sz="1000" dirty="0"/>
-          </a:p>
-        </p:txBody>
-      </p:sp>
-      <p:sp>
-        <p:nvSpPr>
-          <p:cNvPr id="12" name="Text 10"/>
-          <p:cNvSpPr/>
-          <p:nvPr/>
-        </p:nvSpPr>
-        <p:spPr>
-          <a:xfrm>
-            <a:off x="4389120" y="1719072"/>
-            <a:ext cx="3840480" cy="502920"/>
-          </a:xfrm>
-          <a:prstGeom prst="rect">
-            <a:avLst/>
-          </a:prstGeom>
-          <a:noFill/>
-          <a:ln/>
-        </p:spPr>
-        <p:txBody>
-          <a:bodyPr wrap="square" lIns="0" tIns="0" rIns="0" bIns="0" rtlCol="0" anchor="ctr"/>
-          <a:lstStyle/>
-          <a:p>
-            <a:pPr marL="0" indent="0">
-              <a:buNone/>
-            </a:pPr>
-            <a:r>
-              <a:rPr lang="en-US" sz="1100" dirty="0">
-                <a:solidFill>
-                  <a:srgbClr val="1B5E40"/>
-                </a:solidFill>
-                <a:latin typeface="Consolas" pitchFamily="34" charset="0"/>
-                <a:ea typeface="Consolas" pitchFamily="34" charset="-122"/>
-                <a:cs typeface="Consolas" pitchFamily="34" charset="-120"/>
-              </a:rPr>
-              <a:t>Fix:  cd repo-name  to navigate into the cloned folder</a:t>
-            </a:r>
-            <a:endParaRPr lang="en-US" sz="1100" dirty="0"/>
-          </a:p>
-        </p:txBody>
-      </p:sp>
-      <p:sp>
-        <p:nvSpPr>
-          <p:cNvPr id="13" name="Shape 11"/>
-          <p:cNvSpPr/>
-          <p:nvPr/>
-        </p:nvSpPr>
-        <p:spPr>
-          <a:xfrm>
-            <a:off x="731520" y="2386584"/>
-            <a:ext cx="7680960" cy="658368"/>
-          </a:xfrm>
-          <a:prstGeom prst="rect">
-            <a:avLst/>
-          </a:prstGeom>
-          <a:solidFill>
-            <a:srgbClr val="FFFFFF"/>
-          </a:solidFill>
-          <a:ln/>
-        </p:spPr>
-        <p:txBody>
-          <a:bodyPr/>
-          <a:lstStyle/>
-          <a:p>
-            <a:endParaRPr lang="en-US"/>
-          </a:p>
-        </p:txBody>
-      </p:sp>
-      <p:sp>
-        <p:nvSpPr>
-          <p:cNvPr id="14" name="Text 12"/>
-          <p:cNvSpPr/>
-          <p:nvPr/>
-        </p:nvSpPr>
-        <p:spPr>
-          <a:xfrm>
-            <a:off x="868680" y="2404872"/>
-            <a:ext cx="3200400" cy="274320"/>
-          </a:xfrm>
-          <a:prstGeom prst="rect">
-            <a:avLst/>
-          </a:prstGeom>
-          <a:noFill/>
-          <a:ln/>
-        </p:spPr>
-        <p:txBody>
-          <a:bodyPr wrap="square" lIns="0" tIns="0" rIns="0" bIns="0" rtlCol="0" anchor="ctr"/>
-          <a:lstStyle/>
-          <a:p>
-            <a:pPr marL="0" indent="0">
-              <a:buNone/>
-            </a:pPr>
-            <a:r>
-              <a:rPr lang="en-US" sz="1200" b="1" dirty="0">
-                <a:solidFill>
-                  <a:srgbClr val="1E2530"/>
-                </a:solidFill>
-                <a:latin typeface="Open Sans" pitchFamily="34" charset="0"/>
-                <a:ea typeface="Open Sans" pitchFamily="34" charset="-122"/>
-                <a:cs typeface="Open Sans" pitchFamily="34" charset="-120"/>
-              </a:rPr>
-              <a:t>Accidentally edited the wrong file</a:t>
-            </a:r>
-            <a:endParaRPr lang="en-US" sz="1200" dirty="0"/>
-          </a:p>
-        </p:txBody>
-      </p:sp>
-      <p:sp>
-        <p:nvSpPr>
-          <p:cNvPr id="15" name="Text 13"/>
-          <p:cNvSpPr/>
-          <p:nvPr/>
-        </p:nvSpPr>
-        <p:spPr>
-          <a:xfrm>
-            <a:off x="868680" y="2679192"/>
-            <a:ext cx="3200400" cy="274320"/>
-          </a:xfrm>
-          <a:prstGeom prst="rect">
-            <a:avLst/>
-          </a:prstGeom>
-          <a:noFill/>
-          <a:ln/>
-        </p:spPr>
-        <p:txBody>
-          <a:bodyPr wrap="square" lIns="0" tIns="0" rIns="0" bIns="0" rtlCol="0" anchor="ctr"/>
-          <a:lstStyle/>
-          <a:p>
-            <a:pPr marL="0" indent="0">
-              <a:buNone/>
-            </a:pPr>
-            <a:r>
-              <a:rPr lang="en-US" sz="1000" dirty="0">
-                <a:solidFill>
-                  <a:srgbClr val="5A6B7A"/>
-                </a:solidFill>
-                <a:latin typeface="Open Sans" pitchFamily="34" charset="0"/>
-                <a:ea typeface="Open Sans" pitchFamily="34" charset="-122"/>
-                <a:cs typeface="Open Sans" pitchFamily="34" charset="-120"/>
-              </a:rPr>
-              <a:t>No worries — Git tracks everything.</a:t>
-            </a:r>
-            <a:endParaRPr lang="en-US" sz="1000" dirty="0"/>
-          </a:p>
-        </p:txBody>
-      </p:sp>
-      <p:sp>
-        <p:nvSpPr>
-          <p:cNvPr id="16" name="Text 14"/>
-          <p:cNvSpPr/>
-          <p:nvPr/>
-        </p:nvSpPr>
-        <p:spPr>
-          <a:xfrm>
-            <a:off x="4389120" y="2432304"/>
-            <a:ext cx="3840480" cy="502920"/>
-          </a:xfrm>
-          <a:prstGeom prst="rect">
-            <a:avLst/>
-          </a:prstGeom>
-          <a:noFill/>
-          <a:ln/>
-        </p:spPr>
-        <p:txBody>
-          <a:bodyPr wrap="square" lIns="0" tIns="0" rIns="0" bIns="0" rtlCol="0" anchor="ctr"/>
-          <a:lstStyle/>
-          <a:p>
-            <a:pPr marL="0" indent="0">
-              <a:buNone/>
-            </a:pPr>
-            <a:r>
-              <a:rPr lang="en-US" sz="1100" dirty="0">
-                <a:solidFill>
-                  <a:srgbClr val="1B5E40"/>
-                </a:solidFill>
-                <a:latin typeface="Consolas" pitchFamily="34" charset="0"/>
-                <a:ea typeface="Consolas" pitchFamily="34" charset="-122"/>
-                <a:cs typeface="Consolas" pitchFamily="34" charset="-120"/>
-              </a:rPr>
-              <a:t>Fix:  git checkout -- filename  reverts to last commit</a:t>
-            </a:r>
-            <a:endParaRPr lang="en-US" sz="1100" dirty="0"/>
-          </a:p>
-        </p:txBody>
-      </p:sp>
-      <p:sp>
-        <p:nvSpPr>
-          <p:cNvPr id="17" name="Text 15"/>
-          <p:cNvSpPr/>
-          <p:nvPr/>
-        </p:nvSpPr>
-        <p:spPr>
-          <a:xfrm>
-            <a:off x="868680" y="3118104"/>
-            <a:ext cx="3200400" cy="274320"/>
-          </a:xfrm>
-          <a:prstGeom prst="rect">
-            <a:avLst/>
-          </a:prstGeom>
-          <a:noFill/>
-          <a:ln/>
-        </p:spPr>
-        <p:txBody>
-          <a:bodyPr wrap="square" lIns="0" tIns="0" rIns="0" bIns="0" rtlCol="0" anchor="ctr"/>
-          <a:lstStyle/>
-          <a:p>
-            <a:pPr marL="0" indent="0">
-              <a:buNone/>
-            </a:pPr>
-            <a:r>
-              <a:rPr lang="en-US" sz="1200" b="1" dirty="0">
-                <a:solidFill>
-                  <a:srgbClr val="1E2530"/>
-                </a:solidFill>
-                <a:latin typeface="Open Sans" pitchFamily="34" charset="0"/>
-                <a:ea typeface="Open Sans" pitchFamily="34" charset="-122"/>
-                <a:cs typeface="Open Sans" pitchFamily="34" charset="-120"/>
-              </a:rPr>
-              <a:t>"rejected — failed to push"</a:t>
-            </a:r>
-            <a:endParaRPr lang="en-US" sz="1200" dirty="0"/>
-          </a:p>
-        </p:txBody>
-      </p:sp>
-      <p:sp>
-        <p:nvSpPr>
-          <p:cNvPr id="18" name="Text 16"/>
-          <p:cNvSpPr/>
-          <p:nvPr/>
-        </p:nvSpPr>
-        <p:spPr>
-          <a:xfrm>
-            <a:off x="868680" y="3392424"/>
-            <a:ext cx="3200400" cy="274320"/>
-          </a:xfrm>
-          <a:prstGeom prst="rect">
-            <a:avLst/>
-          </a:prstGeom>
-          <a:noFill/>
-          <a:ln/>
-        </p:spPr>
-        <p:txBody>
-          <a:bodyPr wrap="square" lIns="0" tIns="0" rIns="0" bIns="0" rtlCol="0" anchor="ctr"/>
-          <a:lstStyle/>
-          <a:p>
-            <a:pPr marL="0" indent="0">
-              <a:buNone/>
-            </a:pPr>
-            <a:r>
-              <a:rPr lang="en-US" sz="1000" dirty="0">
-                <a:solidFill>
-                  <a:srgbClr val="5A6B7A"/>
-                </a:solidFill>
-                <a:latin typeface="Open Sans" pitchFamily="34" charset="0"/>
-                <a:ea typeface="Open Sans" pitchFamily="34" charset="-122"/>
-                <a:cs typeface="Open Sans" pitchFamily="34" charset="-120"/>
-              </a:rPr>
-              <a:t>Someone (or you on another device) pushed first.</a:t>
-            </a:r>
-            <a:endParaRPr lang="en-US" sz="1000" dirty="0"/>
-          </a:p>
-        </p:txBody>
-      </p:sp>
-      <p:sp>
-        <p:nvSpPr>
-          <p:cNvPr id="19" name="Text 17"/>
-          <p:cNvSpPr/>
-          <p:nvPr/>
-        </p:nvSpPr>
-        <p:spPr>
-          <a:xfrm>
-            <a:off x="4389120" y="3145536"/>
-            <a:ext cx="3840480" cy="502920"/>
-          </a:xfrm>
-          <a:prstGeom prst="rect">
-            <a:avLst/>
-          </a:prstGeom>
-          <a:noFill/>
-          <a:ln/>
-        </p:spPr>
-        <p:txBody>
-          <a:bodyPr wrap="square" lIns="0" tIns="0" rIns="0" bIns="0" rtlCol="0" anchor="ctr"/>
-          <a:lstStyle/>
-          <a:p>
-            <a:pPr marL="0" indent="0">
-              <a:buNone/>
-            </a:pPr>
-            <a:r>
-              <a:rPr lang="en-US" sz="1100" dirty="0">
-                <a:solidFill>
-                  <a:srgbClr val="1B5E40"/>
-                </a:solidFill>
-                <a:latin typeface="Consolas" pitchFamily="34" charset="0"/>
-                <a:ea typeface="Consolas" pitchFamily="34" charset="-122"/>
-                <a:cs typeface="Consolas" pitchFamily="34" charset="-120"/>
-              </a:rPr>
-              <a:t>Fix:  git pull  then  git push  to sync and re-upload</a:t>
-            </a:r>
-            <a:endParaRPr lang="en-US" sz="1100" dirty="0"/>
-          </a:p>
-        </p:txBody>
-      </p:sp>
-      <p:sp>
-        <p:nvSpPr>
-          <p:cNvPr id="20" name="Shape 18"/>
-          <p:cNvSpPr/>
-          <p:nvPr/>
-        </p:nvSpPr>
-        <p:spPr>
-          <a:xfrm>
-            <a:off x="731520" y="3813048"/>
-            <a:ext cx="7680960" cy="658368"/>
-          </a:xfrm>
-          <a:prstGeom prst="rect">
-            <a:avLst/>
-          </a:prstGeom>
-          <a:solidFill>
-            <a:srgbClr val="FFFFFF"/>
-          </a:solidFill>
-          <a:ln/>
-        </p:spPr>
-        <p:txBody>
-          <a:bodyPr/>
-          <a:lstStyle/>
-          <a:p>
-            <a:endParaRPr lang="en-US"/>
-          </a:p>
-        </p:txBody>
-      </p:sp>
-      <p:sp>
-        <p:nvSpPr>
-          <p:cNvPr id="21" name="Text 19"/>
-          <p:cNvSpPr/>
-          <p:nvPr/>
-        </p:nvSpPr>
-        <p:spPr>
-          <a:xfrm>
-            <a:off x="868680" y="3831336"/>
-            <a:ext cx="3200400" cy="274320"/>
-          </a:xfrm>
-          <a:prstGeom prst="rect">
-            <a:avLst/>
-          </a:prstGeom>
-          <a:noFill/>
-          <a:ln/>
-        </p:spPr>
-        <p:txBody>
-          <a:bodyPr wrap="square" lIns="0" tIns="0" rIns="0" bIns="0" rtlCol="0" anchor="ctr"/>
-          <a:lstStyle/>
-          <a:p>
-            <a:pPr marL="0" indent="0">
-              <a:buNone/>
-            </a:pPr>
-            <a:r>
-              <a:rPr lang="en-US" sz="1200" b="1" dirty="0">
-                <a:solidFill>
-                  <a:srgbClr val="1E2530"/>
-                </a:solidFill>
-                <a:latin typeface="Open Sans" pitchFamily="34" charset="0"/>
-                <a:ea typeface="Open Sans" pitchFamily="34" charset="-122"/>
-                <a:cs typeface="Open Sans" pitchFamily="34" charset="-120"/>
-              </a:rPr>
-              <a:t>Forgot to write a commit message</a:t>
-            </a:r>
-            <a:endParaRPr lang="en-US" sz="1200" dirty="0"/>
-          </a:p>
-        </p:txBody>
-      </p:sp>
-      <p:sp>
-        <p:nvSpPr>
-          <p:cNvPr id="22" name="Text 20"/>
-          <p:cNvSpPr/>
-          <p:nvPr/>
-        </p:nvSpPr>
-        <p:spPr>
-          <a:xfrm>
-            <a:off x="868680" y="4105656"/>
-            <a:ext cx="3200400" cy="274320"/>
-          </a:xfrm>
-          <a:prstGeom prst="rect">
-            <a:avLst/>
-          </a:prstGeom>
-          <a:noFill/>
-          <a:ln/>
-        </p:spPr>
-        <p:txBody>
-          <a:bodyPr wrap="square" lIns="0" tIns="0" rIns="0" bIns="0" rtlCol="0" anchor="ctr"/>
-          <a:lstStyle/>
-          <a:p>
-            <a:pPr marL="0" indent="0">
-              <a:buNone/>
-            </a:pPr>
-            <a:r>
-              <a:rPr lang="en-US" sz="1000" dirty="0">
-                <a:solidFill>
-                  <a:srgbClr val="5A6B7A"/>
-                </a:solidFill>
-                <a:latin typeface="Open Sans" pitchFamily="34" charset="0"/>
-                <a:ea typeface="Open Sans" pitchFamily="34" charset="-122"/>
-                <a:cs typeface="Open Sans" pitchFamily="34" charset="-120"/>
-              </a:rPr>
-              <a:t>A text editor opened and you're stuck.</a:t>
-            </a:r>
-            <a:endParaRPr lang="en-US" sz="1000" dirty="0"/>
-          </a:p>
-        </p:txBody>
-      </p:sp>
-      <p:sp>
-        <p:nvSpPr>
-          <p:cNvPr id="23" name="Text 21"/>
-          <p:cNvSpPr/>
-          <p:nvPr/>
-        </p:nvSpPr>
-        <p:spPr>
-          <a:xfrm>
-            <a:off x="4389120" y="3858768"/>
-            <a:ext cx="3840480" cy="502920"/>
-          </a:xfrm>
-          <a:prstGeom prst="rect">
-            <a:avLst/>
-          </a:prstGeom>
-          <a:noFill/>
-          <a:ln/>
-        </p:spPr>
-        <p:txBody>
-          <a:bodyPr wrap="square" lIns="0" tIns="0" rIns="0" bIns="0" rtlCol="0" anchor="ctr"/>
-          <a:lstStyle/>
-          <a:p>
-            <a:pPr marL="0" indent="0">
-              <a:buNone/>
-            </a:pPr>
-            <a:r>
-              <a:rPr lang="en-US" sz="1100" dirty="0">
-                <a:solidFill>
-                  <a:srgbClr val="1B5E40"/>
-                </a:solidFill>
-                <a:latin typeface="Consolas" pitchFamily="34" charset="0"/>
-                <a:ea typeface="Consolas" pitchFamily="34" charset="-122"/>
-                <a:cs typeface="Consolas" pitchFamily="34" charset="-120"/>
-              </a:rPr>
-              <a:t>Fix:  Type your message, then press Esc, type  :wq  and press Enter</a:t>
             </a:r>
             <a:endParaRPr lang="en-US" sz="1100" dirty="0"/>
           </a:p>

--- a/docs/presentations/GitHub_AI_Appendix.pptx
+++ b/docs/presentations/GitHub_AI_Appendix.pptx
@@ -6106,7 +6106,7 @@
                 <a:ea typeface="Open Sans" pitchFamily="34" charset="-122"/>
                 <a:cs typeface="Open Sans" pitchFamily="34" charset="-120"/>
               </a:rPr>
-              <a:t>NOW ONLINE</a:t>
+              <a:t>STEP 4 OF 4</a:t>
             </a:r>
             <a:endParaRPr lang="en-US" sz="1400" dirty="0"/>
           </a:p>

--- a/docs/presentations/GitHub_AI_Appendix.pptx
+++ b/docs/presentations/GitHub_AI_Appendix.pptx
@@ -14,11 +14,6 @@
     <p:sldId id="259" r:id="rId5"/>
     <p:sldId id="260" r:id="rId6"/>
     <p:sldId id="271" r:id="rId22"/>
-    <p:sldId id="265" r:id="rId11"/>
-    <p:sldId id="266" r:id="rId12"/>
-    <p:sldId id="267" r:id="rId13"/>
-    <p:sldId id="268" r:id="rId14"/>
-    <p:sldId id="269" r:id="rId15"/>
   </p:sldIdLst>
   <p:sldSz cx="9144000" cy="5143500" type="screen16x9"/>
   <p:notesSz cx="5143500" cy="9144000"/>
@@ -331,426 +326,6 @@
 </p:notes>
 </file>
 
-<file path=ppt/notesSlides/notesSlide10.xml><?xml version="1.0" encoding="utf-8"?>
-<p:notes xmlns:a="http://schemas.openxmlformats.org/drawingml/2006/main" xmlns:r="http://schemas.openxmlformats.org/officeDocument/2006/relationships" xmlns:p="http://schemas.openxmlformats.org/presentationml/2006/main">
-  <p:cSld>
-    <p:spTree>
-      <p:nvGrpSpPr>
-        <p:cNvPr id="1" name=""/>
-        <p:cNvGrpSpPr/>
-        <p:nvPr/>
-      </p:nvGrpSpPr>
-      <p:grpSpPr>
-        <a:xfrm>
-          <a:off x="0" y="0"/>
-          <a:ext cx="0" cy="0"/>
-          <a:chOff x="0" y="0"/>
-          <a:chExt cx="0" cy="0"/>
-        </a:xfrm>
-      </p:grpSpPr>
-      <p:sp>
-        <p:nvSpPr>
-          <p:cNvPr id="2" name="Slide Image Placeholder 1"/>
-          <p:cNvSpPr>
-            <a:spLocks noGrp="1" noRot="1" noChangeAspect="1"/>
-          </p:cNvSpPr>
-          <p:nvPr>
-            <p:ph type="sldImg"/>
-          </p:nvPr>
-        </p:nvSpPr>
-        <p:spPr/>
-      </p:sp>
-      <p:sp>
-        <p:nvSpPr>
-          <p:cNvPr id="3" name="Notes Placeholder 2"/>
-          <p:cNvSpPr>
-            <a:spLocks noGrp="1"/>
-          </p:cNvSpPr>
-          <p:nvPr>
-            <p:ph type="body" idx="1"/>
-          </p:nvPr>
-        </p:nvSpPr>
-        <p:spPr/>
-        <p:txBody>
-          <a:bodyPr/>
-          <a:lstStyle/>
-          <a:p>
-            <a:endParaRPr lang="en-US" dirty="0"/>
-          </a:p>
-        </p:txBody>
-      </p:sp>
-      <p:sp>
-        <p:nvSpPr>
-          <p:cNvPr id="4" name="Slide Number Placeholder 3"/>
-          <p:cNvSpPr>
-            <a:spLocks noGrp="1"/>
-          </p:cNvSpPr>
-          <p:nvPr>
-            <p:ph type="sldNum" sz="quarter" idx="10"/>
-          </p:nvPr>
-        </p:nvSpPr>
-        <p:spPr/>
-        <p:txBody>
-          <a:bodyPr/>
-          <a:lstStyle/>
-          <a:p>
-            <a:fld id="{F7021451-1387-4CA6-816F-3879F97B5CBC}" type="slidenum">
-              <a:rPr lang="en-US"/>
-              <a:t>10</a:t>
-            </a:fld>
-            <a:endParaRPr lang="en-US"/>
-          </a:p>
-        </p:txBody>
-      </p:sp>
-    </p:spTree>
-    <p:extLst>
-      <p:ext uri="{BB962C8B-B14F-4D97-AF65-F5344CB8AC3E}">
-        <p14:creationId xmlns:p14="http://schemas.microsoft.com/office/powerpoint/2010/main" val="1024086991"/>
-      </p:ext>
-    </p:extLst>
-  </p:cSld>
-  <p:clrMapOvr>
-    <a:masterClrMapping/>
-  </p:clrMapOvr>
-</p:notes>
-</file>
-
-<file path=ppt/notesSlides/notesSlide11.xml><?xml version="1.0" encoding="utf-8"?>
-<p:notes xmlns:a="http://schemas.openxmlformats.org/drawingml/2006/main" xmlns:r="http://schemas.openxmlformats.org/officeDocument/2006/relationships" xmlns:p="http://schemas.openxmlformats.org/presentationml/2006/main">
-  <p:cSld>
-    <p:spTree>
-      <p:nvGrpSpPr>
-        <p:cNvPr id="1" name=""/>
-        <p:cNvGrpSpPr/>
-        <p:nvPr/>
-      </p:nvGrpSpPr>
-      <p:grpSpPr>
-        <a:xfrm>
-          <a:off x="0" y="0"/>
-          <a:ext cx="0" cy="0"/>
-          <a:chOff x="0" y="0"/>
-          <a:chExt cx="0" cy="0"/>
-        </a:xfrm>
-      </p:grpSpPr>
-      <p:sp>
-        <p:nvSpPr>
-          <p:cNvPr id="2" name="Slide Image Placeholder 1"/>
-          <p:cNvSpPr>
-            <a:spLocks noGrp="1" noRot="1" noChangeAspect="1"/>
-          </p:cNvSpPr>
-          <p:nvPr>
-            <p:ph type="sldImg"/>
-          </p:nvPr>
-        </p:nvSpPr>
-        <p:spPr/>
-      </p:sp>
-      <p:sp>
-        <p:nvSpPr>
-          <p:cNvPr id="3" name="Notes Placeholder 2"/>
-          <p:cNvSpPr>
-            <a:spLocks noGrp="1"/>
-          </p:cNvSpPr>
-          <p:nvPr>
-            <p:ph type="body" idx="1"/>
-          </p:nvPr>
-        </p:nvSpPr>
-        <p:spPr/>
-        <p:txBody>
-          <a:bodyPr/>
-          <a:lstStyle/>
-          <a:p>
-            <a:endParaRPr lang="en-US" dirty="0"/>
-          </a:p>
-        </p:txBody>
-      </p:sp>
-      <p:sp>
-        <p:nvSpPr>
-          <p:cNvPr id="4" name="Slide Number Placeholder 3"/>
-          <p:cNvSpPr>
-            <a:spLocks noGrp="1"/>
-          </p:cNvSpPr>
-          <p:nvPr>
-            <p:ph type="sldNum" sz="quarter" idx="10"/>
-          </p:nvPr>
-        </p:nvSpPr>
-        <p:spPr/>
-        <p:txBody>
-          <a:bodyPr/>
-          <a:lstStyle/>
-          <a:p>
-            <a:fld id="{F7021451-1387-4CA6-816F-3879F97B5CBC}" type="slidenum">
-              <a:rPr lang="en-US"/>
-              <a:t>11</a:t>
-            </a:fld>
-            <a:endParaRPr lang="en-US"/>
-          </a:p>
-        </p:txBody>
-      </p:sp>
-    </p:spTree>
-    <p:extLst>
-      <p:ext uri="{BB962C8B-B14F-4D97-AF65-F5344CB8AC3E}">
-        <p14:creationId xmlns:p14="http://schemas.microsoft.com/office/powerpoint/2010/main" val="1024086991"/>
-      </p:ext>
-    </p:extLst>
-  </p:cSld>
-  <p:clrMapOvr>
-    <a:masterClrMapping/>
-  </p:clrMapOvr>
-</p:notes>
-</file>
-
-<file path=ppt/notesSlides/notesSlide12.xml><?xml version="1.0" encoding="utf-8"?>
-<p:notes xmlns:a="http://schemas.openxmlformats.org/drawingml/2006/main" xmlns:r="http://schemas.openxmlformats.org/officeDocument/2006/relationships" xmlns:p="http://schemas.openxmlformats.org/presentationml/2006/main">
-  <p:cSld>
-    <p:spTree>
-      <p:nvGrpSpPr>
-        <p:cNvPr id="1" name=""/>
-        <p:cNvGrpSpPr/>
-        <p:nvPr/>
-      </p:nvGrpSpPr>
-      <p:grpSpPr>
-        <a:xfrm>
-          <a:off x="0" y="0"/>
-          <a:ext cx="0" cy="0"/>
-          <a:chOff x="0" y="0"/>
-          <a:chExt cx="0" cy="0"/>
-        </a:xfrm>
-      </p:grpSpPr>
-      <p:sp>
-        <p:nvSpPr>
-          <p:cNvPr id="2" name="Slide Image Placeholder 1"/>
-          <p:cNvSpPr>
-            <a:spLocks noGrp="1" noRot="1" noChangeAspect="1"/>
-          </p:cNvSpPr>
-          <p:nvPr>
-            <p:ph type="sldImg"/>
-          </p:nvPr>
-        </p:nvSpPr>
-        <p:spPr/>
-      </p:sp>
-      <p:sp>
-        <p:nvSpPr>
-          <p:cNvPr id="3" name="Notes Placeholder 2"/>
-          <p:cNvSpPr>
-            <a:spLocks noGrp="1"/>
-          </p:cNvSpPr>
-          <p:nvPr>
-            <p:ph type="body" idx="1"/>
-          </p:nvPr>
-        </p:nvSpPr>
-        <p:spPr/>
-        <p:txBody>
-          <a:bodyPr/>
-          <a:lstStyle/>
-          <a:p>
-            <a:endParaRPr lang="en-US" dirty="0"/>
-          </a:p>
-        </p:txBody>
-      </p:sp>
-      <p:sp>
-        <p:nvSpPr>
-          <p:cNvPr id="4" name="Slide Number Placeholder 3"/>
-          <p:cNvSpPr>
-            <a:spLocks noGrp="1"/>
-          </p:cNvSpPr>
-          <p:nvPr>
-            <p:ph type="sldNum" sz="quarter" idx="10"/>
-          </p:nvPr>
-        </p:nvSpPr>
-        <p:spPr/>
-        <p:txBody>
-          <a:bodyPr/>
-          <a:lstStyle/>
-          <a:p>
-            <a:fld id="{F7021451-1387-4CA6-816F-3879F97B5CBC}" type="slidenum">
-              <a:rPr lang="en-US"/>
-              <a:t>12</a:t>
-            </a:fld>
-            <a:endParaRPr lang="en-US"/>
-          </a:p>
-        </p:txBody>
-      </p:sp>
-    </p:spTree>
-    <p:extLst>
-      <p:ext uri="{BB962C8B-B14F-4D97-AF65-F5344CB8AC3E}">
-        <p14:creationId xmlns:p14="http://schemas.microsoft.com/office/powerpoint/2010/main" val="1024086991"/>
-      </p:ext>
-    </p:extLst>
-  </p:cSld>
-  <p:clrMapOvr>
-    <a:masterClrMapping/>
-  </p:clrMapOvr>
-</p:notes>
-</file>
-
-<file path=ppt/notesSlides/notesSlide13.xml><?xml version="1.0" encoding="utf-8"?>
-<p:notes xmlns:a="http://schemas.openxmlformats.org/drawingml/2006/main" xmlns:r="http://schemas.openxmlformats.org/officeDocument/2006/relationships" xmlns:p="http://schemas.openxmlformats.org/presentationml/2006/main">
-  <p:cSld>
-    <p:spTree>
-      <p:nvGrpSpPr>
-        <p:cNvPr id="1" name=""/>
-        <p:cNvGrpSpPr/>
-        <p:nvPr/>
-      </p:nvGrpSpPr>
-      <p:grpSpPr>
-        <a:xfrm>
-          <a:off x="0" y="0"/>
-          <a:ext cx="0" cy="0"/>
-          <a:chOff x="0" y="0"/>
-          <a:chExt cx="0" cy="0"/>
-        </a:xfrm>
-      </p:grpSpPr>
-      <p:sp>
-        <p:nvSpPr>
-          <p:cNvPr id="2" name="Slide Image Placeholder 1"/>
-          <p:cNvSpPr>
-            <a:spLocks noGrp="1" noRot="1" noChangeAspect="1"/>
-          </p:cNvSpPr>
-          <p:nvPr>
-            <p:ph type="sldImg"/>
-          </p:nvPr>
-        </p:nvSpPr>
-        <p:spPr/>
-      </p:sp>
-      <p:sp>
-        <p:nvSpPr>
-          <p:cNvPr id="3" name="Notes Placeholder 2"/>
-          <p:cNvSpPr>
-            <a:spLocks noGrp="1"/>
-          </p:cNvSpPr>
-          <p:nvPr>
-            <p:ph type="body" idx="1"/>
-          </p:nvPr>
-        </p:nvSpPr>
-        <p:spPr/>
-        <p:txBody>
-          <a:bodyPr/>
-          <a:lstStyle/>
-          <a:p>
-            <a:endParaRPr lang="en-US" dirty="0"/>
-          </a:p>
-        </p:txBody>
-      </p:sp>
-      <p:sp>
-        <p:nvSpPr>
-          <p:cNvPr id="4" name="Slide Number Placeholder 3"/>
-          <p:cNvSpPr>
-            <a:spLocks noGrp="1"/>
-          </p:cNvSpPr>
-          <p:nvPr>
-            <p:ph type="sldNum" sz="quarter" idx="10"/>
-          </p:nvPr>
-        </p:nvSpPr>
-        <p:spPr/>
-        <p:txBody>
-          <a:bodyPr/>
-          <a:lstStyle/>
-          <a:p>
-            <a:fld id="{F7021451-1387-4CA6-816F-3879F97B5CBC}" type="slidenum">
-              <a:rPr lang="en-US"/>
-              <a:t>13</a:t>
-            </a:fld>
-            <a:endParaRPr lang="en-US"/>
-          </a:p>
-        </p:txBody>
-      </p:sp>
-    </p:spTree>
-    <p:extLst>
-      <p:ext uri="{BB962C8B-B14F-4D97-AF65-F5344CB8AC3E}">
-        <p14:creationId xmlns:p14="http://schemas.microsoft.com/office/powerpoint/2010/main" val="1024086991"/>
-      </p:ext>
-    </p:extLst>
-  </p:cSld>
-  <p:clrMapOvr>
-    <a:masterClrMapping/>
-  </p:clrMapOvr>
-</p:notes>
-</file>
-
-<file path=ppt/notesSlides/notesSlide14.xml><?xml version="1.0" encoding="utf-8"?>
-<p:notes xmlns:a="http://schemas.openxmlformats.org/drawingml/2006/main" xmlns:r="http://schemas.openxmlformats.org/officeDocument/2006/relationships" xmlns:p="http://schemas.openxmlformats.org/presentationml/2006/main">
-  <p:cSld>
-    <p:spTree>
-      <p:nvGrpSpPr>
-        <p:cNvPr id="1" name=""/>
-        <p:cNvGrpSpPr/>
-        <p:nvPr/>
-      </p:nvGrpSpPr>
-      <p:grpSpPr>
-        <a:xfrm>
-          <a:off x="0" y="0"/>
-          <a:ext cx="0" cy="0"/>
-          <a:chOff x="0" y="0"/>
-          <a:chExt cx="0" cy="0"/>
-        </a:xfrm>
-      </p:grpSpPr>
-      <p:sp>
-        <p:nvSpPr>
-          <p:cNvPr id="2" name="Slide Image Placeholder 1"/>
-          <p:cNvSpPr>
-            <a:spLocks noGrp="1" noRot="1" noChangeAspect="1"/>
-          </p:cNvSpPr>
-          <p:nvPr>
-            <p:ph type="sldImg"/>
-          </p:nvPr>
-        </p:nvSpPr>
-        <p:spPr/>
-      </p:sp>
-      <p:sp>
-        <p:nvSpPr>
-          <p:cNvPr id="3" name="Notes Placeholder 2"/>
-          <p:cNvSpPr>
-            <a:spLocks noGrp="1"/>
-          </p:cNvSpPr>
-          <p:nvPr>
-            <p:ph type="body" idx="1"/>
-          </p:nvPr>
-        </p:nvSpPr>
-        <p:spPr/>
-        <p:txBody>
-          <a:bodyPr/>
-          <a:lstStyle/>
-          <a:p>
-            <a:endParaRPr lang="en-US" dirty="0"/>
-          </a:p>
-        </p:txBody>
-      </p:sp>
-      <p:sp>
-        <p:nvSpPr>
-          <p:cNvPr id="4" name="Slide Number Placeholder 3"/>
-          <p:cNvSpPr>
-            <a:spLocks noGrp="1"/>
-          </p:cNvSpPr>
-          <p:nvPr>
-            <p:ph type="sldNum" sz="quarter" idx="10"/>
-          </p:nvPr>
-        </p:nvSpPr>
-        <p:spPr/>
-        <p:txBody>
-          <a:bodyPr/>
-          <a:lstStyle/>
-          <a:p>
-            <a:fld id="{F7021451-1387-4CA6-816F-3879F97B5CBC}" type="slidenum">
-              <a:rPr lang="en-US"/>
-              <a:t>14</a:t>
-            </a:fld>
-            <a:endParaRPr lang="en-US"/>
-          </a:p>
-        </p:txBody>
-      </p:sp>
-    </p:spTree>
-    <p:extLst>
-      <p:ext uri="{BB962C8B-B14F-4D97-AF65-F5344CB8AC3E}">
-        <p14:creationId xmlns:p14="http://schemas.microsoft.com/office/powerpoint/2010/main" val="1024086991"/>
-      </p:ext>
-    </p:extLst>
-  </p:cSld>
-  <p:clrMapOvr>
-    <a:masterClrMapping/>
-  </p:clrMapOvr>
-</p:notes>
-</file>
-
 <file path=ppt/notesSlides/notesSlide2.xml><?xml version="1.0" encoding="utf-8"?>
 <p:notes xmlns:a="http://schemas.openxmlformats.org/drawingml/2006/main" xmlns:r="http://schemas.openxmlformats.org/officeDocument/2006/relationships" xmlns:p="http://schemas.openxmlformats.org/presentationml/2006/main">
   <p:cSld>
@@ -1701,4315 +1276,6 @@
               <a:t>Stauffer  |  Shidler College of Business  |  University of Hawaiʻi at Mānoa</a:t>
             </a:r>
             <a:endParaRPr lang="en-US" sz="1000" dirty="0"/>
-          </a:p>
-        </p:txBody>
-      </p:sp>
-    </p:spTree>
-  </p:cSld>
-  <p:clrMapOvr>
-    <a:masterClrMapping/>
-  </p:clrMapOvr>
-</p:sld>
-</file>
-
-<file path=ppt/slides/slide10.xml><?xml version="1.0" encoding="utf-8"?>
-<p:sld xmlns:a="http://schemas.openxmlformats.org/drawingml/2006/main" xmlns:r="http://schemas.openxmlformats.org/officeDocument/2006/relationships" xmlns:p="http://schemas.openxmlformats.org/presentationml/2006/main">
-  <p:cSld name="Slide 10">
-    <p:bg>
-      <p:bgPr>
-        <a:solidFill>
-          <a:srgbClr val="1E2530"/>
-        </a:solidFill>
-        <a:effectLst/>
-      </p:bgPr>
-    </p:bg>
-    <p:spTree>
-      <p:nvGrpSpPr>
-        <p:cNvPr id="1" name=""/>
-        <p:cNvGrpSpPr/>
-        <p:nvPr/>
-      </p:nvGrpSpPr>
-      <p:grpSpPr>
-        <a:xfrm>
-          <a:off x="0" y="0"/>
-          <a:ext cx="0" cy="0"/>
-          <a:chOff x="0" y="0"/>
-          <a:chExt cx="0" cy="0"/>
-        </a:xfrm>
-      </p:grpSpPr>
-      <p:sp>
-        <p:nvSpPr>
-          <p:cNvPr id="2" name="Shape 0"/>
-          <p:cNvSpPr/>
-          <p:nvPr/>
-        </p:nvSpPr>
-        <p:spPr>
-          <a:xfrm>
-            <a:off x="0" y="0"/>
-            <a:ext cx="9144000" cy="36576"/>
-          </a:xfrm>
-          <a:prstGeom prst="rect">
-            <a:avLst/>
-          </a:prstGeom>
-          <a:solidFill>
-            <a:srgbClr val="B8975C"/>
-          </a:solidFill>
-          <a:ln/>
-        </p:spPr>
-        <p:txBody>
-          <a:bodyPr/>
-          <a:lstStyle/>
-          <a:p>
-            <a:endParaRPr lang="en-US"/>
-          </a:p>
-        </p:txBody>
-      </p:sp>
-      <p:sp>
-        <p:nvSpPr>
-          <p:cNvPr id="3" name="Text 1"/>
-          <p:cNvSpPr/>
-          <p:nvPr/>
-        </p:nvSpPr>
-        <p:spPr>
-          <a:xfrm>
-            <a:off x="731520" y="731520"/>
-            <a:ext cx="7680960" cy="365760"/>
-          </a:xfrm>
-          <a:prstGeom prst="rect">
-            <a:avLst/>
-          </a:prstGeom>
-          <a:noFill/>
-          <a:ln/>
-        </p:spPr>
-        <p:txBody>
-          <a:bodyPr wrap="square" lIns="0" tIns="0" rIns="0" bIns="0" rtlCol="0" anchor="ctr"/>
-          <a:lstStyle/>
-          <a:p>
-            <a:pPr marL="0" indent="0">
-              <a:buNone/>
-            </a:pPr>
-            <a:r>
-              <a:rPr lang="en-US" sz="1400" b="1" kern="0" spc="600" dirty="0">
-                <a:solidFill>
-                  <a:srgbClr val="B8975C"/>
-                </a:solidFill>
-                <a:latin typeface="Open Sans" pitchFamily="34" charset="0"/>
-                <a:ea typeface="Open Sans" pitchFamily="34" charset="-122"/>
-                <a:cs typeface="Open Sans" pitchFamily="34" charset="-120"/>
-              </a:rPr>
-              <a:t>PART 2</a:t>
-            </a:r>
-            <a:endParaRPr lang="en-US" sz="1400" dirty="0"/>
-          </a:p>
-        </p:txBody>
-      </p:sp>
-      <p:sp>
-        <p:nvSpPr>
-          <p:cNvPr id="4" name="Text 2"/>
-          <p:cNvSpPr/>
-          <p:nvPr/>
-        </p:nvSpPr>
-        <p:spPr>
-          <a:xfrm>
-            <a:off x="731520" y="1280160"/>
-            <a:ext cx="7680960" cy="1645920"/>
-          </a:xfrm>
-          <a:prstGeom prst="rect">
-            <a:avLst/>
-          </a:prstGeom>
-          <a:noFill/>
-          <a:ln/>
-        </p:spPr>
-        <p:txBody>
-          <a:bodyPr wrap="square" lIns="0" tIns="0" rIns="0" bIns="0" rtlCol="0" anchor="ctr"/>
-          <a:lstStyle/>
-          <a:p>
-            <a:pPr marL="0" indent="0">
-              <a:lnSpc>
-                <a:spcPct val="110000"/>
-              </a:lnSpc>
-              <a:buNone/>
-            </a:pPr>
-            <a:r>
-              <a:rPr lang="en-US" sz="4000" b="1" dirty="0">
-                <a:solidFill>
-                  <a:srgbClr val="FFFFFF"/>
-                </a:solidFill>
-                <a:latin typeface="Open Sans" pitchFamily="34" charset="0"/>
-                <a:ea typeface="Open Sans" pitchFamily="34" charset="-122"/>
-                <a:cs typeface="Open Sans" pitchFamily="34" charset="-120"/>
-              </a:rPr>
-              <a:t>Using AI Tools</a:t>
-            </a:r>
-            <a:endParaRPr lang="en-US" sz="4000" dirty="0"/>
-          </a:p>
-          <a:p>
-            <a:pPr marL="0" indent="0">
-              <a:lnSpc>
-                <a:spcPct val="110000"/>
-              </a:lnSpc>
-              <a:buNone/>
-            </a:pPr>
-            <a:r>
-              <a:rPr lang="en-US" sz="4000" b="1" dirty="0">
-                <a:solidFill>
-                  <a:srgbClr val="FFFFFF"/>
-                </a:solidFill>
-                <a:latin typeface="Open Sans" pitchFamily="34" charset="0"/>
-                <a:ea typeface="Open Sans" pitchFamily="34" charset="-122"/>
-                <a:cs typeface="Open Sans" pitchFamily="34" charset="-120"/>
-              </a:rPr>
-              <a:t>with GitHub</a:t>
-            </a:r>
-            <a:endParaRPr lang="en-US" sz="4000" dirty="0"/>
-          </a:p>
-        </p:txBody>
-      </p:sp>
-      <p:sp>
-        <p:nvSpPr>
-          <p:cNvPr id="5" name="Shape 3"/>
-          <p:cNvSpPr/>
-          <p:nvPr/>
-        </p:nvSpPr>
-        <p:spPr>
-          <a:xfrm>
-            <a:off x="731520" y="3108960"/>
-            <a:ext cx="1828800" cy="36576"/>
-          </a:xfrm>
-          <a:prstGeom prst="rect">
-            <a:avLst/>
-          </a:prstGeom>
-          <a:solidFill>
-            <a:srgbClr val="B8975C"/>
-          </a:solidFill>
-          <a:ln/>
-        </p:spPr>
-        <p:txBody>
-          <a:bodyPr/>
-          <a:lstStyle/>
-          <a:p>
-            <a:endParaRPr lang="en-US"/>
-          </a:p>
-        </p:txBody>
-      </p:sp>
-      <p:sp>
-        <p:nvSpPr>
-          <p:cNvPr id="6" name="Text 4"/>
-          <p:cNvSpPr/>
-          <p:nvPr/>
-        </p:nvSpPr>
-        <p:spPr>
-          <a:xfrm>
-            <a:off x="731520" y="3337560"/>
-            <a:ext cx="6400800" cy="640080"/>
-          </a:xfrm>
-          <a:prstGeom prst="rect">
-            <a:avLst/>
-          </a:prstGeom>
-          <a:noFill/>
-          <a:ln/>
-        </p:spPr>
-        <p:txBody>
-          <a:bodyPr wrap="square" lIns="0" tIns="0" rIns="0" bIns="0" rtlCol="0" anchor="ctr"/>
-          <a:lstStyle/>
-          <a:p>
-            <a:pPr marL="0" indent="0">
-              <a:lnSpc>
-                <a:spcPct val="140000"/>
-              </a:lnSpc>
-              <a:buNone/>
-            </a:pPr>
-            <a:r>
-              <a:rPr lang="en-US" sz="1400" dirty="0">
-                <a:solidFill>
-                  <a:srgbClr val="8A9BAD"/>
-                </a:solidFill>
-                <a:latin typeface="Open Sans" pitchFamily="34" charset="0"/>
-                <a:ea typeface="Open Sans" pitchFamily="34" charset="-122"/>
-                <a:cs typeface="Open Sans" pitchFamily="34" charset="-120"/>
-              </a:rPr>
-              <a:t>How to use ChatGPT and Claude as analytical partners</a:t>
-            </a:r>
-            <a:endParaRPr lang="en-US" sz="1400" dirty="0"/>
-          </a:p>
-          <a:p>
-            <a:pPr marL="0" indent="0">
-              <a:lnSpc>
-                <a:spcPct val="140000"/>
-              </a:lnSpc>
-              <a:buNone/>
-            </a:pPr>
-            <a:r>
-              <a:rPr lang="en-US" sz="1400" dirty="0">
-                <a:solidFill>
-                  <a:srgbClr val="8A9BAD"/>
-                </a:solidFill>
-                <a:latin typeface="Open Sans" pitchFamily="34" charset="0"/>
-                <a:ea typeface="Open Sans" pitchFamily="34" charset="-122"/>
-                <a:cs typeface="Open Sans" pitchFamily="34" charset="-120"/>
-              </a:rPr>
-              <a:t>for your ratio analysis project.</a:t>
-            </a:r>
-            <a:endParaRPr lang="en-US" sz="1400" dirty="0"/>
-          </a:p>
-        </p:txBody>
-      </p:sp>
-      <p:pic>
-        <p:nvPicPr>
-          <p:cNvPr id="7" name="Image 0" descr="preencoded.png"/>
-          <p:cNvPicPr>
-            <a:picLocks noChangeAspect="1"/>
-          </p:cNvPicPr>
-          <p:nvPr/>
-        </p:nvPicPr>
-        <p:blipFill>
-          <a:blip r:embed="rId3"/>
-          <a:stretch>
-            <a:fillRect/>
-          </a:stretch>
-        </p:blipFill>
-        <p:spPr>
-          <a:xfrm>
-            <a:off x="7132320" y="3017520"/>
-            <a:ext cx="1097280" cy="1097280"/>
-          </a:xfrm>
-          <a:prstGeom prst="rect">
-            <a:avLst/>
-          </a:prstGeom>
-        </p:spPr>
-      </p:pic>
-      <p:sp>
-        <p:nvSpPr>
-          <p:cNvPr id="8" name="Text 5"/>
-          <p:cNvSpPr/>
-          <p:nvPr/>
-        </p:nvSpPr>
-        <p:spPr>
-          <a:xfrm>
-            <a:off x="457200" y="4663440"/>
-            <a:ext cx="8229600" cy="320040"/>
-          </a:xfrm>
-          <a:prstGeom prst="rect">
-            <a:avLst/>
-          </a:prstGeom>
-          <a:noFill/>
-          <a:ln/>
-        </p:spPr>
-        <p:txBody>
-          <a:bodyPr wrap="square" rtlCol="0" anchor="ctr"/>
-          <a:lstStyle/>
-          <a:p>
-            <a:pPr marL="0" indent="0" algn="ctr">
-              <a:buNone/>
-            </a:pPr>
-            <a:r>
-              <a:rPr lang="en-US" sz="1000" dirty="0">
-                <a:solidFill>
-                  <a:srgbClr val="5A6B7A"/>
-                </a:solidFill>
-                <a:latin typeface="Open Sans" pitchFamily="34" charset="0"/>
-                <a:ea typeface="Open Sans" pitchFamily="34" charset="-122"/>
-                <a:cs typeface="Open Sans" pitchFamily="34" charset="-120"/>
-              </a:rPr>
-              <a:t>Stauffer  |  Shidler College of Business  |  University of Hawaiʻi at Mānoa</a:t>
-            </a:r>
-            <a:endParaRPr lang="en-US" sz="1000" dirty="0"/>
-          </a:p>
-        </p:txBody>
-      </p:sp>
-    </p:spTree>
-  </p:cSld>
-  <p:clrMapOvr>
-    <a:masterClrMapping/>
-  </p:clrMapOvr>
-</p:sld>
-</file>
-
-<file path=ppt/slides/slide11.xml><?xml version="1.0" encoding="utf-8"?>
-<p:sld xmlns:a="http://schemas.openxmlformats.org/drawingml/2006/main" xmlns:r="http://schemas.openxmlformats.org/officeDocument/2006/relationships" xmlns:p="http://schemas.openxmlformats.org/presentationml/2006/main">
-  <p:cSld name="Slide 11">
-    <p:bg>
-      <p:bgPr>
-        <a:solidFill>
-          <a:srgbClr val="FAF9F7"/>
-        </a:solidFill>
-        <a:effectLst/>
-      </p:bgPr>
-    </p:bg>
-    <p:spTree>
-      <p:nvGrpSpPr>
-        <p:cNvPr id="1" name=""/>
-        <p:cNvGrpSpPr/>
-        <p:nvPr/>
-      </p:nvGrpSpPr>
-      <p:grpSpPr>
-        <a:xfrm>
-          <a:off x="0" y="0"/>
-          <a:ext cx="0" cy="0"/>
-          <a:chOff x="0" y="0"/>
-          <a:chExt cx="0" cy="0"/>
-        </a:xfrm>
-      </p:grpSpPr>
-      <p:sp>
-        <p:nvSpPr>
-          <p:cNvPr id="2" name="Shape 0"/>
-          <p:cNvSpPr/>
-          <p:nvPr/>
-        </p:nvSpPr>
-        <p:spPr>
-          <a:xfrm>
-            <a:off x="0" y="0"/>
-            <a:ext cx="9144000" cy="36576"/>
-          </a:xfrm>
-          <a:prstGeom prst="rect">
-            <a:avLst/>
-          </a:prstGeom>
-          <a:solidFill>
-            <a:srgbClr val="B8975C"/>
-          </a:solidFill>
-          <a:ln/>
-        </p:spPr>
-        <p:txBody>
-          <a:bodyPr/>
-          <a:lstStyle/>
-          <a:p>
-            <a:endParaRPr lang="en-US"/>
-          </a:p>
-        </p:txBody>
-      </p:sp>
-      <p:sp>
-        <p:nvSpPr>
-          <p:cNvPr id="3" name="Shape 1"/>
-          <p:cNvSpPr/>
-          <p:nvPr/>
-        </p:nvSpPr>
-        <p:spPr>
-          <a:xfrm>
-            <a:off x="0" y="4709160"/>
-            <a:ext cx="9144000" cy="434340"/>
-          </a:xfrm>
-          <a:prstGeom prst="rect">
-            <a:avLst/>
-          </a:prstGeom>
-          <a:solidFill>
-            <a:srgbClr val="36454F"/>
-          </a:solidFill>
-          <a:ln/>
-        </p:spPr>
-        <p:txBody>
-          <a:bodyPr/>
-          <a:lstStyle/>
-          <a:p>
-            <a:endParaRPr lang="en-US"/>
-          </a:p>
-        </p:txBody>
-      </p:sp>
-      <p:sp>
-        <p:nvSpPr>
-          <p:cNvPr id="4" name="Text 2"/>
-          <p:cNvSpPr/>
-          <p:nvPr/>
-        </p:nvSpPr>
-        <p:spPr>
-          <a:xfrm>
-            <a:off x="457200" y="4754880"/>
-            <a:ext cx="8229600" cy="320040"/>
-          </a:xfrm>
-          <a:prstGeom prst="rect">
-            <a:avLst/>
-          </a:prstGeom>
-          <a:noFill/>
-          <a:ln/>
-        </p:spPr>
-        <p:txBody>
-          <a:bodyPr wrap="square" rtlCol="0" anchor="ctr"/>
-          <a:lstStyle/>
-          <a:p>
-            <a:pPr marL="0" indent="0" algn="ctr">
-              <a:buNone/>
-            </a:pPr>
-            <a:r>
-              <a:rPr lang="en-US" sz="900" dirty="0">
-                <a:solidFill>
-                  <a:srgbClr val="8A9BAD"/>
-                </a:solidFill>
-                <a:latin typeface="Open Sans" pitchFamily="34" charset="0"/>
-                <a:ea typeface="Open Sans" pitchFamily="34" charset="-122"/>
-                <a:cs typeface="Open Sans" pitchFamily="34" charset="-120"/>
-              </a:rPr>
-              <a:t>Stauffer  |  Appendix: GitHub &amp; AI Setup Guide  |  Shidler College of Business</a:t>
-            </a:r>
-            <a:endParaRPr lang="en-US" sz="900" dirty="0"/>
-          </a:p>
-        </p:txBody>
-      </p:sp>
-      <p:sp>
-        <p:nvSpPr>
-          <p:cNvPr id="5" name="Text 3"/>
-          <p:cNvSpPr/>
-          <p:nvPr/>
-        </p:nvSpPr>
-        <p:spPr>
-          <a:xfrm>
-            <a:off x="731520" y="320040"/>
-            <a:ext cx="7680960" cy="457200"/>
-          </a:xfrm>
-          <a:prstGeom prst="rect">
-            <a:avLst/>
-          </a:prstGeom>
-          <a:noFill/>
-          <a:ln/>
-        </p:spPr>
-        <p:txBody>
-          <a:bodyPr wrap="square" lIns="0" tIns="0" rIns="0" bIns="0" rtlCol="0" anchor="ctr"/>
-          <a:lstStyle/>
-          <a:p>
-            <a:pPr marL="0" indent="0">
-              <a:buNone/>
-            </a:pPr>
-            <a:r>
-              <a:rPr lang="en-US" sz="2800" b="1" dirty="0">
-                <a:solidFill>
-                  <a:srgbClr val="1E2530"/>
-                </a:solidFill>
-                <a:latin typeface="Open Sans" pitchFamily="34" charset="0"/>
-                <a:ea typeface="Open Sans" pitchFamily="34" charset="-122"/>
-                <a:cs typeface="Open Sans" pitchFamily="34" charset="-120"/>
-              </a:rPr>
-              <a:t>Using ChatGPT for This Project</a:t>
-            </a:r>
-            <a:endParaRPr lang="en-US" sz="2800" dirty="0"/>
-          </a:p>
-        </p:txBody>
-      </p:sp>
-      <p:sp>
-        <p:nvSpPr>
-          <p:cNvPr id="6" name="Text 4"/>
-          <p:cNvSpPr/>
-          <p:nvPr/>
-        </p:nvSpPr>
-        <p:spPr>
-          <a:xfrm>
-            <a:off x="731520" y="822960"/>
-            <a:ext cx="7680960" cy="274320"/>
-          </a:xfrm>
-          <a:prstGeom prst="rect">
-            <a:avLst/>
-          </a:prstGeom>
-          <a:noFill/>
-          <a:ln/>
-        </p:spPr>
-        <p:txBody>
-          <a:bodyPr wrap="square" lIns="0" tIns="0" rIns="0" bIns="0" rtlCol="0" anchor="ctr"/>
-          <a:lstStyle/>
-          <a:p>
-            <a:pPr marL="0" indent="0">
-              <a:buNone/>
-            </a:pPr>
-            <a:r>
-              <a:rPr lang="en-US" sz="1100" dirty="0">
-                <a:solidFill>
-                  <a:srgbClr val="5A6B7A"/>
-                </a:solidFill>
-                <a:latin typeface="Open Sans" pitchFamily="34" charset="0"/>
-                <a:ea typeface="Open Sans" pitchFamily="34" charset="-122"/>
-                <a:cs typeface="Open Sans" pitchFamily="34" charset="-120"/>
-              </a:rPr>
-              <a:t>chatgpt.com  |  Free tier is sufficient. GPT-4o is recommended if you have Plus.</a:t>
-            </a:r>
-            <a:endParaRPr lang="en-US" sz="1100" dirty="0"/>
-          </a:p>
-        </p:txBody>
-      </p:sp>
-      <p:sp>
-        <p:nvSpPr>
-          <p:cNvPr id="7" name="Shape 5"/>
-          <p:cNvSpPr/>
-          <p:nvPr/>
-        </p:nvSpPr>
-        <p:spPr>
-          <a:xfrm>
-            <a:off x="731520" y="1280160"/>
-            <a:ext cx="3840480" cy="3108960"/>
-          </a:xfrm>
-          <a:prstGeom prst="rect">
-            <a:avLst/>
-          </a:prstGeom>
-          <a:solidFill>
-            <a:srgbClr val="FFFFFF"/>
-          </a:solidFill>
-          <a:ln/>
-          <a:effectLst>
-            <a:outerShdw blurRad="50800" dist="25400" dir="8100000" algn="bl" rotWithShape="0">
-              <a:srgbClr val="000000">
-                <a:alpha val="6000"/>
-              </a:srgbClr>
-            </a:outerShdw>
-          </a:effectLst>
-        </p:spPr>
-        <p:txBody>
-          <a:bodyPr/>
-          <a:lstStyle/>
-          <a:p>
-            <a:endParaRPr lang="en-US"/>
-          </a:p>
-        </p:txBody>
-      </p:sp>
-      <p:pic>
-        <p:nvPicPr>
-          <p:cNvPr id="8" name="Image 0" descr="preencoded.png"/>
-          <p:cNvPicPr>
-            <a:picLocks noChangeAspect="1"/>
-          </p:cNvPicPr>
-          <p:nvPr/>
-        </p:nvPicPr>
-        <p:blipFill>
-          <a:blip r:embed="rId3"/>
-          <a:stretch>
-            <a:fillRect/>
-          </a:stretch>
-        </p:blipFill>
-        <p:spPr>
-          <a:xfrm>
-            <a:off x="914400" y="1417320"/>
-            <a:ext cx="274320" cy="274320"/>
-          </a:xfrm>
-          <a:prstGeom prst="rect">
-            <a:avLst/>
-          </a:prstGeom>
-        </p:spPr>
-      </p:pic>
-      <p:sp>
-        <p:nvSpPr>
-          <p:cNvPr id="9" name="Text 6"/>
-          <p:cNvSpPr/>
-          <p:nvPr/>
-        </p:nvSpPr>
-        <p:spPr>
-          <a:xfrm>
-            <a:off x="1280160" y="1417320"/>
-            <a:ext cx="3108960" cy="274320"/>
-          </a:xfrm>
-          <a:prstGeom prst="rect">
-            <a:avLst/>
-          </a:prstGeom>
-          <a:noFill/>
-          <a:ln/>
-        </p:spPr>
-        <p:txBody>
-          <a:bodyPr wrap="square" lIns="0" tIns="0" rIns="0" bIns="0" rtlCol="0" anchor="ctr"/>
-          <a:lstStyle/>
-          <a:p>
-            <a:pPr marL="0" indent="0">
-              <a:buNone/>
-            </a:pPr>
-            <a:r>
-              <a:rPr lang="en-US" sz="1400" b="1" dirty="0">
-                <a:solidFill>
-                  <a:srgbClr val="1B5E40"/>
-                </a:solidFill>
-                <a:latin typeface="Open Sans" pitchFamily="34" charset="0"/>
-                <a:ea typeface="Open Sans" pitchFamily="34" charset="-122"/>
-                <a:cs typeface="Open Sans" pitchFamily="34" charset="-120"/>
-              </a:rPr>
-              <a:t>What ChatGPT Does Well</a:t>
-            </a:r>
-            <a:endParaRPr lang="en-US" sz="1400" dirty="0"/>
-          </a:p>
-        </p:txBody>
-      </p:sp>
-      <p:sp>
-        <p:nvSpPr>
-          <p:cNvPr id="10" name="Text 7"/>
-          <p:cNvSpPr/>
-          <p:nvPr/>
-        </p:nvSpPr>
-        <p:spPr>
-          <a:xfrm>
-            <a:off x="914400" y="1828800"/>
-            <a:ext cx="3474720" cy="320040"/>
-          </a:xfrm>
-          <a:prstGeom prst="rect">
-            <a:avLst/>
-          </a:prstGeom>
-          <a:noFill/>
-          <a:ln/>
-        </p:spPr>
-        <p:txBody>
-          <a:bodyPr wrap="square" lIns="0" tIns="0" rIns="0" bIns="0" rtlCol="0" anchor="ctr"/>
-          <a:lstStyle/>
-          <a:p>
-            <a:pPr marL="342900" indent="-342900">
-              <a:buSzPct val="100000"/>
-              <a:buChar char="▪"/>
-            </a:pPr>
-            <a:r>
-              <a:rPr lang="en-US" sz="1100" dirty="0">
-                <a:solidFill>
-                  <a:srgbClr val="5A6B7A"/>
-                </a:solidFill>
-                <a:latin typeface="Open Sans" pitchFamily="34" charset="0"/>
-                <a:ea typeface="Open Sans" pitchFamily="34" charset="-122"/>
-                <a:cs typeface="Open Sans" pitchFamily="34" charset="-120"/>
-              </a:rPr>
-              <a:t>Explaining ratio formulas and what they mean</a:t>
-            </a:r>
-            <a:endParaRPr lang="en-US" sz="1100" dirty="0"/>
-          </a:p>
-        </p:txBody>
-      </p:sp>
-      <p:sp>
-        <p:nvSpPr>
-          <p:cNvPr id="11" name="Text 8"/>
-          <p:cNvSpPr/>
-          <p:nvPr/>
-        </p:nvSpPr>
-        <p:spPr>
-          <a:xfrm>
-            <a:off x="914400" y="2194560"/>
-            <a:ext cx="3474720" cy="320040"/>
-          </a:xfrm>
-          <a:prstGeom prst="rect">
-            <a:avLst/>
-          </a:prstGeom>
-          <a:noFill/>
-          <a:ln/>
-        </p:spPr>
-        <p:txBody>
-          <a:bodyPr wrap="square" lIns="0" tIns="0" rIns="0" bIns="0" rtlCol="0" anchor="ctr"/>
-          <a:lstStyle/>
-          <a:p>
-            <a:pPr marL="342900" indent="-342900">
-              <a:buSzPct val="100000"/>
-              <a:buChar char="▪"/>
-            </a:pPr>
-            <a:r>
-              <a:rPr lang="en-US" sz="1100" dirty="0">
-                <a:solidFill>
-                  <a:srgbClr val="5A6B7A"/>
-                </a:solidFill>
-                <a:latin typeface="Open Sans" pitchFamily="34" charset="0"/>
-                <a:ea typeface="Open Sans" pitchFamily="34" charset="-122"/>
-                <a:cs typeface="Open Sans" pitchFamily="34" charset="-120"/>
-              </a:rPr>
-              <a:t>Drafting memo language and executive summaries</a:t>
-            </a:r>
-            <a:endParaRPr lang="en-US" sz="1100" dirty="0"/>
-          </a:p>
-        </p:txBody>
-      </p:sp>
-      <p:sp>
-        <p:nvSpPr>
-          <p:cNvPr id="12" name="Text 9"/>
-          <p:cNvSpPr/>
-          <p:nvPr/>
-        </p:nvSpPr>
-        <p:spPr>
-          <a:xfrm>
-            <a:off x="914400" y="2560320"/>
-            <a:ext cx="3474720" cy="320040"/>
-          </a:xfrm>
-          <a:prstGeom prst="rect">
-            <a:avLst/>
-          </a:prstGeom>
-          <a:noFill/>
-          <a:ln/>
-        </p:spPr>
-        <p:txBody>
-          <a:bodyPr wrap="square" lIns="0" tIns="0" rIns="0" bIns="0" rtlCol="0" anchor="ctr"/>
-          <a:lstStyle/>
-          <a:p>
-            <a:pPr marL="342900" indent="-342900">
-              <a:buSzPct val="100000"/>
-              <a:buChar char="▪"/>
-            </a:pPr>
-            <a:r>
-              <a:rPr lang="en-US" sz="1100" dirty="0">
-                <a:solidFill>
-                  <a:srgbClr val="5A6B7A"/>
-                </a:solidFill>
-                <a:latin typeface="Open Sans" pitchFamily="34" charset="0"/>
-                <a:ea typeface="Open Sans" pitchFamily="34" charset="-122"/>
-                <a:cs typeface="Open Sans" pitchFamily="34" charset="-120"/>
-              </a:rPr>
-              <a:t>Generating Excel formulas from plain English</a:t>
-            </a:r>
-            <a:endParaRPr lang="en-US" sz="1100" dirty="0"/>
-          </a:p>
-        </p:txBody>
-      </p:sp>
-      <p:sp>
-        <p:nvSpPr>
-          <p:cNvPr id="13" name="Text 10"/>
-          <p:cNvSpPr/>
-          <p:nvPr/>
-        </p:nvSpPr>
-        <p:spPr>
-          <a:xfrm>
-            <a:off x="914400" y="2926080"/>
-            <a:ext cx="3474720" cy="320040"/>
-          </a:xfrm>
-          <a:prstGeom prst="rect">
-            <a:avLst/>
-          </a:prstGeom>
-          <a:noFill/>
-          <a:ln/>
-        </p:spPr>
-        <p:txBody>
-          <a:bodyPr wrap="square" lIns="0" tIns="0" rIns="0" bIns="0" rtlCol="0" anchor="ctr"/>
-          <a:lstStyle/>
-          <a:p>
-            <a:pPr marL="342900" indent="-342900">
-              <a:buSzPct val="100000"/>
-              <a:buChar char="▪"/>
-            </a:pPr>
-            <a:r>
-              <a:rPr lang="en-US" sz="1100" dirty="0">
-                <a:solidFill>
-                  <a:srgbClr val="5A6B7A"/>
-                </a:solidFill>
-                <a:latin typeface="Open Sans" pitchFamily="34" charset="0"/>
-                <a:ea typeface="Open Sans" pitchFamily="34" charset="-122"/>
-                <a:cs typeface="Open Sans" pitchFamily="34" charset="-120"/>
-              </a:rPr>
-              <a:t>Reviewing your spec for clarity and completeness</a:t>
-            </a:r>
-            <a:endParaRPr lang="en-US" sz="1100" dirty="0"/>
-          </a:p>
-        </p:txBody>
-      </p:sp>
-      <p:sp>
-        <p:nvSpPr>
-          <p:cNvPr id="14" name="Text 11"/>
-          <p:cNvSpPr/>
-          <p:nvPr/>
-        </p:nvSpPr>
-        <p:spPr>
-          <a:xfrm>
-            <a:off x="914400" y="3291840"/>
-            <a:ext cx="3474720" cy="320040"/>
-          </a:xfrm>
-          <a:prstGeom prst="rect">
-            <a:avLst/>
-          </a:prstGeom>
-          <a:noFill/>
-          <a:ln/>
-        </p:spPr>
-        <p:txBody>
-          <a:bodyPr wrap="square" lIns="0" tIns="0" rIns="0" bIns="0" rtlCol="0" anchor="ctr"/>
-          <a:lstStyle/>
-          <a:p>
-            <a:pPr marL="342900" indent="-342900">
-              <a:buSzPct val="100000"/>
-              <a:buChar char="▪"/>
-            </a:pPr>
-            <a:r>
-              <a:rPr lang="en-US" sz="1100" dirty="0">
-                <a:solidFill>
-                  <a:srgbClr val="5A6B7A"/>
-                </a:solidFill>
-                <a:latin typeface="Open Sans" pitchFamily="34" charset="0"/>
-                <a:ea typeface="Open Sans" pitchFamily="34" charset="-122"/>
-                <a:cs typeface="Open Sans" pitchFamily="34" charset="-120"/>
-              </a:rPr>
-              <a:t>Building structured AI prompts (Stage 4)</a:t>
-            </a:r>
-            <a:endParaRPr lang="en-US" sz="1100" dirty="0"/>
-          </a:p>
-        </p:txBody>
-      </p:sp>
-      <p:sp>
-        <p:nvSpPr>
-          <p:cNvPr id="15" name="Text 12"/>
-          <p:cNvSpPr/>
-          <p:nvPr/>
-        </p:nvSpPr>
-        <p:spPr>
-          <a:xfrm>
-            <a:off x="914400" y="3657600"/>
-            <a:ext cx="3474720" cy="320040"/>
-          </a:xfrm>
-          <a:prstGeom prst="rect">
-            <a:avLst/>
-          </a:prstGeom>
-          <a:noFill/>
-          <a:ln/>
-        </p:spPr>
-        <p:txBody>
-          <a:bodyPr wrap="square" lIns="0" tIns="0" rIns="0" bIns="0" rtlCol="0" anchor="ctr"/>
-          <a:lstStyle/>
-          <a:p>
-            <a:pPr marL="342900" indent="-342900">
-              <a:buSzPct val="100000"/>
-              <a:buChar char="▪"/>
-            </a:pPr>
-            <a:r>
-              <a:rPr lang="en-US" sz="1100" dirty="0">
-                <a:solidFill>
-                  <a:srgbClr val="5A6B7A"/>
-                </a:solidFill>
-                <a:latin typeface="Open Sans" pitchFamily="34" charset="0"/>
-                <a:ea typeface="Open Sans" pitchFamily="34" charset="-122"/>
-                <a:cs typeface="Open Sans" pitchFamily="34" charset="-120"/>
-              </a:rPr>
-              <a:t>Brainstorming strategic recommendations</a:t>
-            </a:r>
-            <a:endParaRPr lang="en-US" sz="1100" dirty="0"/>
-          </a:p>
-        </p:txBody>
-      </p:sp>
-      <p:sp>
-        <p:nvSpPr>
-          <p:cNvPr id="16" name="Shape 13"/>
-          <p:cNvSpPr/>
-          <p:nvPr/>
-        </p:nvSpPr>
-        <p:spPr>
-          <a:xfrm>
-            <a:off x="4937760" y="1280160"/>
-            <a:ext cx="3474720" cy="3108960"/>
-          </a:xfrm>
-          <a:prstGeom prst="rect">
-            <a:avLst/>
-          </a:prstGeom>
-          <a:solidFill>
-            <a:srgbClr val="FFFFFF"/>
-          </a:solidFill>
-          <a:ln/>
-          <a:effectLst>
-            <a:outerShdw blurRad="50800" dist="25400" dir="8100000" algn="bl" rotWithShape="0">
-              <a:srgbClr val="000000">
-                <a:alpha val="6000"/>
-              </a:srgbClr>
-            </a:outerShdw>
-          </a:effectLst>
-        </p:spPr>
-        <p:txBody>
-          <a:bodyPr/>
-          <a:lstStyle/>
-          <a:p>
-            <a:endParaRPr lang="en-US"/>
-          </a:p>
-        </p:txBody>
-      </p:sp>
-      <p:pic>
-        <p:nvPicPr>
-          <p:cNvPr id="17" name="Image 1" descr="preencoded.png"/>
-          <p:cNvPicPr>
-            <a:picLocks noChangeAspect="1"/>
-          </p:cNvPicPr>
-          <p:nvPr/>
-        </p:nvPicPr>
-        <p:blipFill>
-          <a:blip r:embed="rId4"/>
-          <a:stretch>
-            <a:fillRect/>
-          </a:stretch>
-        </p:blipFill>
-        <p:spPr>
-          <a:xfrm>
-            <a:off x="5120640" y="1417320"/>
-            <a:ext cx="274320" cy="274320"/>
-          </a:xfrm>
-          <a:prstGeom prst="rect">
-            <a:avLst/>
-          </a:prstGeom>
-        </p:spPr>
-      </p:pic>
-      <p:sp>
-        <p:nvSpPr>
-          <p:cNvPr id="18" name="Text 14"/>
-          <p:cNvSpPr/>
-          <p:nvPr/>
-        </p:nvSpPr>
-        <p:spPr>
-          <a:xfrm>
-            <a:off x="5486400" y="1417320"/>
-            <a:ext cx="2743200" cy="274320"/>
-          </a:xfrm>
-          <a:prstGeom prst="rect">
-            <a:avLst/>
-          </a:prstGeom>
-          <a:noFill/>
-          <a:ln/>
-        </p:spPr>
-        <p:txBody>
-          <a:bodyPr wrap="square" lIns="0" tIns="0" rIns="0" bIns="0" rtlCol="0" anchor="ctr"/>
-          <a:lstStyle/>
-          <a:p>
-            <a:pPr marL="0" indent="0">
-              <a:buNone/>
-            </a:pPr>
-            <a:r>
-              <a:rPr lang="en-US" sz="1400" b="1" dirty="0">
-                <a:solidFill>
-                  <a:srgbClr val="CC4444"/>
-                </a:solidFill>
-                <a:latin typeface="Open Sans" pitchFamily="34" charset="0"/>
-                <a:ea typeface="Open Sans" pitchFamily="34" charset="-122"/>
-                <a:cs typeface="Open Sans" pitchFamily="34" charset="-120"/>
-              </a:rPr>
-              <a:t>Watch Out For</a:t>
-            </a:r>
-            <a:endParaRPr lang="en-US" sz="1400" dirty="0"/>
-          </a:p>
-        </p:txBody>
-      </p:sp>
-      <p:sp>
-        <p:nvSpPr>
-          <p:cNvPr id="19" name="Text 15"/>
-          <p:cNvSpPr/>
-          <p:nvPr/>
-        </p:nvSpPr>
-        <p:spPr>
-          <a:xfrm>
-            <a:off x="5120640" y="1828800"/>
-            <a:ext cx="3108960" cy="365760"/>
-          </a:xfrm>
-          <a:prstGeom prst="rect">
-            <a:avLst/>
-          </a:prstGeom>
-          <a:noFill/>
-          <a:ln/>
-        </p:spPr>
-        <p:txBody>
-          <a:bodyPr wrap="square" lIns="0" tIns="0" rIns="0" bIns="0" rtlCol="0" anchor="ctr"/>
-          <a:lstStyle/>
-          <a:p>
-            <a:pPr marL="342900" indent="-342900">
-              <a:lnSpc>
-                <a:spcPct val="130000"/>
-              </a:lnSpc>
-              <a:buSzPct val="100000"/>
-              <a:buChar char="▪"/>
-            </a:pPr>
-            <a:r>
-              <a:rPr lang="en-US" sz="1100" dirty="0">
-                <a:solidFill>
-                  <a:srgbClr val="5A6B7A"/>
-                </a:solidFill>
-                <a:latin typeface="Open Sans" pitchFamily="34" charset="0"/>
-                <a:ea typeface="Open Sans" pitchFamily="34" charset="-122"/>
-                <a:cs typeface="Open Sans" pitchFamily="34" charset="-120"/>
-              </a:rPr>
-              <a:t>It can invent financial data that looks real but isn't</a:t>
-            </a:r>
-            <a:endParaRPr lang="en-US" sz="1100" dirty="0"/>
-          </a:p>
-        </p:txBody>
-      </p:sp>
-      <p:sp>
-        <p:nvSpPr>
-          <p:cNvPr id="20" name="Text 16"/>
-          <p:cNvSpPr/>
-          <p:nvPr/>
-        </p:nvSpPr>
-        <p:spPr>
-          <a:xfrm>
-            <a:off x="5120640" y="2286000"/>
-            <a:ext cx="3108960" cy="365760"/>
-          </a:xfrm>
-          <a:prstGeom prst="rect">
-            <a:avLst/>
-          </a:prstGeom>
-          <a:noFill/>
-          <a:ln/>
-        </p:spPr>
-        <p:txBody>
-          <a:bodyPr wrap="square" lIns="0" tIns="0" rIns="0" bIns="0" rtlCol="0" anchor="ctr"/>
-          <a:lstStyle/>
-          <a:p>
-            <a:pPr marL="342900" indent="-342900">
-              <a:lnSpc>
-                <a:spcPct val="130000"/>
-              </a:lnSpc>
-              <a:buSzPct val="100000"/>
-              <a:buChar char="▪"/>
-            </a:pPr>
-            <a:r>
-              <a:rPr lang="en-US" sz="1100" dirty="0">
-                <a:solidFill>
-                  <a:srgbClr val="5A6B7A"/>
-                </a:solidFill>
-                <a:latin typeface="Open Sans" pitchFamily="34" charset="0"/>
-                <a:ea typeface="Open Sans" pitchFamily="34" charset="-122"/>
-                <a:cs typeface="Open Sans" pitchFamily="34" charset="-120"/>
-              </a:rPr>
-              <a:t>Ratio formulas may be subtly wrong — always verify</a:t>
-            </a:r>
-            <a:endParaRPr lang="en-US" sz="1100" dirty="0"/>
-          </a:p>
-        </p:txBody>
-      </p:sp>
-      <p:sp>
-        <p:nvSpPr>
-          <p:cNvPr id="21" name="Text 17"/>
-          <p:cNvSpPr/>
-          <p:nvPr/>
-        </p:nvSpPr>
-        <p:spPr>
-          <a:xfrm>
-            <a:off x="5120640" y="2743200"/>
-            <a:ext cx="3108960" cy="365760"/>
-          </a:xfrm>
-          <a:prstGeom prst="rect">
-            <a:avLst/>
-          </a:prstGeom>
-          <a:noFill/>
-          <a:ln/>
-        </p:spPr>
-        <p:txBody>
-          <a:bodyPr wrap="square" lIns="0" tIns="0" rIns="0" bIns="0" rtlCol="0" anchor="ctr"/>
-          <a:lstStyle/>
-          <a:p>
-            <a:pPr marL="342900" indent="-342900">
-              <a:lnSpc>
-                <a:spcPct val="130000"/>
-              </a:lnSpc>
-              <a:buSzPct val="100000"/>
-              <a:buChar char="▪"/>
-            </a:pPr>
-            <a:r>
-              <a:rPr lang="en-US" sz="1100" dirty="0">
-                <a:solidFill>
-                  <a:srgbClr val="5A6B7A"/>
-                </a:solidFill>
-                <a:latin typeface="Open Sans" pitchFamily="34" charset="0"/>
-                <a:ea typeface="Open Sans" pitchFamily="34" charset="-122"/>
-                <a:cs typeface="Open Sans" pitchFamily="34" charset="-120"/>
-              </a:rPr>
-              <a:t>It doesn't know YOUR company's specific numbers</a:t>
-            </a:r>
-            <a:endParaRPr lang="en-US" sz="1100" dirty="0"/>
-          </a:p>
-        </p:txBody>
-      </p:sp>
-      <p:sp>
-        <p:nvSpPr>
-          <p:cNvPr id="22" name="Text 18"/>
-          <p:cNvSpPr/>
-          <p:nvPr/>
-        </p:nvSpPr>
-        <p:spPr>
-          <a:xfrm>
-            <a:off x="5120640" y="3200400"/>
-            <a:ext cx="3108960" cy="365760"/>
-          </a:xfrm>
-          <a:prstGeom prst="rect">
-            <a:avLst/>
-          </a:prstGeom>
-          <a:noFill/>
-          <a:ln/>
-        </p:spPr>
-        <p:txBody>
-          <a:bodyPr wrap="square" lIns="0" tIns="0" rIns="0" bIns="0" rtlCol="0" anchor="ctr"/>
-          <a:lstStyle/>
-          <a:p>
-            <a:pPr marL="342900" indent="-342900">
-              <a:lnSpc>
-                <a:spcPct val="130000"/>
-              </a:lnSpc>
-              <a:buSzPct val="100000"/>
-              <a:buChar char="▪"/>
-            </a:pPr>
-            <a:r>
-              <a:rPr lang="en-US" sz="1100" dirty="0">
-                <a:solidFill>
-                  <a:srgbClr val="5A6B7A"/>
-                </a:solidFill>
-                <a:latin typeface="Open Sans" pitchFamily="34" charset="0"/>
-                <a:ea typeface="Open Sans" pitchFamily="34" charset="-122"/>
-                <a:cs typeface="Open Sans" pitchFamily="34" charset="-120"/>
-              </a:rPr>
-              <a:t>Named range conventions must be given to it explicitly</a:t>
-            </a:r>
-            <a:endParaRPr lang="en-US" sz="1100" dirty="0"/>
-          </a:p>
-        </p:txBody>
-      </p:sp>
-      <p:sp>
-        <p:nvSpPr>
-          <p:cNvPr id="23" name="Text 19"/>
-          <p:cNvSpPr/>
-          <p:nvPr/>
-        </p:nvSpPr>
-        <p:spPr>
-          <a:xfrm>
-            <a:off x="5120640" y="3657600"/>
-            <a:ext cx="3108960" cy="365760"/>
-          </a:xfrm>
-          <a:prstGeom prst="rect">
-            <a:avLst/>
-          </a:prstGeom>
-          <a:noFill/>
-          <a:ln/>
-        </p:spPr>
-        <p:txBody>
-          <a:bodyPr wrap="square" lIns="0" tIns="0" rIns="0" bIns="0" rtlCol="0" anchor="ctr"/>
-          <a:lstStyle/>
-          <a:p>
-            <a:pPr marL="342900" indent="-342900">
-              <a:lnSpc>
-                <a:spcPct val="130000"/>
-              </a:lnSpc>
-              <a:buSzPct val="100000"/>
-              <a:buChar char="▪"/>
-            </a:pPr>
-            <a:r>
-              <a:rPr lang="en-US" sz="1100" dirty="0">
-                <a:solidFill>
-                  <a:srgbClr val="5A6B7A"/>
-                </a:solidFill>
-                <a:latin typeface="Open Sans" pitchFamily="34" charset="0"/>
-                <a:ea typeface="Open Sans" pitchFamily="34" charset="-122"/>
-                <a:cs typeface="Open Sans" pitchFamily="34" charset="-120"/>
-              </a:rPr>
-              <a:t>Never paste sensitive personal data into prompts</a:t>
-            </a:r>
-            <a:endParaRPr lang="en-US" sz="1100" dirty="0"/>
-          </a:p>
-        </p:txBody>
-      </p:sp>
-    </p:spTree>
-  </p:cSld>
-  <p:clrMapOvr>
-    <a:masterClrMapping/>
-  </p:clrMapOvr>
-</p:sld>
-</file>
-
-<file path=ppt/slides/slide12.xml><?xml version="1.0" encoding="utf-8"?>
-<p:sld xmlns:a="http://schemas.openxmlformats.org/drawingml/2006/main" xmlns:r="http://schemas.openxmlformats.org/officeDocument/2006/relationships" xmlns:p="http://schemas.openxmlformats.org/presentationml/2006/main">
-  <p:cSld name="Slide 12">
-    <p:bg>
-      <p:bgPr>
-        <a:solidFill>
-          <a:srgbClr val="FAF9F7"/>
-        </a:solidFill>
-        <a:effectLst/>
-      </p:bgPr>
-    </p:bg>
-    <p:spTree>
-      <p:nvGrpSpPr>
-        <p:cNvPr id="1" name=""/>
-        <p:cNvGrpSpPr/>
-        <p:nvPr/>
-      </p:nvGrpSpPr>
-      <p:grpSpPr>
-        <a:xfrm>
-          <a:off x="0" y="0"/>
-          <a:ext cx="0" cy="0"/>
-          <a:chOff x="0" y="0"/>
-          <a:chExt cx="0" cy="0"/>
-        </a:xfrm>
-      </p:grpSpPr>
-      <p:sp>
-        <p:nvSpPr>
-          <p:cNvPr id="2" name="Shape 0"/>
-          <p:cNvSpPr/>
-          <p:nvPr/>
-        </p:nvSpPr>
-        <p:spPr>
-          <a:xfrm>
-            <a:off x="0" y="0"/>
-            <a:ext cx="9144000" cy="36576"/>
-          </a:xfrm>
-          <a:prstGeom prst="rect">
-            <a:avLst/>
-          </a:prstGeom>
-          <a:solidFill>
-            <a:srgbClr val="B8975C"/>
-          </a:solidFill>
-          <a:ln/>
-        </p:spPr>
-        <p:txBody>
-          <a:bodyPr/>
-          <a:lstStyle/>
-          <a:p>
-            <a:endParaRPr lang="en-US"/>
-          </a:p>
-        </p:txBody>
-      </p:sp>
-      <p:sp>
-        <p:nvSpPr>
-          <p:cNvPr id="3" name="Shape 1"/>
-          <p:cNvSpPr/>
-          <p:nvPr/>
-        </p:nvSpPr>
-        <p:spPr>
-          <a:xfrm>
-            <a:off x="0" y="4709160"/>
-            <a:ext cx="9144000" cy="434340"/>
-          </a:xfrm>
-          <a:prstGeom prst="rect">
-            <a:avLst/>
-          </a:prstGeom>
-          <a:solidFill>
-            <a:srgbClr val="36454F"/>
-          </a:solidFill>
-          <a:ln/>
-        </p:spPr>
-        <p:txBody>
-          <a:bodyPr/>
-          <a:lstStyle/>
-          <a:p>
-            <a:endParaRPr lang="en-US"/>
-          </a:p>
-        </p:txBody>
-      </p:sp>
-      <p:sp>
-        <p:nvSpPr>
-          <p:cNvPr id="4" name="Text 2"/>
-          <p:cNvSpPr/>
-          <p:nvPr/>
-        </p:nvSpPr>
-        <p:spPr>
-          <a:xfrm>
-            <a:off x="457200" y="4754880"/>
-            <a:ext cx="8229600" cy="320040"/>
-          </a:xfrm>
-          <a:prstGeom prst="rect">
-            <a:avLst/>
-          </a:prstGeom>
-          <a:noFill/>
-          <a:ln/>
-        </p:spPr>
-        <p:txBody>
-          <a:bodyPr wrap="square" rtlCol="0" anchor="ctr"/>
-          <a:lstStyle/>
-          <a:p>
-            <a:pPr marL="0" indent="0" algn="ctr">
-              <a:buNone/>
-            </a:pPr>
-            <a:r>
-              <a:rPr lang="en-US" sz="900" dirty="0">
-                <a:solidFill>
-                  <a:srgbClr val="8A9BAD"/>
-                </a:solidFill>
-                <a:latin typeface="Open Sans" pitchFamily="34" charset="0"/>
-                <a:ea typeface="Open Sans" pitchFamily="34" charset="-122"/>
-                <a:cs typeface="Open Sans" pitchFamily="34" charset="-120"/>
-              </a:rPr>
-              <a:t>Stauffer  |  Appendix: GitHub &amp; AI Setup Guide  |  Shidler College of Business</a:t>
-            </a:r>
-            <a:endParaRPr lang="en-US" sz="900" dirty="0"/>
-          </a:p>
-        </p:txBody>
-      </p:sp>
-      <p:sp>
-        <p:nvSpPr>
-          <p:cNvPr id="5" name="Text 3"/>
-          <p:cNvSpPr/>
-          <p:nvPr/>
-        </p:nvSpPr>
-        <p:spPr>
-          <a:xfrm>
-            <a:off x="731520" y="320040"/>
-            <a:ext cx="7680960" cy="457200"/>
-          </a:xfrm>
-          <a:prstGeom prst="rect">
-            <a:avLst/>
-          </a:prstGeom>
-          <a:noFill/>
-          <a:ln/>
-        </p:spPr>
-        <p:txBody>
-          <a:bodyPr wrap="square" lIns="0" tIns="0" rIns="0" bIns="0" rtlCol="0" anchor="ctr"/>
-          <a:lstStyle/>
-          <a:p>
-            <a:pPr marL="0" indent="0">
-              <a:buNone/>
-            </a:pPr>
-            <a:r>
-              <a:rPr lang="en-US" sz="2800" b="1" dirty="0">
-                <a:solidFill>
-                  <a:srgbClr val="1E2530"/>
-                </a:solidFill>
-                <a:latin typeface="Open Sans" pitchFamily="34" charset="0"/>
-                <a:ea typeface="Open Sans" pitchFamily="34" charset="-122"/>
-                <a:cs typeface="Open Sans" pitchFamily="34" charset="-120"/>
-              </a:rPr>
-              <a:t>Using Claude for This Project</a:t>
-            </a:r>
-            <a:endParaRPr lang="en-US" sz="2800" dirty="0"/>
-          </a:p>
-        </p:txBody>
-      </p:sp>
-      <p:sp>
-        <p:nvSpPr>
-          <p:cNvPr id="6" name="Text 4"/>
-          <p:cNvSpPr/>
-          <p:nvPr/>
-        </p:nvSpPr>
-        <p:spPr>
-          <a:xfrm>
-            <a:off x="731520" y="822960"/>
-            <a:ext cx="7680960" cy="274320"/>
-          </a:xfrm>
-          <a:prstGeom prst="rect">
-            <a:avLst/>
-          </a:prstGeom>
-          <a:noFill/>
-          <a:ln/>
-        </p:spPr>
-        <p:txBody>
-          <a:bodyPr wrap="square" lIns="0" tIns="0" rIns="0" bIns="0" rtlCol="0" anchor="ctr"/>
-          <a:lstStyle/>
-          <a:p>
-            <a:pPr marL="0" indent="0">
-              <a:buNone/>
-            </a:pPr>
-            <a:r>
-              <a:rPr lang="en-US" sz="1100" dirty="0">
-                <a:solidFill>
-                  <a:srgbClr val="5A6B7A"/>
-                </a:solidFill>
-                <a:latin typeface="Open Sans" pitchFamily="34" charset="0"/>
-                <a:ea typeface="Open Sans" pitchFamily="34" charset="-122"/>
-                <a:cs typeface="Open Sans" pitchFamily="34" charset="-120"/>
-              </a:rPr>
-              <a:t>claude.ai  |  Free tier available. Pro gives extended thinking and longer conversations.</a:t>
-            </a:r>
-            <a:endParaRPr lang="en-US" sz="1100" dirty="0"/>
-          </a:p>
-        </p:txBody>
-      </p:sp>
-      <p:sp>
-        <p:nvSpPr>
-          <p:cNvPr id="7" name="Shape 5"/>
-          <p:cNvSpPr/>
-          <p:nvPr/>
-        </p:nvSpPr>
-        <p:spPr>
-          <a:xfrm>
-            <a:off x="731520" y="1280160"/>
-            <a:ext cx="3840480" cy="2011680"/>
-          </a:xfrm>
-          <a:prstGeom prst="rect">
-            <a:avLst/>
-          </a:prstGeom>
-          <a:solidFill>
-            <a:srgbClr val="FFFFFF"/>
-          </a:solidFill>
-          <a:ln/>
-          <a:effectLst>
-            <a:outerShdw blurRad="50800" dist="25400" dir="8100000" algn="bl" rotWithShape="0">
-              <a:srgbClr val="000000">
-                <a:alpha val="6000"/>
-              </a:srgbClr>
-            </a:outerShdw>
-          </a:effectLst>
-        </p:spPr>
-        <p:txBody>
-          <a:bodyPr/>
-          <a:lstStyle/>
-          <a:p>
-            <a:endParaRPr lang="en-US"/>
-          </a:p>
-        </p:txBody>
-      </p:sp>
-      <p:sp>
-        <p:nvSpPr>
-          <p:cNvPr id="8" name="Text 6"/>
-          <p:cNvSpPr/>
-          <p:nvPr/>
-        </p:nvSpPr>
-        <p:spPr>
-          <a:xfrm>
-            <a:off x="914400" y="1371600"/>
-            <a:ext cx="3474720" cy="274320"/>
-          </a:xfrm>
-          <a:prstGeom prst="rect">
-            <a:avLst/>
-          </a:prstGeom>
-          <a:noFill/>
-          <a:ln/>
-        </p:spPr>
-        <p:txBody>
-          <a:bodyPr wrap="square" lIns="0" tIns="0" rIns="0" bIns="0" rtlCol="0" anchor="ctr"/>
-          <a:lstStyle/>
-          <a:p>
-            <a:pPr marL="0" indent="0">
-              <a:buNone/>
-            </a:pPr>
-            <a:r>
-              <a:rPr lang="en-US" sz="1400" b="1" dirty="0">
-                <a:solidFill>
-                  <a:srgbClr val="1E2530"/>
-                </a:solidFill>
-                <a:latin typeface="Open Sans" pitchFamily="34" charset="0"/>
-                <a:ea typeface="Open Sans" pitchFamily="34" charset="-122"/>
-                <a:cs typeface="Open Sans" pitchFamily="34" charset="-120"/>
-              </a:rPr>
-              <a:t>Claude Strengths</a:t>
-            </a:r>
-            <a:endParaRPr lang="en-US" sz="1400" dirty="0"/>
-          </a:p>
-        </p:txBody>
-      </p:sp>
-      <p:sp>
-        <p:nvSpPr>
-          <p:cNvPr id="9" name="Text 7"/>
-          <p:cNvSpPr/>
-          <p:nvPr/>
-        </p:nvSpPr>
-        <p:spPr>
-          <a:xfrm>
-            <a:off x="914400" y="1737360"/>
-            <a:ext cx="3474720" cy="320040"/>
-          </a:xfrm>
-          <a:prstGeom prst="rect">
-            <a:avLst/>
-          </a:prstGeom>
-          <a:noFill/>
-          <a:ln/>
-        </p:spPr>
-        <p:txBody>
-          <a:bodyPr wrap="square" lIns="0" tIns="0" rIns="0" bIns="0" rtlCol="0" anchor="ctr"/>
-          <a:lstStyle/>
-          <a:p>
-            <a:pPr marL="342900" indent="-342900">
-              <a:buSzPct val="100000"/>
-              <a:buChar char="▪"/>
-            </a:pPr>
-            <a:r>
-              <a:rPr lang="en-US" sz="1100" dirty="0">
-                <a:solidFill>
-                  <a:srgbClr val="5A6B7A"/>
-                </a:solidFill>
-                <a:latin typeface="Open Sans" pitchFamily="34" charset="0"/>
-                <a:ea typeface="Open Sans" pitchFamily="34" charset="-122"/>
-                <a:cs typeface="Open Sans" pitchFamily="34" charset="-120"/>
-              </a:rPr>
-              <a:t>Longer context window — paste entire specs or data sets</a:t>
-            </a:r>
-            <a:endParaRPr lang="en-US" sz="1100" dirty="0"/>
-          </a:p>
-        </p:txBody>
-      </p:sp>
-      <p:sp>
-        <p:nvSpPr>
-          <p:cNvPr id="10" name="Text 8"/>
-          <p:cNvSpPr/>
-          <p:nvPr/>
-        </p:nvSpPr>
-        <p:spPr>
-          <a:xfrm>
-            <a:off x="914400" y="2084832"/>
-            <a:ext cx="3474720" cy="320040"/>
-          </a:xfrm>
-          <a:prstGeom prst="rect">
-            <a:avLst/>
-          </a:prstGeom>
-          <a:noFill/>
-          <a:ln/>
-        </p:spPr>
-        <p:txBody>
-          <a:bodyPr wrap="square" lIns="0" tIns="0" rIns="0" bIns="0" rtlCol="0" anchor="ctr"/>
-          <a:lstStyle/>
-          <a:p>
-            <a:pPr marL="342900" indent="-342900">
-              <a:buSzPct val="100000"/>
-              <a:buChar char="▪"/>
-            </a:pPr>
-            <a:r>
-              <a:rPr lang="en-US" sz="1100" dirty="0">
-                <a:solidFill>
-                  <a:srgbClr val="5A6B7A"/>
-                </a:solidFill>
-                <a:latin typeface="Open Sans" pitchFamily="34" charset="0"/>
-                <a:ea typeface="Open Sans" pitchFamily="34" charset="-122"/>
-                <a:cs typeface="Open Sans" pitchFamily="34" charset="-120"/>
-              </a:rPr>
-              <a:t>Strong at structured document generation (memos, specs)</a:t>
-            </a:r>
-            <a:endParaRPr lang="en-US" sz="1100" dirty="0"/>
-          </a:p>
-        </p:txBody>
-      </p:sp>
-      <p:sp>
-        <p:nvSpPr>
-          <p:cNvPr id="11" name="Text 9"/>
-          <p:cNvSpPr/>
-          <p:nvPr/>
-        </p:nvSpPr>
-        <p:spPr>
-          <a:xfrm>
-            <a:off x="914400" y="2432304"/>
-            <a:ext cx="3474720" cy="320040"/>
-          </a:xfrm>
-          <a:prstGeom prst="rect">
-            <a:avLst/>
-          </a:prstGeom>
-          <a:noFill/>
-          <a:ln/>
-        </p:spPr>
-        <p:txBody>
-          <a:bodyPr wrap="square" lIns="0" tIns="0" rIns="0" bIns="0" rtlCol="0" anchor="ctr"/>
-          <a:lstStyle/>
-          <a:p>
-            <a:pPr marL="342900" indent="-342900">
-              <a:buSzPct val="100000"/>
-              <a:buChar char="▪"/>
-            </a:pPr>
-            <a:r>
-              <a:rPr lang="en-US" sz="1100" dirty="0">
-                <a:solidFill>
-                  <a:srgbClr val="5A6B7A"/>
-                </a:solidFill>
-                <a:latin typeface="Open Sans" pitchFamily="34" charset="0"/>
-                <a:ea typeface="Open Sans" pitchFamily="34" charset="-122"/>
-                <a:cs typeface="Open Sans" pitchFamily="34" charset="-120"/>
-              </a:rPr>
-              <a:t>Careful reasoning for multi-step ratio calculations</a:t>
-            </a:r>
-            <a:endParaRPr lang="en-US" sz="1100" dirty="0"/>
-          </a:p>
-        </p:txBody>
-      </p:sp>
-      <p:sp>
-        <p:nvSpPr>
-          <p:cNvPr id="12" name="Text 10"/>
-          <p:cNvSpPr/>
-          <p:nvPr/>
-        </p:nvSpPr>
-        <p:spPr>
-          <a:xfrm>
-            <a:off x="914400" y="2779776"/>
-            <a:ext cx="3474720" cy="320040"/>
-          </a:xfrm>
-          <a:prstGeom prst="rect">
-            <a:avLst/>
-          </a:prstGeom>
-          <a:noFill/>
-          <a:ln/>
-        </p:spPr>
-        <p:txBody>
-          <a:bodyPr wrap="square" lIns="0" tIns="0" rIns="0" bIns="0" rtlCol="0" anchor="ctr"/>
-          <a:lstStyle/>
-          <a:p>
-            <a:pPr marL="342900" indent="-342900">
-              <a:buSzPct val="100000"/>
-              <a:buChar char="▪"/>
-            </a:pPr>
-            <a:r>
-              <a:rPr lang="en-US" sz="1100" dirty="0">
-                <a:solidFill>
-                  <a:srgbClr val="5A6B7A"/>
-                </a:solidFill>
-                <a:latin typeface="Open Sans" pitchFamily="34" charset="0"/>
-                <a:ea typeface="Open Sans" pitchFamily="34" charset="-122"/>
-                <a:cs typeface="Open Sans" pitchFamily="34" charset="-120"/>
-              </a:rPr>
-              <a:t>Can read uploaded files (PDF, Excel, images)</a:t>
-            </a:r>
-            <a:endParaRPr lang="en-US" sz="1100" dirty="0"/>
-          </a:p>
-        </p:txBody>
-      </p:sp>
-      <p:sp>
-        <p:nvSpPr>
-          <p:cNvPr id="13" name="Shape 11"/>
-          <p:cNvSpPr/>
-          <p:nvPr/>
-        </p:nvSpPr>
-        <p:spPr>
-          <a:xfrm>
-            <a:off x="4937760" y="1280160"/>
-            <a:ext cx="3474720" cy="2011680"/>
-          </a:xfrm>
-          <a:prstGeom prst="rect">
-            <a:avLst/>
-          </a:prstGeom>
-          <a:solidFill>
-            <a:srgbClr val="FFFFFF"/>
-          </a:solidFill>
-          <a:ln/>
-          <a:effectLst>
-            <a:outerShdw blurRad="50800" dist="25400" dir="8100000" algn="bl" rotWithShape="0">
-              <a:srgbClr val="000000">
-                <a:alpha val="6000"/>
-              </a:srgbClr>
-            </a:outerShdw>
-          </a:effectLst>
-        </p:spPr>
-        <p:txBody>
-          <a:bodyPr/>
-          <a:lstStyle/>
-          <a:p>
-            <a:endParaRPr lang="en-US"/>
-          </a:p>
-        </p:txBody>
-      </p:sp>
-      <p:sp>
-        <p:nvSpPr>
-          <p:cNvPr id="14" name="Text 12"/>
-          <p:cNvSpPr/>
-          <p:nvPr/>
-        </p:nvSpPr>
-        <p:spPr>
-          <a:xfrm>
-            <a:off x="5120640" y="1371600"/>
-            <a:ext cx="3108960" cy="274320"/>
-          </a:xfrm>
-          <a:prstGeom prst="rect">
-            <a:avLst/>
-          </a:prstGeom>
-          <a:noFill/>
-          <a:ln/>
-        </p:spPr>
-        <p:txBody>
-          <a:bodyPr wrap="square" lIns="0" tIns="0" rIns="0" bIns="0" rtlCol="0" anchor="ctr"/>
-          <a:lstStyle/>
-          <a:p>
-            <a:pPr marL="0" indent="0">
-              <a:buNone/>
-            </a:pPr>
-            <a:r>
-              <a:rPr lang="en-US" sz="1400" b="1" dirty="0">
-                <a:solidFill>
-                  <a:srgbClr val="1E2530"/>
-                </a:solidFill>
-                <a:latin typeface="Open Sans" pitchFamily="34" charset="0"/>
-                <a:ea typeface="Open Sans" pitchFamily="34" charset="-122"/>
-                <a:cs typeface="Open Sans" pitchFamily="34" charset="-120"/>
-              </a:rPr>
-              <a:t>Using Claude with GitHub</a:t>
-            </a:r>
-            <a:endParaRPr lang="en-US" sz="1400" dirty="0"/>
-          </a:p>
-        </p:txBody>
-      </p:sp>
-      <p:sp>
-        <p:nvSpPr>
-          <p:cNvPr id="15" name="Text 13"/>
-          <p:cNvSpPr/>
-          <p:nvPr/>
-        </p:nvSpPr>
-        <p:spPr>
-          <a:xfrm>
-            <a:off x="5120640" y="1737360"/>
-            <a:ext cx="3108960" cy="320040"/>
-          </a:xfrm>
-          <a:prstGeom prst="rect">
-            <a:avLst/>
-          </a:prstGeom>
-          <a:noFill/>
-          <a:ln/>
-        </p:spPr>
-        <p:txBody>
-          <a:bodyPr wrap="square" lIns="0" tIns="0" rIns="0" bIns="0" rtlCol="0" anchor="ctr"/>
-          <a:lstStyle/>
-          <a:p>
-            <a:pPr marL="342900" indent="-342900">
-              <a:buSzPct val="100000"/>
-              <a:buChar char="▪"/>
-            </a:pPr>
-            <a:r>
-              <a:rPr lang="en-US" sz="1100" dirty="0">
-                <a:solidFill>
-                  <a:srgbClr val="5A6B7A"/>
-                </a:solidFill>
-                <a:latin typeface="Open Sans" pitchFamily="34" charset="0"/>
-                <a:ea typeface="Open Sans" pitchFamily="34" charset="-122"/>
-                <a:cs typeface="Open Sans" pitchFamily="34" charset="-120"/>
-              </a:rPr>
-              <a:t>Paste your GitHub file links as context</a:t>
-            </a:r>
-            <a:endParaRPr lang="en-US" sz="1100" dirty="0"/>
-          </a:p>
-        </p:txBody>
-      </p:sp>
-      <p:sp>
-        <p:nvSpPr>
-          <p:cNvPr id="16" name="Text 14"/>
-          <p:cNvSpPr/>
-          <p:nvPr/>
-        </p:nvSpPr>
-        <p:spPr>
-          <a:xfrm>
-            <a:off x="5120640" y="2084832"/>
-            <a:ext cx="3108960" cy="320040"/>
-          </a:xfrm>
-          <a:prstGeom prst="rect">
-            <a:avLst/>
-          </a:prstGeom>
-          <a:noFill/>
-          <a:ln/>
-        </p:spPr>
-        <p:txBody>
-          <a:bodyPr wrap="square" lIns="0" tIns="0" rIns="0" bIns="0" rtlCol="0" anchor="ctr"/>
-          <a:lstStyle/>
-          <a:p>
-            <a:pPr marL="342900" indent="-342900">
-              <a:buSzPct val="100000"/>
-              <a:buChar char="▪"/>
-            </a:pPr>
-            <a:r>
-              <a:rPr lang="en-US" sz="1100" dirty="0">
-                <a:solidFill>
-                  <a:srgbClr val="5A6B7A"/>
-                </a:solidFill>
-                <a:latin typeface="Open Sans" pitchFamily="34" charset="0"/>
-                <a:ea typeface="Open Sans" pitchFamily="34" charset="-122"/>
-                <a:cs typeface="Open Sans" pitchFamily="34" charset="-120"/>
-              </a:rPr>
-              <a:t>Ask Claude to generate Markdown for your memos</a:t>
-            </a:r>
-            <a:endParaRPr lang="en-US" sz="1100" dirty="0"/>
-          </a:p>
-        </p:txBody>
-      </p:sp>
-      <p:sp>
-        <p:nvSpPr>
-          <p:cNvPr id="17" name="Text 15"/>
-          <p:cNvSpPr/>
-          <p:nvPr/>
-        </p:nvSpPr>
-        <p:spPr>
-          <a:xfrm>
-            <a:off x="5120640" y="2432304"/>
-            <a:ext cx="3108960" cy="320040"/>
-          </a:xfrm>
-          <a:prstGeom prst="rect">
-            <a:avLst/>
-          </a:prstGeom>
-          <a:noFill/>
-          <a:ln/>
-        </p:spPr>
-        <p:txBody>
-          <a:bodyPr wrap="square" lIns="0" tIns="0" rIns="0" bIns="0" rtlCol="0" anchor="ctr"/>
-          <a:lstStyle/>
-          <a:p>
-            <a:pPr marL="342900" indent="-342900">
-              <a:buSzPct val="100000"/>
-              <a:buChar char="▪"/>
-            </a:pPr>
-            <a:r>
-              <a:rPr lang="en-US" sz="1100" dirty="0">
-                <a:solidFill>
-                  <a:srgbClr val="5A6B7A"/>
-                </a:solidFill>
-                <a:latin typeface="Open Sans" pitchFamily="34" charset="0"/>
-                <a:ea typeface="Open Sans" pitchFamily="34" charset="-122"/>
-                <a:cs typeface="Open Sans" pitchFamily="34" charset="-120"/>
-              </a:rPr>
-              <a:t>Upload your .xlsx and ask for ratio verification</a:t>
-            </a:r>
-            <a:endParaRPr lang="en-US" sz="1100" dirty="0"/>
-          </a:p>
-        </p:txBody>
-      </p:sp>
-      <p:sp>
-        <p:nvSpPr>
-          <p:cNvPr id="18" name="Text 16"/>
-          <p:cNvSpPr/>
-          <p:nvPr/>
-        </p:nvSpPr>
-        <p:spPr>
-          <a:xfrm>
-            <a:off x="5120640" y="2779776"/>
-            <a:ext cx="3108960" cy="320040"/>
-          </a:xfrm>
-          <a:prstGeom prst="rect">
-            <a:avLst/>
-          </a:prstGeom>
-          <a:noFill/>
-          <a:ln/>
-        </p:spPr>
-        <p:txBody>
-          <a:bodyPr wrap="square" lIns="0" tIns="0" rIns="0" bIns="0" rtlCol="0" anchor="ctr"/>
-          <a:lstStyle/>
-          <a:p>
-            <a:pPr marL="342900" indent="-342900">
-              <a:buSzPct val="100000"/>
-              <a:buChar char="▪"/>
-            </a:pPr>
-            <a:r>
-              <a:rPr lang="en-US" sz="1100" dirty="0">
-                <a:solidFill>
-                  <a:srgbClr val="5A6B7A"/>
-                </a:solidFill>
-                <a:latin typeface="Open Sans" pitchFamily="34" charset="0"/>
-                <a:ea typeface="Open Sans" pitchFamily="34" charset="-122"/>
-                <a:cs typeface="Open Sans" pitchFamily="34" charset="-120"/>
-              </a:rPr>
-              <a:t>Use Claude to draft your Stage 4 AI prompt</a:t>
-            </a:r>
-            <a:endParaRPr lang="en-US" sz="1100" dirty="0"/>
-          </a:p>
-        </p:txBody>
-      </p:sp>
-      <p:sp>
-        <p:nvSpPr>
-          <p:cNvPr id="19" name="Shape 17"/>
-          <p:cNvSpPr/>
-          <p:nvPr/>
-        </p:nvSpPr>
-        <p:spPr>
-          <a:xfrm>
-            <a:off x="731520" y="3520440"/>
-            <a:ext cx="7680960" cy="1005840"/>
-          </a:xfrm>
-          <a:prstGeom prst="rect">
-            <a:avLst/>
-          </a:prstGeom>
-          <a:solidFill>
-            <a:srgbClr val="36454F"/>
-          </a:solidFill>
-          <a:ln/>
-        </p:spPr>
-        <p:txBody>
-          <a:bodyPr/>
-          <a:lstStyle/>
-          <a:p>
-            <a:endParaRPr lang="en-US"/>
-          </a:p>
-        </p:txBody>
-      </p:sp>
-      <p:pic>
-        <p:nvPicPr>
-          <p:cNvPr id="20" name="Image 0" descr="preencoded.png"/>
-          <p:cNvPicPr>
-            <a:picLocks noChangeAspect="1"/>
-          </p:cNvPicPr>
-          <p:nvPr/>
-        </p:nvPicPr>
-        <p:blipFill>
-          <a:blip r:embed="rId3"/>
-          <a:stretch>
-            <a:fillRect/>
-          </a:stretch>
-        </p:blipFill>
-        <p:spPr>
-          <a:xfrm>
-            <a:off x="960120" y="3611880"/>
-            <a:ext cx="320040" cy="320040"/>
-          </a:xfrm>
-          <a:prstGeom prst="rect">
-            <a:avLst/>
-          </a:prstGeom>
-        </p:spPr>
-      </p:pic>
-      <p:sp>
-        <p:nvSpPr>
-          <p:cNvPr id="21" name="Text 18"/>
-          <p:cNvSpPr/>
-          <p:nvPr/>
-        </p:nvSpPr>
-        <p:spPr>
-          <a:xfrm>
-            <a:off x="1371600" y="3611880"/>
-            <a:ext cx="3657600" cy="274320"/>
-          </a:xfrm>
-          <a:prstGeom prst="rect">
-            <a:avLst/>
-          </a:prstGeom>
-          <a:noFill/>
-          <a:ln/>
-        </p:spPr>
-        <p:txBody>
-          <a:bodyPr wrap="square" lIns="0" tIns="0" rIns="0" bIns="0" rtlCol="0" anchor="ctr"/>
-          <a:lstStyle/>
-          <a:p>
-            <a:pPr marL="0" indent="0">
-              <a:buNone/>
-            </a:pPr>
-            <a:r>
-              <a:rPr lang="en-US" sz="1200" b="1" dirty="0">
-                <a:solidFill>
-                  <a:srgbClr val="B8975C"/>
-                </a:solidFill>
-                <a:latin typeface="Open Sans" pitchFamily="34" charset="0"/>
-                <a:ea typeface="Open Sans" pitchFamily="34" charset="-122"/>
-                <a:cs typeface="Open Sans" pitchFamily="34" charset="-120"/>
-              </a:rPr>
-              <a:t>Example Prompt for Stage 1</a:t>
-            </a:r>
-            <a:endParaRPr lang="en-US" sz="1200" dirty="0"/>
-          </a:p>
-        </p:txBody>
-      </p:sp>
-      <p:sp>
-        <p:nvSpPr>
-          <p:cNvPr id="22" name="Text 19"/>
-          <p:cNvSpPr/>
-          <p:nvPr/>
-        </p:nvSpPr>
-        <p:spPr>
-          <a:xfrm>
-            <a:off x="960120" y="3931920"/>
-            <a:ext cx="7269480" cy="548640"/>
-          </a:xfrm>
-          <a:prstGeom prst="rect">
-            <a:avLst/>
-          </a:prstGeom>
-          <a:noFill/>
-          <a:ln/>
-        </p:spPr>
-        <p:txBody>
-          <a:bodyPr wrap="square" lIns="0" tIns="0" rIns="0" bIns="0" rtlCol="0" anchor="ctr"/>
-          <a:lstStyle/>
-          <a:p>
-            <a:pPr marL="0" indent="0">
-              <a:lnSpc>
-                <a:spcPct val="130000"/>
-              </a:lnSpc>
-              <a:buNone/>
-            </a:pPr>
-            <a:r>
-              <a:rPr lang="en-US" sz="1000" i="1" dirty="0">
-                <a:solidFill>
-                  <a:srgbClr val="FFFFFF"/>
-                </a:solidFill>
-                <a:latin typeface="Open Sans" pitchFamily="34" charset="0"/>
-                <a:ea typeface="Open Sans" pitchFamily="34" charset="-122"/>
-                <a:cs typeface="Open Sans" pitchFamily="34" charset="-120"/>
-              </a:rPr>
-              <a:t>"I'm writing a 300-400 word executive memo for my CFO about Apple Inc. (AAPL). The memo should cover: why ratio analysis matters, the six ratio categories (Performance, Profitability, Efficiency, Leverage, Liquidity, Du Pont), and a preview of my analytical plan. Use professional finance language."</a:t>
-            </a:r>
-            <a:endParaRPr lang="en-US" sz="1000" dirty="0"/>
-          </a:p>
-        </p:txBody>
-      </p:sp>
-    </p:spTree>
-  </p:cSld>
-  <p:clrMapOvr>
-    <a:masterClrMapping/>
-  </p:clrMapOvr>
-</p:sld>
-</file>
-
-<file path=ppt/slides/slide13.xml><?xml version="1.0" encoding="utf-8"?>
-<p:sld xmlns:a="http://schemas.openxmlformats.org/drawingml/2006/main" xmlns:r="http://schemas.openxmlformats.org/officeDocument/2006/relationships" xmlns:p="http://schemas.openxmlformats.org/presentationml/2006/main">
-  <p:cSld name="Slide 13">
-    <p:bg>
-      <p:bgPr>
-        <a:solidFill>
-          <a:srgbClr val="FAF9F7"/>
-        </a:solidFill>
-        <a:effectLst/>
-      </p:bgPr>
-    </p:bg>
-    <p:spTree>
-      <p:nvGrpSpPr>
-        <p:cNvPr id="1" name=""/>
-        <p:cNvGrpSpPr/>
-        <p:nvPr/>
-      </p:nvGrpSpPr>
-      <p:grpSpPr>
-        <a:xfrm>
-          <a:off x="0" y="0"/>
-          <a:ext cx="0" cy="0"/>
-          <a:chOff x="0" y="0"/>
-          <a:chExt cx="0" cy="0"/>
-        </a:xfrm>
-      </p:grpSpPr>
-      <p:sp>
-        <p:nvSpPr>
-          <p:cNvPr id="2" name="Shape 0"/>
-          <p:cNvSpPr/>
-          <p:nvPr/>
-        </p:nvSpPr>
-        <p:spPr>
-          <a:xfrm>
-            <a:off x="0" y="0"/>
-            <a:ext cx="9144000" cy="36576"/>
-          </a:xfrm>
-          <a:prstGeom prst="rect">
-            <a:avLst/>
-          </a:prstGeom>
-          <a:solidFill>
-            <a:srgbClr val="B8975C"/>
-          </a:solidFill>
-          <a:ln/>
-        </p:spPr>
-        <p:txBody>
-          <a:bodyPr/>
-          <a:lstStyle/>
-          <a:p>
-            <a:endParaRPr lang="en-US"/>
-          </a:p>
-        </p:txBody>
-      </p:sp>
-      <p:sp>
-        <p:nvSpPr>
-          <p:cNvPr id="3" name="Shape 1"/>
-          <p:cNvSpPr/>
-          <p:nvPr/>
-        </p:nvSpPr>
-        <p:spPr>
-          <a:xfrm>
-            <a:off x="0" y="4709160"/>
-            <a:ext cx="9144000" cy="434340"/>
-          </a:xfrm>
-          <a:prstGeom prst="rect">
-            <a:avLst/>
-          </a:prstGeom>
-          <a:solidFill>
-            <a:srgbClr val="36454F"/>
-          </a:solidFill>
-          <a:ln/>
-        </p:spPr>
-        <p:txBody>
-          <a:bodyPr/>
-          <a:lstStyle/>
-          <a:p>
-            <a:endParaRPr lang="en-US"/>
-          </a:p>
-        </p:txBody>
-      </p:sp>
-      <p:sp>
-        <p:nvSpPr>
-          <p:cNvPr id="4" name="Text 2"/>
-          <p:cNvSpPr/>
-          <p:nvPr/>
-        </p:nvSpPr>
-        <p:spPr>
-          <a:xfrm>
-            <a:off x="457200" y="4754880"/>
-            <a:ext cx="8229600" cy="320040"/>
-          </a:xfrm>
-          <a:prstGeom prst="rect">
-            <a:avLst/>
-          </a:prstGeom>
-          <a:noFill/>
-          <a:ln/>
-        </p:spPr>
-        <p:txBody>
-          <a:bodyPr wrap="square" rtlCol="0" anchor="ctr"/>
-          <a:lstStyle/>
-          <a:p>
-            <a:pPr marL="0" indent="0" algn="ctr">
-              <a:buNone/>
-            </a:pPr>
-            <a:r>
-              <a:rPr lang="en-US" sz="900" dirty="0">
-                <a:solidFill>
-                  <a:srgbClr val="8A9BAD"/>
-                </a:solidFill>
-                <a:latin typeface="Open Sans" pitchFamily="34" charset="0"/>
-                <a:ea typeface="Open Sans" pitchFamily="34" charset="-122"/>
-                <a:cs typeface="Open Sans" pitchFamily="34" charset="-120"/>
-              </a:rPr>
-              <a:t>Stauffer  |  Appendix: GitHub &amp; AI Setup Guide  |  Shidler College of Business</a:t>
-            </a:r>
-            <a:endParaRPr lang="en-US" sz="900" dirty="0"/>
-          </a:p>
-        </p:txBody>
-      </p:sp>
-      <p:sp>
-        <p:nvSpPr>
-          <p:cNvPr id="5" name="Text 3"/>
-          <p:cNvSpPr/>
-          <p:nvPr/>
-        </p:nvSpPr>
-        <p:spPr>
-          <a:xfrm>
-            <a:off x="731520" y="320040"/>
-            <a:ext cx="7680960" cy="457200"/>
-          </a:xfrm>
-          <a:prstGeom prst="rect">
-            <a:avLst/>
-          </a:prstGeom>
-          <a:noFill/>
-          <a:ln/>
-        </p:spPr>
-        <p:txBody>
-          <a:bodyPr wrap="square" lIns="0" tIns="0" rIns="0" bIns="0" rtlCol="0" anchor="ctr"/>
-          <a:lstStyle/>
-          <a:p>
-            <a:pPr marL="0" indent="0">
-              <a:buNone/>
-            </a:pPr>
-            <a:r>
-              <a:rPr lang="en-US" sz="2800" b="1" dirty="0">
-                <a:solidFill>
-                  <a:srgbClr val="1E2530"/>
-                </a:solidFill>
-                <a:latin typeface="Open Sans" pitchFamily="34" charset="0"/>
-                <a:ea typeface="Open Sans" pitchFamily="34" charset="-122"/>
-                <a:cs typeface="Open Sans" pitchFamily="34" charset="-120"/>
-              </a:rPr>
-              <a:t>Prompt Patterns That Work</a:t>
-            </a:r>
-            <a:endParaRPr lang="en-US" sz="2800" dirty="0"/>
-          </a:p>
-        </p:txBody>
-      </p:sp>
-      <p:sp>
-        <p:nvSpPr>
-          <p:cNvPr id="6" name="Text 4"/>
-          <p:cNvSpPr/>
-          <p:nvPr/>
-        </p:nvSpPr>
-        <p:spPr>
-          <a:xfrm>
-            <a:off x="731520" y="822960"/>
-            <a:ext cx="7680960" cy="274320"/>
-          </a:xfrm>
-          <a:prstGeom prst="rect">
-            <a:avLst/>
-          </a:prstGeom>
-          <a:noFill/>
-          <a:ln/>
-        </p:spPr>
-        <p:txBody>
-          <a:bodyPr wrap="square" lIns="0" tIns="0" rIns="0" bIns="0" rtlCol="0" anchor="ctr"/>
-          <a:lstStyle/>
-          <a:p>
-            <a:pPr marL="0" indent="0">
-              <a:buNone/>
-            </a:pPr>
-            <a:r>
-              <a:rPr lang="en-US" sz="1200" dirty="0">
-                <a:solidFill>
-                  <a:srgbClr val="5A6B7A"/>
-                </a:solidFill>
-                <a:latin typeface="Open Sans" pitchFamily="34" charset="0"/>
-                <a:ea typeface="Open Sans" pitchFamily="34" charset="-122"/>
-                <a:cs typeface="Open Sans" pitchFamily="34" charset="-120"/>
-              </a:rPr>
-              <a:t>Use these templates as starting points. Adapt them to your company and stage.</a:t>
-            </a:r>
-            <a:endParaRPr lang="en-US" sz="1200" dirty="0"/>
-          </a:p>
-        </p:txBody>
-      </p:sp>
-      <p:sp>
-        <p:nvSpPr>
-          <p:cNvPr id="7" name="Shape 5"/>
-          <p:cNvSpPr/>
-          <p:nvPr/>
-        </p:nvSpPr>
-        <p:spPr>
-          <a:xfrm>
-            <a:off x="731520" y="1234440"/>
-            <a:ext cx="7680960" cy="731520"/>
-          </a:xfrm>
-          <a:prstGeom prst="rect">
-            <a:avLst/>
-          </a:prstGeom>
-          <a:solidFill>
-            <a:srgbClr val="FFFFFF"/>
-          </a:solidFill>
-          <a:ln/>
-          <a:effectLst>
-            <a:outerShdw blurRad="38100" dist="12700" dir="8100000" algn="bl" rotWithShape="0">
-              <a:srgbClr val="000000">
-                <a:alpha val="5000"/>
-              </a:srgbClr>
-            </a:outerShdw>
-          </a:effectLst>
-        </p:spPr>
-        <p:txBody>
-          <a:bodyPr/>
-          <a:lstStyle/>
-          <a:p>
-            <a:endParaRPr lang="en-US"/>
-          </a:p>
-        </p:txBody>
-      </p:sp>
-      <p:sp>
-        <p:nvSpPr>
-          <p:cNvPr id="8" name="Shape 6"/>
-          <p:cNvSpPr/>
-          <p:nvPr/>
-        </p:nvSpPr>
-        <p:spPr>
-          <a:xfrm>
-            <a:off x="731520" y="1234440"/>
-            <a:ext cx="54864" cy="731520"/>
-          </a:xfrm>
-          <a:prstGeom prst="rect">
-            <a:avLst/>
-          </a:prstGeom>
-          <a:solidFill>
-            <a:srgbClr val="B8975C"/>
-          </a:solidFill>
-          <a:ln/>
-        </p:spPr>
-        <p:txBody>
-          <a:bodyPr/>
-          <a:lstStyle/>
-          <a:p>
-            <a:endParaRPr lang="en-US"/>
-          </a:p>
-        </p:txBody>
-      </p:sp>
-      <p:sp>
-        <p:nvSpPr>
-          <p:cNvPr id="9" name="Text 7"/>
-          <p:cNvSpPr/>
-          <p:nvPr/>
-        </p:nvSpPr>
-        <p:spPr>
-          <a:xfrm>
-            <a:off x="960120" y="1261872"/>
-            <a:ext cx="1828800" cy="320040"/>
-          </a:xfrm>
-          <a:prstGeom prst="rect">
-            <a:avLst/>
-          </a:prstGeom>
-          <a:noFill/>
-          <a:ln/>
-        </p:spPr>
-        <p:txBody>
-          <a:bodyPr wrap="square" lIns="0" tIns="0" rIns="0" bIns="0" rtlCol="0" anchor="ctr"/>
-          <a:lstStyle/>
-          <a:p>
-            <a:pPr marL="0" indent="0">
-              <a:buNone/>
-            </a:pPr>
-            <a:r>
-              <a:rPr lang="en-US" sz="1300" b="1" dirty="0">
-                <a:solidFill>
-                  <a:srgbClr val="1E2530"/>
-                </a:solidFill>
-                <a:latin typeface="Open Sans" pitchFamily="34" charset="0"/>
-                <a:ea typeface="Open Sans" pitchFamily="34" charset="-122"/>
-                <a:cs typeface="Open Sans" pitchFamily="34" charset="-120"/>
-              </a:rPr>
-              <a:t>Give It a Role</a:t>
-            </a:r>
-            <a:endParaRPr lang="en-US" sz="1300" dirty="0"/>
-          </a:p>
-        </p:txBody>
-      </p:sp>
-      <p:sp>
-        <p:nvSpPr>
-          <p:cNvPr id="10" name="Text 8"/>
-          <p:cNvSpPr/>
-          <p:nvPr/>
-        </p:nvSpPr>
-        <p:spPr>
-          <a:xfrm>
-            <a:off x="960120" y="1581912"/>
-            <a:ext cx="3200400" cy="320040"/>
-          </a:xfrm>
-          <a:prstGeom prst="rect">
-            <a:avLst/>
-          </a:prstGeom>
-          <a:noFill/>
-          <a:ln/>
-        </p:spPr>
-        <p:txBody>
-          <a:bodyPr wrap="square" lIns="0" tIns="0" rIns="0" bIns="0" rtlCol="0" anchor="ctr"/>
-          <a:lstStyle/>
-          <a:p>
-            <a:pPr marL="0" indent="0">
-              <a:buNone/>
-            </a:pPr>
-            <a:r>
-              <a:rPr lang="en-US" sz="1000" b="1" dirty="0">
-                <a:solidFill>
-                  <a:srgbClr val="CC4444"/>
-                </a:solidFill>
-              </a:rPr>
-              <a:t xml:space="preserve">Vague:  </a:t>
-            </a:r>
-            <a:r>
-              <a:rPr lang="en-US" sz="1000" i="1" dirty="0">
-                <a:solidFill>
-                  <a:srgbClr val="8A9BAD"/>
-                </a:solidFill>
-              </a:rPr>
-              <a:t>"Help me with ratios"</a:t>
-            </a:r>
-            <a:endParaRPr lang="en-US" sz="1000" dirty="0"/>
-          </a:p>
-        </p:txBody>
-      </p:sp>
-      <p:sp>
-        <p:nvSpPr>
-          <p:cNvPr id="11" name="Text 9"/>
-          <p:cNvSpPr/>
-          <p:nvPr/>
-        </p:nvSpPr>
-        <p:spPr>
-          <a:xfrm>
-            <a:off x="4206240" y="1280160"/>
-            <a:ext cx="4023360" cy="640080"/>
-          </a:xfrm>
-          <a:prstGeom prst="rect">
-            <a:avLst/>
-          </a:prstGeom>
-          <a:noFill/>
-          <a:ln/>
-        </p:spPr>
-        <p:txBody>
-          <a:bodyPr wrap="square" lIns="0" tIns="0" rIns="0" bIns="0" rtlCol="0" anchor="ctr"/>
-          <a:lstStyle/>
-          <a:p>
-            <a:pPr marL="0" indent="0">
-              <a:lnSpc>
-                <a:spcPct val="130000"/>
-              </a:lnSpc>
-              <a:buNone/>
-            </a:pPr>
-            <a:r>
-              <a:rPr lang="en-US" sz="1000" b="1" dirty="0">
-                <a:solidFill>
-                  <a:srgbClr val="1B5E40"/>
-                </a:solidFill>
-              </a:rPr>
-              <a:t xml:space="preserve">Better:  </a:t>
-            </a:r>
-            <a:r>
-              <a:rPr lang="en-US" sz="1000" dirty="0">
-                <a:solidFill>
-                  <a:srgbClr val="5A6B7A"/>
-                </a:solidFill>
-              </a:rPr>
-              <a:t>"You are an FP&amp;A analyst at Apple. Calculate the current ratio from these balance sheet figures..."</a:t>
-            </a:r>
-            <a:endParaRPr lang="en-US" sz="1000" dirty="0"/>
-          </a:p>
-        </p:txBody>
-      </p:sp>
-      <p:sp>
-        <p:nvSpPr>
-          <p:cNvPr id="12" name="Shape 10"/>
-          <p:cNvSpPr/>
-          <p:nvPr/>
-        </p:nvSpPr>
-        <p:spPr>
-          <a:xfrm>
-            <a:off x="731520" y="2057400"/>
-            <a:ext cx="7680960" cy="731520"/>
-          </a:xfrm>
-          <a:prstGeom prst="rect">
-            <a:avLst/>
-          </a:prstGeom>
-          <a:solidFill>
-            <a:srgbClr val="FFFFFF"/>
-          </a:solidFill>
-          <a:ln/>
-          <a:effectLst>
-            <a:outerShdw blurRad="38100" dist="12700" dir="8100000" algn="bl" rotWithShape="0">
-              <a:srgbClr val="000000">
-                <a:alpha val="5000"/>
-              </a:srgbClr>
-            </a:outerShdw>
-          </a:effectLst>
-        </p:spPr>
-        <p:txBody>
-          <a:bodyPr/>
-          <a:lstStyle/>
-          <a:p>
-            <a:endParaRPr lang="en-US"/>
-          </a:p>
-        </p:txBody>
-      </p:sp>
-      <p:sp>
-        <p:nvSpPr>
-          <p:cNvPr id="13" name="Shape 11"/>
-          <p:cNvSpPr/>
-          <p:nvPr/>
-        </p:nvSpPr>
-        <p:spPr>
-          <a:xfrm>
-            <a:off x="731520" y="2057400"/>
-            <a:ext cx="54864" cy="731520"/>
-          </a:xfrm>
-          <a:prstGeom prst="rect">
-            <a:avLst/>
-          </a:prstGeom>
-          <a:solidFill>
-            <a:srgbClr val="B8975C"/>
-          </a:solidFill>
-          <a:ln/>
-        </p:spPr>
-        <p:txBody>
-          <a:bodyPr/>
-          <a:lstStyle/>
-          <a:p>
-            <a:endParaRPr lang="en-US"/>
-          </a:p>
-        </p:txBody>
-      </p:sp>
-      <p:sp>
-        <p:nvSpPr>
-          <p:cNvPr id="14" name="Text 12"/>
-          <p:cNvSpPr/>
-          <p:nvPr/>
-        </p:nvSpPr>
-        <p:spPr>
-          <a:xfrm>
-            <a:off x="960120" y="2084832"/>
-            <a:ext cx="1828800" cy="320040"/>
-          </a:xfrm>
-          <a:prstGeom prst="rect">
-            <a:avLst/>
-          </a:prstGeom>
-          <a:noFill/>
-          <a:ln/>
-        </p:spPr>
-        <p:txBody>
-          <a:bodyPr wrap="square" lIns="0" tIns="0" rIns="0" bIns="0" rtlCol="0" anchor="ctr"/>
-          <a:lstStyle/>
-          <a:p>
-            <a:pPr marL="0" indent="0">
-              <a:buNone/>
-            </a:pPr>
-            <a:r>
-              <a:rPr lang="en-US" sz="1300" b="1" dirty="0">
-                <a:solidFill>
-                  <a:srgbClr val="1E2530"/>
-                </a:solidFill>
-                <a:latin typeface="Open Sans" pitchFamily="34" charset="0"/>
-                <a:ea typeface="Open Sans" pitchFamily="34" charset="-122"/>
-                <a:cs typeface="Open Sans" pitchFamily="34" charset="-120"/>
-              </a:rPr>
-              <a:t>Provide the Data</a:t>
-            </a:r>
-            <a:endParaRPr lang="en-US" sz="1300" dirty="0"/>
-          </a:p>
-        </p:txBody>
-      </p:sp>
-      <p:sp>
-        <p:nvSpPr>
-          <p:cNvPr id="15" name="Text 13"/>
-          <p:cNvSpPr/>
-          <p:nvPr/>
-        </p:nvSpPr>
-        <p:spPr>
-          <a:xfrm>
-            <a:off x="960120" y="2404872"/>
-            <a:ext cx="3200400" cy="320040"/>
-          </a:xfrm>
-          <a:prstGeom prst="rect">
-            <a:avLst/>
-          </a:prstGeom>
-          <a:noFill/>
-          <a:ln/>
-        </p:spPr>
-        <p:txBody>
-          <a:bodyPr wrap="square" lIns="0" tIns="0" rIns="0" bIns="0" rtlCol="0" anchor="ctr"/>
-          <a:lstStyle/>
-          <a:p>
-            <a:pPr marL="0" indent="0">
-              <a:buNone/>
-            </a:pPr>
-            <a:r>
-              <a:rPr lang="en-US" sz="1000" b="1" dirty="0">
-                <a:solidFill>
-                  <a:srgbClr val="CC4444"/>
-                </a:solidFill>
-              </a:rPr>
-              <a:t xml:space="preserve">Vague:  </a:t>
-            </a:r>
-            <a:r>
-              <a:rPr lang="en-US" sz="1000" i="1" dirty="0">
-                <a:solidFill>
-                  <a:srgbClr val="8A9BAD"/>
-                </a:solidFill>
-              </a:rPr>
-              <a:t>"What is AAPL's ROE?"</a:t>
-            </a:r>
-            <a:endParaRPr lang="en-US" sz="1000" dirty="0"/>
-          </a:p>
-        </p:txBody>
-      </p:sp>
-      <p:sp>
-        <p:nvSpPr>
-          <p:cNvPr id="16" name="Text 14"/>
-          <p:cNvSpPr/>
-          <p:nvPr/>
-        </p:nvSpPr>
-        <p:spPr>
-          <a:xfrm>
-            <a:off x="4206240" y="2103120"/>
-            <a:ext cx="4023360" cy="640080"/>
-          </a:xfrm>
-          <a:prstGeom prst="rect">
-            <a:avLst/>
-          </a:prstGeom>
-          <a:noFill/>
-          <a:ln/>
-        </p:spPr>
-        <p:txBody>
-          <a:bodyPr wrap="square" lIns="0" tIns="0" rIns="0" bIns="0" rtlCol="0" anchor="ctr"/>
-          <a:lstStyle/>
-          <a:p>
-            <a:pPr marL="0" indent="0">
-              <a:lnSpc>
-                <a:spcPct val="130000"/>
-              </a:lnSpc>
-              <a:buNone/>
-            </a:pPr>
-            <a:r>
-              <a:rPr lang="en-US" sz="1000" b="1" dirty="0">
-                <a:solidFill>
-                  <a:srgbClr val="1B5E40"/>
-                </a:solidFill>
-              </a:rPr>
-              <a:t xml:space="preserve">Better:  </a:t>
-            </a:r>
-            <a:r>
-              <a:rPr lang="en-US" sz="1000" dirty="0">
-                <a:solidFill>
-                  <a:srgbClr val="5A6B7A"/>
-                </a:solidFill>
-              </a:rPr>
-              <a:t>"Net Income: $93.7B. Shareholder Equity: $56.9B. Calculate ROE and explain what it means for Apple."</a:t>
-            </a:r>
-            <a:endParaRPr lang="en-US" sz="1000" dirty="0"/>
-          </a:p>
-        </p:txBody>
-      </p:sp>
-      <p:sp>
-        <p:nvSpPr>
-          <p:cNvPr id="17" name="Shape 15"/>
-          <p:cNvSpPr/>
-          <p:nvPr/>
-        </p:nvSpPr>
-        <p:spPr>
-          <a:xfrm>
-            <a:off x="731520" y="2880360"/>
-            <a:ext cx="7680960" cy="731520"/>
-          </a:xfrm>
-          <a:prstGeom prst="rect">
-            <a:avLst/>
-          </a:prstGeom>
-          <a:solidFill>
-            <a:srgbClr val="FFFFFF"/>
-          </a:solidFill>
-          <a:ln/>
-          <a:effectLst>
-            <a:outerShdw blurRad="38100" dist="12700" dir="8100000" algn="bl" rotWithShape="0">
-              <a:srgbClr val="000000">
-                <a:alpha val="5000"/>
-              </a:srgbClr>
-            </a:outerShdw>
-          </a:effectLst>
-        </p:spPr>
-        <p:txBody>
-          <a:bodyPr/>
-          <a:lstStyle/>
-          <a:p>
-            <a:endParaRPr lang="en-US"/>
-          </a:p>
-        </p:txBody>
-      </p:sp>
-      <p:sp>
-        <p:nvSpPr>
-          <p:cNvPr id="18" name="Shape 16"/>
-          <p:cNvSpPr/>
-          <p:nvPr/>
-        </p:nvSpPr>
-        <p:spPr>
-          <a:xfrm>
-            <a:off x="731520" y="2880360"/>
-            <a:ext cx="54864" cy="731520"/>
-          </a:xfrm>
-          <a:prstGeom prst="rect">
-            <a:avLst/>
-          </a:prstGeom>
-          <a:solidFill>
-            <a:srgbClr val="B8975C"/>
-          </a:solidFill>
-          <a:ln/>
-        </p:spPr>
-        <p:txBody>
-          <a:bodyPr/>
-          <a:lstStyle/>
-          <a:p>
-            <a:endParaRPr lang="en-US"/>
-          </a:p>
-        </p:txBody>
-      </p:sp>
-      <p:sp>
-        <p:nvSpPr>
-          <p:cNvPr id="19" name="Text 17"/>
-          <p:cNvSpPr/>
-          <p:nvPr/>
-        </p:nvSpPr>
-        <p:spPr>
-          <a:xfrm>
-            <a:off x="960120" y="2907792"/>
-            <a:ext cx="1828800" cy="320040"/>
-          </a:xfrm>
-          <a:prstGeom prst="rect">
-            <a:avLst/>
-          </a:prstGeom>
-          <a:noFill/>
-          <a:ln/>
-        </p:spPr>
-        <p:txBody>
-          <a:bodyPr wrap="square" lIns="0" tIns="0" rIns="0" bIns="0" rtlCol="0" anchor="ctr"/>
-          <a:lstStyle/>
-          <a:p>
-            <a:pPr marL="0" indent="0">
-              <a:buNone/>
-            </a:pPr>
-            <a:r>
-              <a:rPr lang="en-US" sz="1300" b="1" dirty="0">
-                <a:solidFill>
-                  <a:srgbClr val="1E2530"/>
-                </a:solidFill>
-                <a:latin typeface="Open Sans" pitchFamily="34" charset="0"/>
-                <a:ea typeface="Open Sans" pitchFamily="34" charset="-122"/>
-                <a:cs typeface="Open Sans" pitchFamily="34" charset="-120"/>
-              </a:rPr>
-              <a:t>Specify the Output</a:t>
-            </a:r>
-            <a:endParaRPr lang="en-US" sz="1300" dirty="0"/>
-          </a:p>
-        </p:txBody>
-      </p:sp>
-      <p:sp>
-        <p:nvSpPr>
-          <p:cNvPr id="20" name="Text 18"/>
-          <p:cNvSpPr/>
-          <p:nvPr/>
-        </p:nvSpPr>
-        <p:spPr>
-          <a:xfrm>
-            <a:off x="960120" y="3227832"/>
-            <a:ext cx="3200400" cy="320040"/>
-          </a:xfrm>
-          <a:prstGeom prst="rect">
-            <a:avLst/>
-          </a:prstGeom>
-          <a:noFill/>
-          <a:ln/>
-        </p:spPr>
-        <p:txBody>
-          <a:bodyPr wrap="square" lIns="0" tIns="0" rIns="0" bIns="0" rtlCol="0" anchor="ctr"/>
-          <a:lstStyle/>
-          <a:p>
-            <a:pPr marL="0" indent="0">
-              <a:buNone/>
-            </a:pPr>
-            <a:r>
-              <a:rPr lang="en-US" sz="1000" b="1" dirty="0">
-                <a:solidFill>
-                  <a:srgbClr val="CC4444"/>
-                </a:solidFill>
-              </a:rPr>
-              <a:t xml:space="preserve">Vague:  </a:t>
-            </a:r>
-            <a:r>
-              <a:rPr lang="en-US" sz="1000" i="1" dirty="0">
-                <a:solidFill>
-                  <a:srgbClr val="8A9BAD"/>
-                </a:solidFill>
-              </a:rPr>
-              <a:t>"Analyze these ratios"</a:t>
-            </a:r>
-            <a:endParaRPr lang="en-US" sz="1000" dirty="0"/>
-          </a:p>
-        </p:txBody>
-      </p:sp>
-      <p:sp>
-        <p:nvSpPr>
-          <p:cNvPr id="21" name="Text 19"/>
-          <p:cNvSpPr/>
-          <p:nvPr/>
-        </p:nvSpPr>
-        <p:spPr>
-          <a:xfrm>
-            <a:off x="4206240" y="2926080"/>
-            <a:ext cx="4023360" cy="640080"/>
-          </a:xfrm>
-          <a:prstGeom prst="rect">
-            <a:avLst/>
-          </a:prstGeom>
-          <a:noFill/>
-          <a:ln/>
-        </p:spPr>
-        <p:txBody>
-          <a:bodyPr wrap="square" lIns="0" tIns="0" rIns="0" bIns="0" rtlCol="0" anchor="ctr"/>
-          <a:lstStyle/>
-          <a:p>
-            <a:pPr marL="0" indent="0">
-              <a:lnSpc>
-                <a:spcPct val="130000"/>
-              </a:lnSpc>
-              <a:buNone/>
-            </a:pPr>
-            <a:r>
-              <a:rPr lang="en-US" sz="1000" b="1" dirty="0">
-                <a:solidFill>
-                  <a:srgbClr val="1B5E40"/>
-                </a:solidFill>
-              </a:rPr>
-              <a:t xml:space="preserve">Better:  </a:t>
-            </a:r>
-            <a:r>
-              <a:rPr lang="en-US" sz="1000" dirty="0">
-                <a:solidFill>
-                  <a:srgbClr val="5A6B7A"/>
-                </a:solidFill>
-              </a:rPr>
-              <a:t>"Present results in a Markdown table with columns: Ratio Name, Formula, Value, Interpretation. Use 2 decimal places."</a:t>
-            </a:r>
-            <a:endParaRPr lang="en-US" sz="1000" dirty="0"/>
-          </a:p>
-        </p:txBody>
-      </p:sp>
-      <p:sp>
-        <p:nvSpPr>
-          <p:cNvPr id="22" name="Shape 20"/>
-          <p:cNvSpPr/>
-          <p:nvPr/>
-        </p:nvSpPr>
-        <p:spPr>
-          <a:xfrm>
-            <a:off x="731520" y="3703320"/>
-            <a:ext cx="7680960" cy="731520"/>
-          </a:xfrm>
-          <a:prstGeom prst="rect">
-            <a:avLst/>
-          </a:prstGeom>
-          <a:solidFill>
-            <a:srgbClr val="FFFFFF"/>
-          </a:solidFill>
-          <a:ln/>
-          <a:effectLst>
-            <a:outerShdw blurRad="38100" dist="12700" dir="8100000" algn="bl" rotWithShape="0">
-              <a:srgbClr val="000000">
-                <a:alpha val="5000"/>
-              </a:srgbClr>
-            </a:outerShdw>
-          </a:effectLst>
-        </p:spPr>
-        <p:txBody>
-          <a:bodyPr/>
-          <a:lstStyle/>
-          <a:p>
-            <a:endParaRPr lang="en-US"/>
-          </a:p>
-        </p:txBody>
-      </p:sp>
-      <p:sp>
-        <p:nvSpPr>
-          <p:cNvPr id="23" name="Shape 21"/>
-          <p:cNvSpPr/>
-          <p:nvPr/>
-        </p:nvSpPr>
-        <p:spPr>
-          <a:xfrm>
-            <a:off x="731520" y="3703320"/>
-            <a:ext cx="54864" cy="731520"/>
-          </a:xfrm>
-          <a:prstGeom prst="rect">
-            <a:avLst/>
-          </a:prstGeom>
-          <a:solidFill>
-            <a:srgbClr val="B8975C"/>
-          </a:solidFill>
-          <a:ln/>
-        </p:spPr>
-        <p:txBody>
-          <a:bodyPr/>
-          <a:lstStyle/>
-          <a:p>
-            <a:endParaRPr lang="en-US"/>
-          </a:p>
-        </p:txBody>
-      </p:sp>
-      <p:sp>
-        <p:nvSpPr>
-          <p:cNvPr id="24" name="Text 22"/>
-          <p:cNvSpPr/>
-          <p:nvPr/>
-        </p:nvSpPr>
-        <p:spPr>
-          <a:xfrm>
-            <a:off x="960120" y="3730752"/>
-            <a:ext cx="1828800" cy="320040"/>
-          </a:xfrm>
-          <a:prstGeom prst="rect">
-            <a:avLst/>
-          </a:prstGeom>
-          <a:noFill/>
-          <a:ln/>
-        </p:spPr>
-        <p:txBody>
-          <a:bodyPr wrap="square" lIns="0" tIns="0" rIns="0" bIns="0" rtlCol="0" anchor="ctr"/>
-          <a:lstStyle/>
-          <a:p>
-            <a:pPr marL="0" indent="0">
-              <a:buNone/>
-            </a:pPr>
-            <a:r>
-              <a:rPr lang="en-US" sz="1300" b="1" dirty="0">
-                <a:solidFill>
-                  <a:srgbClr val="1E2530"/>
-                </a:solidFill>
-                <a:latin typeface="Open Sans" pitchFamily="34" charset="0"/>
-                <a:ea typeface="Open Sans" pitchFamily="34" charset="-122"/>
-                <a:cs typeface="Open Sans" pitchFamily="34" charset="-120"/>
-              </a:rPr>
-              <a:t>Request Verification</a:t>
-            </a:r>
-            <a:endParaRPr lang="en-US" sz="1300" dirty="0"/>
-          </a:p>
-        </p:txBody>
-      </p:sp>
-      <p:sp>
-        <p:nvSpPr>
-          <p:cNvPr id="25" name="Text 23"/>
-          <p:cNvSpPr/>
-          <p:nvPr/>
-        </p:nvSpPr>
-        <p:spPr>
-          <a:xfrm>
-            <a:off x="960120" y="4050792"/>
-            <a:ext cx="3200400" cy="320040"/>
-          </a:xfrm>
-          <a:prstGeom prst="rect">
-            <a:avLst/>
-          </a:prstGeom>
-          <a:noFill/>
-          <a:ln/>
-        </p:spPr>
-        <p:txBody>
-          <a:bodyPr wrap="square" lIns="0" tIns="0" rIns="0" bIns="0" rtlCol="0" anchor="ctr"/>
-          <a:lstStyle/>
-          <a:p>
-            <a:pPr marL="0" indent="0">
-              <a:buNone/>
-            </a:pPr>
-            <a:r>
-              <a:rPr lang="en-US" sz="1000" b="1" dirty="0">
-                <a:solidFill>
-                  <a:srgbClr val="CC4444"/>
-                </a:solidFill>
-              </a:rPr>
-              <a:t xml:space="preserve">Vague:  </a:t>
-            </a:r>
-            <a:r>
-              <a:rPr lang="en-US" sz="1000" i="1" dirty="0">
-                <a:solidFill>
-                  <a:srgbClr val="8A9BAD"/>
-                </a:solidFill>
-              </a:rPr>
-              <a:t>"Is this right?"</a:t>
-            </a:r>
-            <a:endParaRPr lang="en-US" sz="1000" dirty="0"/>
-          </a:p>
-        </p:txBody>
-      </p:sp>
-      <p:sp>
-        <p:nvSpPr>
-          <p:cNvPr id="26" name="Text 24"/>
-          <p:cNvSpPr/>
-          <p:nvPr/>
-        </p:nvSpPr>
-        <p:spPr>
-          <a:xfrm>
-            <a:off x="4206240" y="3749040"/>
-            <a:ext cx="4023360" cy="640080"/>
-          </a:xfrm>
-          <a:prstGeom prst="rect">
-            <a:avLst/>
-          </a:prstGeom>
-          <a:noFill/>
-          <a:ln/>
-        </p:spPr>
-        <p:txBody>
-          <a:bodyPr wrap="square" lIns="0" tIns="0" rIns="0" bIns="0" rtlCol="0" anchor="ctr"/>
-          <a:lstStyle/>
-          <a:p>
-            <a:pPr marL="0" indent="0">
-              <a:lnSpc>
-                <a:spcPct val="130000"/>
-              </a:lnSpc>
-              <a:buNone/>
-            </a:pPr>
-            <a:r>
-              <a:rPr lang="en-US" sz="1000" b="1" dirty="0">
-                <a:solidFill>
-                  <a:srgbClr val="1B5E40"/>
-                </a:solidFill>
-              </a:rPr>
-              <a:t xml:space="preserve">Better:  </a:t>
-            </a:r>
-            <a:r>
-              <a:rPr lang="en-US" sz="1000" dirty="0">
-                <a:solidFill>
-                  <a:srgbClr val="5A6B7A"/>
-                </a:solidFill>
-              </a:rPr>
-              <a:t>"Cross-check: ROE should equal Profit Margin × Asset Turnover × Equity Multiplier via Du Pont. Show the math."</a:t>
-            </a:r>
-            <a:endParaRPr lang="en-US" sz="1000" dirty="0"/>
-          </a:p>
-        </p:txBody>
-      </p:sp>
-    </p:spTree>
-  </p:cSld>
-  <p:clrMapOvr>
-    <a:masterClrMapping/>
-  </p:clrMapOvr>
-</p:sld>
-</file>
-
-<file path=ppt/slides/slide14.xml><?xml version="1.0" encoding="utf-8"?>
-<p:sld xmlns:a="http://schemas.openxmlformats.org/drawingml/2006/main" xmlns:r="http://schemas.openxmlformats.org/officeDocument/2006/relationships" xmlns:p="http://schemas.openxmlformats.org/presentationml/2006/main">
-  <p:cSld name="Slide 14">
-    <p:bg>
-      <p:bgPr>
-        <a:solidFill>
-          <a:srgbClr val="FAF9F7"/>
-        </a:solidFill>
-        <a:effectLst/>
-      </p:bgPr>
-    </p:bg>
-    <p:spTree>
-      <p:nvGrpSpPr>
-        <p:cNvPr id="1" name=""/>
-        <p:cNvGrpSpPr/>
-        <p:nvPr/>
-      </p:nvGrpSpPr>
-      <p:grpSpPr>
-        <a:xfrm>
-          <a:off x="0" y="0"/>
-          <a:ext cx="0" cy="0"/>
-          <a:chOff x="0" y="0"/>
-          <a:chExt cx="0" cy="0"/>
-        </a:xfrm>
-      </p:grpSpPr>
-      <p:sp>
-        <p:nvSpPr>
-          <p:cNvPr id="2" name="Shape 0"/>
-          <p:cNvSpPr/>
-          <p:nvPr/>
-        </p:nvSpPr>
-        <p:spPr>
-          <a:xfrm>
-            <a:off x="0" y="0"/>
-            <a:ext cx="9144000" cy="36576"/>
-          </a:xfrm>
-          <a:prstGeom prst="rect">
-            <a:avLst/>
-          </a:prstGeom>
-          <a:solidFill>
-            <a:srgbClr val="B8975C"/>
-          </a:solidFill>
-          <a:ln/>
-        </p:spPr>
-        <p:txBody>
-          <a:bodyPr/>
-          <a:lstStyle/>
-          <a:p>
-            <a:endParaRPr lang="en-US"/>
-          </a:p>
-        </p:txBody>
-      </p:sp>
-      <p:sp>
-        <p:nvSpPr>
-          <p:cNvPr id="3" name="Shape 1"/>
-          <p:cNvSpPr/>
-          <p:nvPr/>
-        </p:nvSpPr>
-        <p:spPr>
-          <a:xfrm>
-            <a:off x="0" y="4709160"/>
-            <a:ext cx="9144000" cy="434340"/>
-          </a:xfrm>
-          <a:prstGeom prst="rect">
-            <a:avLst/>
-          </a:prstGeom>
-          <a:solidFill>
-            <a:srgbClr val="36454F"/>
-          </a:solidFill>
-          <a:ln/>
-        </p:spPr>
-        <p:txBody>
-          <a:bodyPr/>
-          <a:lstStyle/>
-          <a:p>
-            <a:endParaRPr lang="en-US"/>
-          </a:p>
-        </p:txBody>
-      </p:sp>
-      <p:sp>
-        <p:nvSpPr>
-          <p:cNvPr id="4" name="Text 2"/>
-          <p:cNvSpPr/>
-          <p:nvPr/>
-        </p:nvSpPr>
-        <p:spPr>
-          <a:xfrm>
-            <a:off x="457200" y="4754880"/>
-            <a:ext cx="8229600" cy="320040"/>
-          </a:xfrm>
-          <a:prstGeom prst="rect">
-            <a:avLst/>
-          </a:prstGeom>
-          <a:noFill/>
-          <a:ln/>
-        </p:spPr>
-        <p:txBody>
-          <a:bodyPr wrap="square" rtlCol="0" anchor="ctr"/>
-          <a:lstStyle/>
-          <a:p>
-            <a:pPr marL="0" indent="0" algn="ctr">
-              <a:buNone/>
-            </a:pPr>
-            <a:r>
-              <a:rPr lang="en-US" sz="900" dirty="0">
-                <a:solidFill>
-                  <a:srgbClr val="8A9BAD"/>
-                </a:solidFill>
-                <a:latin typeface="Open Sans" pitchFamily="34" charset="0"/>
-                <a:ea typeface="Open Sans" pitchFamily="34" charset="-122"/>
-                <a:cs typeface="Open Sans" pitchFamily="34" charset="-120"/>
-              </a:rPr>
-              <a:t>Stauffer  |  Appendix: GitHub &amp; AI Setup Guide  |  Shidler College of Business</a:t>
-            </a:r>
-            <a:endParaRPr lang="en-US" sz="900" dirty="0"/>
-          </a:p>
-        </p:txBody>
-      </p:sp>
-      <p:sp>
-        <p:nvSpPr>
-          <p:cNvPr id="5" name="Text 3"/>
-          <p:cNvSpPr/>
-          <p:nvPr/>
-        </p:nvSpPr>
-        <p:spPr>
-          <a:xfrm>
-            <a:off x="731520" y="320040"/>
-            <a:ext cx="7680960" cy="457200"/>
-          </a:xfrm>
-          <a:prstGeom prst="rect">
-            <a:avLst/>
-          </a:prstGeom>
-          <a:noFill/>
-          <a:ln/>
-        </p:spPr>
-        <p:txBody>
-          <a:bodyPr wrap="square" lIns="0" tIns="0" rIns="0" bIns="0" rtlCol="0" anchor="ctr"/>
-          <a:lstStyle/>
-          <a:p>
-            <a:pPr marL="0" indent="0">
-              <a:buNone/>
-            </a:pPr>
-            <a:r>
-              <a:rPr lang="en-US" sz="2800" b="1" dirty="0">
-                <a:solidFill>
-                  <a:srgbClr val="1E2530"/>
-                </a:solidFill>
-                <a:latin typeface="Open Sans" pitchFamily="34" charset="0"/>
-                <a:ea typeface="Open Sans" pitchFamily="34" charset="-122"/>
-                <a:cs typeface="Open Sans" pitchFamily="34" charset="-120"/>
-              </a:rPr>
-              <a:t>Putting It All Together: AI + GitHub Workflow</a:t>
-            </a:r>
-            <a:endParaRPr lang="en-US" sz="2800" dirty="0"/>
-          </a:p>
-        </p:txBody>
-      </p:sp>
-      <p:sp>
-        <p:nvSpPr>
-          <p:cNvPr id="6" name="Shape 4"/>
-          <p:cNvSpPr/>
-          <p:nvPr/>
-        </p:nvSpPr>
-        <p:spPr>
-          <a:xfrm>
-            <a:off x="457200" y="1051560"/>
-            <a:ext cx="1463040" cy="1828800"/>
-          </a:xfrm>
-          <a:prstGeom prst="rect">
-            <a:avLst/>
-          </a:prstGeom>
-          <a:solidFill>
-            <a:srgbClr val="FFFFFF"/>
-          </a:solidFill>
-          <a:ln/>
-          <a:effectLst>
-            <a:outerShdw blurRad="50800" dist="25400" dir="8100000" algn="bl" rotWithShape="0">
-              <a:srgbClr val="000000">
-                <a:alpha val="6000"/>
-              </a:srgbClr>
-            </a:outerShdw>
-          </a:effectLst>
-        </p:spPr>
-        <p:txBody>
-          <a:bodyPr/>
-          <a:lstStyle/>
-          <a:p>
-            <a:endParaRPr lang="en-US"/>
-          </a:p>
-        </p:txBody>
-      </p:sp>
-      <p:pic>
-        <p:nvPicPr>
-          <p:cNvPr id="7" name="Image 0" descr="preencoded.png"/>
-          <p:cNvPicPr>
-            <a:picLocks noChangeAspect="1"/>
-          </p:cNvPicPr>
-          <p:nvPr/>
-        </p:nvPicPr>
-        <p:blipFill>
-          <a:blip r:embed="rId3"/>
-          <a:stretch>
-            <a:fillRect/>
-          </a:stretch>
-        </p:blipFill>
-        <p:spPr>
-          <a:xfrm>
-            <a:off x="960120" y="1188720"/>
-            <a:ext cx="365760" cy="365760"/>
-          </a:xfrm>
-          <a:prstGeom prst="rect">
-            <a:avLst/>
-          </a:prstGeom>
-        </p:spPr>
-      </p:pic>
-      <p:sp>
-        <p:nvSpPr>
-          <p:cNvPr id="8" name="Text 5"/>
-          <p:cNvSpPr/>
-          <p:nvPr/>
-        </p:nvSpPr>
-        <p:spPr>
-          <a:xfrm>
-            <a:off x="548640" y="1645920"/>
-            <a:ext cx="1280160" cy="274320"/>
-          </a:xfrm>
-          <a:prstGeom prst="rect">
-            <a:avLst/>
-          </a:prstGeom>
-          <a:noFill/>
-          <a:ln/>
-        </p:spPr>
-        <p:txBody>
-          <a:bodyPr wrap="square" lIns="0" tIns="0" rIns="0" bIns="0" rtlCol="0" anchor="ctr"/>
-          <a:lstStyle/>
-          <a:p>
-            <a:pPr marL="0" indent="0" algn="ctr">
-              <a:buNone/>
-            </a:pPr>
-            <a:r>
-              <a:rPr lang="en-US" sz="1400" b="1" dirty="0">
-                <a:solidFill>
-                  <a:srgbClr val="1E2530"/>
-                </a:solidFill>
-                <a:latin typeface="Open Sans" pitchFamily="34" charset="0"/>
-                <a:ea typeface="Open Sans" pitchFamily="34" charset="-122"/>
-                <a:cs typeface="Open Sans" pitchFamily="34" charset="-120"/>
-              </a:rPr>
-              <a:t>Draft</a:t>
-            </a:r>
-            <a:endParaRPr lang="en-US" sz="1400" dirty="0"/>
-          </a:p>
-        </p:txBody>
-      </p:sp>
-      <p:sp>
-        <p:nvSpPr>
-          <p:cNvPr id="9" name="Text 6"/>
-          <p:cNvSpPr/>
-          <p:nvPr/>
-        </p:nvSpPr>
-        <p:spPr>
-          <a:xfrm>
-            <a:off x="548640" y="1965960"/>
-            <a:ext cx="1280160" cy="640080"/>
-          </a:xfrm>
-          <a:prstGeom prst="rect">
-            <a:avLst/>
-          </a:prstGeom>
-          <a:noFill/>
-          <a:ln/>
-        </p:spPr>
-        <p:txBody>
-          <a:bodyPr wrap="square" lIns="0" tIns="0" rIns="0" bIns="0" rtlCol="0" anchor="t"/>
-          <a:lstStyle/>
-          <a:p>
-            <a:pPr marL="0" indent="0" algn="ctr">
-              <a:lnSpc>
-                <a:spcPct val="130000"/>
-              </a:lnSpc>
-              <a:buNone/>
-            </a:pPr>
-            <a:r>
-              <a:rPr lang="en-US" sz="1000" dirty="0">
-                <a:solidFill>
-                  <a:srgbClr val="5A6B7A"/>
-                </a:solidFill>
-                <a:latin typeface="Open Sans" pitchFamily="34" charset="0"/>
-                <a:ea typeface="Open Sans" pitchFamily="34" charset="-122"/>
-                <a:cs typeface="Open Sans" pitchFamily="34" charset="-120"/>
-              </a:rPr>
-              <a:t>Use AI to draft</a:t>
-            </a:r>
-            <a:endParaRPr lang="en-US" sz="1000" dirty="0"/>
-          </a:p>
-          <a:p>
-            <a:pPr marL="0" indent="0" algn="ctr">
-              <a:lnSpc>
-                <a:spcPct val="130000"/>
-              </a:lnSpc>
-              <a:buNone/>
-            </a:pPr>
-            <a:r>
-              <a:rPr lang="en-US" sz="1000" dirty="0">
-                <a:solidFill>
-                  <a:srgbClr val="5A6B7A"/>
-                </a:solidFill>
-                <a:latin typeface="Open Sans" pitchFamily="34" charset="0"/>
-                <a:ea typeface="Open Sans" pitchFamily="34" charset="-122"/>
-                <a:cs typeface="Open Sans" pitchFamily="34" charset="-120"/>
-              </a:rPr>
-              <a:t>memo or spec</a:t>
-            </a:r>
-            <a:endParaRPr lang="en-US" sz="1000" dirty="0"/>
-          </a:p>
-        </p:txBody>
-      </p:sp>
-      <p:sp>
-        <p:nvSpPr>
-          <p:cNvPr id="10" name="Text 7"/>
-          <p:cNvSpPr/>
-          <p:nvPr/>
-        </p:nvSpPr>
-        <p:spPr>
-          <a:xfrm>
-            <a:off x="1920240" y="1645920"/>
-            <a:ext cx="274320" cy="365760"/>
-          </a:xfrm>
-          <a:prstGeom prst="rect">
-            <a:avLst/>
-          </a:prstGeom>
-          <a:noFill/>
-          <a:ln/>
-        </p:spPr>
-        <p:txBody>
-          <a:bodyPr wrap="square" lIns="0" tIns="0" rIns="0" bIns="0" rtlCol="0" anchor="ctr"/>
-          <a:lstStyle/>
-          <a:p>
-            <a:pPr marL="0" indent="0" algn="ctr">
-              <a:buNone/>
-            </a:pPr>
-            <a:r>
-              <a:rPr lang="en-US" sz="1800" b="1" dirty="0">
-                <a:solidFill>
-                  <a:srgbClr val="B8975C"/>
-                </a:solidFill>
-                <a:latin typeface="Open Sans" pitchFamily="34" charset="0"/>
-                <a:ea typeface="Open Sans" pitchFamily="34" charset="-122"/>
-                <a:cs typeface="Open Sans" pitchFamily="34" charset="-120"/>
-              </a:rPr>
-              <a:t>→</a:t>
-            </a:r>
-            <a:endParaRPr lang="en-US" sz="1800" dirty="0"/>
-          </a:p>
-        </p:txBody>
-      </p:sp>
-      <p:sp>
-        <p:nvSpPr>
-          <p:cNvPr id="11" name="Shape 8"/>
-          <p:cNvSpPr/>
-          <p:nvPr/>
-        </p:nvSpPr>
-        <p:spPr>
-          <a:xfrm>
-            <a:off x="2194560" y="1051560"/>
-            <a:ext cx="1463040" cy="1828800"/>
-          </a:xfrm>
-          <a:prstGeom prst="rect">
-            <a:avLst/>
-          </a:prstGeom>
-          <a:solidFill>
-            <a:srgbClr val="FFFFFF"/>
-          </a:solidFill>
-          <a:ln/>
-          <a:effectLst>
-            <a:outerShdw blurRad="50800" dist="25400" dir="8100000" algn="bl" rotWithShape="0">
-              <a:srgbClr val="000000">
-                <a:alpha val="6000"/>
-              </a:srgbClr>
-            </a:outerShdw>
-          </a:effectLst>
-        </p:spPr>
-        <p:txBody>
-          <a:bodyPr/>
-          <a:lstStyle/>
-          <a:p>
-            <a:endParaRPr lang="en-US"/>
-          </a:p>
-        </p:txBody>
-      </p:sp>
-      <p:pic>
-        <p:nvPicPr>
-          <p:cNvPr id="12" name="Image 1" descr="preencoded.png"/>
-          <p:cNvPicPr>
-            <a:picLocks noChangeAspect="1"/>
-          </p:cNvPicPr>
-          <p:nvPr/>
-        </p:nvPicPr>
-        <p:blipFill>
-          <a:blip r:embed="rId4"/>
-          <a:stretch>
-            <a:fillRect/>
-          </a:stretch>
-        </p:blipFill>
-        <p:spPr>
-          <a:xfrm>
-            <a:off x="2697480" y="1188720"/>
-            <a:ext cx="365760" cy="365760"/>
-          </a:xfrm>
-          <a:prstGeom prst="rect">
-            <a:avLst/>
-          </a:prstGeom>
-        </p:spPr>
-      </p:pic>
-      <p:sp>
-        <p:nvSpPr>
-          <p:cNvPr id="13" name="Text 9"/>
-          <p:cNvSpPr/>
-          <p:nvPr/>
-        </p:nvSpPr>
-        <p:spPr>
-          <a:xfrm>
-            <a:off x="2286000" y="1645920"/>
-            <a:ext cx="1280160" cy="274320"/>
-          </a:xfrm>
-          <a:prstGeom prst="rect">
-            <a:avLst/>
-          </a:prstGeom>
-          <a:noFill/>
-          <a:ln/>
-        </p:spPr>
-        <p:txBody>
-          <a:bodyPr wrap="square" lIns="0" tIns="0" rIns="0" bIns="0" rtlCol="0" anchor="ctr"/>
-          <a:lstStyle/>
-          <a:p>
-            <a:pPr marL="0" indent="0" algn="ctr">
-              <a:buNone/>
-            </a:pPr>
-            <a:r>
-              <a:rPr lang="en-US" sz="1400" b="1" dirty="0">
-                <a:solidFill>
-                  <a:srgbClr val="1E2530"/>
-                </a:solidFill>
-                <a:latin typeface="Open Sans" pitchFamily="34" charset="0"/>
-                <a:ea typeface="Open Sans" pitchFamily="34" charset="-122"/>
-                <a:cs typeface="Open Sans" pitchFamily="34" charset="-120"/>
-              </a:rPr>
-              <a:t>Edit</a:t>
-            </a:r>
-            <a:endParaRPr lang="en-US" sz="1400" dirty="0"/>
-          </a:p>
-        </p:txBody>
-      </p:sp>
-      <p:sp>
-        <p:nvSpPr>
-          <p:cNvPr id="14" name="Text 10"/>
-          <p:cNvSpPr/>
-          <p:nvPr/>
-        </p:nvSpPr>
-        <p:spPr>
-          <a:xfrm>
-            <a:off x="2286000" y="1965960"/>
-            <a:ext cx="1280160" cy="640080"/>
-          </a:xfrm>
-          <a:prstGeom prst="rect">
-            <a:avLst/>
-          </a:prstGeom>
-          <a:noFill/>
-          <a:ln/>
-        </p:spPr>
-        <p:txBody>
-          <a:bodyPr wrap="square" lIns="0" tIns="0" rIns="0" bIns="0" rtlCol="0" anchor="t"/>
-          <a:lstStyle/>
-          <a:p>
-            <a:pPr marL="0" indent="0" algn="ctr">
-              <a:lnSpc>
-                <a:spcPct val="130000"/>
-              </a:lnSpc>
-              <a:buNone/>
-            </a:pPr>
-            <a:r>
-              <a:rPr lang="en-US" sz="1000" dirty="0">
-                <a:solidFill>
-                  <a:srgbClr val="5A6B7A"/>
-                </a:solidFill>
-                <a:latin typeface="Open Sans" pitchFamily="34" charset="0"/>
-                <a:ea typeface="Open Sans" pitchFamily="34" charset="-122"/>
-                <a:cs typeface="Open Sans" pitchFamily="34" charset="-120"/>
-              </a:rPr>
-              <a:t>Revise in your</a:t>
-            </a:r>
-            <a:endParaRPr lang="en-US" sz="1000" dirty="0"/>
-          </a:p>
-          <a:p>
-            <a:pPr marL="0" indent="0" algn="ctr">
-              <a:lnSpc>
-                <a:spcPct val="130000"/>
-              </a:lnSpc>
-              <a:buNone/>
-            </a:pPr>
-            <a:r>
-              <a:rPr lang="en-US" sz="1000" dirty="0">
-                <a:solidFill>
-                  <a:srgbClr val="5A6B7A"/>
-                </a:solidFill>
-                <a:latin typeface="Open Sans" pitchFamily="34" charset="0"/>
-                <a:ea typeface="Open Sans" pitchFamily="34" charset="-122"/>
-                <a:cs typeface="Open Sans" pitchFamily="34" charset="-120"/>
-              </a:rPr>
-              <a:t>text editor</a:t>
-            </a:r>
-            <a:endParaRPr lang="en-US" sz="1000" dirty="0"/>
-          </a:p>
-        </p:txBody>
-      </p:sp>
-      <p:sp>
-        <p:nvSpPr>
-          <p:cNvPr id="15" name="Text 11"/>
-          <p:cNvSpPr/>
-          <p:nvPr/>
-        </p:nvSpPr>
-        <p:spPr>
-          <a:xfrm>
-            <a:off x="3657600" y="1645920"/>
-            <a:ext cx="274320" cy="365760"/>
-          </a:xfrm>
-          <a:prstGeom prst="rect">
-            <a:avLst/>
-          </a:prstGeom>
-          <a:noFill/>
-          <a:ln/>
-        </p:spPr>
-        <p:txBody>
-          <a:bodyPr wrap="square" lIns="0" tIns="0" rIns="0" bIns="0" rtlCol="0" anchor="ctr"/>
-          <a:lstStyle/>
-          <a:p>
-            <a:pPr marL="0" indent="0" algn="ctr">
-              <a:buNone/>
-            </a:pPr>
-            <a:r>
-              <a:rPr lang="en-US" sz="1800" b="1" dirty="0">
-                <a:solidFill>
-                  <a:srgbClr val="B8975C"/>
-                </a:solidFill>
-                <a:latin typeface="Open Sans" pitchFamily="34" charset="0"/>
-                <a:ea typeface="Open Sans" pitchFamily="34" charset="-122"/>
-                <a:cs typeface="Open Sans" pitchFamily="34" charset="-120"/>
-              </a:rPr>
-              <a:t>→</a:t>
-            </a:r>
-            <a:endParaRPr lang="en-US" sz="1800" dirty="0"/>
-          </a:p>
-        </p:txBody>
-      </p:sp>
-      <p:sp>
-        <p:nvSpPr>
-          <p:cNvPr id="16" name="Shape 12"/>
-          <p:cNvSpPr/>
-          <p:nvPr/>
-        </p:nvSpPr>
-        <p:spPr>
-          <a:xfrm>
-            <a:off x="3931920" y="1051560"/>
-            <a:ext cx="1463040" cy="1828800"/>
-          </a:xfrm>
-          <a:prstGeom prst="rect">
-            <a:avLst/>
-          </a:prstGeom>
-          <a:solidFill>
-            <a:srgbClr val="FFFFFF"/>
-          </a:solidFill>
-          <a:ln/>
-          <a:effectLst>
-            <a:outerShdw blurRad="50800" dist="25400" dir="8100000" algn="bl" rotWithShape="0">
-              <a:srgbClr val="000000">
-                <a:alpha val="6000"/>
-              </a:srgbClr>
-            </a:outerShdw>
-          </a:effectLst>
-        </p:spPr>
-        <p:txBody>
-          <a:bodyPr/>
-          <a:lstStyle/>
-          <a:p>
-            <a:endParaRPr lang="en-US"/>
-          </a:p>
-        </p:txBody>
-      </p:sp>
-      <p:pic>
-        <p:nvPicPr>
-          <p:cNvPr id="17" name="Image 2" descr="preencoded.png"/>
-          <p:cNvPicPr>
-            <a:picLocks noChangeAspect="1"/>
-          </p:cNvPicPr>
-          <p:nvPr/>
-        </p:nvPicPr>
-        <p:blipFill>
-          <a:blip r:embed="rId5"/>
-          <a:stretch>
-            <a:fillRect/>
-          </a:stretch>
-        </p:blipFill>
-        <p:spPr>
-          <a:xfrm>
-            <a:off x="4434840" y="1188720"/>
-            <a:ext cx="365760" cy="365760"/>
-          </a:xfrm>
-          <a:prstGeom prst="rect">
-            <a:avLst/>
-          </a:prstGeom>
-        </p:spPr>
-      </p:pic>
-      <p:sp>
-        <p:nvSpPr>
-          <p:cNvPr id="18" name="Text 13"/>
-          <p:cNvSpPr/>
-          <p:nvPr/>
-        </p:nvSpPr>
-        <p:spPr>
-          <a:xfrm>
-            <a:off x="4023360" y="1645920"/>
-            <a:ext cx="1280160" cy="274320"/>
-          </a:xfrm>
-          <a:prstGeom prst="rect">
-            <a:avLst/>
-          </a:prstGeom>
-          <a:noFill/>
-          <a:ln/>
-        </p:spPr>
-        <p:txBody>
-          <a:bodyPr wrap="square" lIns="0" tIns="0" rIns="0" bIns="0" rtlCol="0" anchor="ctr"/>
-          <a:lstStyle/>
-          <a:p>
-            <a:pPr marL="0" indent="0" algn="ctr">
-              <a:buNone/>
-            </a:pPr>
-            <a:r>
-              <a:rPr lang="en-US" sz="1400" b="1" dirty="0">
-                <a:solidFill>
-                  <a:srgbClr val="1E2530"/>
-                </a:solidFill>
-                <a:latin typeface="Open Sans" pitchFamily="34" charset="0"/>
-                <a:ea typeface="Open Sans" pitchFamily="34" charset="-122"/>
-                <a:cs typeface="Open Sans" pitchFamily="34" charset="-120"/>
-              </a:rPr>
-              <a:t>Save</a:t>
-            </a:r>
-            <a:endParaRPr lang="en-US" sz="1400" dirty="0"/>
-          </a:p>
-        </p:txBody>
-      </p:sp>
-      <p:sp>
-        <p:nvSpPr>
-          <p:cNvPr id="19" name="Text 14"/>
-          <p:cNvSpPr/>
-          <p:nvPr/>
-        </p:nvSpPr>
-        <p:spPr>
-          <a:xfrm>
-            <a:off x="4023360" y="1965960"/>
-            <a:ext cx="1280160" cy="640080"/>
-          </a:xfrm>
-          <a:prstGeom prst="rect">
-            <a:avLst/>
-          </a:prstGeom>
-          <a:noFill/>
-          <a:ln/>
-        </p:spPr>
-        <p:txBody>
-          <a:bodyPr wrap="square" lIns="0" tIns="0" rIns="0" bIns="0" rtlCol="0" anchor="t"/>
-          <a:lstStyle/>
-          <a:p>
-            <a:pPr marL="0" indent="0" algn="ctr">
-              <a:lnSpc>
-                <a:spcPct val="130000"/>
-              </a:lnSpc>
-              <a:buNone/>
-            </a:pPr>
-            <a:r>
-              <a:rPr lang="en-US" sz="1000" dirty="0">
-                <a:solidFill>
-                  <a:srgbClr val="5A6B7A"/>
-                </a:solidFill>
-                <a:latin typeface="Open Sans" pitchFamily="34" charset="0"/>
-                <a:ea typeface="Open Sans" pitchFamily="34" charset="-122"/>
-                <a:cs typeface="Open Sans" pitchFamily="34" charset="-120"/>
-              </a:rPr>
-              <a:t>Save the .md or</a:t>
-            </a:r>
-            <a:endParaRPr lang="en-US" sz="1000" dirty="0"/>
-          </a:p>
-          <a:p>
-            <a:pPr marL="0" indent="0" algn="ctr">
-              <a:lnSpc>
-                <a:spcPct val="130000"/>
-              </a:lnSpc>
-              <a:buNone/>
-            </a:pPr>
-            <a:r>
-              <a:rPr lang="en-US" sz="1000" dirty="0">
-                <a:solidFill>
-                  <a:srgbClr val="5A6B7A"/>
-                </a:solidFill>
-                <a:latin typeface="Open Sans" pitchFamily="34" charset="0"/>
-                <a:ea typeface="Open Sans" pitchFamily="34" charset="-122"/>
-                <a:cs typeface="Open Sans" pitchFamily="34" charset="-120"/>
-              </a:rPr>
-              <a:t>.xlsx file locally</a:t>
-            </a:r>
-            <a:endParaRPr lang="en-US" sz="1000" dirty="0"/>
-          </a:p>
-        </p:txBody>
-      </p:sp>
-      <p:sp>
-        <p:nvSpPr>
-          <p:cNvPr id="20" name="Text 15"/>
-          <p:cNvSpPr/>
-          <p:nvPr/>
-        </p:nvSpPr>
-        <p:spPr>
-          <a:xfrm>
-            <a:off x="5394960" y="1645920"/>
-            <a:ext cx="274320" cy="365760"/>
-          </a:xfrm>
-          <a:prstGeom prst="rect">
-            <a:avLst/>
-          </a:prstGeom>
-          <a:noFill/>
-          <a:ln/>
-        </p:spPr>
-        <p:txBody>
-          <a:bodyPr wrap="square" lIns="0" tIns="0" rIns="0" bIns="0" rtlCol="0" anchor="ctr"/>
-          <a:lstStyle/>
-          <a:p>
-            <a:pPr marL="0" indent="0" algn="ctr">
-              <a:buNone/>
-            </a:pPr>
-            <a:r>
-              <a:rPr lang="en-US" sz="1800" b="1" dirty="0">
-                <a:solidFill>
-                  <a:srgbClr val="B8975C"/>
-                </a:solidFill>
-                <a:latin typeface="Open Sans" pitchFamily="34" charset="0"/>
-                <a:ea typeface="Open Sans" pitchFamily="34" charset="-122"/>
-                <a:cs typeface="Open Sans" pitchFamily="34" charset="-120"/>
-              </a:rPr>
-              <a:t>→</a:t>
-            </a:r>
-            <a:endParaRPr lang="en-US" sz="1800" dirty="0"/>
-          </a:p>
-        </p:txBody>
-      </p:sp>
-      <p:sp>
-        <p:nvSpPr>
-          <p:cNvPr id="21" name="Shape 16"/>
-          <p:cNvSpPr/>
-          <p:nvPr/>
-        </p:nvSpPr>
-        <p:spPr>
-          <a:xfrm>
-            <a:off x="5669280" y="1051560"/>
-            <a:ext cx="1463040" cy="1828800"/>
-          </a:xfrm>
-          <a:prstGeom prst="rect">
-            <a:avLst/>
-          </a:prstGeom>
-          <a:solidFill>
-            <a:srgbClr val="FFFFFF"/>
-          </a:solidFill>
-          <a:ln/>
-          <a:effectLst>
-            <a:outerShdw blurRad="50800" dist="25400" dir="8100000" algn="bl" rotWithShape="0">
-              <a:srgbClr val="000000">
-                <a:alpha val="6000"/>
-              </a:srgbClr>
-            </a:outerShdw>
-          </a:effectLst>
-        </p:spPr>
-        <p:txBody>
-          <a:bodyPr/>
-          <a:lstStyle/>
-          <a:p>
-            <a:endParaRPr lang="en-US"/>
-          </a:p>
-        </p:txBody>
-      </p:sp>
-      <p:pic>
-        <p:nvPicPr>
-          <p:cNvPr id="22" name="Image 3" descr="preencoded.png"/>
-          <p:cNvPicPr>
-            <a:picLocks noChangeAspect="1"/>
-          </p:cNvPicPr>
-          <p:nvPr/>
-        </p:nvPicPr>
-        <p:blipFill>
-          <a:blip r:embed="rId6"/>
-          <a:stretch>
-            <a:fillRect/>
-          </a:stretch>
-        </p:blipFill>
-        <p:spPr>
-          <a:xfrm>
-            <a:off x="6172200" y="1188720"/>
-            <a:ext cx="365760" cy="365760"/>
-          </a:xfrm>
-          <a:prstGeom prst="rect">
-            <a:avLst/>
-          </a:prstGeom>
-        </p:spPr>
-      </p:pic>
-      <p:sp>
-        <p:nvSpPr>
-          <p:cNvPr id="23" name="Text 17"/>
-          <p:cNvSpPr/>
-          <p:nvPr/>
-        </p:nvSpPr>
-        <p:spPr>
-          <a:xfrm>
-            <a:off x="5760720" y="1645920"/>
-            <a:ext cx="1280160" cy="274320"/>
-          </a:xfrm>
-          <a:prstGeom prst="rect">
-            <a:avLst/>
-          </a:prstGeom>
-          <a:noFill/>
-          <a:ln/>
-        </p:spPr>
-        <p:txBody>
-          <a:bodyPr wrap="square" lIns="0" tIns="0" rIns="0" bIns="0" rtlCol="0" anchor="ctr"/>
-          <a:lstStyle/>
-          <a:p>
-            <a:pPr marL="0" indent="0" algn="ctr">
-              <a:buNone/>
-            </a:pPr>
-            <a:r>
-              <a:rPr lang="en-US" sz="1400" b="1" dirty="0">
-                <a:solidFill>
-                  <a:srgbClr val="1E2530"/>
-                </a:solidFill>
-                <a:latin typeface="Open Sans" pitchFamily="34" charset="0"/>
-                <a:ea typeface="Open Sans" pitchFamily="34" charset="-122"/>
-                <a:cs typeface="Open Sans" pitchFamily="34" charset="-120"/>
-              </a:rPr>
-              <a:t>Commit</a:t>
-            </a:r>
-            <a:endParaRPr lang="en-US" sz="1400" dirty="0"/>
-          </a:p>
-        </p:txBody>
-      </p:sp>
-      <p:sp>
-        <p:nvSpPr>
-          <p:cNvPr id="24" name="Text 18"/>
-          <p:cNvSpPr/>
-          <p:nvPr/>
-        </p:nvSpPr>
-        <p:spPr>
-          <a:xfrm>
-            <a:off x="5760720" y="1965960"/>
-            <a:ext cx="1280160" cy="640080"/>
-          </a:xfrm>
-          <a:prstGeom prst="rect">
-            <a:avLst/>
-          </a:prstGeom>
-          <a:noFill/>
-          <a:ln/>
-        </p:spPr>
-        <p:txBody>
-          <a:bodyPr wrap="square" lIns="0" tIns="0" rIns="0" bIns="0" rtlCol="0" anchor="t"/>
-          <a:lstStyle/>
-          <a:p>
-            <a:pPr marL="0" indent="0" algn="ctr">
-              <a:lnSpc>
-                <a:spcPct val="130000"/>
-              </a:lnSpc>
-              <a:buNone/>
-            </a:pPr>
-            <a:r>
-              <a:rPr lang="en-US" sz="1000" dirty="0">
-                <a:solidFill>
-                  <a:srgbClr val="5A6B7A"/>
-                </a:solidFill>
-                <a:latin typeface="Open Sans" pitchFamily="34" charset="0"/>
-                <a:ea typeface="Open Sans" pitchFamily="34" charset="-122"/>
-                <a:cs typeface="Open Sans" pitchFamily="34" charset="-120"/>
-              </a:rPr>
-              <a:t>git add + commit</a:t>
-            </a:r>
-            <a:endParaRPr lang="en-US" sz="1000" dirty="0"/>
-          </a:p>
-          <a:p>
-            <a:pPr marL="0" indent="0" algn="ctr">
-              <a:lnSpc>
-                <a:spcPct val="130000"/>
-              </a:lnSpc>
-              <a:buNone/>
-            </a:pPr>
-            <a:r>
-              <a:rPr lang="en-US" sz="1000" dirty="0">
-                <a:solidFill>
-                  <a:srgbClr val="5A6B7A"/>
-                </a:solidFill>
-                <a:latin typeface="Open Sans" pitchFamily="34" charset="0"/>
-                <a:ea typeface="Open Sans" pitchFamily="34" charset="-122"/>
-                <a:cs typeface="Open Sans" pitchFamily="34" charset="-120"/>
-              </a:rPr>
-              <a:t>with clear message</a:t>
-            </a:r>
-            <a:endParaRPr lang="en-US" sz="1000" dirty="0"/>
-          </a:p>
-        </p:txBody>
-      </p:sp>
-      <p:sp>
-        <p:nvSpPr>
-          <p:cNvPr id="25" name="Text 19"/>
-          <p:cNvSpPr/>
-          <p:nvPr/>
-        </p:nvSpPr>
-        <p:spPr>
-          <a:xfrm>
-            <a:off x="7132320" y="1645920"/>
-            <a:ext cx="274320" cy="365760"/>
-          </a:xfrm>
-          <a:prstGeom prst="rect">
-            <a:avLst/>
-          </a:prstGeom>
-          <a:noFill/>
-          <a:ln/>
-        </p:spPr>
-        <p:txBody>
-          <a:bodyPr wrap="square" lIns="0" tIns="0" rIns="0" bIns="0" rtlCol="0" anchor="ctr"/>
-          <a:lstStyle/>
-          <a:p>
-            <a:pPr marL="0" indent="0" algn="ctr">
-              <a:buNone/>
-            </a:pPr>
-            <a:r>
-              <a:rPr lang="en-US" sz="1800" b="1" dirty="0">
-                <a:solidFill>
-                  <a:srgbClr val="B8975C"/>
-                </a:solidFill>
-                <a:latin typeface="Open Sans" pitchFamily="34" charset="0"/>
-                <a:ea typeface="Open Sans" pitchFamily="34" charset="-122"/>
-                <a:cs typeface="Open Sans" pitchFamily="34" charset="-120"/>
-              </a:rPr>
-              <a:t>→</a:t>
-            </a:r>
-            <a:endParaRPr lang="en-US" sz="1800" dirty="0"/>
-          </a:p>
-        </p:txBody>
-      </p:sp>
-      <p:sp>
-        <p:nvSpPr>
-          <p:cNvPr id="26" name="Shape 20"/>
-          <p:cNvSpPr/>
-          <p:nvPr/>
-        </p:nvSpPr>
-        <p:spPr>
-          <a:xfrm>
-            <a:off x="7406640" y="1051560"/>
-            <a:ext cx="1463040" cy="1828800"/>
-          </a:xfrm>
-          <a:prstGeom prst="rect">
-            <a:avLst/>
-          </a:prstGeom>
-          <a:solidFill>
-            <a:srgbClr val="FFFFFF"/>
-          </a:solidFill>
-          <a:ln/>
-          <a:effectLst>
-            <a:outerShdw blurRad="50800" dist="25400" dir="8100000" algn="bl" rotWithShape="0">
-              <a:srgbClr val="000000">
-                <a:alpha val="6000"/>
-              </a:srgbClr>
-            </a:outerShdw>
-          </a:effectLst>
-        </p:spPr>
-        <p:txBody>
-          <a:bodyPr/>
-          <a:lstStyle/>
-          <a:p>
-            <a:endParaRPr lang="en-US"/>
-          </a:p>
-        </p:txBody>
-      </p:sp>
-      <p:pic>
-        <p:nvPicPr>
-          <p:cNvPr id="27" name="Image 4" descr="preencoded.png"/>
-          <p:cNvPicPr>
-            <a:picLocks noChangeAspect="1"/>
-          </p:cNvPicPr>
-          <p:nvPr/>
-        </p:nvPicPr>
-        <p:blipFill>
-          <a:blip r:embed="rId7"/>
-          <a:stretch>
-            <a:fillRect/>
-          </a:stretch>
-        </p:blipFill>
-        <p:spPr>
-          <a:xfrm>
-            <a:off x="7909560" y="1188720"/>
-            <a:ext cx="365760" cy="365760"/>
-          </a:xfrm>
-          <a:prstGeom prst="rect">
-            <a:avLst/>
-          </a:prstGeom>
-        </p:spPr>
-      </p:pic>
-      <p:sp>
-        <p:nvSpPr>
-          <p:cNvPr id="28" name="Text 21"/>
-          <p:cNvSpPr/>
-          <p:nvPr/>
-        </p:nvSpPr>
-        <p:spPr>
-          <a:xfrm>
-            <a:off x="7498080" y="1645920"/>
-            <a:ext cx="1280160" cy="274320"/>
-          </a:xfrm>
-          <a:prstGeom prst="rect">
-            <a:avLst/>
-          </a:prstGeom>
-          <a:noFill/>
-          <a:ln/>
-        </p:spPr>
-        <p:txBody>
-          <a:bodyPr wrap="square" lIns="0" tIns="0" rIns="0" bIns="0" rtlCol="0" anchor="ctr"/>
-          <a:lstStyle/>
-          <a:p>
-            <a:pPr marL="0" indent="0" algn="ctr">
-              <a:buNone/>
-            </a:pPr>
-            <a:r>
-              <a:rPr lang="en-US" sz="1400" b="1" dirty="0">
-                <a:solidFill>
-                  <a:srgbClr val="1E2530"/>
-                </a:solidFill>
-                <a:latin typeface="Open Sans" pitchFamily="34" charset="0"/>
-                <a:ea typeface="Open Sans" pitchFamily="34" charset="-122"/>
-                <a:cs typeface="Open Sans" pitchFamily="34" charset="-120"/>
-              </a:rPr>
-              <a:t>Push</a:t>
-            </a:r>
-            <a:endParaRPr lang="en-US" sz="1400" dirty="0"/>
-          </a:p>
-        </p:txBody>
-      </p:sp>
-      <p:sp>
-        <p:nvSpPr>
-          <p:cNvPr id="29" name="Text 22"/>
-          <p:cNvSpPr/>
-          <p:nvPr/>
-        </p:nvSpPr>
-        <p:spPr>
-          <a:xfrm>
-            <a:off x="7498080" y="1965960"/>
-            <a:ext cx="1280160" cy="640080"/>
-          </a:xfrm>
-          <a:prstGeom prst="rect">
-            <a:avLst/>
-          </a:prstGeom>
-          <a:noFill/>
-          <a:ln/>
-        </p:spPr>
-        <p:txBody>
-          <a:bodyPr wrap="square" lIns="0" tIns="0" rIns="0" bIns="0" rtlCol="0" anchor="t"/>
-          <a:lstStyle/>
-          <a:p>
-            <a:pPr marL="0" indent="0" algn="ctr">
-              <a:lnSpc>
-                <a:spcPct val="130000"/>
-              </a:lnSpc>
-              <a:buNone/>
-            </a:pPr>
-            <a:r>
-              <a:rPr lang="en-US" sz="1000" dirty="0">
-                <a:solidFill>
-                  <a:srgbClr val="5A6B7A"/>
-                </a:solidFill>
-                <a:latin typeface="Open Sans" pitchFamily="34" charset="0"/>
-                <a:ea typeface="Open Sans" pitchFamily="34" charset="-122"/>
-                <a:cs typeface="Open Sans" pitchFamily="34" charset="-120"/>
-              </a:rPr>
-              <a:t>git push to upload</a:t>
-            </a:r>
-            <a:endParaRPr lang="en-US" sz="1000" dirty="0"/>
-          </a:p>
-          <a:p>
-            <a:pPr marL="0" indent="0" algn="ctr">
-              <a:lnSpc>
-                <a:spcPct val="130000"/>
-              </a:lnSpc>
-              <a:buNone/>
-            </a:pPr>
-            <a:r>
-              <a:rPr lang="en-US" sz="1000" dirty="0">
-                <a:solidFill>
-                  <a:srgbClr val="5A6B7A"/>
-                </a:solidFill>
-                <a:latin typeface="Open Sans" pitchFamily="34" charset="0"/>
-                <a:ea typeface="Open Sans" pitchFamily="34" charset="-122"/>
-                <a:cs typeface="Open Sans" pitchFamily="34" charset="-120"/>
-              </a:rPr>
-              <a:t>to GitHub</a:t>
-            </a:r>
-            <a:endParaRPr lang="en-US" sz="1000" dirty="0"/>
-          </a:p>
-        </p:txBody>
-      </p:sp>
-      <p:sp>
-        <p:nvSpPr>
-          <p:cNvPr id="30" name="Shape 23"/>
-          <p:cNvSpPr/>
-          <p:nvPr/>
-        </p:nvSpPr>
-        <p:spPr>
-          <a:xfrm>
-            <a:off x="731520" y="3200400"/>
-            <a:ext cx="7680960" cy="1234440"/>
-          </a:xfrm>
-          <a:prstGeom prst="rect">
-            <a:avLst/>
-          </a:prstGeom>
-          <a:solidFill>
-            <a:srgbClr val="FFFFFF"/>
-          </a:solidFill>
-          <a:ln/>
-          <a:effectLst>
-            <a:outerShdw blurRad="50800" dist="25400" dir="8100000" algn="bl" rotWithShape="0">
-              <a:srgbClr val="000000">
-                <a:alpha val="6000"/>
-              </a:srgbClr>
-            </a:outerShdw>
-          </a:effectLst>
-        </p:spPr>
-        <p:txBody>
-          <a:bodyPr/>
-          <a:lstStyle/>
-          <a:p>
-            <a:endParaRPr lang="en-US"/>
-          </a:p>
-        </p:txBody>
-      </p:sp>
-      <p:sp>
-        <p:nvSpPr>
-          <p:cNvPr id="31" name="Shape 24"/>
-          <p:cNvSpPr/>
-          <p:nvPr/>
-        </p:nvSpPr>
-        <p:spPr>
-          <a:xfrm>
-            <a:off x="731520" y="3200400"/>
-            <a:ext cx="54864" cy="1234440"/>
-          </a:xfrm>
-          <a:prstGeom prst="rect">
-            <a:avLst/>
-          </a:prstGeom>
-          <a:solidFill>
-            <a:srgbClr val="B8975C"/>
-          </a:solidFill>
-          <a:ln/>
-        </p:spPr>
-        <p:txBody>
-          <a:bodyPr/>
-          <a:lstStyle/>
-          <a:p>
-            <a:endParaRPr lang="en-US"/>
-          </a:p>
-        </p:txBody>
-      </p:sp>
-      <p:pic>
-        <p:nvPicPr>
-          <p:cNvPr id="32" name="Image 5" descr="preencoded.png"/>
-          <p:cNvPicPr>
-            <a:picLocks noChangeAspect="1"/>
-          </p:cNvPicPr>
-          <p:nvPr/>
-        </p:nvPicPr>
-        <p:blipFill>
-          <a:blip r:embed="rId8"/>
-          <a:stretch>
-            <a:fillRect/>
-          </a:stretch>
-        </p:blipFill>
-        <p:spPr>
-          <a:xfrm>
-            <a:off x="960120" y="3291840"/>
-            <a:ext cx="320040" cy="320040"/>
-          </a:xfrm>
-          <a:prstGeom prst="rect">
-            <a:avLst/>
-          </a:prstGeom>
-        </p:spPr>
-      </p:pic>
-      <p:sp>
-        <p:nvSpPr>
-          <p:cNvPr id="33" name="Text 25"/>
-          <p:cNvSpPr/>
-          <p:nvPr/>
-        </p:nvSpPr>
-        <p:spPr>
-          <a:xfrm>
-            <a:off x="1371600" y="3291840"/>
-            <a:ext cx="3657600" cy="320040"/>
-          </a:xfrm>
-          <a:prstGeom prst="rect">
-            <a:avLst/>
-          </a:prstGeom>
-          <a:noFill/>
-          <a:ln/>
-        </p:spPr>
-        <p:txBody>
-          <a:bodyPr wrap="square" lIns="0" tIns="0" rIns="0" bIns="0" rtlCol="0" anchor="ctr"/>
-          <a:lstStyle/>
-          <a:p>
-            <a:pPr marL="0" indent="0">
-              <a:buNone/>
-            </a:pPr>
-            <a:r>
-              <a:rPr lang="en-US" sz="1500" b="1" dirty="0">
-                <a:solidFill>
-                  <a:srgbClr val="1E2530"/>
-                </a:solidFill>
-                <a:latin typeface="Open Sans" pitchFamily="34" charset="0"/>
-                <a:ea typeface="Open Sans" pitchFamily="34" charset="-122"/>
-                <a:cs typeface="Open Sans" pitchFamily="34" charset="-120"/>
-              </a:rPr>
-              <a:t>Don’t Forget Your Prompt Log</a:t>
-            </a:r>
-            <a:endParaRPr lang="en-US" sz="1500" dirty="0"/>
-          </a:p>
-        </p:txBody>
-      </p:sp>
-      <p:sp>
-        <p:nvSpPr>
-          <p:cNvPr id="34" name="Text 26"/>
-          <p:cNvSpPr/>
-          <p:nvPr/>
-        </p:nvSpPr>
-        <p:spPr>
-          <a:xfrm>
-            <a:off x="960120" y="3657600"/>
-            <a:ext cx="7269480" cy="640080"/>
-          </a:xfrm>
-          <a:prstGeom prst="rect">
-            <a:avLst/>
-          </a:prstGeom>
-          <a:noFill/>
-          <a:ln/>
-        </p:spPr>
-        <p:txBody>
-          <a:bodyPr wrap="square" lIns="0" tIns="0" rIns="0" bIns="0" rtlCol="0" anchor="t"/>
-          <a:lstStyle/>
-          <a:p>
-            <a:pPr marL="0" indent="0">
-              <a:lnSpc>
-                <a:spcPct val="140000"/>
-              </a:lnSpc>
-              <a:buNone/>
-            </a:pPr>
-            <a:r>
-              <a:rPr lang="en-US" sz="1100" dirty="0">
-                <a:solidFill>
-                  <a:srgbClr val="5A6B7A"/>
-                </a:solidFill>
-              </a:rPr>
-              <a:t xml:space="preserve">Every meaningful AI interaction should be logged in </a:t>
-            </a:r>
-            <a:r>
-              <a:rPr lang="en-US" sz="1100" b="1" dirty="0">
-                <a:solidFill>
-                  <a:srgbClr val="B8975C"/>
-                </a:solidFill>
-                <a:latin typeface="Consolas" pitchFamily="34" charset="0"/>
-                <a:ea typeface="Consolas" pitchFamily="34" charset="-122"/>
-                <a:cs typeface="Consolas" pitchFamily="34" charset="-120"/>
-              </a:rPr>
-              <a:t>deliverables/prompt-log.md</a:t>
-            </a:r>
-            <a:endParaRPr lang="en-US" sz="1100" dirty="0"/>
-          </a:p>
-          <a:p>
-            <a:pPr marL="0" indent="0">
-              <a:lnSpc>
-                <a:spcPct val="140000"/>
-              </a:lnSpc>
-              <a:buNone/>
-            </a:pPr>
-            <a:endParaRPr lang="en-US" sz="1100" dirty="0"/>
-          </a:p>
-          <a:p>
-            <a:pPr marL="0" indent="0">
-              <a:lnSpc>
-                <a:spcPct val="140000"/>
-              </a:lnSpc>
-              <a:buNone/>
-            </a:pPr>
-            <a:r>
-              <a:rPr lang="en-US" sz="1100" dirty="0">
-                <a:solidFill>
-                  <a:srgbClr val="5A6B7A"/>
-                </a:solidFill>
-              </a:rPr>
-              <a:t xml:space="preserve">For each entry, record: </a:t>
-            </a:r>
-            <a:endParaRPr lang="en-US" sz="1100" dirty="0"/>
-          </a:p>
-          <a:p>
-            <a:pPr marL="0" indent="0">
-              <a:lnSpc>
-                <a:spcPct val="140000"/>
-              </a:lnSpc>
-              <a:buNone/>
-            </a:pPr>
-            <a:r>
-              <a:rPr lang="en-US" sz="1100" b="1" dirty="0">
-                <a:solidFill>
-                  <a:srgbClr val="1E2530"/>
-                </a:solidFill>
-              </a:rPr>
-              <a:t>the prompt you used</a:t>
-            </a:r>
-            <a:r>
-              <a:rPr lang="en-US" sz="1100" dirty="0">
-                <a:solidFill>
-                  <a:srgbClr val="5A6B7A"/>
-                </a:solidFill>
-              </a:rPr>
-              <a:t xml:space="preserve">, </a:t>
-            </a:r>
-            <a:r>
-              <a:rPr lang="en-US" sz="1100" b="1" dirty="0">
-                <a:solidFill>
-                  <a:srgbClr val="1E2530"/>
-                </a:solidFill>
-              </a:rPr>
-              <a:t>the key output</a:t>
-            </a:r>
-            <a:r>
-              <a:rPr lang="en-US" sz="1100" dirty="0">
-                <a:solidFill>
-                  <a:srgbClr val="5A6B7A"/>
-                </a:solidFill>
-              </a:rPr>
-              <a:t xml:space="preserve">, and </a:t>
-            </a:r>
-            <a:r>
-              <a:rPr lang="en-US" sz="1100" b="1" dirty="0">
-                <a:solidFill>
-                  <a:srgbClr val="1E2530"/>
-                </a:solidFill>
-              </a:rPr>
-              <a:t>whether you used/modified/rejected it</a:t>
-            </a:r>
-            <a:r>
-              <a:rPr lang="en-US" sz="1100" dirty="0">
-                <a:solidFill>
-                  <a:srgbClr val="5A6B7A"/>
-                </a:solidFill>
-              </a:rPr>
-              <a:t>.</a:t>
-            </a:r>
-            <a:endParaRPr lang="en-US" sz="1100" dirty="0"/>
           </a:p>
         </p:txBody>
       </p:sp>
